--- a/Presentacion-APOPS-Siempre.pptx
+++ b/Presentacion-APOPS-Siempre.pptx
@@ -5073,12 +5073,12 @@
         </p:nvSpPr>
         <p:spPr>
           <a:xfrm>
-            <a:off x="4174236" y="1737360"/>
-            <a:ext cx="3931920" cy="4572000"/>
+            <a:off x="3994931" y="1737360"/>
+            <a:ext cx="4290529" cy="4572000"/>
           </a:xfrm>
           <a:prstGeom prst="roundRect">
             <a:avLst>
-              <a:gd name="adj" fmla="val 3488"/>
+              <a:gd name="adj" fmla="val 2131"/>
             </a:avLst>
           </a:prstGeom>
           <a:solidFill>
@@ -5099,13 +5099,14 @@
         </p:nvPicPr>
         <p:blipFill>
           <a:blip r:embed="rId1"/>
-          <a:srcRect l="0" r="0" t="0" b="0"/>
-          <a:stretch/>
+          <a:stretch>
+            <a:fillRect/>
+          </a:stretch>
         </p:blipFill>
         <p:spPr>
           <a:xfrm>
-            <a:off x="4128516" y="1691640"/>
-            <a:ext cx="3931920" cy="4572000"/>
+            <a:off x="3949211" y="1691640"/>
+            <a:ext cx="4290529" cy="4572000"/>
           </a:xfrm>
           <a:prstGeom prst="rect">
             <a:avLst/>
@@ -5406,12 +5407,12 @@
         </p:nvSpPr>
         <p:spPr>
           <a:xfrm>
-            <a:off x="4174236" y="1737360"/>
-            <a:ext cx="3931920" cy="4572000"/>
+            <a:off x="5082921" y="1737360"/>
+            <a:ext cx="2114550" cy="4572000"/>
           </a:xfrm>
           <a:prstGeom prst="roundRect">
             <a:avLst>
-              <a:gd name="adj" fmla="val 3488"/>
+              <a:gd name="adj" fmla="val 4324"/>
             </a:avLst>
           </a:prstGeom>
           <a:solidFill>
@@ -5432,13 +5433,14 @@
         </p:nvPicPr>
         <p:blipFill>
           <a:blip r:embed="rId1"/>
-          <a:srcRect l="0" r="0" t="0" b="0"/>
-          <a:stretch/>
+          <a:stretch>
+            <a:fillRect/>
+          </a:stretch>
         </p:blipFill>
         <p:spPr>
           <a:xfrm>
-            <a:off x="4128516" y="1691640"/>
-            <a:ext cx="3931920" cy="4572000"/>
+            <a:off x="5037201" y="1691640"/>
+            <a:ext cx="2114550" cy="4572000"/>
           </a:xfrm>
           <a:prstGeom prst="rect">
             <a:avLst/>
@@ -5739,12 +5741,12 @@
         </p:nvSpPr>
         <p:spPr>
           <a:xfrm>
-            <a:off x="4174236" y="1737360"/>
-            <a:ext cx="3931920" cy="4572000"/>
+            <a:off x="4406271" y="1737360"/>
+            <a:ext cx="3467850" cy="4572000"/>
           </a:xfrm>
           <a:prstGeom prst="roundRect">
             <a:avLst>
-              <a:gd name="adj" fmla="val 3488"/>
+              <a:gd name="adj" fmla="val 2637"/>
             </a:avLst>
           </a:prstGeom>
           <a:solidFill>
@@ -5765,13 +5767,14 @@
         </p:nvPicPr>
         <p:blipFill>
           <a:blip r:embed="rId1"/>
-          <a:srcRect l="0" r="0" t="0" b="0"/>
-          <a:stretch/>
+          <a:stretch>
+            <a:fillRect/>
+          </a:stretch>
         </p:blipFill>
         <p:spPr>
           <a:xfrm>
-            <a:off x="4128516" y="1691640"/>
-            <a:ext cx="3931920" cy="4572000"/>
+            <a:off x="4360551" y="1691640"/>
+            <a:ext cx="3467850" cy="4572000"/>
           </a:xfrm>
           <a:prstGeom prst="rect">
             <a:avLst/>
@@ -6072,12 +6075,12 @@
         </p:nvSpPr>
         <p:spPr>
           <a:xfrm>
-            <a:off x="4174236" y="1737360"/>
-            <a:ext cx="3931920" cy="4572000"/>
+            <a:off x="2686438" y="1737360"/>
+            <a:ext cx="6907516" cy="4572000"/>
           </a:xfrm>
           <a:prstGeom prst="roundRect">
             <a:avLst>
-              <a:gd name="adj" fmla="val 3488"/>
+              <a:gd name="adj" fmla="val 2000"/>
             </a:avLst>
           </a:prstGeom>
           <a:solidFill>
@@ -6090,7 +6093,7 @@
       </p:sp>
       <p:pic>
         <p:nvPicPr>
-          <p:cNvPr id="6" name="Image 0" descr="public/imagenes para software/dashboard-padron-mapa2.png">    </p:cNvPr>
+          <p:cNvPr id="6" name="Image 0" descr="public/imagenes para software/dashboard-padron-mapa1.PNG">    </p:cNvPr>
           <p:cNvPicPr>
             <a:picLocks noChangeAspect="1"/>
           </p:cNvPicPr>
@@ -6098,13 +6101,14 @@
         </p:nvPicPr>
         <p:blipFill>
           <a:blip r:embed="rId1"/>
-          <a:srcRect l="0" r="0" t="0" b="0"/>
-          <a:stretch/>
+          <a:stretch>
+            <a:fillRect/>
+          </a:stretch>
         </p:blipFill>
         <p:spPr>
           <a:xfrm>
-            <a:off x="4128516" y="1691640"/>
-            <a:ext cx="3931920" cy="4572000"/>
+            <a:off x="2640718" y="1691640"/>
+            <a:ext cx="6907516" cy="4572000"/>
           </a:xfrm>
           <a:prstGeom prst="rect">
             <a:avLst/>
@@ -6405,12 +6409,12 @@
         </p:nvSpPr>
         <p:spPr>
           <a:xfrm>
-            <a:off x="4174236" y="1737360"/>
-            <a:ext cx="3931920" cy="4572000"/>
+            <a:off x="5082921" y="1737360"/>
+            <a:ext cx="2114550" cy="4572000"/>
           </a:xfrm>
           <a:prstGeom prst="roundRect">
             <a:avLst>
-              <a:gd name="adj" fmla="val 3488"/>
+              <a:gd name="adj" fmla="val 4324"/>
             </a:avLst>
           </a:prstGeom>
           <a:solidFill>
@@ -6431,13 +6435,14 @@
         </p:nvPicPr>
         <p:blipFill>
           <a:blip r:embed="rId1"/>
-          <a:srcRect l="0" r="0" t="0" b="0"/>
-          <a:stretch/>
+          <a:stretch>
+            <a:fillRect/>
+          </a:stretch>
         </p:blipFill>
         <p:spPr>
           <a:xfrm>
-            <a:off x="4128516" y="1691640"/>
-            <a:ext cx="3931920" cy="4572000"/>
+            <a:off x="5037201" y="1691640"/>
+            <a:ext cx="2114550" cy="4572000"/>
           </a:xfrm>
           <a:prstGeom prst="rect">
             <a:avLst/>
@@ -6738,12 +6743,12 @@
         </p:nvSpPr>
         <p:spPr>
           <a:xfrm>
-            <a:off x="4174236" y="1737360"/>
-            <a:ext cx="3931920" cy="4572000"/>
+            <a:off x="5082921" y="1737360"/>
+            <a:ext cx="2114550" cy="4572000"/>
           </a:xfrm>
           <a:prstGeom prst="roundRect">
             <a:avLst>
-              <a:gd name="adj" fmla="val 3488"/>
+              <a:gd name="adj" fmla="val 4324"/>
             </a:avLst>
           </a:prstGeom>
           <a:solidFill>
@@ -6764,13 +6769,14 @@
         </p:nvPicPr>
         <p:blipFill>
           <a:blip r:embed="rId1"/>
-          <a:srcRect l="0" r="0" t="0" b="0"/>
-          <a:stretch/>
+          <a:stretch>
+            <a:fillRect/>
+          </a:stretch>
         </p:blipFill>
         <p:spPr>
           <a:xfrm>
-            <a:off x="4128516" y="1691640"/>
-            <a:ext cx="3931920" cy="4572000"/>
+            <a:off x="5037201" y="1691640"/>
+            <a:ext cx="2114550" cy="4572000"/>
           </a:xfrm>
           <a:prstGeom prst="rect">
             <a:avLst/>
@@ -7071,12 +7077,12 @@
         </p:nvSpPr>
         <p:spPr>
           <a:xfrm>
-            <a:off x="4174236" y="1737360"/>
-            <a:ext cx="3931920" cy="4572000"/>
+            <a:off x="2883583" y="1737360"/>
+            <a:ext cx="6513226" cy="4572000"/>
           </a:xfrm>
           <a:prstGeom prst="roundRect">
             <a:avLst>
-              <a:gd name="adj" fmla="val 3488"/>
+              <a:gd name="adj" fmla="val 2000"/>
             </a:avLst>
           </a:prstGeom>
           <a:solidFill>
@@ -7097,13 +7103,14 @@
         </p:nvPicPr>
         <p:blipFill>
           <a:blip r:embed="rId1"/>
-          <a:srcRect l="0" r="0" t="0" b="0"/>
-          <a:stretch/>
+          <a:stretch>
+            <a:fillRect/>
+          </a:stretch>
         </p:blipFill>
         <p:spPr>
           <a:xfrm>
-            <a:off x="4128516" y="1691640"/>
-            <a:ext cx="3931920" cy="4572000"/>
+            <a:off x="2837863" y="1691640"/>
+            <a:ext cx="6513226" cy="4572000"/>
           </a:xfrm>
           <a:prstGeom prst="rect">
             <a:avLst/>

--- a/Presentacion-APOPS-Siempre.pptx
+++ b/Presentacion-APOPS-Siempre.pptx
@@ -3968,7 +3968,7 @@
                 <a:ea typeface="Calibri" pitchFamily="34" charset="-122"/>
                 <a:cs typeface="Calibri" pitchFamily="34" charset="-120"/>
               </a:rPr>
-              <a:t>Notif enviadas (afiliados / delegados)</a:t>
+              <a:t>Notificaciones enviadas (afiliados / delegados)</a:t>
             </a:r>
             <a:endParaRPr lang="en-US" sz="1100" dirty="0"/>
           </a:p>
@@ -7620,7 +7620,7 @@
                 <a:ea typeface="Calibri" pitchFamily="34" charset="-122"/>
                 <a:cs typeface="Calibri" pitchFamily="34" charset="-120"/>
               </a:rPr>
-              <a:t>Cualquier cotizante ANSES entra a apops.vercel.app y ve novedades, carousel y CTA "Afiliarme".</a:t>
+              <a:t>Cualquier compañero de ANSES entra a siempreapops y ve novedades, carousel y CTA "Afiliarme".</a:t>
             </a:r>
             <a:endParaRPr lang="en-US" sz="1200" dirty="0"/>
           </a:p>
@@ -14313,7 +14313,7 @@
                 <a:ea typeface="Calibri" pitchFamily="34" charset="-122"/>
                 <a:cs typeface="Calibri" pitchFamily="34" charset="-120"/>
               </a:rPr>
-              <a:t>Cartilla médica</a:t>
+              <a:t>Farmacia médica</a:t>
             </a:r>
             <a:endParaRPr lang="en-US" sz="1400" dirty="0"/>
           </a:p>
@@ -14352,7 +14352,7 @@
                 <a:ea typeface="Calibri" pitchFamily="34" charset="-122"/>
                 <a:cs typeface="Calibri" pitchFamily="34" charset="-120"/>
               </a:rPr>
-              <a:t>Búsqueda y geolocalización de prestadores</a:t>
+              <a:t>Búsqueda y geolocalización en el mapa</a:t>
             </a:r>
             <a:endParaRPr lang="en-US" sz="1100" dirty="0"/>
           </a:p>
@@ -14601,7 +14601,7 @@
                 <a:ea typeface="Calibri" pitchFamily="34" charset="-122"/>
                 <a:cs typeface="Calibri" pitchFamily="34" charset="-120"/>
               </a:rPr>
-              <a:t>Solicitud de turnos</a:t>
+              <a:t>Encuestas</a:t>
             </a:r>
             <a:endParaRPr lang="en-US" sz="1400" dirty="0"/>
           </a:p>
@@ -14640,7 +14640,7 @@
                 <a:ea typeface="Calibri" pitchFamily="34" charset="-122"/>
                 <a:cs typeface="Calibri" pitchFamily="34" charset="-120"/>
               </a:rPr>
-              <a:t>Reserva online para sede, asesoramiento jurídico</a:t>
+              <a:t>Realizar encuestas periódicas para poder hacer una lectura de lo que está pasando con los afiliados y delegados</a:t>
             </a:r>
             <a:endParaRPr lang="en-US" sz="1100" dirty="0"/>
           </a:p>
@@ -15465,7 +15465,7 @@
                 <a:ea typeface="Calibri" pitchFamily="34" charset="-122"/>
                 <a:cs typeface="Calibri" pitchFamily="34" charset="-120"/>
               </a:rPr>
-              <a:t>Recibos y aportes</a:t>
+              <a:t>Regalos</a:t>
             </a:r>
             <a:endParaRPr lang="en-US" sz="1400" dirty="0"/>
           </a:p>
@@ -15504,7 +15504,7 @@
                 <a:ea typeface="Calibri" pitchFamily="34" charset="-122"/>
                 <a:cs typeface="Calibri" pitchFamily="34" charset="-120"/>
               </a:rPr>
-              <a:t>Histórico financiero integrado con RRHH</a:t>
+              <a:t>Notificaciones automáticas cuando se realiza algún tipo de regalo: día de la madre, padres, etc.</a:t>
             </a:r>
             <a:endParaRPr lang="en-US" sz="1100" dirty="0"/>
           </a:p>
@@ -16620,7 +16620,7 @@
                 <a:ea typeface="Calibri" pitchFamily="34" charset="-122"/>
                 <a:cs typeface="Calibri" pitchFamily="34" charset="-120"/>
               </a:rPr>
-              <a:t>Mail que no llega</a:t>
+              <a:t>Comunicación</a:t>
             </a:r>
             <a:endParaRPr lang="en-US" sz="1400" dirty="0"/>
           </a:p>
@@ -16659,7 +16659,7 @@
                 <a:ea typeface="Calibri" pitchFamily="34" charset="-122"/>
                 <a:cs typeface="Calibri" pitchFamily="34" charset="-120"/>
               </a:rPr>
-              <a:t>Avisos masivos que se pierden en la bandeja de spam o no se leen.</a:t>
+              <a:t>Avisos y mensajes con alertas a los afiliados, delegados y también a la Comisión Directiva (CD).</a:t>
             </a:r>
             <a:endParaRPr lang="en-US" sz="1100" dirty="0"/>
           </a:p>
@@ -16764,7 +16764,7 @@
                 <a:ea typeface="Calibri" pitchFamily="34" charset="-122"/>
                 <a:cs typeface="Calibri" pitchFamily="34" charset="-120"/>
               </a:rPr>
-              <a:t>Sin métricas</a:t>
+              <a:t>Métricas</a:t>
             </a:r>
             <a:endParaRPr lang="en-US" sz="1400" dirty="0"/>
           </a:p>
@@ -16803,7 +16803,7 @@
                 <a:ea typeface="Calibri" pitchFamily="34" charset="-122"/>
                 <a:cs typeface="Calibri" pitchFamily="34" charset="-120"/>
               </a:rPr>
-              <a:t>La CD no sabe quién leyó qué, qué delegados están activos, qué interesa.</a:t>
+              <a:t>La Comisión Directiva (CD) va a saber quién leyó qué, qué delegados/afiliados recibieron la comunicación.</a:t>
             </a:r>
             <a:endParaRPr lang="en-US" sz="1100" dirty="0"/>
           </a:p>
@@ -16908,7 +16908,7 @@
                 <a:ea typeface="Calibri" pitchFamily="34" charset="-122"/>
                 <a:cs typeface="Calibri" pitchFamily="34" charset="-120"/>
               </a:rPr>
-              <a:t>Trámites presenciales</a:t>
+              <a:t>Trámites online</a:t>
             </a:r>
             <a:endParaRPr lang="en-US" sz="1400" dirty="0"/>
           </a:p>
@@ -16947,7 +16947,7 @@
                 <a:ea typeface="Calibri" pitchFamily="34" charset="-122"/>
                 <a:cs typeface="Calibri" pitchFamily="34" charset="-120"/>
               </a:rPr>
-              <a:t>Afiliarse requiere ir a la sede, papeles, esperas.</a:t>
+              <a:t>Afiliarse desde la aplicación con firma digital, simple y con posterior aprobación. Recibo de alertas que llegaron sus anteojos.</a:t>
             </a:r>
             <a:endParaRPr lang="en-US" sz="1100" dirty="0"/>
           </a:p>
@@ -17052,7 +17052,7 @@
                 <a:ea typeface="Calibri" pitchFamily="34" charset="-122"/>
                 <a:cs typeface="Calibri" pitchFamily="34" charset="-120"/>
               </a:rPr>
-              <a:t>11.000 cotizantes invisibles</a:t>
+              <a:t>Compañeros de ANSES invisibles</a:t>
             </a:r>
             <a:endParaRPr lang="en-US" sz="1400" dirty="0"/>
           </a:p>
@@ -17235,7 +17235,7 @@
                 <a:ea typeface="Calibri" pitchFamily="34" charset="-122"/>
                 <a:cs typeface="Calibri" pitchFamily="34" charset="-120"/>
               </a:rPr>
-              <a:t>No tiene cómo ver quién en su edificio es no-afiliado y podría sumarse.</a:t>
+              <a:t>Mayor herramientas para los delegados de los edificios y regionales. Mejor comunicación con los afiliados.</a:t>
             </a:r>
             <a:endParaRPr lang="en-US" sz="1100" dirty="0"/>
           </a:p>
@@ -17659,7 +17659,7 @@
                 <a:ea typeface="Calibri" pitchFamily="34" charset="-122"/>
                 <a:cs typeface="Calibri" pitchFamily="34" charset="-120"/>
               </a:rPr>
-              <a:t>Mail que se pierde</a:t>
+              <a:t>Mail o WhatsApp que se pierde</a:t>
             </a:r>
             <a:endParaRPr lang="en-US" sz="1200" dirty="0"/>
           </a:p>
@@ -17737,7 +17737,7 @@
                 <a:ea typeface="Calibri" pitchFamily="34" charset="-122"/>
                 <a:cs typeface="Calibri" pitchFamily="34" charset="-120"/>
               </a:rPr>
-              <a:t>Carteles que no se leen</a:t>
+              <a:t>Comunicados que no se leen</a:t>
             </a:r>
             <a:endParaRPr lang="en-US" sz="1200" dirty="0"/>
           </a:p>
@@ -18127,7 +18127,7 @@
                 <a:ea typeface="Calibri" pitchFamily="34" charset="-122"/>
                 <a:cs typeface="Calibri" pitchFamily="34" charset="-120"/>
               </a:rPr>
-              <a:t>11.000 cotizantes invisibles</a:t>
+              <a:t>Compañeros invisibles</a:t>
             </a:r>
             <a:endParaRPr lang="en-US" sz="1200" dirty="0"/>
           </a:p>
@@ -18166,7 +18166,7 @@
                 <a:ea typeface="Calibri" pitchFamily="34" charset="-122"/>
                 <a:cs typeface="Calibri" pitchFamily="34" charset="-120"/>
               </a:rPr>
-              <a:t>Página pública con noticias y form de afiliación</a:t>
+              <a:t>Página pública con noticias y formulario de afiliación</a:t>
             </a:r>
             <a:endParaRPr lang="en-US" sz="1200" dirty="0"/>
           </a:p>
@@ -18724,7 +18724,7 @@
                 <a:ea typeface="Calibri Light" pitchFamily="34" charset="-122"/>
                 <a:cs typeface="Calibri Light" pitchFamily="34" charset="-120"/>
               </a:rPr>
-              <a:t>Cotizantes a captar</a:t>
+              <a:t>Compañeros no activos</a:t>
             </a:r>
             <a:endParaRPr lang="en-US" sz="2400" dirty="0"/>
           </a:p>
@@ -18794,7 +18794,7 @@
                 <a:ea typeface="Calibri" pitchFamily="34" charset="-122"/>
                 <a:cs typeface="Calibri" pitchFamily="34" charset="-120"/>
               </a:rPr>
-              <a:t>Acceso al formulario de afiliación online</a:t>
+              <a:t>Noticias importantes para los trabajadores de ANSES</a:t>
             </a:r>
             <a:endParaRPr lang="en-US" sz="1300" dirty="0"/>
           </a:p>
@@ -18818,31 +18818,7 @@
                 <a:ea typeface="Calibri" pitchFamily="34" charset="-122"/>
                 <a:cs typeface="Calibri" pitchFamily="34" charset="-120"/>
               </a:rPr>
-              <a:t>Compartible por WhatsApp orgánico</a:t>
-            </a:r>
-            <a:endParaRPr lang="en-US" sz="1300" dirty="0"/>
-          </a:p>
-          <a:p>
-            <a:pPr marL="342900" indent="-342900">
-              <a:lnSpc>
-                <a:spcPts val="1800"/>
-              </a:lnSpc>
-              <a:spcAft>
-                <a:spcPts val="600"/>
-              </a:spcAft>
-              <a:buSzPct val="100000"/>
-              <a:buChar char="▪"/>
-            </a:pPr>
-            <a:r>
-              <a:rPr lang="en-US" sz="1300" dirty="0">
-                <a:solidFill>
-                  <a:srgbClr val="CBD5E1"/>
-                </a:solidFill>
-                <a:latin typeface="Calibri" pitchFamily="34" charset="0"/>
-                <a:ea typeface="Calibri" pitchFamily="34" charset="-122"/>
-                <a:cs typeface="Calibri" pitchFamily="34" charset="-120"/>
-              </a:rPr>
-              <a:t>Identificables por el delegado en su edificio</a:t>
+              <a:t>Acceso al formulario de afiliación online</a:t>
             </a:r>
             <a:endParaRPr lang="en-US" sz="1300" dirty="0"/>
           </a:p>
@@ -19175,7 +19151,7 @@
                 <a:ea typeface="Calibri Light" pitchFamily="34" charset="-122"/>
                 <a:cs typeface="Calibri Light" pitchFamily="34" charset="-120"/>
               </a:rPr>
-              <a:t>15.558</a:t>
+              <a:t>11.558</a:t>
             </a:r>
             <a:endParaRPr lang="en-US" sz="5200" dirty="0"/>
           </a:p>
@@ -19463,7 +19439,7 @@
                 <a:ea typeface="Calibri Light" pitchFamily="34" charset="-122"/>
                 <a:cs typeface="Calibri Light" pitchFamily="34" charset="-120"/>
               </a:rPr>
-              <a:t>11.000+</a:t>
+              <a:t>7.558+</a:t>
             </a:r>
             <a:endParaRPr lang="en-US" sz="5200" dirty="0"/>
           </a:p>
@@ -19502,7 +19478,7 @@
                 <a:ea typeface="Calibri" pitchFamily="34" charset="-122"/>
                 <a:cs typeface="Calibri" pitchFamily="34" charset="-120"/>
               </a:rPr>
-              <a:t>Cotizantes no-APOPS</a:t>
+              <a:t>Compañeros no afiliados o de otros gremios</a:t>
             </a:r>
             <a:endParaRPr lang="en-US" sz="1400" dirty="0"/>
           </a:p>

--- a/Presentacion-APOPS-Siempre.pptx
+++ b/Presentacion-APOPS-Siempre.pptx
@@ -4515,7 +4515,7 @@
             <a:r>
               <a:rPr lang="en-US" sz="900" dirty="0">
                 <a:solidFill>
-                  <a:srgbClr val="6B7280"/>
+                  <a:srgbClr val="CBD5E1"/>
                 </a:solidFill>
                 <a:latin typeface="Calibri" pitchFamily="34" charset="0"/>
                 <a:ea typeface="Calibri" pitchFamily="34" charset="-122"/>
@@ -4554,7 +4554,7 @@
             <a:r>
               <a:rPr lang="en-US" sz="900" dirty="0">
                 <a:solidFill>
-                  <a:srgbClr val="6B7280"/>
+                  <a:srgbClr val="CBD5E1"/>
                 </a:solidFill>
                 <a:latin typeface="Calibri" pitchFamily="34" charset="0"/>
                 <a:ea typeface="Calibri" pitchFamily="34" charset="-122"/>
@@ -4865,7 +4865,7 @@
             <a:r>
               <a:rPr lang="en-US" sz="900" dirty="0">
                 <a:solidFill>
-                  <a:srgbClr val="6B7280"/>
+                  <a:srgbClr val="CBD5E1"/>
                 </a:solidFill>
                 <a:latin typeface="Calibri" pitchFamily="34" charset="0"/>
                 <a:ea typeface="Calibri" pitchFamily="34" charset="-122"/>
@@ -4904,7 +4904,7 @@
             <a:r>
               <a:rPr lang="en-US" sz="900" dirty="0">
                 <a:solidFill>
-                  <a:srgbClr val="6B7280"/>
+                  <a:srgbClr val="CBD5E1"/>
                 </a:solidFill>
                 <a:latin typeface="Calibri" pitchFamily="34" charset="0"/>
                 <a:ea typeface="Calibri" pitchFamily="34" charset="-122"/>
@@ -4930,7 +4930,7 @@
     <p:bg>
       <p:bgPr>
         <a:solidFill>
-          <a:srgbClr val="F8FAFC"/>
+          <a:srgbClr val="1A325C"/>
         </a:solidFill>
       </p:bgPr>
     </p:bg>
@@ -5014,7 +5014,7 @@
             <a:r>
               <a:rPr lang="en-US" sz="2400" b="1" dirty="0">
                 <a:solidFill>
-                  <a:srgbClr val="14213D"/>
+                  <a:srgbClr val="FFFFFF"/>
                 </a:solidFill>
                 <a:latin typeface="Calibri Light" pitchFamily="34" charset="0"/>
                 <a:ea typeface="Calibri Light" pitchFamily="34" charset="-122"/>
@@ -5053,7 +5053,7 @@
             <a:r>
               <a:rPr lang="en-US" sz="1300" dirty="0">
                 <a:solidFill>
-                  <a:srgbClr val="6B7280"/>
+                  <a:srgbClr val="CBD5E1"/>
                 </a:solidFill>
                 <a:latin typeface="Calibri" pitchFamily="34" charset="0"/>
                 <a:ea typeface="Calibri" pitchFamily="34" charset="-122"/>
@@ -5140,7 +5140,7 @@
             <a:r>
               <a:rPr lang="en-US" sz="1100" i="1" dirty="0">
                 <a:solidFill>
-                  <a:srgbClr val="6B7280"/>
+                  <a:srgbClr val="CBD5E1"/>
                 </a:solidFill>
                 <a:latin typeface="Calibri" pitchFamily="34" charset="0"/>
                 <a:ea typeface="Calibri" pitchFamily="34" charset="-122"/>
@@ -5199,7 +5199,7 @@
             <a:r>
               <a:rPr lang="en-US" sz="900" dirty="0">
                 <a:solidFill>
-                  <a:srgbClr val="6B7280"/>
+                  <a:srgbClr val="CBD5E1"/>
                 </a:solidFill>
                 <a:latin typeface="Calibri" pitchFamily="34" charset="0"/>
                 <a:ea typeface="Calibri" pitchFamily="34" charset="-122"/>
@@ -5238,7 +5238,7 @@
             <a:r>
               <a:rPr lang="en-US" sz="900" dirty="0">
                 <a:solidFill>
-                  <a:srgbClr val="6B7280"/>
+                  <a:srgbClr val="CBD5E1"/>
                 </a:solidFill>
                 <a:latin typeface="Calibri" pitchFamily="34" charset="0"/>
                 <a:ea typeface="Calibri" pitchFamily="34" charset="-122"/>
@@ -5264,7 +5264,7 @@
     <p:bg>
       <p:bgPr>
         <a:solidFill>
-          <a:srgbClr val="F8FAFC"/>
+          <a:srgbClr val="1A325C"/>
         </a:solidFill>
       </p:bgPr>
     </p:bg>
@@ -5348,7 +5348,7 @@
             <a:r>
               <a:rPr lang="en-US" sz="2400" b="1" dirty="0">
                 <a:solidFill>
-                  <a:srgbClr val="14213D"/>
+                  <a:srgbClr val="FFFFFF"/>
                 </a:solidFill>
                 <a:latin typeface="Calibri Light" pitchFamily="34" charset="0"/>
                 <a:ea typeface="Calibri Light" pitchFamily="34" charset="-122"/>
@@ -5387,7 +5387,7 @@
             <a:r>
               <a:rPr lang="en-US" sz="1300" dirty="0">
                 <a:solidFill>
-                  <a:srgbClr val="6B7280"/>
+                  <a:srgbClr val="CBD5E1"/>
                 </a:solidFill>
                 <a:latin typeface="Calibri" pitchFamily="34" charset="0"/>
                 <a:ea typeface="Calibri" pitchFamily="34" charset="-122"/>
@@ -5474,7 +5474,7 @@
             <a:r>
               <a:rPr lang="en-US" sz="1100" i="1" dirty="0">
                 <a:solidFill>
-                  <a:srgbClr val="6B7280"/>
+                  <a:srgbClr val="CBD5E1"/>
                 </a:solidFill>
                 <a:latin typeface="Calibri" pitchFamily="34" charset="0"/>
                 <a:ea typeface="Calibri" pitchFamily="34" charset="-122"/>
@@ -5533,7 +5533,7 @@
             <a:r>
               <a:rPr lang="en-US" sz="900" dirty="0">
                 <a:solidFill>
-                  <a:srgbClr val="6B7280"/>
+                  <a:srgbClr val="CBD5E1"/>
                 </a:solidFill>
                 <a:latin typeface="Calibri" pitchFamily="34" charset="0"/>
                 <a:ea typeface="Calibri" pitchFamily="34" charset="-122"/>
@@ -5572,7 +5572,7 @@
             <a:r>
               <a:rPr lang="en-US" sz="900" dirty="0">
                 <a:solidFill>
-                  <a:srgbClr val="6B7280"/>
+                  <a:srgbClr val="CBD5E1"/>
                 </a:solidFill>
                 <a:latin typeface="Calibri" pitchFamily="34" charset="0"/>
                 <a:ea typeface="Calibri" pitchFamily="34" charset="-122"/>
@@ -5598,7 +5598,7 @@
     <p:bg>
       <p:bgPr>
         <a:solidFill>
-          <a:srgbClr val="F8FAFC"/>
+          <a:srgbClr val="1A325C"/>
         </a:solidFill>
       </p:bgPr>
     </p:bg>
@@ -5682,7 +5682,7 @@
             <a:r>
               <a:rPr lang="en-US" sz="2400" b="1" dirty="0">
                 <a:solidFill>
-                  <a:srgbClr val="14213D"/>
+                  <a:srgbClr val="FFFFFF"/>
                 </a:solidFill>
                 <a:latin typeface="Calibri Light" pitchFamily="34" charset="0"/>
                 <a:ea typeface="Calibri Light" pitchFamily="34" charset="-122"/>
@@ -5721,7 +5721,7 @@
             <a:r>
               <a:rPr lang="en-US" sz="1300" dirty="0">
                 <a:solidFill>
-                  <a:srgbClr val="6B7280"/>
+                  <a:srgbClr val="CBD5E1"/>
                 </a:solidFill>
                 <a:latin typeface="Calibri" pitchFamily="34" charset="0"/>
                 <a:ea typeface="Calibri" pitchFamily="34" charset="-122"/>
@@ -5808,7 +5808,7 @@
             <a:r>
               <a:rPr lang="en-US" sz="1100" i="1" dirty="0">
                 <a:solidFill>
-                  <a:srgbClr val="6B7280"/>
+                  <a:srgbClr val="CBD5E1"/>
                 </a:solidFill>
                 <a:latin typeface="Calibri" pitchFamily="34" charset="0"/>
                 <a:ea typeface="Calibri" pitchFamily="34" charset="-122"/>
@@ -5867,7 +5867,7 @@
             <a:r>
               <a:rPr lang="en-US" sz="900" dirty="0">
                 <a:solidFill>
-                  <a:srgbClr val="6B7280"/>
+                  <a:srgbClr val="CBD5E1"/>
                 </a:solidFill>
                 <a:latin typeface="Calibri" pitchFamily="34" charset="0"/>
                 <a:ea typeface="Calibri" pitchFamily="34" charset="-122"/>
@@ -5906,7 +5906,7 @@
             <a:r>
               <a:rPr lang="en-US" sz="900" dirty="0">
                 <a:solidFill>
-                  <a:srgbClr val="6B7280"/>
+                  <a:srgbClr val="CBD5E1"/>
                 </a:solidFill>
                 <a:latin typeface="Calibri" pitchFamily="34" charset="0"/>
                 <a:ea typeface="Calibri" pitchFamily="34" charset="-122"/>
@@ -5932,7 +5932,7 @@
     <p:bg>
       <p:bgPr>
         <a:solidFill>
-          <a:srgbClr val="F8FAFC"/>
+          <a:srgbClr val="1A325C"/>
         </a:solidFill>
       </p:bgPr>
     </p:bg>
@@ -6016,7 +6016,7 @@
             <a:r>
               <a:rPr lang="en-US" sz="2400" b="1" dirty="0">
                 <a:solidFill>
-                  <a:srgbClr val="14213D"/>
+                  <a:srgbClr val="FFFFFF"/>
                 </a:solidFill>
                 <a:latin typeface="Calibri Light" pitchFamily="34" charset="0"/>
                 <a:ea typeface="Calibri Light" pitchFamily="34" charset="-122"/>
@@ -6055,7 +6055,7 @@
             <a:r>
               <a:rPr lang="en-US" sz="1300" dirty="0">
                 <a:solidFill>
-                  <a:srgbClr val="6B7280"/>
+                  <a:srgbClr val="CBD5E1"/>
                 </a:solidFill>
                 <a:latin typeface="Calibri" pitchFamily="34" charset="0"/>
                 <a:ea typeface="Calibri" pitchFamily="34" charset="-122"/>
@@ -6142,7 +6142,7 @@
             <a:r>
               <a:rPr lang="en-US" sz="1100" i="1" dirty="0">
                 <a:solidFill>
-                  <a:srgbClr val="6B7280"/>
+                  <a:srgbClr val="CBD5E1"/>
                 </a:solidFill>
                 <a:latin typeface="Calibri" pitchFamily="34" charset="0"/>
                 <a:ea typeface="Calibri" pitchFamily="34" charset="-122"/>
@@ -6201,7 +6201,7 @@
             <a:r>
               <a:rPr lang="en-US" sz="900" dirty="0">
                 <a:solidFill>
-                  <a:srgbClr val="6B7280"/>
+                  <a:srgbClr val="CBD5E1"/>
                 </a:solidFill>
                 <a:latin typeface="Calibri" pitchFamily="34" charset="0"/>
                 <a:ea typeface="Calibri" pitchFamily="34" charset="-122"/>
@@ -6240,7 +6240,7 @@
             <a:r>
               <a:rPr lang="en-US" sz="900" dirty="0">
                 <a:solidFill>
-                  <a:srgbClr val="6B7280"/>
+                  <a:srgbClr val="CBD5E1"/>
                 </a:solidFill>
                 <a:latin typeface="Calibri" pitchFamily="34" charset="0"/>
                 <a:ea typeface="Calibri" pitchFamily="34" charset="-122"/>
@@ -6266,7 +6266,7 @@
     <p:bg>
       <p:bgPr>
         <a:solidFill>
-          <a:srgbClr val="F8FAFC"/>
+          <a:srgbClr val="1A325C"/>
         </a:solidFill>
       </p:bgPr>
     </p:bg>
@@ -6350,7 +6350,7 @@
             <a:r>
               <a:rPr lang="en-US" sz="2400" b="1" dirty="0">
                 <a:solidFill>
-                  <a:srgbClr val="14213D"/>
+                  <a:srgbClr val="FFFFFF"/>
                 </a:solidFill>
                 <a:latin typeface="Calibri Light" pitchFamily="34" charset="0"/>
                 <a:ea typeface="Calibri Light" pitchFamily="34" charset="-122"/>
@@ -6389,7 +6389,7 @@
             <a:r>
               <a:rPr lang="en-US" sz="1300" dirty="0">
                 <a:solidFill>
-                  <a:srgbClr val="6B7280"/>
+                  <a:srgbClr val="CBD5E1"/>
                 </a:solidFill>
                 <a:latin typeface="Calibri" pitchFamily="34" charset="0"/>
                 <a:ea typeface="Calibri" pitchFamily="34" charset="-122"/>
@@ -6476,7 +6476,7 @@
             <a:r>
               <a:rPr lang="en-US" sz="1100" i="1" dirty="0">
                 <a:solidFill>
-                  <a:srgbClr val="6B7280"/>
+                  <a:srgbClr val="CBD5E1"/>
                 </a:solidFill>
                 <a:latin typeface="Calibri" pitchFamily="34" charset="0"/>
                 <a:ea typeface="Calibri" pitchFamily="34" charset="-122"/>
@@ -6535,7 +6535,7 @@
             <a:r>
               <a:rPr lang="en-US" sz="900" dirty="0">
                 <a:solidFill>
-                  <a:srgbClr val="6B7280"/>
+                  <a:srgbClr val="CBD5E1"/>
                 </a:solidFill>
                 <a:latin typeface="Calibri" pitchFamily="34" charset="0"/>
                 <a:ea typeface="Calibri" pitchFamily="34" charset="-122"/>
@@ -6574,7 +6574,7 @@
             <a:r>
               <a:rPr lang="en-US" sz="900" dirty="0">
                 <a:solidFill>
-                  <a:srgbClr val="6B7280"/>
+                  <a:srgbClr val="CBD5E1"/>
                 </a:solidFill>
                 <a:latin typeface="Calibri" pitchFamily="34" charset="0"/>
                 <a:ea typeface="Calibri" pitchFamily="34" charset="-122"/>
@@ -6600,7 +6600,7 @@
     <p:bg>
       <p:bgPr>
         <a:solidFill>
-          <a:srgbClr val="F8FAFC"/>
+          <a:srgbClr val="1A325C"/>
         </a:solidFill>
       </p:bgPr>
     </p:bg>
@@ -6684,7 +6684,7 @@
             <a:r>
               <a:rPr lang="en-US" sz="2400" b="1" dirty="0">
                 <a:solidFill>
-                  <a:srgbClr val="14213D"/>
+                  <a:srgbClr val="FFFFFF"/>
                 </a:solidFill>
                 <a:latin typeface="Calibri Light" pitchFamily="34" charset="0"/>
                 <a:ea typeface="Calibri Light" pitchFamily="34" charset="-122"/>
@@ -6723,7 +6723,7 @@
             <a:r>
               <a:rPr lang="en-US" sz="1300" dirty="0">
                 <a:solidFill>
-                  <a:srgbClr val="6B7280"/>
+                  <a:srgbClr val="CBD5E1"/>
                 </a:solidFill>
                 <a:latin typeface="Calibri" pitchFamily="34" charset="0"/>
                 <a:ea typeface="Calibri" pitchFamily="34" charset="-122"/>
@@ -6810,7 +6810,7 @@
             <a:r>
               <a:rPr lang="en-US" sz="1100" i="1" dirty="0">
                 <a:solidFill>
-                  <a:srgbClr val="6B7280"/>
+                  <a:srgbClr val="CBD5E1"/>
                 </a:solidFill>
                 <a:latin typeface="Calibri" pitchFamily="34" charset="0"/>
                 <a:ea typeface="Calibri" pitchFamily="34" charset="-122"/>
@@ -6869,7 +6869,7 @@
             <a:r>
               <a:rPr lang="en-US" sz="900" dirty="0">
                 <a:solidFill>
-                  <a:srgbClr val="6B7280"/>
+                  <a:srgbClr val="CBD5E1"/>
                 </a:solidFill>
                 <a:latin typeface="Calibri" pitchFamily="34" charset="0"/>
                 <a:ea typeface="Calibri" pitchFamily="34" charset="-122"/>
@@ -6908,7 +6908,7 @@
             <a:r>
               <a:rPr lang="en-US" sz="900" dirty="0">
                 <a:solidFill>
-                  <a:srgbClr val="6B7280"/>
+                  <a:srgbClr val="CBD5E1"/>
                 </a:solidFill>
                 <a:latin typeface="Calibri" pitchFamily="34" charset="0"/>
                 <a:ea typeface="Calibri" pitchFamily="34" charset="-122"/>
@@ -6934,7 +6934,7 @@
     <p:bg>
       <p:bgPr>
         <a:solidFill>
-          <a:srgbClr val="F8FAFC"/>
+          <a:srgbClr val="1A325C"/>
         </a:solidFill>
       </p:bgPr>
     </p:bg>
@@ -7018,7 +7018,7 @@
             <a:r>
               <a:rPr lang="en-US" sz="2400" b="1" dirty="0">
                 <a:solidFill>
-                  <a:srgbClr val="14213D"/>
+                  <a:srgbClr val="FFFFFF"/>
                 </a:solidFill>
                 <a:latin typeface="Calibri Light" pitchFamily="34" charset="0"/>
                 <a:ea typeface="Calibri Light" pitchFamily="34" charset="-122"/>
@@ -7057,7 +7057,7 @@
             <a:r>
               <a:rPr lang="en-US" sz="1300" dirty="0">
                 <a:solidFill>
-                  <a:srgbClr val="6B7280"/>
+                  <a:srgbClr val="CBD5E1"/>
                 </a:solidFill>
                 <a:latin typeface="Calibri" pitchFamily="34" charset="0"/>
                 <a:ea typeface="Calibri" pitchFamily="34" charset="-122"/>
@@ -7144,7 +7144,7 @@
             <a:r>
               <a:rPr lang="en-US" sz="1100" i="1" dirty="0">
                 <a:solidFill>
-                  <a:srgbClr val="6B7280"/>
+                  <a:srgbClr val="CBD5E1"/>
                 </a:solidFill>
                 <a:latin typeface="Calibri" pitchFamily="34" charset="0"/>
                 <a:ea typeface="Calibri" pitchFamily="34" charset="-122"/>
@@ -7203,7 +7203,7 @@
             <a:r>
               <a:rPr lang="en-US" sz="900" dirty="0">
                 <a:solidFill>
-                  <a:srgbClr val="6B7280"/>
+                  <a:srgbClr val="CBD5E1"/>
                 </a:solidFill>
                 <a:latin typeface="Calibri" pitchFamily="34" charset="0"/>
                 <a:ea typeface="Calibri" pitchFamily="34" charset="-122"/>
@@ -7242,7 +7242,7 @@
             <a:r>
               <a:rPr lang="en-US" sz="900" dirty="0">
                 <a:solidFill>
-                  <a:srgbClr val="6B7280"/>
+                  <a:srgbClr val="CBD5E1"/>
                 </a:solidFill>
                 <a:latin typeface="Calibri" pitchFamily="34" charset="0"/>
                 <a:ea typeface="Calibri" pitchFamily="34" charset="-122"/>
@@ -7268,7 +7268,7 @@
     <p:bg>
       <p:bgPr>
         <a:solidFill>
-          <a:srgbClr val="FFFFFF"/>
+          <a:srgbClr val="0F1F3D"/>
         </a:solidFill>
       </p:bgPr>
     </p:bg>
@@ -7352,7 +7352,7 @@
             <a:r>
               <a:rPr lang="en-US" sz="3200" b="1" dirty="0">
                 <a:solidFill>
-                  <a:srgbClr val="14213D"/>
+                  <a:srgbClr val="FFFFFF"/>
                 </a:solidFill>
                 <a:latin typeface="Calibri Light" pitchFamily="34" charset="0"/>
                 <a:ea typeface="Calibri Light" pitchFamily="34" charset="-122"/>
@@ -7391,7 +7391,7 @@
             <a:r>
               <a:rPr lang="en-US" sz="1600" dirty="0">
                 <a:solidFill>
-                  <a:srgbClr val="6B7280"/>
+                  <a:srgbClr val="CBD5E1"/>
                 </a:solidFill>
                 <a:latin typeface="Calibri" pitchFamily="34" charset="0"/>
                 <a:ea typeface="Calibri" pitchFamily="34" charset="-122"/>
@@ -7440,11 +7440,11 @@
             </a:avLst>
           </a:prstGeom>
           <a:solidFill>
-            <a:srgbClr val="FFFFFF"/>
+            <a:srgbClr val="0F1F3D"/>
           </a:solidFill>
           <a:ln w="12700">
             <a:solidFill>
-              <a:srgbClr val="E5E7EB"/>
+              <a:srgbClr val="334155"/>
             </a:solidFill>
             <a:prstDash val="solid"/>
           </a:ln>
@@ -7575,7 +7575,7 @@
             <a:r>
               <a:rPr lang="en-US" sz="1800" b="1" dirty="0">
                 <a:solidFill>
-                  <a:srgbClr val="14213D"/>
+                  <a:srgbClr val="FFFFFF"/>
                 </a:solidFill>
                 <a:latin typeface="Calibri" pitchFamily="34" charset="0"/>
                 <a:ea typeface="Calibri" pitchFamily="34" charset="-122"/>
@@ -7614,7 +7614,7 @@
             <a:r>
               <a:rPr lang="en-US" sz="1200" dirty="0">
                 <a:solidFill>
-                  <a:srgbClr val="6B7280"/>
+                  <a:srgbClr val="CBD5E1"/>
                 </a:solidFill>
                 <a:latin typeface="Calibri" pitchFamily="34" charset="0"/>
                 <a:ea typeface="Calibri" pitchFamily="34" charset="-122"/>
@@ -7643,11 +7643,11 @@
             </a:avLst>
           </a:prstGeom>
           <a:solidFill>
-            <a:srgbClr val="FFFFFF"/>
+            <a:srgbClr val="0F1F3D"/>
           </a:solidFill>
           <a:ln w="12700">
             <a:solidFill>
-              <a:srgbClr val="E5E7EB"/>
+              <a:srgbClr val="334155"/>
             </a:solidFill>
             <a:prstDash val="solid"/>
           </a:ln>
@@ -7778,7 +7778,7 @@
             <a:r>
               <a:rPr lang="en-US" sz="1800" b="1" dirty="0">
                 <a:solidFill>
-                  <a:srgbClr val="14213D"/>
+                  <a:srgbClr val="FFFFFF"/>
                 </a:solidFill>
                 <a:latin typeface="Calibri" pitchFamily="34" charset="0"/>
                 <a:ea typeface="Calibri" pitchFamily="34" charset="-122"/>
@@ -7817,7 +7817,7 @@
             <a:r>
               <a:rPr lang="en-US" sz="1200" dirty="0">
                 <a:solidFill>
-                  <a:srgbClr val="6B7280"/>
+                  <a:srgbClr val="CBD5E1"/>
                 </a:solidFill>
                 <a:latin typeface="Calibri" pitchFamily="34" charset="0"/>
                 <a:ea typeface="Calibri" pitchFamily="34" charset="-122"/>
@@ -7846,11 +7846,11 @@
             </a:avLst>
           </a:prstGeom>
           <a:solidFill>
-            <a:srgbClr val="FFFFFF"/>
+            <a:srgbClr val="0F1F3D"/>
           </a:solidFill>
           <a:ln w="12700">
             <a:solidFill>
-              <a:srgbClr val="E5E7EB"/>
+              <a:srgbClr val="334155"/>
             </a:solidFill>
             <a:prstDash val="solid"/>
           </a:ln>
@@ -7981,7 +7981,7 @@
             <a:r>
               <a:rPr lang="en-US" sz="1800" b="1" dirty="0">
                 <a:solidFill>
-                  <a:srgbClr val="14213D"/>
+                  <a:srgbClr val="FFFFFF"/>
                 </a:solidFill>
                 <a:latin typeface="Calibri" pitchFamily="34" charset="0"/>
                 <a:ea typeface="Calibri" pitchFamily="34" charset="-122"/>
@@ -8020,7 +8020,7 @@
             <a:r>
               <a:rPr lang="en-US" sz="1200" dirty="0">
                 <a:solidFill>
-                  <a:srgbClr val="6B7280"/>
+                  <a:srgbClr val="CBD5E1"/>
                 </a:solidFill>
                 <a:latin typeface="Calibri" pitchFamily="34" charset="0"/>
                 <a:ea typeface="Calibri" pitchFamily="34" charset="-122"/>
@@ -8059,7 +8059,7 @@
             <a:r>
               <a:rPr lang="en-US" sz="1300" i="1" dirty="0">
                 <a:solidFill>
-                  <a:srgbClr val="6B7280"/>
+                  <a:srgbClr val="CBD5E1"/>
                 </a:solidFill>
                 <a:latin typeface="Calibri" pitchFamily="34" charset="0"/>
                 <a:ea typeface="Calibri" pitchFamily="34" charset="-122"/>
@@ -8118,7 +8118,7 @@
             <a:r>
               <a:rPr lang="en-US" sz="900" dirty="0">
                 <a:solidFill>
-                  <a:srgbClr val="6B7280"/>
+                  <a:srgbClr val="CBD5E1"/>
                 </a:solidFill>
                 <a:latin typeface="Calibri" pitchFamily="34" charset="0"/>
                 <a:ea typeface="Calibri" pitchFamily="34" charset="-122"/>
@@ -8157,7 +8157,7 @@
             <a:r>
               <a:rPr lang="en-US" sz="900" dirty="0">
                 <a:solidFill>
-                  <a:srgbClr val="6B7280"/>
+                  <a:srgbClr val="CBD5E1"/>
                 </a:solidFill>
                 <a:latin typeface="Calibri" pitchFamily="34" charset="0"/>
                 <a:ea typeface="Calibri" pitchFamily="34" charset="-122"/>
@@ -8183,7 +8183,7 @@
     <p:bg>
       <p:bgPr>
         <a:solidFill>
-          <a:srgbClr val="FFFFFF"/>
+          <a:srgbClr val="0F1F3D"/>
         </a:solidFill>
       </p:bgPr>
     </p:bg>
@@ -8267,7 +8267,7 @@
             <a:r>
               <a:rPr lang="en-US" sz="3200" b="1" dirty="0">
                 <a:solidFill>
-                  <a:srgbClr val="14213D"/>
+                  <a:srgbClr val="FFFFFF"/>
                 </a:solidFill>
                 <a:latin typeface="Calibri Light" pitchFamily="34" charset="0"/>
                 <a:ea typeface="Calibri Light" pitchFamily="34" charset="-122"/>
@@ -8306,7 +8306,7 @@
             <a:r>
               <a:rPr lang="en-US" sz="1600" dirty="0">
                 <a:solidFill>
-                  <a:srgbClr val="6B7280"/>
+                  <a:srgbClr val="CBD5E1"/>
                 </a:solidFill>
                 <a:latin typeface="Calibri" pitchFamily="34" charset="0"/>
                 <a:ea typeface="Calibri" pitchFamily="34" charset="-122"/>
@@ -8404,7 +8404,7 @@
             <a:r>
               <a:rPr lang="en-US" sz="1600" b="1" dirty="0">
                 <a:solidFill>
-                  <a:srgbClr val="14213D"/>
+                  <a:srgbClr val="FFFFFF"/>
                 </a:solidFill>
                 <a:latin typeface="Calibri" pitchFamily="34" charset="0"/>
                 <a:ea typeface="Calibri" pitchFamily="34" charset="-122"/>
@@ -8424,7 +8424,7 @@
             <a:r>
               <a:rPr lang="en-US" sz="1200" dirty="0">
                 <a:solidFill>
-                  <a:srgbClr val="6B7280"/>
+                  <a:srgbClr val="CBD5E1"/>
                 </a:solidFill>
                 <a:latin typeface="Calibri" pitchFamily="34" charset="0"/>
                 <a:ea typeface="Calibri" pitchFamily="34" charset="-122"/>
@@ -8502,7 +8502,7 @@
             <a:r>
               <a:rPr lang="en-US" sz="1600" b="1" dirty="0">
                 <a:solidFill>
-                  <a:srgbClr val="14213D"/>
+                  <a:srgbClr val="FFFFFF"/>
                 </a:solidFill>
                 <a:latin typeface="Calibri" pitchFamily="34" charset="0"/>
                 <a:ea typeface="Calibri" pitchFamily="34" charset="-122"/>
@@ -8522,7 +8522,7 @@
             <a:r>
               <a:rPr lang="en-US" sz="1200" dirty="0">
                 <a:solidFill>
-                  <a:srgbClr val="6B7280"/>
+                  <a:srgbClr val="CBD5E1"/>
                 </a:solidFill>
                 <a:latin typeface="Calibri" pitchFamily="34" charset="0"/>
                 <a:ea typeface="Calibri" pitchFamily="34" charset="-122"/>
@@ -8600,7 +8600,7 @@
             <a:r>
               <a:rPr lang="en-US" sz="1600" b="1" dirty="0">
                 <a:solidFill>
-                  <a:srgbClr val="14213D"/>
+                  <a:srgbClr val="FFFFFF"/>
                 </a:solidFill>
                 <a:latin typeface="Calibri" pitchFamily="34" charset="0"/>
                 <a:ea typeface="Calibri" pitchFamily="34" charset="-122"/>
@@ -8620,7 +8620,7 @@
             <a:r>
               <a:rPr lang="en-US" sz="1200" dirty="0">
                 <a:solidFill>
-                  <a:srgbClr val="6B7280"/>
+                  <a:srgbClr val="CBD5E1"/>
                 </a:solidFill>
                 <a:latin typeface="Calibri" pitchFamily="34" charset="0"/>
                 <a:ea typeface="Calibri" pitchFamily="34" charset="-122"/>
@@ -8698,7 +8698,7 @@
             <a:r>
               <a:rPr lang="en-US" sz="1600" b="1" dirty="0">
                 <a:solidFill>
-                  <a:srgbClr val="14213D"/>
+                  <a:srgbClr val="FFFFFF"/>
                 </a:solidFill>
                 <a:latin typeface="Calibri" pitchFamily="34" charset="0"/>
                 <a:ea typeface="Calibri" pitchFamily="34" charset="-122"/>
@@ -8718,7 +8718,7 @@
             <a:r>
               <a:rPr lang="en-US" sz="1200" dirty="0">
                 <a:solidFill>
-                  <a:srgbClr val="6B7280"/>
+                  <a:srgbClr val="CBD5E1"/>
                 </a:solidFill>
                 <a:latin typeface="Calibri" pitchFamily="34" charset="0"/>
                 <a:ea typeface="Calibri" pitchFamily="34" charset="-122"/>
@@ -8796,7 +8796,7 @@
             <a:r>
               <a:rPr lang="en-US" sz="1600" b="1" dirty="0">
                 <a:solidFill>
-                  <a:srgbClr val="14213D"/>
+                  <a:srgbClr val="FFFFFF"/>
                 </a:solidFill>
                 <a:latin typeface="Calibri" pitchFamily="34" charset="0"/>
                 <a:ea typeface="Calibri" pitchFamily="34" charset="-122"/>
@@ -8816,7 +8816,7 @@
             <a:r>
               <a:rPr lang="en-US" sz="1200" dirty="0">
                 <a:solidFill>
-                  <a:srgbClr val="6B7280"/>
+                  <a:srgbClr val="CBD5E1"/>
                 </a:solidFill>
                 <a:latin typeface="Calibri" pitchFamily="34" charset="0"/>
                 <a:ea typeface="Calibri" pitchFamily="34" charset="-122"/>
@@ -8894,7 +8894,7 @@
             <a:r>
               <a:rPr lang="en-US" sz="1600" b="1" dirty="0">
                 <a:solidFill>
-                  <a:srgbClr val="14213D"/>
+                  <a:srgbClr val="FFFFFF"/>
                 </a:solidFill>
                 <a:latin typeface="Calibri" pitchFamily="34" charset="0"/>
                 <a:ea typeface="Calibri" pitchFamily="34" charset="-122"/>
@@ -8914,7 +8914,7 @@
             <a:r>
               <a:rPr lang="en-US" sz="1200" dirty="0">
                 <a:solidFill>
-                  <a:srgbClr val="6B7280"/>
+                  <a:srgbClr val="CBD5E1"/>
                 </a:solidFill>
                 <a:latin typeface="Calibri" pitchFamily="34" charset="0"/>
                 <a:ea typeface="Calibri" pitchFamily="34" charset="-122"/>
@@ -8992,7 +8992,7 @@
             <a:r>
               <a:rPr lang="en-US" sz="1600" b="1" dirty="0">
                 <a:solidFill>
-                  <a:srgbClr val="14213D"/>
+                  <a:srgbClr val="FFFFFF"/>
                 </a:solidFill>
                 <a:latin typeface="Calibri" pitchFamily="34" charset="0"/>
                 <a:ea typeface="Calibri" pitchFamily="34" charset="-122"/>
@@ -9012,7 +9012,7 @@
             <a:r>
               <a:rPr lang="en-US" sz="1200" dirty="0">
                 <a:solidFill>
-                  <a:srgbClr val="6B7280"/>
+                  <a:srgbClr val="CBD5E1"/>
                 </a:solidFill>
                 <a:latin typeface="Calibri" pitchFamily="34" charset="0"/>
                 <a:ea typeface="Calibri" pitchFamily="34" charset="-122"/>
@@ -9071,7 +9071,7 @@
             <a:r>
               <a:rPr lang="en-US" sz="900" dirty="0">
                 <a:solidFill>
-                  <a:srgbClr val="6B7280"/>
+                  <a:srgbClr val="CBD5E1"/>
                 </a:solidFill>
                 <a:latin typeface="Calibri" pitchFamily="34" charset="0"/>
                 <a:ea typeface="Calibri" pitchFamily="34" charset="-122"/>
@@ -9110,7 +9110,7 @@
             <a:r>
               <a:rPr lang="en-US" sz="900" dirty="0">
                 <a:solidFill>
-                  <a:srgbClr val="6B7280"/>
+                  <a:srgbClr val="CBD5E1"/>
                 </a:solidFill>
                 <a:latin typeface="Calibri" pitchFamily="34" charset="0"/>
                 <a:ea typeface="Calibri" pitchFamily="34" charset="-122"/>
@@ -9136,7 +9136,7 @@
     <p:bg>
       <p:bgPr>
         <a:solidFill>
-          <a:srgbClr val="FFFFFF"/>
+          <a:srgbClr val="0F1F3D"/>
         </a:solidFill>
       </p:bgPr>
     </p:bg>
@@ -9220,7 +9220,7 @@
             <a:r>
               <a:rPr lang="en-US" sz="3200" b="1" dirty="0">
                 <a:solidFill>
-                  <a:srgbClr val="14213D"/>
+                  <a:srgbClr val="FFFFFF"/>
                 </a:solidFill>
                 <a:latin typeface="Calibri Light" pitchFamily="34" charset="0"/>
                 <a:ea typeface="Calibri Light" pitchFamily="34" charset="-122"/>
@@ -9259,7 +9259,7 @@
             <a:r>
               <a:rPr lang="en-US" sz="1600" dirty="0">
                 <a:solidFill>
-                  <a:srgbClr val="6B7280"/>
+                  <a:srgbClr val="CBD5E1"/>
                 </a:solidFill>
                 <a:latin typeface="Calibri" pitchFamily="34" charset="0"/>
                 <a:ea typeface="Calibri" pitchFamily="34" charset="-122"/>
@@ -9308,11 +9308,11 @@
             </a:avLst>
           </a:prstGeom>
           <a:solidFill>
-            <a:srgbClr val="F8FAFC"/>
+            <a:srgbClr val="1A325C"/>
           </a:solidFill>
           <a:ln w="12700">
             <a:solidFill>
-              <a:srgbClr val="E5E7EB"/>
+              <a:srgbClr val="334155"/>
             </a:solidFill>
             <a:prstDash val="solid"/>
           </a:ln>
@@ -9384,7 +9384,7 @@
             <a:r>
               <a:rPr lang="en-US" sz="1600" b="1" dirty="0">
                 <a:solidFill>
-                  <a:srgbClr val="14213D"/>
+                  <a:srgbClr val="FFFFFF"/>
                 </a:solidFill>
                 <a:latin typeface="Calibri" pitchFamily="34" charset="0"/>
                 <a:ea typeface="Calibri" pitchFamily="34" charset="-122"/>
@@ -9430,7 +9430,7 @@
             <a:r>
               <a:rPr lang="en-US" sz="1200" dirty="0">
                 <a:solidFill>
-                  <a:srgbClr val="6B7280"/>
+                  <a:srgbClr val="CBD5E1"/>
                 </a:solidFill>
                 <a:latin typeface="Calibri" pitchFamily="34" charset="0"/>
                 <a:ea typeface="Calibri" pitchFamily="34" charset="-122"/>
@@ -9454,7 +9454,7 @@
             <a:r>
               <a:rPr lang="en-US" sz="1200" dirty="0">
                 <a:solidFill>
-                  <a:srgbClr val="6B7280"/>
+                  <a:srgbClr val="CBD5E1"/>
                 </a:solidFill>
                 <a:latin typeface="Calibri" pitchFamily="34" charset="0"/>
                 <a:ea typeface="Calibri" pitchFamily="34" charset="-122"/>
@@ -9478,7 +9478,7 @@
             <a:r>
               <a:rPr lang="en-US" sz="1200" dirty="0">
                 <a:solidFill>
-                  <a:srgbClr val="6B7280"/>
+                  <a:srgbClr val="CBD5E1"/>
                 </a:solidFill>
                 <a:latin typeface="Calibri" pitchFamily="34" charset="0"/>
                 <a:ea typeface="Calibri" pitchFamily="34" charset="-122"/>
@@ -9502,7 +9502,7 @@
             <a:r>
               <a:rPr lang="en-US" sz="1200" dirty="0">
                 <a:solidFill>
-                  <a:srgbClr val="6B7280"/>
+                  <a:srgbClr val="CBD5E1"/>
                 </a:solidFill>
                 <a:latin typeface="Calibri" pitchFamily="34" charset="0"/>
                 <a:ea typeface="Calibri" pitchFamily="34" charset="-122"/>
@@ -9526,7 +9526,7 @@
             <a:r>
               <a:rPr lang="en-US" sz="1200" dirty="0">
                 <a:solidFill>
-                  <a:srgbClr val="6B7280"/>
+                  <a:srgbClr val="CBD5E1"/>
                 </a:solidFill>
                 <a:latin typeface="Calibri" pitchFamily="34" charset="0"/>
                 <a:ea typeface="Calibri" pitchFamily="34" charset="-122"/>
@@ -9555,11 +9555,11 @@
             </a:avLst>
           </a:prstGeom>
           <a:solidFill>
-            <a:srgbClr val="F8FAFC"/>
+            <a:srgbClr val="1A325C"/>
           </a:solidFill>
           <a:ln w="12700">
             <a:solidFill>
-              <a:srgbClr val="E5E7EB"/>
+              <a:srgbClr val="334155"/>
             </a:solidFill>
             <a:prstDash val="solid"/>
           </a:ln>
@@ -9631,7 +9631,7 @@
             <a:r>
               <a:rPr lang="en-US" sz="1600" b="1" dirty="0">
                 <a:solidFill>
-                  <a:srgbClr val="14213D"/>
+                  <a:srgbClr val="FFFFFF"/>
                 </a:solidFill>
                 <a:latin typeface="Calibri" pitchFamily="34" charset="0"/>
                 <a:ea typeface="Calibri" pitchFamily="34" charset="-122"/>
@@ -9677,7 +9677,7 @@
             <a:r>
               <a:rPr lang="en-US" sz="1200" dirty="0">
                 <a:solidFill>
-                  <a:srgbClr val="6B7280"/>
+                  <a:srgbClr val="CBD5E1"/>
                 </a:solidFill>
                 <a:latin typeface="Calibri" pitchFamily="34" charset="0"/>
                 <a:ea typeface="Calibri" pitchFamily="34" charset="-122"/>
@@ -9701,7 +9701,7 @@
             <a:r>
               <a:rPr lang="en-US" sz="1200" dirty="0">
                 <a:solidFill>
-                  <a:srgbClr val="6B7280"/>
+                  <a:srgbClr val="CBD5E1"/>
                 </a:solidFill>
                 <a:latin typeface="Calibri" pitchFamily="34" charset="0"/>
                 <a:ea typeface="Calibri" pitchFamily="34" charset="-122"/>
@@ -9725,7 +9725,7 @@
             <a:r>
               <a:rPr lang="en-US" sz="1200" dirty="0">
                 <a:solidFill>
-                  <a:srgbClr val="6B7280"/>
+                  <a:srgbClr val="CBD5E1"/>
                 </a:solidFill>
                 <a:latin typeface="Calibri" pitchFamily="34" charset="0"/>
                 <a:ea typeface="Calibri" pitchFamily="34" charset="-122"/>
@@ -9749,7 +9749,7 @@
             <a:r>
               <a:rPr lang="en-US" sz="1200" dirty="0">
                 <a:solidFill>
-                  <a:srgbClr val="6B7280"/>
+                  <a:srgbClr val="CBD5E1"/>
                 </a:solidFill>
                 <a:latin typeface="Calibri" pitchFamily="34" charset="0"/>
                 <a:ea typeface="Calibri" pitchFamily="34" charset="-122"/>
@@ -9773,7 +9773,7 @@
             <a:r>
               <a:rPr lang="en-US" sz="1200" dirty="0">
                 <a:solidFill>
-                  <a:srgbClr val="6B7280"/>
+                  <a:srgbClr val="CBD5E1"/>
                 </a:solidFill>
                 <a:latin typeface="Calibri" pitchFamily="34" charset="0"/>
                 <a:ea typeface="Calibri" pitchFamily="34" charset="-122"/>
@@ -9802,11 +9802,11 @@
             </a:avLst>
           </a:prstGeom>
           <a:solidFill>
-            <a:srgbClr val="F8FAFC"/>
+            <a:srgbClr val="1A325C"/>
           </a:solidFill>
           <a:ln w="12700">
             <a:solidFill>
-              <a:srgbClr val="E5E7EB"/>
+              <a:srgbClr val="334155"/>
             </a:solidFill>
             <a:prstDash val="solid"/>
           </a:ln>
@@ -9878,7 +9878,7 @@
             <a:r>
               <a:rPr lang="en-US" sz="1600" b="1" dirty="0">
                 <a:solidFill>
-                  <a:srgbClr val="14213D"/>
+                  <a:srgbClr val="FFFFFF"/>
                 </a:solidFill>
                 <a:latin typeface="Calibri" pitchFamily="34" charset="0"/>
                 <a:ea typeface="Calibri" pitchFamily="34" charset="-122"/>
@@ -9924,7 +9924,7 @@
             <a:r>
               <a:rPr lang="en-US" sz="1200" dirty="0">
                 <a:solidFill>
-                  <a:srgbClr val="6B7280"/>
+                  <a:srgbClr val="CBD5E1"/>
                 </a:solidFill>
                 <a:latin typeface="Calibri" pitchFamily="34" charset="0"/>
                 <a:ea typeface="Calibri" pitchFamily="34" charset="-122"/>
@@ -9948,7 +9948,7 @@
             <a:r>
               <a:rPr lang="en-US" sz="1200" dirty="0">
                 <a:solidFill>
-                  <a:srgbClr val="6B7280"/>
+                  <a:srgbClr val="CBD5E1"/>
                 </a:solidFill>
                 <a:latin typeface="Calibri" pitchFamily="34" charset="0"/>
                 <a:ea typeface="Calibri" pitchFamily="34" charset="-122"/>
@@ -9972,7 +9972,7 @@
             <a:r>
               <a:rPr lang="en-US" sz="1200" dirty="0">
                 <a:solidFill>
-                  <a:srgbClr val="6B7280"/>
+                  <a:srgbClr val="CBD5E1"/>
                 </a:solidFill>
                 <a:latin typeface="Calibri" pitchFamily="34" charset="0"/>
                 <a:ea typeface="Calibri" pitchFamily="34" charset="-122"/>
@@ -9996,7 +9996,7 @@
             <a:r>
               <a:rPr lang="en-US" sz="1200" dirty="0">
                 <a:solidFill>
-                  <a:srgbClr val="6B7280"/>
+                  <a:srgbClr val="CBD5E1"/>
                 </a:solidFill>
                 <a:latin typeface="Calibri" pitchFamily="34" charset="0"/>
                 <a:ea typeface="Calibri" pitchFamily="34" charset="-122"/>
@@ -10116,7 +10116,7 @@
             <a:r>
               <a:rPr lang="en-US" sz="900" dirty="0">
                 <a:solidFill>
-                  <a:srgbClr val="6B7280"/>
+                  <a:srgbClr val="CBD5E1"/>
                 </a:solidFill>
                 <a:latin typeface="Calibri" pitchFamily="34" charset="0"/>
                 <a:ea typeface="Calibri" pitchFamily="34" charset="-122"/>
@@ -10155,7 +10155,7 @@
             <a:r>
               <a:rPr lang="en-US" sz="900" dirty="0">
                 <a:solidFill>
-                  <a:srgbClr val="6B7280"/>
+                  <a:srgbClr val="CBD5E1"/>
                 </a:solidFill>
                 <a:latin typeface="Calibri" pitchFamily="34" charset="0"/>
                 <a:ea typeface="Calibri" pitchFamily="34" charset="-122"/>
@@ -10181,7 +10181,7 @@
     <p:bg>
       <p:bgPr>
         <a:solidFill>
-          <a:srgbClr val="FFFFFF"/>
+          <a:srgbClr val="0F1F3D"/>
         </a:solidFill>
       </p:bgPr>
     </p:bg>
@@ -10265,7 +10265,7 @@
             <a:r>
               <a:rPr lang="en-US" sz="3200" b="1" dirty="0">
                 <a:solidFill>
-                  <a:srgbClr val="14213D"/>
+                  <a:srgbClr val="FFFFFF"/>
                 </a:solidFill>
                 <a:latin typeface="Calibri Light" pitchFamily="34" charset="0"/>
                 <a:ea typeface="Calibri Light" pitchFamily="34" charset="-122"/>
@@ -10304,7 +10304,7 @@
             <a:r>
               <a:rPr lang="en-US" sz="1600" dirty="0">
                 <a:solidFill>
-                  <a:srgbClr val="6B7280"/>
+                  <a:srgbClr val="CBD5E1"/>
                 </a:solidFill>
                 <a:latin typeface="Calibri" pitchFamily="34" charset="0"/>
                 <a:ea typeface="Calibri" pitchFamily="34" charset="-122"/>
@@ -10353,11 +10353,11 @@
             </a:avLst>
           </a:prstGeom>
           <a:solidFill>
-            <a:srgbClr val="F8FAFC"/>
+            <a:srgbClr val="1A325C"/>
           </a:solidFill>
           <a:ln w="12700">
             <a:solidFill>
-              <a:srgbClr val="E5E7EB"/>
+              <a:srgbClr val="334155"/>
             </a:solidFill>
             <a:prstDash val="solid"/>
           </a:ln>
@@ -10429,7 +10429,7 @@
             <a:r>
               <a:rPr lang="en-US" sz="1200" b="1" dirty="0">
                 <a:solidFill>
-                  <a:srgbClr val="14213D"/>
+                  <a:srgbClr val="FFFFFF"/>
                 </a:solidFill>
                 <a:latin typeface="Calibri" pitchFamily="34" charset="0"/>
                 <a:ea typeface="Calibri" pitchFamily="34" charset="-122"/>
@@ -10458,11 +10458,11 @@
             </a:avLst>
           </a:prstGeom>
           <a:solidFill>
-            <a:srgbClr val="F8FAFC"/>
+            <a:srgbClr val="1A325C"/>
           </a:solidFill>
           <a:ln w="12700">
             <a:solidFill>
-              <a:srgbClr val="E5E7EB"/>
+              <a:srgbClr val="334155"/>
             </a:solidFill>
             <a:prstDash val="solid"/>
           </a:ln>
@@ -10534,7 +10534,7 @@
             <a:r>
               <a:rPr lang="en-US" sz="1200" b="1" dirty="0">
                 <a:solidFill>
-                  <a:srgbClr val="14213D"/>
+                  <a:srgbClr val="FFFFFF"/>
                 </a:solidFill>
                 <a:latin typeface="Calibri" pitchFamily="34" charset="0"/>
                 <a:ea typeface="Calibri" pitchFamily="34" charset="-122"/>
@@ -10563,11 +10563,11 @@
             </a:avLst>
           </a:prstGeom>
           <a:solidFill>
-            <a:srgbClr val="F8FAFC"/>
+            <a:srgbClr val="1A325C"/>
           </a:solidFill>
           <a:ln w="12700">
             <a:solidFill>
-              <a:srgbClr val="E5E7EB"/>
+              <a:srgbClr val="334155"/>
             </a:solidFill>
             <a:prstDash val="solid"/>
           </a:ln>
@@ -10639,7 +10639,7 @@
             <a:r>
               <a:rPr lang="en-US" sz="1200" b="1" dirty="0">
                 <a:solidFill>
-                  <a:srgbClr val="14213D"/>
+                  <a:srgbClr val="FFFFFF"/>
                 </a:solidFill>
                 <a:latin typeface="Calibri" pitchFamily="34" charset="0"/>
                 <a:ea typeface="Calibri" pitchFamily="34" charset="-122"/>
@@ -10668,11 +10668,11 @@
             </a:avLst>
           </a:prstGeom>
           <a:solidFill>
-            <a:srgbClr val="F8FAFC"/>
+            <a:srgbClr val="1A325C"/>
           </a:solidFill>
           <a:ln w="12700">
             <a:solidFill>
-              <a:srgbClr val="E5E7EB"/>
+              <a:srgbClr val="334155"/>
             </a:solidFill>
             <a:prstDash val="solid"/>
           </a:ln>
@@ -10744,7 +10744,7 @@
             <a:r>
               <a:rPr lang="en-US" sz="1200" b="1" dirty="0">
                 <a:solidFill>
-                  <a:srgbClr val="14213D"/>
+                  <a:srgbClr val="FFFFFF"/>
                 </a:solidFill>
                 <a:latin typeface="Calibri" pitchFamily="34" charset="0"/>
                 <a:ea typeface="Calibri" pitchFamily="34" charset="-122"/>
@@ -10773,11 +10773,11 @@
             </a:avLst>
           </a:prstGeom>
           <a:solidFill>
-            <a:srgbClr val="F8FAFC"/>
+            <a:srgbClr val="1A325C"/>
           </a:solidFill>
           <a:ln w="12700">
             <a:solidFill>
-              <a:srgbClr val="E5E7EB"/>
+              <a:srgbClr val="334155"/>
             </a:solidFill>
             <a:prstDash val="solid"/>
           </a:ln>
@@ -10849,7 +10849,7 @@
             <a:r>
               <a:rPr lang="en-US" sz="1200" b="1" dirty="0">
                 <a:solidFill>
-                  <a:srgbClr val="14213D"/>
+                  <a:srgbClr val="FFFFFF"/>
                 </a:solidFill>
                 <a:latin typeface="Calibri" pitchFamily="34" charset="0"/>
                 <a:ea typeface="Calibri" pitchFamily="34" charset="-122"/>
@@ -10878,11 +10878,11 @@
             </a:avLst>
           </a:prstGeom>
           <a:solidFill>
-            <a:srgbClr val="F8FAFC"/>
+            <a:srgbClr val="1A325C"/>
           </a:solidFill>
           <a:ln w="12700">
             <a:solidFill>
-              <a:srgbClr val="E5E7EB"/>
+              <a:srgbClr val="334155"/>
             </a:solidFill>
             <a:prstDash val="solid"/>
           </a:ln>
@@ -10954,7 +10954,7 @@
             <a:r>
               <a:rPr lang="en-US" sz="1200" b="1" dirty="0">
                 <a:solidFill>
-                  <a:srgbClr val="14213D"/>
+                  <a:srgbClr val="FFFFFF"/>
                 </a:solidFill>
                 <a:latin typeface="Calibri" pitchFamily="34" charset="0"/>
                 <a:ea typeface="Calibri" pitchFamily="34" charset="-122"/>
@@ -10983,11 +10983,11 @@
             </a:avLst>
           </a:prstGeom>
           <a:solidFill>
-            <a:srgbClr val="F8FAFC"/>
+            <a:srgbClr val="1A325C"/>
           </a:solidFill>
           <a:ln w="12700">
             <a:solidFill>
-              <a:srgbClr val="E5E7EB"/>
+              <a:srgbClr val="334155"/>
             </a:solidFill>
             <a:prstDash val="solid"/>
           </a:ln>
@@ -11059,7 +11059,7 @@
             <a:r>
               <a:rPr lang="en-US" sz="1200" b="1" dirty="0">
                 <a:solidFill>
-                  <a:srgbClr val="14213D"/>
+                  <a:srgbClr val="FFFFFF"/>
                 </a:solidFill>
                 <a:latin typeface="Calibri" pitchFamily="34" charset="0"/>
                 <a:ea typeface="Calibri" pitchFamily="34" charset="-122"/>
@@ -11088,11 +11088,11 @@
             </a:avLst>
           </a:prstGeom>
           <a:solidFill>
-            <a:srgbClr val="F8FAFC"/>
+            <a:srgbClr val="1A325C"/>
           </a:solidFill>
           <a:ln w="12700">
             <a:solidFill>
-              <a:srgbClr val="E5E7EB"/>
+              <a:srgbClr val="334155"/>
             </a:solidFill>
             <a:prstDash val="solid"/>
           </a:ln>
@@ -11164,7 +11164,7 @@
             <a:r>
               <a:rPr lang="en-US" sz="1200" b="1" dirty="0">
                 <a:solidFill>
-                  <a:srgbClr val="14213D"/>
+                  <a:srgbClr val="FFFFFF"/>
                 </a:solidFill>
                 <a:latin typeface="Calibri" pitchFamily="34" charset="0"/>
                 <a:ea typeface="Calibri" pitchFamily="34" charset="-122"/>
@@ -11223,7 +11223,7 @@
             <a:r>
               <a:rPr lang="en-US" sz="900" dirty="0">
                 <a:solidFill>
-                  <a:srgbClr val="6B7280"/>
+                  <a:srgbClr val="CBD5E1"/>
                 </a:solidFill>
                 <a:latin typeface="Calibri" pitchFamily="34" charset="0"/>
                 <a:ea typeface="Calibri" pitchFamily="34" charset="-122"/>
@@ -11262,7 +11262,7 @@
             <a:r>
               <a:rPr lang="en-US" sz="900" dirty="0">
                 <a:solidFill>
-                  <a:srgbClr val="6B7280"/>
+                  <a:srgbClr val="CBD5E1"/>
                 </a:solidFill>
                 <a:latin typeface="Calibri" pitchFamily="34" charset="0"/>
                 <a:ea typeface="Calibri" pitchFamily="34" charset="-122"/>
@@ -11288,7 +11288,7 @@
     <p:bg>
       <p:bgPr>
         <a:solidFill>
-          <a:srgbClr val="FFFFFF"/>
+          <a:srgbClr val="0F1F3D"/>
         </a:solidFill>
       </p:bgPr>
     </p:bg>
@@ -11372,7 +11372,7 @@
             <a:r>
               <a:rPr lang="en-US" sz="3200" b="1" dirty="0">
                 <a:solidFill>
-                  <a:srgbClr val="14213D"/>
+                  <a:srgbClr val="FFFFFF"/>
                 </a:solidFill>
                 <a:latin typeface="Calibri Light" pitchFamily="34" charset="0"/>
                 <a:ea typeface="Calibri Light" pitchFamily="34" charset="-122"/>
@@ -11411,7 +11411,7 @@
             <a:r>
               <a:rPr lang="en-US" sz="1600" dirty="0">
                 <a:solidFill>
-                  <a:srgbClr val="6B7280"/>
+                  <a:srgbClr val="CBD5E1"/>
                 </a:solidFill>
                 <a:latin typeface="Calibri" pitchFamily="34" charset="0"/>
                 <a:ea typeface="Calibri" pitchFamily="34" charset="-122"/>
@@ -11509,7 +11509,7 @@
             <a:r>
               <a:rPr lang="en-US" sz="1900" b="1" dirty="0">
                 <a:solidFill>
-                  <a:srgbClr val="14213D"/>
+                  <a:srgbClr val="FFFFFF"/>
                 </a:solidFill>
                 <a:latin typeface="Calibri" pitchFamily="34" charset="0"/>
                 <a:ea typeface="Calibri" pitchFamily="34" charset="-122"/>
@@ -11548,7 +11548,7 @@
             <a:r>
               <a:rPr lang="en-US" sz="1300" dirty="0">
                 <a:solidFill>
-                  <a:srgbClr val="6B7280"/>
+                  <a:srgbClr val="CBD5E1"/>
                 </a:solidFill>
                 <a:latin typeface="Calibri" pitchFamily="34" charset="0"/>
                 <a:ea typeface="Calibri" pitchFamily="34" charset="-122"/>
@@ -11626,7 +11626,7 @@
             <a:r>
               <a:rPr lang="en-US" sz="1900" b="1" dirty="0">
                 <a:solidFill>
-                  <a:srgbClr val="14213D"/>
+                  <a:srgbClr val="FFFFFF"/>
                 </a:solidFill>
                 <a:latin typeface="Calibri" pitchFamily="34" charset="0"/>
                 <a:ea typeface="Calibri" pitchFamily="34" charset="-122"/>
@@ -11665,7 +11665,7 @@
             <a:r>
               <a:rPr lang="en-US" sz="1300" dirty="0">
                 <a:solidFill>
-                  <a:srgbClr val="6B7280"/>
+                  <a:srgbClr val="CBD5E1"/>
                 </a:solidFill>
                 <a:latin typeface="Calibri" pitchFamily="34" charset="0"/>
                 <a:ea typeface="Calibri" pitchFamily="34" charset="-122"/>
@@ -11743,7 +11743,7 @@
             <a:r>
               <a:rPr lang="en-US" sz="1900" b="1" dirty="0">
                 <a:solidFill>
-                  <a:srgbClr val="14213D"/>
+                  <a:srgbClr val="FFFFFF"/>
                 </a:solidFill>
                 <a:latin typeface="Calibri" pitchFamily="34" charset="0"/>
                 <a:ea typeface="Calibri" pitchFamily="34" charset="-122"/>
@@ -11782,7 +11782,7 @@
             <a:r>
               <a:rPr lang="en-US" sz="1300" dirty="0">
                 <a:solidFill>
-                  <a:srgbClr val="6B7280"/>
+                  <a:srgbClr val="CBD5E1"/>
                 </a:solidFill>
                 <a:latin typeface="Calibri" pitchFamily="34" charset="0"/>
                 <a:ea typeface="Calibri" pitchFamily="34" charset="-122"/>
@@ -11860,7 +11860,7 @@
             <a:r>
               <a:rPr lang="en-US" sz="1900" b="1" dirty="0">
                 <a:solidFill>
-                  <a:srgbClr val="14213D"/>
+                  <a:srgbClr val="FFFFFF"/>
                 </a:solidFill>
                 <a:latin typeface="Calibri" pitchFamily="34" charset="0"/>
                 <a:ea typeface="Calibri" pitchFamily="34" charset="-122"/>
@@ -11899,7 +11899,7 @@
             <a:r>
               <a:rPr lang="en-US" sz="1300" dirty="0">
                 <a:solidFill>
-                  <a:srgbClr val="6B7280"/>
+                  <a:srgbClr val="CBD5E1"/>
                 </a:solidFill>
                 <a:latin typeface="Calibri" pitchFamily="34" charset="0"/>
                 <a:ea typeface="Calibri" pitchFamily="34" charset="-122"/>
@@ -11958,7 +11958,7 @@
             <a:r>
               <a:rPr lang="en-US" sz="900" dirty="0">
                 <a:solidFill>
-                  <a:srgbClr val="6B7280"/>
+                  <a:srgbClr val="CBD5E1"/>
                 </a:solidFill>
                 <a:latin typeface="Calibri" pitchFamily="34" charset="0"/>
                 <a:ea typeface="Calibri" pitchFamily="34" charset="-122"/>
@@ -11997,7 +11997,7 @@
             <a:r>
               <a:rPr lang="en-US" sz="900" dirty="0">
                 <a:solidFill>
-                  <a:srgbClr val="6B7280"/>
+                  <a:srgbClr val="CBD5E1"/>
                 </a:solidFill>
                 <a:latin typeface="Calibri" pitchFamily="34" charset="0"/>
                 <a:ea typeface="Calibri" pitchFamily="34" charset="-122"/>
@@ -12023,7 +12023,7 @@
     <p:bg>
       <p:bgPr>
         <a:solidFill>
-          <a:srgbClr val="FFFFFF"/>
+          <a:srgbClr val="0F1F3D"/>
         </a:solidFill>
       </p:bgPr>
     </p:bg>
@@ -12107,7 +12107,7 @@
             <a:r>
               <a:rPr lang="en-US" sz="3200" b="1" dirty="0">
                 <a:solidFill>
-                  <a:srgbClr val="14213D"/>
+                  <a:srgbClr val="FFFFFF"/>
                 </a:solidFill>
                 <a:latin typeface="Calibri Light" pitchFamily="34" charset="0"/>
                 <a:ea typeface="Calibri Light" pitchFamily="34" charset="-122"/>
@@ -12146,7 +12146,7 @@
             <a:r>
               <a:rPr lang="en-US" sz="1600" dirty="0">
                 <a:solidFill>
-                  <a:srgbClr val="6B7280"/>
+                  <a:srgbClr val="CBD5E1"/>
                 </a:solidFill>
                 <a:latin typeface="Calibri" pitchFamily="34" charset="0"/>
                 <a:ea typeface="Calibri" pitchFamily="34" charset="-122"/>
@@ -12195,11 +12195,11 @@
             </a:avLst>
           </a:prstGeom>
           <a:solidFill>
-            <a:srgbClr val="FFFFFF"/>
+            <a:srgbClr val="0F1F3D"/>
           </a:solidFill>
           <a:ln w="12700">
             <a:solidFill>
-              <a:srgbClr val="E5E7EB"/>
+              <a:srgbClr val="334155"/>
             </a:solidFill>
             <a:prstDash val="solid"/>
           </a:ln>
@@ -12271,7 +12271,7 @@
             <a:r>
               <a:rPr lang="en-US" sz="1900" b="1" dirty="0">
                 <a:solidFill>
-                  <a:srgbClr val="14213D"/>
+                  <a:srgbClr val="FFFFFF"/>
                 </a:solidFill>
                 <a:latin typeface="Calibri" pitchFamily="34" charset="0"/>
                 <a:ea typeface="Calibri" pitchFamily="34" charset="-122"/>
@@ -12355,7 +12355,7 @@
             <a:r>
               <a:rPr lang="en-US" sz="1200" dirty="0">
                 <a:solidFill>
-                  <a:srgbClr val="6B7280"/>
+                  <a:srgbClr val="CBD5E1"/>
                 </a:solidFill>
                 <a:latin typeface="Calibri" pitchFamily="34" charset="0"/>
                 <a:ea typeface="Calibri" pitchFamily="34" charset="-122"/>
@@ -12375,7 +12375,7 @@
             <a:r>
               <a:rPr lang="en-US" sz="1200" dirty="0">
                 <a:solidFill>
-                  <a:srgbClr val="6B7280"/>
+                  <a:srgbClr val="CBD5E1"/>
                 </a:solidFill>
                 <a:latin typeface="Calibri" pitchFamily="34" charset="0"/>
                 <a:ea typeface="Calibri" pitchFamily="34" charset="-122"/>
@@ -12395,7 +12395,7 @@
             <a:r>
               <a:rPr lang="en-US" sz="1200" dirty="0">
                 <a:solidFill>
-                  <a:srgbClr val="6B7280"/>
+                  <a:srgbClr val="CBD5E1"/>
                 </a:solidFill>
                 <a:latin typeface="Calibri" pitchFamily="34" charset="0"/>
                 <a:ea typeface="Calibri" pitchFamily="34" charset="-122"/>
@@ -12415,7 +12415,7 @@
             <a:r>
               <a:rPr lang="en-US" sz="1200" dirty="0">
                 <a:solidFill>
-                  <a:srgbClr val="6B7280"/>
+                  <a:srgbClr val="CBD5E1"/>
                 </a:solidFill>
                 <a:latin typeface="Calibri" pitchFamily="34" charset="0"/>
                 <a:ea typeface="Calibri" pitchFamily="34" charset="-122"/>
@@ -12444,11 +12444,11 @@
             </a:avLst>
           </a:prstGeom>
           <a:solidFill>
-            <a:srgbClr val="FFFFFF"/>
+            <a:srgbClr val="0F1F3D"/>
           </a:solidFill>
           <a:ln w="12700">
             <a:solidFill>
-              <a:srgbClr val="E5E7EB"/>
+              <a:srgbClr val="334155"/>
             </a:solidFill>
             <a:prstDash val="solid"/>
           </a:ln>
@@ -12520,7 +12520,7 @@
             <a:r>
               <a:rPr lang="en-US" sz="1900" b="1" dirty="0">
                 <a:solidFill>
-                  <a:srgbClr val="14213D"/>
+                  <a:srgbClr val="FFFFFF"/>
                 </a:solidFill>
                 <a:latin typeface="Calibri" pitchFamily="34" charset="0"/>
                 <a:ea typeface="Calibri" pitchFamily="34" charset="-122"/>
@@ -12604,7 +12604,7 @@
             <a:r>
               <a:rPr lang="en-US" sz="1200" dirty="0">
                 <a:solidFill>
-                  <a:srgbClr val="6B7280"/>
+                  <a:srgbClr val="CBD5E1"/>
                 </a:solidFill>
                 <a:latin typeface="Calibri" pitchFamily="34" charset="0"/>
                 <a:ea typeface="Calibri" pitchFamily="34" charset="-122"/>
@@ -12624,7 +12624,7 @@
             <a:r>
               <a:rPr lang="en-US" sz="1200" dirty="0">
                 <a:solidFill>
-                  <a:srgbClr val="6B7280"/>
+                  <a:srgbClr val="CBD5E1"/>
                 </a:solidFill>
                 <a:latin typeface="Calibri" pitchFamily="34" charset="0"/>
                 <a:ea typeface="Calibri" pitchFamily="34" charset="-122"/>
@@ -12644,7 +12644,7 @@
             <a:r>
               <a:rPr lang="en-US" sz="1200" dirty="0">
                 <a:solidFill>
-                  <a:srgbClr val="6B7280"/>
+                  <a:srgbClr val="CBD5E1"/>
                 </a:solidFill>
                 <a:latin typeface="Calibri" pitchFamily="34" charset="0"/>
                 <a:ea typeface="Calibri" pitchFamily="34" charset="-122"/>
@@ -12664,7 +12664,7 @@
             <a:r>
               <a:rPr lang="en-US" sz="1200" dirty="0">
                 <a:solidFill>
-                  <a:srgbClr val="6B7280"/>
+                  <a:srgbClr val="CBD5E1"/>
                 </a:solidFill>
                 <a:latin typeface="Calibri" pitchFamily="34" charset="0"/>
                 <a:ea typeface="Calibri" pitchFamily="34" charset="-122"/>
@@ -12693,11 +12693,11 @@
             </a:avLst>
           </a:prstGeom>
           <a:solidFill>
-            <a:srgbClr val="FFFFFF"/>
+            <a:srgbClr val="0F1F3D"/>
           </a:solidFill>
           <a:ln w="12700">
             <a:solidFill>
-              <a:srgbClr val="E5E7EB"/>
+              <a:srgbClr val="334155"/>
             </a:solidFill>
             <a:prstDash val="solid"/>
           </a:ln>
@@ -12769,7 +12769,7 @@
             <a:r>
               <a:rPr lang="en-US" sz="1900" b="1" dirty="0">
                 <a:solidFill>
-                  <a:srgbClr val="14213D"/>
+                  <a:srgbClr val="FFFFFF"/>
                 </a:solidFill>
                 <a:latin typeface="Calibri" pitchFamily="34" charset="0"/>
                 <a:ea typeface="Calibri" pitchFamily="34" charset="-122"/>
@@ -12853,7 +12853,7 @@
             <a:r>
               <a:rPr lang="en-US" sz="1200" dirty="0">
                 <a:solidFill>
-                  <a:srgbClr val="6B7280"/>
+                  <a:srgbClr val="CBD5E1"/>
                 </a:solidFill>
                 <a:latin typeface="Calibri" pitchFamily="34" charset="0"/>
                 <a:ea typeface="Calibri" pitchFamily="34" charset="-122"/>
@@ -12873,7 +12873,7 @@
             <a:r>
               <a:rPr lang="en-US" sz="1200" dirty="0">
                 <a:solidFill>
-                  <a:srgbClr val="6B7280"/>
+                  <a:srgbClr val="CBD5E1"/>
                 </a:solidFill>
                 <a:latin typeface="Calibri" pitchFamily="34" charset="0"/>
                 <a:ea typeface="Calibri" pitchFamily="34" charset="-122"/>
@@ -12893,7 +12893,7 @@
             <a:r>
               <a:rPr lang="en-US" sz="1200" dirty="0">
                 <a:solidFill>
-                  <a:srgbClr val="6B7280"/>
+                  <a:srgbClr val="CBD5E1"/>
                 </a:solidFill>
                 <a:latin typeface="Calibri" pitchFamily="34" charset="0"/>
                 <a:ea typeface="Calibri" pitchFamily="34" charset="-122"/>
@@ -12913,7 +12913,7 @@
             <a:r>
               <a:rPr lang="en-US" sz="1200" dirty="0">
                 <a:solidFill>
-                  <a:srgbClr val="6B7280"/>
+                  <a:srgbClr val="CBD5E1"/>
                 </a:solidFill>
                 <a:latin typeface="Calibri" pitchFamily="34" charset="0"/>
                 <a:ea typeface="Calibri" pitchFamily="34" charset="-122"/>
@@ -13035,7 +13035,7 @@
             <a:r>
               <a:rPr lang="en-US" sz="900" dirty="0">
                 <a:solidFill>
-                  <a:srgbClr val="6B7280"/>
+                  <a:srgbClr val="CBD5E1"/>
                 </a:solidFill>
                 <a:latin typeface="Calibri" pitchFamily="34" charset="0"/>
                 <a:ea typeface="Calibri" pitchFamily="34" charset="-122"/>
@@ -13074,7 +13074,7 @@
             <a:r>
               <a:rPr lang="en-US" sz="900" dirty="0">
                 <a:solidFill>
-                  <a:srgbClr val="6B7280"/>
+                  <a:srgbClr val="CBD5E1"/>
                 </a:solidFill>
                 <a:latin typeface="Calibri" pitchFamily="34" charset="0"/>
                 <a:ea typeface="Calibri" pitchFamily="34" charset="-122"/>
@@ -13100,7 +13100,7 @@
     <p:bg>
       <p:bgPr>
         <a:solidFill>
-          <a:srgbClr val="FFFFFF"/>
+          <a:srgbClr val="0F1F3D"/>
         </a:solidFill>
       </p:bgPr>
     </p:bg>
@@ -13184,7 +13184,7 @@
             <a:r>
               <a:rPr lang="en-US" sz="3200" b="1" dirty="0">
                 <a:solidFill>
-                  <a:srgbClr val="14213D"/>
+                  <a:srgbClr val="FFFFFF"/>
                 </a:solidFill>
                 <a:latin typeface="Calibri Light" pitchFamily="34" charset="0"/>
                 <a:ea typeface="Calibri Light" pitchFamily="34" charset="-122"/>
@@ -13223,7 +13223,7 @@
             <a:r>
               <a:rPr lang="en-US" sz="1600" dirty="0">
                 <a:solidFill>
-                  <a:srgbClr val="6B7280"/>
+                  <a:srgbClr val="CBD5E1"/>
                 </a:solidFill>
                 <a:latin typeface="Calibri" pitchFamily="34" charset="0"/>
                 <a:ea typeface="Calibri" pitchFamily="34" charset="-122"/>
@@ -13341,7 +13341,7 @@
             <a:r>
               <a:rPr lang="en-US" sz="1600" b="1" dirty="0">
                 <a:solidFill>
-                  <a:srgbClr val="14213D"/>
+                  <a:srgbClr val="FFFFFF"/>
                 </a:solidFill>
                 <a:latin typeface="Calibri" pitchFamily="34" charset="0"/>
                 <a:ea typeface="Calibri" pitchFamily="34" charset="-122"/>
@@ -13380,7 +13380,7 @@
             <a:r>
               <a:rPr lang="en-US" sz="1200" dirty="0">
                 <a:solidFill>
-                  <a:srgbClr val="6B7280"/>
+                  <a:srgbClr val="CBD5E1"/>
                 </a:solidFill>
                 <a:latin typeface="Calibri" pitchFamily="34" charset="0"/>
                 <a:ea typeface="Calibri" pitchFamily="34" charset="-122"/>
@@ -13478,7 +13478,7 @@
             <a:r>
               <a:rPr lang="en-US" sz="1600" b="1" dirty="0">
                 <a:solidFill>
-                  <a:srgbClr val="14213D"/>
+                  <a:srgbClr val="FFFFFF"/>
                 </a:solidFill>
                 <a:latin typeface="Calibri" pitchFamily="34" charset="0"/>
                 <a:ea typeface="Calibri" pitchFamily="34" charset="-122"/>
@@ -13517,7 +13517,7 @@
             <a:r>
               <a:rPr lang="en-US" sz="1200" dirty="0">
                 <a:solidFill>
-                  <a:srgbClr val="6B7280"/>
+                  <a:srgbClr val="CBD5E1"/>
                 </a:solidFill>
                 <a:latin typeface="Calibri" pitchFamily="34" charset="0"/>
                 <a:ea typeface="Calibri" pitchFamily="34" charset="-122"/>
@@ -13615,7 +13615,7 @@
             <a:r>
               <a:rPr lang="en-US" sz="1600" b="1" dirty="0">
                 <a:solidFill>
-                  <a:srgbClr val="14213D"/>
+                  <a:srgbClr val="FFFFFF"/>
                 </a:solidFill>
                 <a:latin typeface="Calibri" pitchFamily="34" charset="0"/>
                 <a:ea typeface="Calibri" pitchFamily="34" charset="-122"/>
@@ -13654,7 +13654,7 @@
             <a:r>
               <a:rPr lang="en-US" sz="1200" dirty="0">
                 <a:solidFill>
-                  <a:srgbClr val="6B7280"/>
+                  <a:srgbClr val="CBD5E1"/>
                 </a:solidFill>
                 <a:latin typeface="Calibri" pitchFamily="34" charset="0"/>
                 <a:ea typeface="Calibri" pitchFamily="34" charset="-122"/>
@@ -13681,7 +13681,7 @@
             <a:avLst/>
           </a:prstGeom>
           <a:solidFill>
-            <a:srgbClr val="6B7280"/>
+            <a:srgbClr val="CBD5E1"/>
           </a:solidFill>
           <a:ln/>
         </p:spPr>
@@ -13713,7 +13713,7 @@
             <a:r>
               <a:rPr lang="en-US" sz="1000" b="1" spc="300" kern="0" dirty="0">
                 <a:solidFill>
-                  <a:srgbClr val="6B7280"/>
+                  <a:srgbClr val="CBD5E1"/>
                 </a:solidFill>
                 <a:latin typeface="Calibri" pitchFamily="34" charset="0"/>
                 <a:ea typeface="Calibri" pitchFamily="34" charset="-122"/>
@@ -13752,7 +13752,7 @@
             <a:r>
               <a:rPr lang="en-US" sz="1600" b="1" dirty="0">
                 <a:solidFill>
-                  <a:srgbClr val="14213D"/>
+                  <a:srgbClr val="FFFFFF"/>
                 </a:solidFill>
                 <a:latin typeface="Calibri" pitchFamily="34" charset="0"/>
                 <a:ea typeface="Calibri" pitchFamily="34" charset="-122"/>
@@ -13791,7 +13791,7 @@
             <a:r>
               <a:rPr lang="en-US" sz="1200" dirty="0">
                 <a:solidFill>
-                  <a:srgbClr val="6B7280"/>
+                  <a:srgbClr val="CBD5E1"/>
                 </a:solidFill>
                 <a:latin typeface="Calibri" pitchFamily="34" charset="0"/>
                 <a:ea typeface="Calibri" pitchFamily="34" charset="-122"/>
@@ -13850,7 +13850,7 @@
             <a:r>
               <a:rPr lang="en-US" sz="900" dirty="0">
                 <a:solidFill>
-                  <a:srgbClr val="6B7280"/>
+                  <a:srgbClr val="CBD5E1"/>
                 </a:solidFill>
                 <a:latin typeface="Calibri" pitchFamily="34" charset="0"/>
                 <a:ea typeface="Calibri" pitchFamily="34" charset="-122"/>
@@ -13889,7 +13889,7 @@
             <a:r>
               <a:rPr lang="en-US" sz="900" dirty="0">
                 <a:solidFill>
-                  <a:srgbClr val="6B7280"/>
+                  <a:srgbClr val="CBD5E1"/>
                 </a:solidFill>
                 <a:latin typeface="Calibri" pitchFamily="34" charset="0"/>
                 <a:ea typeface="Calibri" pitchFamily="34" charset="-122"/>
@@ -13915,7 +13915,7 @@
     <p:bg>
       <p:bgPr>
         <a:solidFill>
-          <a:srgbClr val="FFFFFF"/>
+          <a:srgbClr val="0F1F3D"/>
         </a:solidFill>
       </p:bgPr>
     </p:bg>
@@ -13999,7 +13999,7 @@
             <a:r>
               <a:rPr lang="en-US" sz="3200" b="1" dirty="0">
                 <a:solidFill>
-                  <a:srgbClr val="14213D"/>
+                  <a:srgbClr val="FFFFFF"/>
                 </a:solidFill>
                 <a:latin typeface="Calibri Light" pitchFamily="34" charset="0"/>
                 <a:ea typeface="Calibri Light" pitchFamily="34" charset="-122"/>
@@ -14038,7 +14038,7 @@
             <a:r>
               <a:rPr lang="en-US" sz="1600" dirty="0">
                 <a:solidFill>
-                  <a:srgbClr val="6B7280"/>
+                  <a:srgbClr val="CBD5E1"/>
                 </a:solidFill>
                 <a:latin typeface="Calibri" pitchFamily="34" charset="0"/>
                 <a:ea typeface="Calibri" pitchFamily="34" charset="-122"/>
@@ -14163,7 +14163,7 @@
             <a:r>
               <a:rPr lang="en-US" sz="1400" b="1" dirty="0">
                 <a:solidFill>
-                  <a:srgbClr val="14213D"/>
+                  <a:srgbClr val="FFFFFF"/>
                 </a:solidFill>
                 <a:latin typeface="Calibri" pitchFamily="34" charset="0"/>
                 <a:ea typeface="Calibri" pitchFamily="34" charset="-122"/>
@@ -14202,7 +14202,7 @@
             <a:r>
               <a:rPr lang="en-US" sz="1100" dirty="0">
                 <a:solidFill>
-                  <a:srgbClr val="6B7280"/>
+                  <a:srgbClr val="CBD5E1"/>
                 </a:solidFill>
                 <a:latin typeface="Calibri" pitchFamily="34" charset="0"/>
                 <a:ea typeface="Calibri" pitchFamily="34" charset="-122"/>
@@ -14307,7 +14307,7 @@
             <a:r>
               <a:rPr lang="en-US" sz="1400" b="1" dirty="0">
                 <a:solidFill>
-                  <a:srgbClr val="14213D"/>
+                  <a:srgbClr val="FFFFFF"/>
                 </a:solidFill>
                 <a:latin typeface="Calibri" pitchFamily="34" charset="0"/>
                 <a:ea typeface="Calibri" pitchFamily="34" charset="-122"/>
@@ -14346,7 +14346,7 @@
             <a:r>
               <a:rPr lang="en-US" sz="1100" dirty="0">
                 <a:solidFill>
-                  <a:srgbClr val="6B7280"/>
+                  <a:srgbClr val="CBD5E1"/>
                 </a:solidFill>
                 <a:latin typeface="Calibri" pitchFamily="34" charset="0"/>
                 <a:ea typeface="Calibri" pitchFamily="34" charset="-122"/>
@@ -14451,7 +14451,7 @@
             <a:r>
               <a:rPr lang="en-US" sz="1400" b="1" dirty="0">
                 <a:solidFill>
-                  <a:srgbClr val="14213D"/>
+                  <a:srgbClr val="FFFFFF"/>
                 </a:solidFill>
                 <a:latin typeface="Calibri" pitchFamily="34" charset="0"/>
                 <a:ea typeface="Calibri" pitchFamily="34" charset="-122"/>
@@ -14490,7 +14490,7 @@
             <a:r>
               <a:rPr lang="en-US" sz="1100" dirty="0">
                 <a:solidFill>
-                  <a:srgbClr val="6B7280"/>
+                  <a:srgbClr val="CBD5E1"/>
                 </a:solidFill>
                 <a:latin typeface="Calibri" pitchFamily="34" charset="0"/>
                 <a:ea typeface="Calibri" pitchFamily="34" charset="-122"/>
@@ -14595,7 +14595,7 @@
             <a:r>
               <a:rPr lang="en-US" sz="1400" b="1" dirty="0">
                 <a:solidFill>
-                  <a:srgbClr val="14213D"/>
+                  <a:srgbClr val="FFFFFF"/>
                 </a:solidFill>
                 <a:latin typeface="Calibri" pitchFamily="34" charset="0"/>
                 <a:ea typeface="Calibri" pitchFamily="34" charset="-122"/>
@@ -14634,7 +14634,7 @@
             <a:r>
               <a:rPr lang="en-US" sz="1100" dirty="0">
                 <a:solidFill>
-                  <a:srgbClr val="6B7280"/>
+                  <a:srgbClr val="CBD5E1"/>
                 </a:solidFill>
                 <a:latin typeface="Calibri" pitchFamily="34" charset="0"/>
                 <a:ea typeface="Calibri" pitchFamily="34" charset="-122"/>
@@ -14739,7 +14739,7 @@
             <a:r>
               <a:rPr lang="en-US" sz="1400" b="1" dirty="0">
                 <a:solidFill>
-                  <a:srgbClr val="14213D"/>
+                  <a:srgbClr val="FFFFFF"/>
                 </a:solidFill>
                 <a:latin typeface="Calibri" pitchFamily="34" charset="0"/>
                 <a:ea typeface="Calibri" pitchFamily="34" charset="-122"/>
@@ -14778,7 +14778,7 @@
             <a:r>
               <a:rPr lang="en-US" sz="1100" dirty="0">
                 <a:solidFill>
-                  <a:srgbClr val="6B7280"/>
+                  <a:srgbClr val="CBD5E1"/>
                 </a:solidFill>
                 <a:latin typeface="Calibri" pitchFamily="34" charset="0"/>
                 <a:ea typeface="Calibri" pitchFamily="34" charset="-122"/>
@@ -14883,7 +14883,7 @@
             <a:r>
               <a:rPr lang="en-US" sz="1400" b="1" dirty="0">
                 <a:solidFill>
-                  <a:srgbClr val="14213D"/>
+                  <a:srgbClr val="FFFFFF"/>
                 </a:solidFill>
                 <a:latin typeface="Calibri" pitchFamily="34" charset="0"/>
                 <a:ea typeface="Calibri" pitchFamily="34" charset="-122"/>
@@ -14922,7 +14922,7 @@
             <a:r>
               <a:rPr lang="en-US" sz="1100" dirty="0">
                 <a:solidFill>
-                  <a:srgbClr val="6B7280"/>
+                  <a:srgbClr val="CBD5E1"/>
                 </a:solidFill>
                 <a:latin typeface="Calibri" pitchFamily="34" charset="0"/>
                 <a:ea typeface="Calibri" pitchFamily="34" charset="-122"/>
@@ -15027,7 +15027,7 @@
             <a:r>
               <a:rPr lang="en-US" sz="1400" b="1" dirty="0">
                 <a:solidFill>
-                  <a:srgbClr val="14213D"/>
+                  <a:srgbClr val="FFFFFF"/>
                 </a:solidFill>
                 <a:latin typeface="Calibri" pitchFamily="34" charset="0"/>
                 <a:ea typeface="Calibri" pitchFamily="34" charset="-122"/>
@@ -15066,7 +15066,7 @@
             <a:r>
               <a:rPr lang="en-US" sz="1100" dirty="0">
                 <a:solidFill>
-                  <a:srgbClr val="6B7280"/>
+                  <a:srgbClr val="CBD5E1"/>
                 </a:solidFill>
                 <a:latin typeface="Calibri" pitchFamily="34" charset="0"/>
                 <a:ea typeface="Calibri" pitchFamily="34" charset="-122"/>
@@ -15171,7 +15171,7 @@
             <a:r>
               <a:rPr lang="en-US" sz="1400" b="1" dirty="0">
                 <a:solidFill>
-                  <a:srgbClr val="14213D"/>
+                  <a:srgbClr val="FFFFFF"/>
                 </a:solidFill>
                 <a:latin typeface="Calibri" pitchFamily="34" charset="0"/>
                 <a:ea typeface="Calibri" pitchFamily="34" charset="-122"/>
@@ -15210,7 +15210,7 @@
             <a:r>
               <a:rPr lang="en-US" sz="1100" dirty="0">
                 <a:solidFill>
-                  <a:srgbClr val="6B7280"/>
+                  <a:srgbClr val="CBD5E1"/>
                 </a:solidFill>
                 <a:latin typeface="Calibri" pitchFamily="34" charset="0"/>
                 <a:ea typeface="Calibri" pitchFamily="34" charset="-122"/>
@@ -15315,7 +15315,7 @@
             <a:r>
               <a:rPr lang="en-US" sz="1400" b="1" dirty="0">
                 <a:solidFill>
-                  <a:srgbClr val="14213D"/>
+                  <a:srgbClr val="FFFFFF"/>
                 </a:solidFill>
                 <a:latin typeface="Calibri" pitchFamily="34" charset="0"/>
                 <a:ea typeface="Calibri" pitchFamily="34" charset="-122"/>
@@ -15354,7 +15354,7 @@
             <a:r>
               <a:rPr lang="en-US" sz="1100" dirty="0">
                 <a:solidFill>
-                  <a:srgbClr val="6B7280"/>
+                  <a:srgbClr val="CBD5E1"/>
                 </a:solidFill>
                 <a:latin typeface="Calibri" pitchFamily="34" charset="0"/>
                 <a:ea typeface="Calibri" pitchFamily="34" charset="-122"/>
@@ -15459,7 +15459,7 @@
             <a:r>
               <a:rPr lang="en-US" sz="1400" b="1" dirty="0">
                 <a:solidFill>
-                  <a:srgbClr val="14213D"/>
+                  <a:srgbClr val="FFFFFF"/>
                 </a:solidFill>
                 <a:latin typeface="Calibri" pitchFamily="34" charset="0"/>
                 <a:ea typeface="Calibri" pitchFamily="34" charset="-122"/>
@@ -15498,7 +15498,7 @@
             <a:r>
               <a:rPr lang="en-US" sz="1100" dirty="0">
                 <a:solidFill>
-                  <a:srgbClr val="6B7280"/>
+                  <a:srgbClr val="CBD5E1"/>
                 </a:solidFill>
                 <a:latin typeface="Calibri" pitchFamily="34" charset="0"/>
                 <a:ea typeface="Calibri" pitchFamily="34" charset="-122"/>
@@ -15557,7 +15557,7 @@
             <a:r>
               <a:rPr lang="en-US" sz="900" dirty="0">
                 <a:solidFill>
-                  <a:srgbClr val="6B7280"/>
+                  <a:srgbClr val="CBD5E1"/>
                 </a:solidFill>
                 <a:latin typeface="Calibri" pitchFamily="34" charset="0"/>
                 <a:ea typeface="Calibri" pitchFamily="34" charset="-122"/>
@@ -15596,7 +15596,7 @@
             <a:r>
               <a:rPr lang="en-US" sz="900" dirty="0">
                 <a:solidFill>
-                  <a:srgbClr val="6B7280"/>
+                  <a:srgbClr val="CBD5E1"/>
                 </a:solidFill>
                 <a:latin typeface="Calibri" pitchFamily="34" charset="0"/>
                 <a:ea typeface="Calibri" pitchFamily="34" charset="-122"/>
@@ -15885,7 +15885,7 @@
             <a:r>
               <a:rPr lang="en-US" sz="900" dirty="0">
                 <a:solidFill>
-                  <a:srgbClr val="6B7280"/>
+                  <a:srgbClr val="CBD5E1"/>
                 </a:solidFill>
                 <a:latin typeface="Calibri" pitchFamily="34" charset="0"/>
                 <a:ea typeface="Calibri" pitchFamily="34" charset="-122"/>
@@ -15924,7 +15924,7 @@
             <a:r>
               <a:rPr lang="en-US" sz="900" dirty="0">
                 <a:solidFill>
-                  <a:srgbClr val="6B7280"/>
+                  <a:srgbClr val="CBD5E1"/>
                 </a:solidFill>
                 <a:latin typeface="Calibri" pitchFamily="34" charset="0"/>
                 <a:ea typeface="Calibri" pitchFamily="34" charset="-122"/>
@@ -15950,7 +15950,7 @@
     <p:bg>
       <p:bgPr>
         <a:solidFill>
-          <a:srgbClr val="FFFFFF"/>
+          <a:srgbClr val="0F1F3D"/>
         </a:solidFill>
       </p:bgPr>
     </p:bg>
@@ -16017,7 +16017,7 @@
             <a:r>
               <a:rPr lang="en-US" sz="7200" b="1" spc="600" kern="0" dirty="0">
                 <a:solidFill>
-                  <a:srgbClr val="14213D"/>
+                  <a:srgbClr val="FFFFFF"/>
                 </a:solidFill>
                 <a:latin typeface="Calibri Light" pitchFamily="34" charset="0"/>
                 <a:ea typeface="Calibri Light" pitchFamily="34" charset="-122"/>
@@ -16056,7 +16056,7 @@
             <a:r>
               <a:rPr lang="en-US" sz="2200" dirty="0">
                 <a:solidFill>
-                  <a:srgbClr val="6B7280"/>
+                  <a:srgbClr val="CBD5E1"/>
                 </a:solidFill>
                 <a:latin typeface="Calibri Light" pitchFamily="34" charset="0"/>
                 <a:ea typeface="Calibri Light" pitchFamily="34" charset="-122"/>
@@ -16154,7 +16154,7 @@
             <a:r>
               <a:rPr lang="en-US" sz="1800" b="1" dirty="0">
                 <a:solidFill>
-                  <a:srgbClr val="14213D"/>
+                  <a:srgbClr val="FFFFFF"/>
                 </a:solidFill>
                 <a:latin typeface="Calibri" pitchFamily="34" charset="0"/>
                 <a:ea typeface="Calibri" pitchFamily="34" charset="-122"/>
@@ -16171,7 +16171,7 @@
             <a:r>
               <a:rPr lang="en-US" sz="1300" dirty="0">
                 <a:solidFill>
-                  <a:srgbClr val="6B7280"/>
+                  <a:srgbClr val="CBD5E1"/>
                 </a:solidFill>
                 <a:latin typeface="Calibri" pitchFamily="34" charset="0"/>
                 <a:ea typeface="Calibri" pitchFamily="34" charset="-122"/>
@@ -16194,7 +16194,7 @@
             <a:r>
               <a:rPr lang="en-US" sz="1300" dirty="0">
                 <a:solidFill>
-                  <a:srgbClr val="6B7280"/>
+                  <a:srgbClr val="CBD5E1"/>
                 </a:solidFill>
                 <a:latin typeface="Calibri" pitchFamily="34" charset="0"/>
                 <a:ea typeface="Calibri" pitchFamily="34" charset="-122"/>
@@ -16228,7 +16228,7 @@
             <a:r>
               <a:rPr lang="en-US" sz="1300" dirty="0">
                 <a:solidFill>
-                  <a:srgbClr val="6B7280"/>
+                  <a:srgbClr val="CBD5E1"/>
                 </a:solidFill>
                 <a:latin typeface="Calibri" pitchFamily="34" charset="0"/>
                 <a:ea typeface="Calibri" pitchFamily="34" charset="-122"/>
@@ -16301,7 +16301,7 @@
             <a:r>
               <a:rPr lang="en-US" sz="900" dirty="0">
                 <a:solidFill>
-                  <a:srgbClr val="6B7280"/>
+                  <a:srgbClr val="CBD5E1"/>
                 </a:solidFill>
                 <a:latin typeface="Calibri" pitchFamily="34" charset="0"/>
                 <a:ea typeface="Calibri" pitchFamily="34" charset="-122"/>
@@ -16340,7 +16340,7 @@
             <a:r>
               <a:rPr lang="en-US" sz="900" dirty="0">
                 <a:solidFill>
-                  <a:srgbClr val="6B7280"/>
+                  <a:srgbClr val="CBD5E1"/>
                 </a:solidFill>
                 <a:latin typeface="Calibri" pitchFamily="34" charset="0"/>
                 <a:ea typeface="Calibri" pitchFamily="34" charset="-122"/>
@@ -16366,7 +16366,7 @@
     <p:bg>
       <p:bgPr>
         <a:solidFill>
-          <a:srgbClr val="FFFFFF"/>
+          <a:srgbClr val="0F1F3D"/>
         </a:solidFill>
       </p:bgPr>
     </p:bg>
@@ -16450,7 +16450,7 @@
             <a:r>
               <a:rPr lang="en-US" sz="3200" b="1" dirty="0">
                 <a:solidFill>
-                  <a:srgbClr val="14213D"/>
+                  <a:srgbClr val="FFFFFF"/>
                 </a:solidFill>
                 <a:latin typeface="Calibri Light" pitchFamily="34" charset="0"/>
                 <a:ea typeface="Calibri Light" pitchFamily="34" charset="-122"/>
@@ -16489,7 +16489,7 @@
             <a:r>
               <a:rPr lang="en-US" sz="1600" dirty="0">
                 <a:solidFill>
-                  <a:srgbClr val="6B7280"/>
+                  <a:srgbClr val="CBD5E1"/>
                 </a:solidFill>
                 <a:latin typeface="Calibri" pitchFamily="34" charset="0"/>
                 <a:ea typeface="Calibri" pitchFamily="34" charset="-122"/>
@@ -16538,11 +16538,11 @@
             </a:avLst>
           </a:prstGeom>
           <a:solidFill>
-            <a:srgbClr val="F8FAFC"/>
+            <a:srgbClr val="1A325C"/>
           </a:solidFill>
           <a:ln w="12700">
             <a:solidFill>
-              <a:srgbClr val="E5E7EB"/>
+              <a:srgbClr val="334155"/>
             </a:solidFill>
             <a:prstDash val="solid"/>
           </a:ln>
@@ -16614,7 +16614,7 @@
             <a:r>
               <a:rPr lang="en-US" sz="1400" b="1" dirty="0">
                 <a:solidFill>
-                  <a:srgbClr val="14213D"/>
+                  <a:srgbClr val="FFFFFF"/>
                 </a:solidFill>
                 <a:latin typeface="Calibri" pitchFamily="34" charset="0"/>
                 <a:ea typeface="Calibri" pitchFamily="34" charset="-122"/>
@@ -16653,7 +16653,7 @@
             <a:r>
               <a:rPr lang="en-US" sz="1100" dirty="0">
                 <a:solidFill>
-                  <a:srgbClr val="6B7280"/>
+                  <a:srgbClr val="CBD5E1"/>
                 </a:solidFill>
                 <a:latin typeface="Calibri" pitchFamily="34" charset="0"/>
                 <a:ea typeface="Calibri" pitchFamily="34" charset="-122"/>
@@ -16682,11 +16682,11 @@
             </a:avLst>
           </a:prstGeom>
           <a:solidFill>
-            <a:srgbClr val="F8FAFC"/>
+            <a:srgbClr val="1A325C"/>
           </a:solidFill>
           <a:ln w="12700">
             <a:solidFill>
-              <a:srgbClr val="E5E7EB"/>
+              <a:srgbClr val="334155"/>
             </a:solidFill>
             <a:prstDash val="solid"/>
           </a:ln>
@@ -16758,7 +16758,7 @@
             <a:r>
               <a:rPr lang="en-US" sz="1400" b="1" dirty="0">
                 <a:solidFill>
-                  <a:srgbClr val="14213D"/>
+                  <a:srgbClr val="FFFFFF"/>
                 </a:solidFill>
                 <a:latin typeface="Calibri" pitchFamily="34" charset="0"/>
                 <a:ea typeface="Calibri" pitchFamily="34" charset="-122"/>
@@ -16797,7 +16797,7 @@
             <a:r>
               <a:rPr lang="en-US" sz="1100" dirty="0">
                 <a:solidFill>
-                  <a:srgbClr val="6B7280"/>
+                  <a:srgbClr val="CBD5E1"/>
                 </a:solidFill>
                 <a:latin typeface="Calibri" pitchFamily="34" charset="0"/>
                 <a:ea typeface="Calibri" pitchFamily="34" charset="-122"/>
@@ -16826,11 +16826,11 @@
             </a:avLst>
           </a:prstGeom>
           <a:solidFill>
-            <a:srgbClr val="F8FAFC"/>
+            <a:srgbClr val="1A325C"/>
           </a:solidFill>
           <a:ln w="12700">
             <a:solidFill>
-              <a:srgbClr val="E5E7EB"/>
+              <a:srgbClr val="334155"/>
             </a:solidFill>
             <a:prstDash val="solid"/>
           </a:ln>
@@ -16902,7 +16902,7 @@
             <a:r>
               <a:rPr lang="en-US" sz="1400" b="1" dirty="0">
                 <a:solidFill>
-                  <a:srgbClr val="14213D"/>
+                  <a:srgbClr val="FFFFFF"/>
                 </a:solidFill>
                 <a:latin typeface="Calibri" pitchFamily="34" charset="0"/>
                 <a:ea typeface="Calibri" pitchFamily="34" charset="-122"/>
@@ -16941,7 +16941,7 @@
             <a:r>
               <a:rPr lang="en-US" sz="1100" dirty="0">
                 <a:solidFill>
-                  <a:srgbClr val="6B7280"/>
+                  <a:srgbClr val="CBD5E1"/>
                 </a:solidFill>
                 <a:latin typeface="Calibri" pitchFamily="34" charset="0"/>
                 <a:ea typeface="Calibri" pitchFamily="34" charset="-122"/>
@@ -16970,11 +16970,11 @@
             </a:avLst>
           </a:prstGeom>
           <a:solidFill>
-            <a:srgbClr val="F8FAFC"/>
+            <a:srgbClr val="1A325C"/>
           </a:solidFill>
           <a:ln w="12700">
             <a:solidFill>
-              <a:srgbClr val="E5E7EB"/>
+              <a:srgbClr val="334155"/>
             </a:solidFill>
             <a:prstDash val="solid"/>
           </a:ln>
@@ -17046,7 +17046,7 @@
             <a:r>
               <a:rPr lang="en-US" sz="1400" b="1" dirty="0">
                 <a:solidFill>
-                  <a:srgbClr val="14213D"/>
+                  <a:srgbClr val="FFFFFF"/>
                 </a:solidFill>
                 <a:latin typeface="Calibri" pitchFamily="34" charset="0"/>
                 <a:ea typeface="Calibri" pitchFamily="34" charset="-122"/>
@@ -17085,7 +17085,7 @@
             <a:r>
               <a:rPr lang="en-US" sz="1100" dirty="0">
                 <a:solidFill>
-                  <a:srgbClr val="6B7280"/>
+                  <a:srgbClr val="CBD5E1"/>
                 </a:solidFill>
                 <a:latin typeface="Calibri" pitchFamily="34" charset="0"/>
                 <a:ea typeface="Calibri" pitchFamily="34" charset="-122"/>
@@ -17114,11 +17114,11 @@
             </a:avLst>
           </a:prstGeom>
           <a:solidFill>
-            <a:srgbClr val="F8FAFC"/>
+            <a:srgbClr val="1A325C"/>
           </a:solidFill>
           <a:ln w="12700">
             <a:solidFill>
-              <a:srgbClr val="E5E7EB"/>
+              <a:srgbClr val="334155"/>
             </a:solidFill>
             <a:prstDash val="solid"/>
           </a:ln>
@@ -17190,7 +17190,7 @@
             <a:r>
               <a:rPr lang="en-US" sz="1400" b="1" dirty="0">
                 <a:solidFill>
-                  <a:srgbClr val="14213D"/>
+                  <a:srgbClr val="FFFFFF"/>
                 </a:solidFill>
                 <a:latin typeface="Calibri" pitchFamily="34" charset="0"/>
                 <a:ea typeface="Calibri" pitchFamily="34" charset="-122"/>
@@ -17229,7 +17229,7 @@
             <a:r>
               <a:rPr lang="en-US" sz="1100" dirty="0">
                 <a:solidFill>
-                  <a:srgbClr val="6B7280"/>
+                  <a:srgbClr val="CBD5E1"/>
                 </a:solidFill>
                 <a:latin typeface="Calibri" pitchFamily="34" charset="0"/>
                 <a:ea typeface="Calibri" pitchFamily="34" charset="-122"/>
@@ -17288,7 +17288,7 @@
             <a:r>
               <a:rPr lang="en-US" sz="900" dirty="0">
                 <a:solidFill>
-                  <a:srgbClr val="6B7280"/>
+                  <a:srgbClr val="CBD5E1"/>
                 </a:solidFill>
                 <a:latin typeface="Calibri" pitchFamily="34" charset="0"/>
                 <a:ea typeface="Calibri" pitchFamily="34" charset="-122"/>
@@ -17327,7 +17327,7 @@
             <a:r>
               <a:rPr lang="en-US" sz="900" dirty="0">
                 <a:solidFill>
-                  <a:srgbClr val="6B7280"/>
+                  <a:srgbClr val="CBD5E1"/>
                 </a:solidFill>
                 <a:latin typeface="Calibri" pitchFamily="34" charset="0"/>
                 <a:ea typeface="Calibri" pitchFamily="34" charset="-122"/>
@@ -17353,7 +17353,7 @@
     <p:bg>
       <p:bgPr>
         <a:solidFill>
-          <a:srgbClr val="FFFFFF"/>
+          <a:srgbClr val="0F1F3D"/>
         </a:solidFill>
       </p:bgPr>
     </p:bg>
@@ -17437,7 +17437,7 @@
             <a:r>
               <a:rPr lang="en-US" sz="3200" b="1" dirty="0">
                 <a:solidFill>
-                  <a:srgbClr val="14213D"/>
+                  <a:srgbClr val="FFFFFF"/>
                 </a:solidFill>
                 <a:latin typeface="Calibri Light" pitchFamily="34" charset="0"/>
                 <a:ea typeface="Calibri Light" pitchFamily="34" charset="-122"/>
@@ -17476,7 +17476,7 @@
             <a:r>
               <a:rPr lang="en-US" sz="1600" dirty="0">
                 <a:solidFill>
-                  <a:srgbClr val="6B7280"/>
+                  <a:srgbClr val="CBD5E1"/>
                 </a:solidFill>
                 <a:latin typeface="Calibri" pitchFamily="34" charset="0"/>
                 <a:ea typeface="Calibri" pitchFamily="34" charset="-122"/>
@@ -17653,7 +17653,7 @@
             <a:r>
               <a:rPr lang="en-US" sz="1200" dirty="0">
                 <a:solidFill>
-                  <a:srgbClr val="6B7280"/>
+                  <a:srgbClr val="CBD5E1"/>
                 </a:solidFill>
                 <a:latin typeface="Calibri" pitchFamily="34" charset="0"/>
                 <a:ea typeface="Calibri" pitchFamily="34" charset="-122"/>
@@ -17692,7 +17692,7 @@
             <a:r>
               <a:rPr lang="en-US" sz="1200" b="1" dirty="0">
                 <a:solidFill>
-                  <a:srgbClr val="14213D"/>
+                  <a:srgbClr val="FFFFFF"/>
                 </a:solidFill>
                 <a:latin typeface="Calibri" pitchFamily="34" charset="0"/>
                 <a:ea typeface="Calibri" pitchFamily="34" charset="-122"/>
@@ -17731,7 +17731,7 @@
             <a:r>
               <a:rPr lang="en-US" sz="1200" dirty="0">
                 <a:solidFill>
-                  <a:srgbClr val="6B7280"/>
+                  <a:srgbClr val="CBD5E1"/>
                 </a:solidFill>
                 <a:latin typeface="Calibri" pitchFamily="34" charset="0"/>
                 <a:ea typeface="Calibri" pitchFamily="34" charset="-122"/>
@@ -17770,7 +17770,7 @@
             <a:r>
               <a:rPr lang="en-US" sz="1200" b="1" dirty="0">
                 <a:solidFill>
-                  <a:srgbClr val="14213D"/>
+                  <a:srgbClr val="FFFFFF"/>
                 </a:solidFill>
                 <a:latin typeface="Calibri" pitchFamily="34" charset="0"/>
                 <a:ea typeface="Calibri" pitchFamily="34" charset="-122"/>
@@ -17809,7 +17809,7 @@
             <a:r>
               <a:rPr lang="en-US" sz="1200" dirty="0">
                 <a:solidFill>
-                  <a:srgbClr val="6B7280"/>
+                  <a:srgbClr val="CBD5E1"/>
                 </a:solidFill>
                 <a:latin typeface="Calibri" pitchFamily="34" charset="0"/>
                 <a:ea typeface="Calibri" pitchFamily="34" charset="-122"/>
@@ -17848,7 +17848,7 @@
             <a:r>
               <a:rPr lang="en-US" sz="1200" b="1" dirty="0">
                 <a:solidFill>
-                  <a:srgbClr val="14213D"/>
+                  <a:srgbClr val="FFFFFF"/>
                 </a:solidFill>
                 <a:latin typeface="Calibri" pitchFamily="34" charset="0"/>
                 <a:ea typeface="Calibri" pitchFamily="34" charset="-122"/>
@@ -17887,7 +17887,7 @@
             <a:r>
               <a:rPr lang="en-US" sz="1200" dirty="0">
                 <a:solidFill>
-                  <a:srgbClr val="6B7280"/>
+                  <a:srgbClr val="CBD5E1"/>
                 </a:solidFill>
                 <a:latin typeface="Calibri" pitchFamily="34" charset="0"/>
                 <a:ea typeface="Calibri" pitchFamily="34" charset="-122"/>
@@ -17926,7 +17926,7 @@
             <a:r>
               <a:rPr lang="en-US" sz="1200" b="1" dirty="0">
                 <a:solidFill>
-                  <a:srgbClr val="14213D"/>
+                  <a:srgbClr val="FFFFFF"/>
                 </a:solidFill>
                 <a:latin typeface="Calibri" pitchFamily="34" charset="0"/>
                 <a:ea typeface="Calibri" pitchFamily="34" charset="-122"/>
@@ -17965,7 +17965,7 @@
             <a:r>
               <a:rPr lang="en-US" sz="1200" dirty="0">
                 <a:solidFill>
-                  <a:srgbClr val="6B7280"/>
+                  <a:srgbClr val="CBD5E1"/>
                 </a:solidFill>
                 <a:latin typeface="Calibri" pitchFamily="34" charset="0"/>
                 <a:ea typeface="Calibri" pitchFamily="34" charset="-122"/>
@@ -18004,7 +18004,7 @@
             <a:r>
               <a:rPr lang="en-US" sz="1200" b="1" dirty="0">
                 <a:solidFill>
-                  <a:srgbClr val="14213D"/>
+                  <a:srgbClr val="FFFFFF"/>
                 </a:solidFill>
                 <a:latin typeface="Calibri" pitchFamily="34" charset="0"/>
                 <a:ea typeface="Calibri" pitchFamily="34" charset="-122"/>
@@ -18043,7 +18043,7 @@
             <a:r>
               <a:rPr lang="en-US" sz="1200" dirty="0">
                 <a:solidFill>
-                  <a:srgbClr val="6B7280"/>
+                  <a:srgbClr val="CBD5E1"/>
                 </a:solidFill>
                 <a:latin typeface="Calibri" pitchFamily="34" charset="0"/>
                 <a:ea typeface="Calibri" pitchFamily="34" charset="-122"/>
@@ -18082,7 +18082,7 @@
             <a:r>
               <a:rPr lang="en-US" sz="1200" b="1" dirty="0">
                 <a:solidFill>
-                  <a:srgbClr val="14213D"/>
+                  <a:srgbClr val="FFFFFF"/>
                 </a:solidFill>
                 <a:latin typeface="Calibri" pitchFamily="34" charset="0"/>
                 <a:ea typeface="Calibri" pitchFamily="34" charset="-122"/>
@@ -18121,7 +18121,7 @@
             <a:r>
               <a:rPr lang="en-US" sz="1200" dirty="0">
                 <a:solidFill>
-                  <a:srgbClr val="6B7280"/>
+                  <a:srgbClr val="CBD5E1"/>
                 </a:solidFill>
                 <a:latin typeface="Calibri" pitchFamily="34" charset="0"/>
                 <a:ea typeface="Calibri" pitchFamily="34" charset="-122"/>
@@ -18160,7 +18160,7 @@
             <a:r>
               <a:rPr lang="en-US" sz="1200" b="1" dirty="0">
                 <a:solidFill>
-                  <a:srgbClr val="14213D"/>
+                  <a:srgbClr val="FFFFFF"/>
                 </a:solidFill>
                 <a:latin typeface="Calibri" pitchFamily="34" charset="0"/>
                 <a:ea typeface="Calibri" pitchFamily="34" charset="-122"/>
@@ -18219,7 +18219,7 @@
             <a:r>
               <a:rPr lang="en-US" sz="900" dirty="0">
                 <a:solidFill>
-                  <a:srgbClr val="6B7280"/>
+                  <a:srgbClr val="CBD5E1"/>
                 </a:solidFill>
                 <a:latin typeface="Calibri" pitchFamily="34" charset="0"/>
                 <a:ea typeface="Calibri" pitchFamily="34" charset="-122"/>
@@ -18258,7 +18258,7 @@
             <a:r>
               <a:rPr lang="en-US" sz="900" dirty="0">
                 <a:solidFill>
-                  <a:srgbClr val="6B7280"/>
+                  <a:srgbClr val="CBD5E1"/>
                 </a:solidFill>
                 <a:latin typeface="Calibri" pitchFamily="34" charset="0"/>
                 <a:ea typeface="Calibri" pitchFamily="34" charset="-122"/>
@@ -18871,7 +18871,7 @@
             <a:r>
               <a:rPr lang="en-US" sz="900" dirty="0">
                 <a:solidFill>
-                  <a:srgbClr val="6B7280"/>
+                  <a:srgbClr val="CBD5E1"/>
                 </a:solidFill>
                 <a:latin typeface="Calibri" pitchFamily="34" charset="0"/>
                 <a:ea typeface="Calibri" pitchFamily="34" charset="-122"/>
@@ -18910,7 +18910,7 @@
             <a:r>
               <a:rPr lang="en-US" sz="900" dirty="0">
                 <a:solidFill>
-                  <a:srgbClr val="6B7280"/>
+                  <a:srgbClr val="CBD5E1"/>
                 </a:solidFill>
                 <a:latin typeface="Calibri" pitchFamily="34" charset="0"/>
                 <a:ea typeface="Calibri" pitchFamily="34" charset="-122"/>
@@ -18936,7 +18936,7 @@
     <p:bg>
       <p:bgPr>
         <a:solidFill>
-          <a:srgbClr val="FFFFFF"/>
+          <a:srgbClr val="0F1F3D"/>
         </a:solidFill>
       </p:bgPr>
     </p:bg>
@@ -19020,7 +19020,7 @@
             <a:r>
               <a:rPr lang="en-US" sz="3200" b="1" dirty="0">
                 <a:solidFill>
-                  <a:srgbClr val="14213D"/>
+                  <a:srgbClr val="FFFFFF"/>
                 </a:solidFill>
                 <a:latin typeface="Calibri Light" pitchFamily="34" charset="0"/>
                 <a:ea typeface="Calibri Light" pitchFamily="34" charset="-122"/>
@@ -19059,7 +19059,7 @@
             <a:r>
               <a:rPr lang="en-US" sz="1600" dirty="0">
                 <a:solidFill>
-                  <a:srgbClr val="6B7280"/>
+                  <a:srgbClr val="CBD5E1"/>
                 </a:solidFill>
                 <a:latin typeface="Calibri" pitchFamily="34" charset="0"/>
                 <a:ea typeface="Calibri" pitchFamily="34" charset="-122"/>
@@ -19108,7 +19108,7 @@
             </a:avLst>
           </a:prstGeom>
           <a:solidFill>
-            <a:srgbClr val="F8FAFC"/>
+            <a:srgbClr val="1A325C"/>
           </a:solidFill>
           <a:ln w="25400">
             <a:solidFill>
@@ -19184,7 +19184,7 @@
             <a:r>
               <a:rPr lang="en-US" sz="1400" b="1" dirty="0">
                 <a:solidFill>
-                  <a:srgbClr val="14213D"/>
+                  <a:srgbClr val="FFFFFF"/>
                 </a:solidFill>
                 <a:latin typeface="Calibri" pitchFamily="34" charset="0"/>
                 <a:ea typeface="Calibri" pitchFamily="34" charset="-122"/>
@@ -19223,7 +19223,7 @@
             <a:r>
               <a:rPr lang="en-US" sz="1100" dirty="0">
                 <a:solidFill>
-                  <a:srgbClr val="6B7280"/>
+                  <a:srgbClr val="CBD5E1"/>
                 </a:solidFill>
                 <a:latin typeface="Calibri" pitchFamily="34" charset="0"/>
                 <a:ea typeface="Calibri" pitchFamily="34" charset="-122"/>
@@ -19252,7 +19252,7 @@
             </a:avLst>
           </a:prstGeom>
           <a:solidFill>
-            <a:srgbClr val="F8FAFC"/>
+            <a:srgbClr val="1A325C"/>
           </a:solidFill>
           <a:ln w="25400">
             <a:solidFill>
@@ -19328,7 +19328,7 @@
             <a:r>
               <a:rPr lang="en-US" sz="1400" b="1" dirty="0">
                 <a:solidFill>
-                  <a:srgbClr val="14213D"/>
+                  <a:srgbClr val="FFFFFF"/>
                 </a:solidFill>
                 <a:latin typeface="Calibri" pitchFamily="34" charset="0"/>
                 <a:ea typeface="Calibri" pitchFamily="34" charset="-122"/>
@@ -19367,7 +19367,7 @@
             <a:r>
               <a:rPr lang="en-US" sz="1100" dirty="0">
                 <a:solidFill>
-                  <a:srgbClr val="6B7280"/>
+                  <a:srgbClr val="CBD5E1"/>
                 </a:solidFill>
                 <a:latin typeface="Calibri" pitchFamily="34" charset="0"/>
                 <a:ea typeface="Calibri" pitchFamily="34" charset="-122"/>
@@ -19396,7 +19396,7 @@
             </a:avLst>
           </a:prstGeom>
           <a:solidFill>
-            <a:srgbClr val="F8FAFC"/>
+            <a:srgbClr val="1A325C"/>
           </a:solidFill>
           <a:ln w="25400">
             <a:solidFill>
@@ -19472,7 +19472,7 @@
             <a:r>
               <a:rPr lang="en-US" sz="1400" b="1" dirty="0">
                 <a:solidFill>
-                  <a:srgbClr val="14213D"/>
+                  <a:srgbClr val="FFFFFF"/>
                 </a:solidFill>
                 <a:latin typeface="Calibri" pitchFamily="34" charset="0"/>
                 <a:ea typeface="Calibri" pitchFamily="34" charset="-122"/>
@@ -19511,7 +19511,7 @@
             <a:r>
               <a:rPr lang="en-US" sz="1100" dirty="0">
                 <a:solidFill>
-                  <a:srgbClr val="6B7280"/>
+                  <a:srgbClr val="CBD5E1"/>
                 </a:solidFill>
                 <a:latin typeface="Calibri" pitchFamily="34" charset="0"/>
                 <a:ea typeface="Calibri" pitchFamily="34" charset="-122"/>
@@ -19540,7 +19540,7 @@
             </a:avLst>
           </a:prstGeom>
           <a:solidFill>
-            <a:srgbClr val="F8FAFC"/>
+            <a:srgbClr val="1A325C"/>
           </a:solidFill>
           <a:ln w="25400">
             <a:solidFill>
@@ -19616,7 +19616,7 @@
             <a:r>
               <a:rPr lang="en-US" sz="1400" b="1" dirty="0">
                 <a:solidFill>
-                  <a:srgbClr val="14213D"/>
+                  <a:srgbClr val="FFFFFF"/>
                 </a:solidFill>
                 <a:latin typeface="Calibri" pitchFamily="34" charset="0"/>
                 <a:ea typeface="Calibri" pitchFamily="34" charset="-122"/>
@@ -19655,7 +19655,7 @@
             <a:r>
               <a:rPr lang="en-US" sz="1100" dirty="0">
                 <a:solidFill>
-                  <a:srgbClr val="6B7280"/>
+                  <a:srgbClr val="CBD5E1"/>
                 </a:solidFill>
                 <a:latin typeface="Calibri" pitchFamily="34" charset="0"/>
                 <a:ea typeface="Calibri" pitchFamily="34" charset="-122"/>
@@ -19714,7 +19714,7 @@
             <a:r>
               <a:rPr lang="en-US" sz="900" dirty="0">
                 <a:solidFill>
-                  <a:srgbClr val="6B7280"/>
+                  <a:srgbClr val="CBD5E1"/>
                 </a:solidFill>
                 <a:latin typeface="Calibri" pitchFamily="34" charset="0"/>
                 <a:ea typeface="Calibri" pitchFamily="34" charset="-122"/>
@@ -19753,7 +19753,7 @@
             <a:r>
               <a:rPr lang="en-US" sz="900" dirty="0">
                 <a:solidFill>
-                  <a:srgbClr val="6B7280"/>
+                  <a:srgbClr val="CBD5E1"/>
                 </a:solidFill>
                 <a:latin typeface="Calibri" pitchFamily="34" charset="0"/>
                 <a:ea typeface="Calibri" pitchFamily="34" charset="-122"/>
@@ -19779,7 +19779,7 @@
     <p:bg>
       <p:bgPr>
         <a:solidFill>
-          <a:srgbClr val="FFFFFF"/>
+          <a:srgbClr val="0F1F3D"/>
         </a:solidFill>
       </p:bgPr>
     </p:bg>
@@ -19863,7 +19863,7 @@
             <a:r>
               <a:rPr lang="en-US" sz="3200" b="1" dirty="0">
                 <a:solidFill>
-                  <a:srgbClr val="14213D"/>
+                  <a:srgbClr val="FFFFFF"/>
                 </a:solidFill>
                 <a:latin typeface="Calibri Light" pitchFamily="34" charset="0"/>
                 <a:ea typeface="Calibri Light" pitchFamily="34" charset="-122"/>
@@ -19902,7 +19902,7 @@
             <a:r>
               <a:rPr lang="en-US" sz="1600" dirty="0">
                 <a:solidFill>
-                  <a:srgbClr val="6B7280"/>
+                  <a:srgbClr val="CBD5E1"/>
                 </a:solidFill>
                 <a:latin typeface="Calibri" pitchFamily="34" charset="0"/>
                 <a:ea typeface="Calibri" pitchFamily="34" charset="-122"/>
@@ -19968,7 +19968,7 @@
             <a:r>
               <a:rPr lang="en-US" sz="1600" dirty="0">
                 <a:solidFill>
-                  <a:srgbClr val="14213D"/>
+                  <a:srgbClr val="FFFFFF"/>
                 </a:solidFill>
                 <a:latin typeface="Calibri" pitchFamily="34" charset="0"/>
                 <a:ea typeface="Calibri" pitchFamily="34" charset="-122"/>
@@ -19992,7 +19992,7 @@
             <a:r>
               <a:rPr lang="en-US" sz="1600" dirty="0">
                 <a:solidFill>
-                  <a:srgbClr val="14213D"/>
+                  <a:srgbClr val="FFFFFF"/>
                 </a:solidFill>
                 <a:latin typeface="Calibri" pitchFamily="34" charset="0"/>
                 <a:ea typeface="Calibri" pitchFamily="34" charset="-122"/>
@@ -20016,7 +20016,7 @@
             <a:r>
               <a:rPr lang="en-US" sz="1600" dirty="0">
                 <a:solidFill>
-                  <a:srgbClr val="14213D"/>
+                  <a:srgbClr val="FFFFFF"/>
                 </a:solidFill>
                 <a:latin typeface="Calibri" pitchFamily="34" charset="0"/>
                 <a:ea typeface="Calibri" pitchFamily="34" charset="-122"/>
@@ -20040,7 +20040,7 @@
             <a:r>
               <a:rPr lang="en-US" sz="1600" dirty="0">
                 <a:solidFill>
-                  <a:srgbClr val="14213D"/>
+                  <a:srgbClr val="FFFFFF"/>
                 </a:solidFill>
                 <a:latin typeface="Calibri" pitchFamily="34" charset="0"/>
                 <a:ea typeface="Calibri" pitchFamily="34" charset="-122"/>
@@ -20064,7 +20064,7 @@
             <a:r>
               <a:rPr lang="en-US" sz="1600" dirty="0">
                 <a:solidFill>
-                  <a:srgbClr val="14213D"/>
+                  <a:srgbClr val="FFFFFF"/>
                 </a:solidFill>
                 <a:latin typeface="Calibri" pitchFamily="34" charset="0"/>
                 <a:ea typeface="Calibri" pitchFamily="34" charset="-122"/>
@@ -20088,7 +20088,7 @@
             <a:r>
               <a:rPr lang="en-US" sz="1600" dirty="0">
                 <a:solidFill>
-                  <a:srgbClr val="14213D"/>
+                  <a:srgbClr val="FFFFFF"/>
                 </a:solidFill>
                 <a:latin typeface="Calibri" pitchFamily="34" charset="0"/>
                 <a:ea typeface="Calibri" pitchFamily="34" charset="-122"/>
@@ -20270,7 +20270,7 @@
             <a:r>
               <a:rPr lang="en-US" sz="900" dirty="0">
                 <a:solidFill>
-                  <a:srgbClr val="6B7280"/>
+                  <a:srgbClr val="CBD5E1"/>
                 </a:solidFill>
                 <a:latin typeface="Calibri" pitchFamily="34" charset="0"/>
                 <a:ea typeface="Calibri" pitchFamily="34" charset="-122"/>
@@ -20309,7 +20309,7 @@
             <a:r>
               <a:rPr lang="en-US" sz="900" dirty="0">
                 <a:solidFill>
-                  <a:srgbClr val="6B7280"/>
+                  <a:srgbClr val="CBD5E1"/>
                 </a:solidFill>
                 <a:latin typeface="Calibri" pitchFamily="34" charset="0"/>
                 <a:ea typeface="Calibri" pitchFamily="34" charset="-122"/>
@@ -20335,7 +20335,7 @@
     <p:bg>
       <p:bgPr>
         <a:solidFill>
-          <a:srgbClr val="FFFFFF"/>
+          <a:srgbClr val="0F1F3D"/>
         </a:solidFill>
       </p:bgPr>
     </p:bg>
@@ -20419,7 +20419,7 @@
             <a:r>
               <a:rPr lang="en-US" sz="3200" b="1" dirty="0">
                 <a:solidFill>
-                  <a:srgbClr val="14213D"/>
+                  <a:srgbClr val="FFFFFF"/>
                 </a:solidFill>
                 <a:latin typeface="Calibri Light" pitchFamily="34" charset="0"/>
                 <a:ea typeface="Calibri Light" pitchFamily="34" charset="-122"/>
@@ -20458,7 +20458,7 @@
             <a:r>
               <a:rPr lang="en-US" sz="1600" dirty="0">
                 <a:solidFill>
-                  <a:srgbClr val="6B7280"/>
+                  <a:srgbClr val="CBD5E1"/>
                 </a:solidFill>
                 <a:latin typeface="Calibri" pitchFamily="34" charset="0"/>
                 <a:ea typeface="Calibri" pitchFamily="34" charset="-122"/>
@@ -20524,7 +20524,7 @@
             <a:r>
               <a:rPr lang="en-US" sz="1600" dirty="0">
                 <a:solidFill>
-                  <a:srgbClr val="14213D"/>
+                  <a:srgbClr val="FFFFFF"/>
                 </a:solidFill>
                 <a:latin typeface="Calibri" pitchFamily="34" charset="0"/>
                 <a:ea typeface="Calibri" pitchFamily="34" charset="-122"/>
@@ -20548,7 +20548,7 @@
             <a:r>
               <a:rPr lang="en-US" sz="1600" dirty="0">
                 <a:solidFill>
-                  <a:srgbClr val="14213D"/>
+                  <a:srgbClr val="FFFFFF"/>
                 </a:solidFill>
                 <a:latin typeface="Calibri" pitchFamily="34" charset="0"/>
                 <a:ea typeface="Calibri" pitchFamily="34" charset="-122"/>
@@ -20572,7 +20572,7 @@
             <a:r>
               <a:rPr lang="en-US" sz="1600" dirty="0">
                 <a:solidFill>
-                  <a:srgbClr val="14213D"/>
+                  <a:srgbClr val="FFFFFF"/>
                 </a:solidFill>
                 <a:latin typeface="Calibri" pitchFamily="34" charset="0"/>
                 <a:ea typeface="Calibri" pitchFamily="34" charset="-122"/>
@@ -20596,7 +20596,7 @@
             <a:r>
               <a:rPr lang="en-US" sz="1600" dirty="0">
                 <a:solidFill>
-                  <a:srgbClr val="14213D"/>
+                  <a:srgbClr val="FFFFFF"/>
                 </a:solidFill>
                 <a:latin typeface="Calibri" pitchFamily="34" charset="0"/>
                 <a:ea typeface="Calibri" pitchFamily="34" charset="-122"/>
@@ -20620,7 +20620,7 @@
             <a:r>
               <a:rPr lang="en-US" sz="1600" dirty="0">
                 <a:solidFill>
-                  <a:srgbClr val="14213D"/>
+                  <a:srgbClr val="FFFFFF"/>
                 </a:solidFill>
                 <a:latin typeface="Calibri" pitchFamily="34" charset="0"/>
                 <a:ea typeface="Calibri" pitchFamily="34" charset="-122"/>
@@ -20644,7 +20644,7 @@
             <a:r>
               <a:rPr lang="en-US" sz="1600" dirty="0">
                 <a:solidFill>
-                  <a:srgbClr val="14213D"/>
+                  <a:srgbClr val="FFFFFF"/>
                 </a:solidFill>
                 <a:latin typeface="Calibri" pitchFamily="34" charset="0"/>
                 <a:ea typeface="Calibri" pitchFamily="34" charset="-122"/>
@@ -20668,7 +20668,7 @@
             <a:r>
               <a:rPr lang="en-US" sz="1600" dirty="0">
                 <a:solidFill>
-                  <a:srgbClr val="14213D"/>
+                  <a:srgbClr val="FFFFFF"/>
                 </a:solidFill>
                 <a:latin typeface="Calibri" pitchFamily="34" charset="0"/>
                 <a:ea typeface="Calibri" pitchFamily="34" charset="-122"/>
@@ -20850,7 +20850,7 @@
             <a:r>
               <a:rPr lang="en-US" sz="900" dirty="0">
                 <a:solidFill>
-                  <a:srgbClr val="6B7280"/>
+                  <a:srgbClr val="CBD5E1"/>
                 </a:solidFill>
                 <a:latin typeface="Calibri" pitchFamily="34" charset="0"/>
                 <a:ea typeface="Calibri" pitchFamily="34" charset="-122"/>
@@ -20889,7 +20889,7 @@
             <a:r>
               <a:rPr lang="en-US" sz="900" dirty="0">
                 <a:solidFill>
-                  <a:srgbClr val="6B7280"/>
+                  <a:srgbClr val="CBD5E1"/>
                 </a:solidFill>
                 <a:latin typeface="Calibri" pitchFamily="34" charset="0"/>
                 <a:ea typeface="Calibri" pitchFamily="34" charset="-122"/>
@@ -20915,7 +20915,7 @@
     <p:bg>
       <p:bgPr>
         <a:solidFill>
-          <a:srgbClr val="FFFFFF"/>
+          <a:srgbClr val="0F1F3D"/>
         </a:solidFill>
       </p:bgPr>
     </p:bg>
@@ -20999,7 +20999,7 @@
             <a:r>
               <a:rPr lang="en-US" sz="3200" b="1" dirty="0">
                 <a:solidFill>
-                  <a:srgbClr val="14213D"/>
+                  <a:srgbClr val="FFFFFF"/>
                 </a:solidFill>
                 <a:latin typeface="Calibri Light" pitchFamily="34" charset="0"/>
                 <a:ea typeface="Calibri Light" pitchFamily="34" charset="-122"/>
@@ -21038,7 +21038,7 @@
             <a:r>
               <a:rPr lang="en-US" sz="1600" dirty="0">
                 <a:solidFill>
-                  <a:srgbClr val="6B7280"/>
+                  <a:srgbClr val="CBD5E1"/>
                 </a:solidFill>
                 <a:latin typeface="Calibri" pitchFamily="34" charset="0"/>
                 <a:ea typeface="Calibri" pitchFamily="34" charset="-122"/>
@@ -21104,7 +21104,7 @@
             <a:r>
               <a:rPr lang="en-US" sz="1600" dirty="0">
                 <a:solidFill>
-                  <a:srgbClr val="14213D"/>
+                  <a:srgbClr val="FFFFFF"/>
                 </a:solidFill>
                 <a:latin typeface="Calibri" pitchFamily="34" charset="0"/>
                 <a:ea typeface="Calibri" pitchFamily="34" charset="-122"/>
@@ -21128,7 +21128,7 @@
             <a:r>
               <a:rPr lang="en-US" sz="1600" dirty="0">
                 <a:solidFill>
-                  <a:srgbClr val="14213D"/>
+                  <a:srgbClr val="FFFFFF"/>
                 </a:solidFill>
                 <a:latin typeface="Calibri" pitchFamily="34" charset="0"/>
                 <a:ea typeface="Calibri" pitchFamily="34" charset="-122"/>
@@ -21152,7 +21152,7 @@
             <a:r>
               <a:rPr lang="en-US" sz="1600" dirty="0">
                 <a:solidFill>
-                  <a:srgbClr val="14213D"/>
+                  <a:srgbClr val="FFFFFF"/>
                 </a:solidFill>
                 <a:latin typeface="Calibri" pitchFamily="34" charset="0"/>
                 <a:ea typeface="Calibri" pitchFamily="34" charset="-122"/>
@@ -21176,7 +21176,7 @@
             <a:r>
               <a:rPr lang="en-US" sz="1600" dirty="0">
                 <a:solidFill>
-                  <a:srgbClr val="14213D"/>
+                  <a:srgbClr val="FFFFFF"/>
                 </a:solidFill>
                 <a:latin typeface="Calibri" pitchFamily="34" charset="0"/>
                 <a:ea typeface="Calibri" pitchFamily="34" charset="-122"/>
@@ -21200,7 +21200,7 @@
             <a:r>
               <a:rPr lang="en-US" sz="1600" dirty="0">
                 <a:solidFill>
-                  <a:srgbClr val="14213D"/>
+                  <a:srgbClr val="FFFFFF"/>
                 </a:solidFill>
                 <a:latin typeface="Calibri" pitchFamily="34" charset="0"/>
                 <a:ea typeface="Calibri" pitchFamily="34" charset="-122"/>
@@ -21224,7 +21224,7 @@
             <a:r>
               <a:rPr lang="en-US" sz="1600" dirty="0">
                 <a:solidFill>
-                  <a:srgbClr val="14213D"/>
+                  <a:srgbClr val="FFFFFF"/>
                 </a:solidFill>
                 <a:latin typeface="Calibri" pitchFamily="34" charset="0"/>
                 <a:ea typeface="Calibri" pitchFamily="34" charset="-122"/>
@@ -21248,7 +21248,7 @@
             <a:r>
               <a:rPr lang="en-US" sz="1600" dirty="0">
                 <a:solidFill>
-                  <a:srgbClr val="14213D"/>
+                  <a:srgbClr val="FFFFFF"/>
                 </a:solidFill>
                 <a:latin typeface="Calibri" pitchFamily="34" charset="0"/>
                 <a:ea typeface="Calibri" pitchFamily="34" charset="-122"/>
@@ -21430,7 +21430,7 @@
             <a:r>
               <a:rPr lang="en-US" sz="900" dirty="0">
                 <a:solidFill>
-                  <a:srgbClr val="6B7280"/>
+                  <a:srgbClr val="CBD5E1"/>
                 </a:solidFill>
                 <a:latin typeface="Calibri" pitchFamily="34" charset="0"/>
                 <a:ea typeface="Calibri" pitchFamily="34" charset="-122"/>
@@ -21469,7 +21469,7 @@
             <a:r>
               <a:rPr lang="en-US" sz="900" dirty="0">
                 <a:solidFill>
-                  <a:srgbClr val="6B7280"/>
+                  <a:srgbClr val="CBD5E1"/>
                 </a:solidFill>
                 <a:latin typeface="Calibri" pitchFamily="34" charset="0"/>
                 <a:ea typeface="Calibri" pitchFamily="34" charset="-122"/>

--- a/Presentacion-APOPS-Siempre.pptx
+++ b/Presentacion-APOPS-Siempre.pptx
@@ -4950,140 +4950,23 @@
       </p:grpSpPr>
       <p:sp>
         <p:nvSpPr>
-          <p:cNvPr id="2" name="Text 0"/>
-          <p:cNvSpPr/>
-          <p:nvPr/>
-        </p:nvSpPr>
-        <p:spPr>
-          <a:xfrm>
-            <a:off x="457200" y="320040"/>
-            <a:ext cx="7315200" cy="274320"/>
-          </a:xfrm>
-          <a:prstGeom prst="rect">
-            <a:avLst/>
-          </a:prstGeom>
-          <a:noFill/>
-          <a:ln/>
-        </p:spPr>
-        <p:txBody>
-          <a:bodyPr wrap="square" rtlCol="0" anchor="ctr"/>
-          <a:lstStyle/>
-          <a:p>
-            <a:pPr indent="0" marL="0">
-              <a:buNone/>
-            </a:pPr>
-            <a:r>
-              <a:rPr lang="en-US" sz="1100" b="1" spc="200" kern="0" dirty="0">
-                <a:solidFill>
-                  <a:srgbClr val="1F72B8"/>
-                </a:solidFill>
-                <a:latin typeface="Calibri" pitchFamily="34" charset="0"/>
-                <a:ea typeface="Calibri" pitchFamily="34" charset="-122"/>
-                <a:cs typeface="Calibri" pitchFamily="34" charset="-120"/>
-              </a:rPr>
-              <a:t>05 · EN VIVO · ACCESO</a:t>
-            </a:r>
-            <a:endParaRPr lang="en-US" sz="1100" dirty="0"/>
-          </a:p>
-        </p:txBody>
-      </p:sp>
-      <p:sp>
-        <p:nvSpPr>
-          <p:cNvPr id="3" name="Text 1"/>
-          <p:cNvSpPr/>
-          <p:nvPr/>
-        </p:nvSpPr>
-        <p:spPr>
-          <a:xfrm>
-            <a:off x="457200" y="594360"/>
-            <a:ext cx="11247120" cy="502920"/>
-          </a:xfrm>
-          <a:prstGeom prst="rect">
-            <a:avLst/>
-          </a:prstGeom>
-          <a:noFill/>
-          <a:ln/>
-        </p:spPr>
-        <p:txBody>
-          <a:bodyPr wrap="square" rtlCol="0" anchor="ctr"/>
-          <a:lstStyle/>
-          <a:p>
-            <a:pPr indent="0" marL="0">
-              <a:buNone/>
-            </a:pPr>
-            <a:r>
-              <a:rPr lang="en-US" sz="2400" b="1" dirty="0">
-                <a:solidFill>
-                  <a:srgbClr val="FFFFFF"/>
-                </a:solidFill>
-                <a:latin typeface="Calibri Light" pitchFamily="34" charset="0"/>
-                <a:ea typeface="Calibri Light" pitchFamily="34" charset="-122"/>
-                <a:cs typeface="Calibri Light" pitchFamily="34" charset="-120"/>
-              </a:rPr>
-              <a:t>Login simple del afiliado</a:t>
-            </a:r>
-            <a:endParaRPr lang="en-US" sz="2400" dirty="0"/>
-          </a:p>
-        </p:txBody>
-      </p:sp>
-      <p:sp>
-        <p:nvSpPr>
-          <p:cNvPr id="4" name="Text 2"/>
-          <p:cNvSpPr/>
-          <p:nvPr/>
-        </p:nvSpPr>
-        <p:spPr>
-          <a:xfrm>
-            <a:off x="457200" y="1097280"/>
-            <a:ext cx="11247120" cy="365760"/>
-          </a:xfrm>
-          <a:prstGeom prst="rect">
-            <a:avLst/>
-          </a:prstGeom>
-          <a:noFill/>
-          <a:ln/>
-        </p:spPr>
-        <p:txBody>
-          <a:bodyPr wrap="square" rtlCol="0" anchor="ctr"/>
-          <a:lstStyle/>
-          <a:p>
-            <a:pPr indent="0" marL="0">
-              <a:buNone/>
-            </a:pPr>
-            <a:r>
-              <a:rPr lang="en-US" sz="1300" dirty="0">
-                <a:solidFill>
-                  <a:srgbClr val="CBD5E1"/>
-                </a:solidFill>
-                <a:latin typeface="Calibri" pitchFamily="34" charset="0"/>
-                <a:ea typeface="Calibri" pitchFamily="34" charset="-122"/>
-                <a:cs typeface="Calibri" pitchFamily="34" charset="-120"/>
-              </a:rPr>
-              <a:t>DNI o legajo + clave. Magic link si se olvida la contraseña. Instalable en 1 toque.</a:t>
-            </a:r>
-            <a:endParaRPr lang="en-US" sz="1300" dirty="0"/>
-          </a:p>
-        </p:txBody>
-      </p:sp>
-      <p:sp>
-        <p:nvSpPr>
-          <p:cNvPr id="5" name="Shape 3"/>
-          <p:cNvSpPr/>
-          <p:nvPr/>
-        </p:nvSpPr>
-        <p:spPr>
-          <a:xfrm>
-            <a:off x="3994931" y="1737360"/>
-            <a:ext cx="4290529" cy="4572000"/>
+          <p:cNvPr id="2" name="Shape 0"/>
+          <p:cNvSpPr/>
+          <p:nvPr/>
+        </p:nvSpPr>
+        <p:spPr>
+          <a:xfrm>
+            <a:off x="420624" y="487550"/>
+            <a:ext cx="5486400" cy="5846323"/>
           </a:xfrm>
           <a:prstGeom prst="roundRect">
             <a:avLst>
-              <a:gd name="adj" fmla="val 2131"/>
+              <a:gd name="adj" fmla="val 2000"/>
             </a:avLst>
           </a:prstGeom>
           <a:solidFill>
             <a:srgbClr val="000000">
-              <a:alpha val="15000"/>
+              <a:alpha val="30000"/>
             </a:srgbClr>
           </a:solidFill>
           <a:ln/>
@@ -5091,7 +4974,7 @@
       </p:sp>
       <p:pic>
         <p:nvPicPr>
-          <p:cNvPr id="6" name="Image 0" descr="public/imagenes para software/login.PNG">    </p:cNvPr>
+          <p:cNvPr id="3" name="Image 0" descr="public/imagenes para software/login.PNG">    </p:cNvPr>
           <p:cNvPicPr>
             <a:picLocks noChangeAspect="1"/>
           </p:cNvPicPr>
@@ -5105,8 +4988,8 @@
         </p:blipFill>
         <p:spPr>
           <a:xfrm>
-            <a:off x="3949211" y="1691640"/>
-            <a:ext cx="4290529" cy="4572000"/>
+            <a:off x="365760" y="414398"/>
+            <a:ext cx="5486400" cy="5846323"/>
           </a:xfrm>
           <a:prstGeom prst="rect">
             <a:avLst/>
@@ -5115,53 +4998,92 @@
       </p:pic>
       <p:sp>
         <p:nvSpPr>
-          <p:cNvPr id="7" name="Text 4"/>
-          <p:cNvSpPr/>
-          <p:nvPr/>
-        </p:nvSpPr>
-        <p:spPr>
-          <a:xfrm>
-            <a:off x="914400" y="6355080"/>
-            <a:ext cx="10332720" cy="274320"/>
-          </a:xfrm>
-          <a:prstGeom prst="rect">
-            <a:avLst/>
-          </a:prstGeom>
-          <a:noFill/>
-          <a:ln/>
-        </p:spPr>
-        <p:txBody>
-          <a:bodyPr wrap="square" rtlCol="0" anchor="ctr"/>
-          <a:lstStyle/>
-          <a:p>
-            <a:pPr algn="ctr" indent="0" marL="0">
-              <a:buNone/>
-            </a:pPr>
-            <a:r>
-              <a:rPr lang="en-US" sz="1100" i="1" dirty="0">
-                <a:solidFill>
-                  <a:srgbClr val="CBD5E1"/>
-                </a:solidFill>
-                <a:latin typeface="Calibri" pitchFamily="34" charset="0"/>
-                <a:ea typeface="Calibri" pitchFamily="34" charset="-122"/>
-                <a:cs typeface="Calibri" pitchFamily="34" charset="-120"/>
-              </a:rPr>
-              <a:t>Pantalla pública en apops.vercel.app — también visible desde computadora.</a:t>
-            </a:r>
-            <a:endParaRPr lang="en-US" sz="1100" dirty="0"/>
-          </a:p>
-        </p:txBody>
-      </p:sp>
-      <p:sp>
-        <p:nvSpPr>
-          <p:cNvPr id="8" name="Shape 5"/>
-          <p:cNvSpPr/>
-          <p:nvPr/>
-        </p:nvSpPr>
-        <p:spPr>
-          <a:xfrm>
-            <a:off x="0" y="6492240"/>
-            <a:ext cx="12188952" cy="27432"/>
+          <p:cNvPr id="4" name="Text 1"/>
+          <p:cNvSpPr/>
+          <p:nvPr/>
+        </p:nvSpPr>
+        <p:spPr>
+          <a:xfrm>
+            <a:off x="6217920" y="548640"/>
+            <a:ext cx="5669280" cy="320040"/>
+          </a:xfrm>
+          <a:prstGeom prst="rect">
+            <a:avLst/>
+          </a:prstGeom>
+          <a:noFill/>
+          <a:ln/>
+        </p:spPr>
+        <p:txBody>
+          <a:bodyPr wrap="square" rtlCol="0" anchor="ctr"/>
+          <a:lstStyle/>
+          <a:p>
+            <a:pPr indent="0" marL="0">
+              <a:buNone/>
+            </a:pPr>
+            <a:r>
+              <a:rPr lang="en-US" sz="1200" b="1" spc="300" kern="0" dirty="0">
+                <a:solidFill>
+                  <a:srgbClr val="7FCFE5"/>
+                </a:solidFill>
+                <a:latin typeface="Calibri" pitchFamily="34" charset="0"/>
+                <a:ea typeface="Calibri" pitchFamily="34" charset="-122"/>
+                <a:cs typeface="Calibri" pitchFamily="34" charset="-120"/>
+              </a:rPr>
+              <a:t>05 · EN VIVO · ACCESO</a:t>
+            </a:r>
+            <a:endParaRPr lang="en-US" sz="1200" dirty="0"/>
+          </a:p>
+        </p:txBody>
+      </p:sp>
+      <p:sp>
+        <p:nvSpPr>
+          <p:cNvPr id="5" name="Text 2"/>
+          <p:cNvSpPr/>
+          <p:nvPr/>
+        </p:nvSpPr>
+        <p:spPr>
+          <a:xfrm>
+            <a:off x="6217920" y="914400"/>
+            <a:ext cx="5669280" cy="1371600"/>
+          </a:xfrm>
+          <a:prstGeom prst="rect">
+            <a:avLst/>
+          </a:prstGeom>
+          <a:noFill/>
+          <a:ln/>
+        </p:spPr>
+        <p:txBody>
+          <a:bodyPr wrap="square" rtlCol="0" anchor="ctr"/>
+          <a:lstStyle/>
+          <a:p>
+            <a:pPr indent="0" marL="0">
+              <a:buNone/>
+            </a:pPr>
+            <a:r>
+              <a:rPr lang="en-US" sz="3200" b="1" dirty="0">
+                <a:solidFill>
+                  <a:srgbClr val="FFFFFF"/>
+                </a:solidFill>
+                <a:latin typeface="Calibri Light" pitchFamily="34" charset="0"/>
+                <a:ea typeface="Calibri Light" pitchFamily="34" charset="-122"/>
+                <a:cs typeface="Calibri Light" pitchFamily="34" charset="-120"/>
+              </a:rPr>
+              <a:t>Login simple del afiliado</a:t>
+            </a:r>
+            <a:endParaRPr lang="en-US" sz="3200" dirty="0"/>
+          </a:p>
+        </p:txBody>
+      </p:sp>
+      <p:sp>
+        <p:nvSpPr>
+          <p:cNvPr id="6" name="Shape 3"/>
+          <p:cNvSpPr/>
+          <p:nvPr/>
+        </p:nvSpPr>
+        <p:spPr>
+          <a:xfrm>
+            <a:off x="6217920" y="2331720"/>
+            <a:ext cx="731520" cy="45720"/>
           </a:xfrm>
           <a:prstGeom prst="rect">
             <a:avLst/>
@@ -5174,7 +5096,176 @@
       </p:sp>
       <p:sp>
         <p:nvSpPr>
+          <p:cNvPr id="7" name="Text 4"/>
+          <p:cNvSpPr/>
+          <p:nvPr/>
+        </p:nvSpPr>
+        <p:spPr>
+          <a:xfrm>
+            <a:off x="6217920" y="2514600"/>
+            <a:ext cx="5669280" cy="1097280"/>
+          </a:xfrm>
+          <a:prstGeom prst="rect">
+            <a:avLst/>
+          </a:prstGeom>
+          <a:noFill/>
+          <a:ln/>
+        </p:spPr>
+        <p:txBody>
+          <a:bodyPr wrap="square" rtlCol="0" anchor="ctr"/>
+          <a:lstStyle/>
+          <a:p>
+            <a:pPr indent="0" marL="0">
+              <a:spcAft>
+                <a:spcPts val="600"/>
+              </a:spcAft>
+              <a:buNone/>
+            </a:pPr>
+            <a:r>
+              <a:rPr lang="en-US" sz="1500" dirty="0">
+                <a:solidFill>
+                  <a:srgbClr val="CBD5E1"/>
+                </a:solidFill>
+                <a:latin typeface="Calibri" pitchFamily="34" charset="0"/>
+                <a:ea typeface="Calibri" pitchFamily="34" charset="-122"/>
+                <a:cs typeface="Calibri" pitchFamily="34" charset="-120"/>
+              </a:rPr>
+              <a:t>DNI o legajo + clave. Magic link si se olvida la contraseña. Instalable en 1 toque.</a:t>
+            </a:r>
+            <a:endParaRPr lang="en-US" sz="1500" dirty="0"/>
+          </a:p>
+        </p:txBody>
+      </p:sp>
+      <p:sp>
+        <p:nvSpPr>
+          <p:cNvPr id="8" name="Shape 5"/>
+          <p:cNvSpPr/>
+          <p:nvPr/>
+        </p:nvSpPr>
+        <p:spPr>
+          <a:xfrm>
+            <a:off x="6217920" y="4023360"/>
+            <a:ext cx="5669280" cy="1463040"/>
+          </a:xfrm>
+          <a:prstGeom prst="roundRect">
+            <a:avLst>
+              <a:gd name="adj" fmla="val 7500"/>
+            </a:avLst>
+          </a:prstGeom>
+          <a:solidFill>
+            <a:srgbClr val="1F72B8">
+              <a:alpha val="20000"/>
+            </a:srgbClr>
+          </a:solidFill>
+          <a:ln w="12700">
+            <a:solidFill>
+              <a:srgbClr val="1F72B8"/>
+            </a:solidFill>
+            <a:prstDash val="solid"/>
+          </a:ln>
+        </p:spPr>
+      </p:sp>
+      <p:sp>
+        <p:nvSpPr>
           <p:cNvPr id="9" name="Text 6"/>
+          <p:cNvSpPr/>
+          <p:nvPr/>
+        </p:nvSpPr>
+        <p:spPr>
+          <a:xfrm>
+            <a:off x="6446520" y="4160520"/>
+            <a:ext cx="5212080" cy="274320"/>
+          </a:xfrm>
+          <a:prstGeom prst="rect">
+            <a:avLst/>
+          </a:prstGeom>
+          <a:noFill/>
+          <a:ln/>
+        </p:spPr>
+        <p:txBody>
+          <a:bodyPr wrap="square" rtlCol="0" anchor="ctr"/>
+          <a:lstStyle/>
+          <a:p>
+            <a:pPr indent="0" marL="0">
+              <a:buNone/>
+            </a:pPr>
+            <a:r>
+              <a:rPr lang="en-US" sz="1000" b="1" spc="300" kern="0" dirty="0">
+                <a:solidFill>
+                  <a:srgbClr val="7FCFE5"/>
+                </a:solidFill>
+                <a:latin typeface="Calibri" pitchFamily="34" charset="0"/>
+                <a:ea typeface="Calibri" pitchFamily="34" charset="-122"/>
+                <a:cs typeface="Calibri" pitchFamily="34" charset="-120"/>
+              </a:rPr>
+              <a:t>💡 DATO DESTACADO</a:t>
+            </a:r>
+            <a:endParaRPr lang="en-US" sz="1000" dirty="0"/>
+          </a:p>
+        </p:txBody>
+      </p:sp>
+      <p:sp>
+        <p:nvSpPr>
+          <p:cNvPr id="10" name="Text 7"/>
+          <p:cNvSpPr/>
+          <p:nvPr/>
+        </p:nvSpPr>
+        <p:spPr>
+          <a:xfrm>
+            <a:off x="6446520" y="4434840"/>
+            <a:ext cx="5212080" cy="960120"/>
+          </a:xfrm>
+          <a:prstGeom prst="rect">
+            <a:avLst/>
+          </a:prstGeom>
+          <a:noFill/>
+          <a:ln/>
+        </p:spPr>
+        <p:txBody>
+          <a:bodyPr wrap="square" rtlCol="0" anchor="ctr"/>
+          <a:lstStyle/>
+          <a:p>
+            <a:pPr indent="0" marL="0">
+              <a:buNone/>
+            </a:pPr>
+            <a:r>
+              <a:rPr lang="en-US" sz="1300" dirty="0">
+                <a:solidFill>
+                  <a:srgbClr val="FFFFFF"/>
+                </a:solidFill>
+                <a:latin typeface="Calibri" pitchFamily="34" charset="0"/>
+                <a:ea typeface="Calibri" pitchFamily="34" charset="-122"/>
+                <a:cs typeface="Calibri" pitchFamily="34" charset="-120"/>
+              </a:rPr>
+              <a:t>Pantalla pública en apops.vercel.app — también visible desde computadora.</a:t>
+            </a:r>
+            <a:endParaRPr lang="en-US" sz="1300" dirty="0"/>
+          </a:p>
+        </p:txBody>
+      </p:sp>
+      <p:sp>
+        <p:nvSpPr>
+          <p:cNvPr id="11" name="Shape 8"/>
+          <p:cNvSpPr/>
+          <p:nvPr/>
+        </p:nvSpPr>
+        <p:spPr>
+          <a:xfrm>
+            <a:off x="0" y="6492240"/>
+            <a:ext cx="12188952" cy="27432"/>
+          </a:xfrm>
+          <a:prstGeom prst="rect">
+            <a:avLst/>
+          </a:prstGeom>
+          <a:solidFill>
+            <a:srgbClr val="1F72B8"/>
+          </a:solidFill>
+          <a:ln/>
+        </p:spPr>
+      </p:sp>
+      <p:sp>
+        <p:nvSpPr>
+          <p:cNvPr id="12" name="Text 9"/>
           <p:cNvSpPr/>
           <p:nvPr/>
         </p:nvSpPr>
@@ -5213,7 +5304,7 @@
       </p:sp>
       <p:sp>
         <p:nvSpPr>
-          <p:cNvPr id="10" name="Text 7"/>
+          <p:cNvPr id="13" name="Text 10"/>
           <p:cNvSpPr/>
           <p:nvPr/>
         </p:nvSpPr>
@@ -5284,140 +5375,23 @@
       </p:grpSpPr>
       <p:sp>
         <p:nvSpPr>
-          <p:cNvPr id="2" name="Text 0"/>
-          <p:cNvSpPr/>
-          <p:nvPr/>
-        </p:nvSpPr>
-        <p:spPr>
-          <a:xfrm>
-            <a:off x="457200" y="320040"/>
-            <a:ext cx="7315200" cy="274320"/>
-          </a:xfrm>
-          <a:prstGeom prst="rect">
-            <a:avLst/>
-          </a:prstGeom>
-          <a:noFill/>
-          <a:ln/>
-        </p:spPr>
-        <p:txBody>
-          <a:bodyPr wrap="square" rtlCol="0" anchor="ctr"/>
-          <a:lstStyle/>
-          <a:p>
-            <a:pPr indent="0" marL="0">
-              <a:buNone/>
-            </a:pPr>
-            <a:r>
-              <a:rPr lang="en-US" sz="1100" b="1" spc="200" kern="0" dirty="0">
-                <a:solidFill>
-                  <a:srgbClr val="1F72B8"/>
-                </a:solidFill>
-                <a:latin typeface="Calibri" pitchFamily="34" charset="0"/>
-                <a:ea typeface="Calibri" pitchFamily="34" charset="-122"/>
-                <a:cs typeface="Calibri" pitchFamily="34" charset="-120"/>
-              </a:rPr>
-              <a:t>05 · EN VIVO · PANEL ADMIN</a:t>
-            </a:r>
-            <a:endParaRPr lang="en-US" sz="1100" dirty="0"/>
-          </a:p>
-        </p:txBody>
-      </p:sp>
-      <p:sp>
-        <p:nvSpPr>
-          <p:cNvPr id="3" name="Text 1"/>
-          <p:cNvSpPr/>
-          <p:nvPr/>
-        </p:nvSpPr>
-        <p:spPr>
-          <a:xfrm>
-            <a:off x="457200" y="594360"/>
-            <a:ext cx="11247120" cy="502920"/>
-          </a:xfrm>
-          <a:prstGeom prst="rect">
-            <a:avLst/>
-          </a:prstGeom>
-          <a:noFill/>
-          <a:ln/>
-        </p:spPr>
-        <p:txBody>
-          <a:bodyPr wrap="square" rtlCol="0" anchor="ctr"/>
-          <a:lstStyle/>
-          <a:p>
-            <a:pPr indent="0" marL="0">
-              <a:buNone/>
-            </a:pPr>
-            <a:r>
-              <a:rPr lang="en-US" sz="2400" b="1" dirty="0">
-                <a:solidFill>
-                  <a:srgbClr val="FFFFFF"/>
-                </a:solidFill>
-                <a:latin typeface="Calibri Light" pitchFamily="34" charset="0"/>
-                <a:ea typeface="Calibri Light" pitchFamily="34" charset="-122"/>
-                <a:cs typeface="Calibri Light" pitchFamily="34" charset="-120"/>
-              </a:rPr>
-              <a:t>Panel de la Comisión Directiva</a:t>
-            </a:r>
-            <a:endParaRPr lang="en-US" sz="2400" dirty="0"/>
-          </a:p>
-        </p:txBody>
-      </p:sp>
-      <p:sp>
-        <p:nvSpPr>
-          <p:cNvPr id="4" name="Text 2"/>
-          <p:cNvSpPr/>
-          <p:nvPr/>
-        </p:nvSpPr>
-        <p:spPr>
-          <a:xfrm>
-            <a:off x="457200" y="1097280"/>
-            <a:ext cx="11247120" cy="365760"/>
-          </a:xfrm>
-          <a:prstGeom prst="rect">
-            <a:avLst/>
-          </a:prstGeom>
-          <a:noFill/>
-          <a:ln/>
-        </p:spPr>
-        <p:txBody>
-          <a:bodyPr wrap="square" rtlCol="0" anchor="ctr"/>
-          <a:lstStyle/>
-          <a:p>
-            <a:pPr indent="0" marL="0">
-              <a:buNone/>
-            </a:pPr>
-            <a:r>
-              <a:rPr lang="en-US" sz="1300" dirty="0">
-                <a:solidFill>
-                  <a:srgbClr val="CBD5E1"/>
-                </a:solidFill>
-                <a:latin typeface="Calibri" pitchFamily="34" charset="0"/>
-                <a:ea typeface="Calibri" pitchFamily="34" charset="-122"/>
-                <a:cs typeface="Calibri" pitchFamily="34" charset="-120"/>
-              </a:rPr>
-              <a:t>Atajos a todas las funciones administrativas con badges de pendientes.</a:t>
-            </a:r>
-            <a:endParaRPr lang="en-US" sz="1300" dirty="0"/>
-          </a:p>
-        </p:txBody>
-      </p:sp>
-      <p:sp>
-        <p:nvSpPr>
-          <p:cNvPr id="5" name="Shape 3"/>
-          <p:cNvSpPr/>
-          <p:nvPr/>
-        </p:nvSpPr>
-        <p:spPr>
-          <a:xfrm>
-            <a:off x="5082921" y="1737360"/>
-            <a:ext cx="2114550" cy="4572000"/>
+          <p:cNvPr id="2" name="Shape 0"/>
+          <p:cNvSpPr/>
+          <p:nvPr/>
+        </p:nvSpPr>
+        <p:spPr>
+          <a:xfrm>
+            <a:off x="1789367" y="438912"/>
+            <a:ext cx="2748915" cy="5943600"/>
           </a:xfrm>
           <a:prstGeom prst="roundRect">
             <a:avLst>
-              <a:gd name="adj" fmla="val 4324"/>
+              <a:gd name="adj" fmla="val 3992"/>
             </a:avLst>
           </a:prstGeom>
           <a:solidFill>
             <a:srgbClr val="000000">
-              <a:alpha val="15000"/>
+              <a:alpha val="30000"/>
             </a:srgbClr>
           </a:solidFill>
           <a:ln/>
@@ -5425,7 +5399,7 @@
       </p:sp>
       <p:pic>
         <p:nvPicPr>
-          <p:cNvPr id="6" name="Image 0" descr="public/imagenes para software/dasjboard.png">    </p:cNvPr>
+          <p:cNvPr id="3" name="Image 0" descr="public/imagenes para software/dasjboard.png">    </p:cNvPr>
           <p:cNvPicPr>
             <a:picLocks noChangeAspect="1"/>
           </p:cNvPicPr>
@@ -5439,8 +5413,8 @@
         </p:blipFill>
         <p:spPr>
           <a:xfrm>
-            <a:off x="5037201" y="1691640"/>
-            <a:ext cx="2114550" cy="4572000"/>
+            <a:off x="1734503" y="365760"/>
+            <a:ext cx="2748915" cy="5943600"/>
           </a:xfrm>
           <a:prstGeom prst="rect">
             <a:avLst/>
@@ -5449,53 +5423,92 @@
       </p:pic>
       <p:sp>
         <p:nvSpPr>
-          <p:cNvPr id="7" name="Text 4"/>
-          <p:cNvSpPr/>
-          <p:nvPr/>
-        </p:nvSpPr>
-        <p:spPr>
-          <a:xfrm>
-            <a:off x="914400" y="6355080"/>
-            <a:ext cx="10332720" cy="274320"/>
-          </a:xfrm>
-          <a:prstGeom prst="rect">
-            <a:avLst/>
-          </a:prstGeom>
-          <a:noFill/>
-          <a:ln/>
-        </p:spPr>
-        <p:txBody>
-          <a:bodyPr wrap="square" rtlCol="0" anchor="ctr"/>
-          <a:lstStyle/>
-          <a:p>
-            <a:pPr algn="ctr" indent="0" marL="0">
-              <a:buNone/>
-            </a:pPr>
-            <a:r>
-              <a:rPr lang="en-US" sz="1100" i="1" dirty="0">
-                <a:solidFill>
-                  <a:srgbClr val="CBD5E1"/>
-                </a:solidFill>
-                <a:latin typeface="Calibri" pitchFamily="34" charset="0"/>
-                <a:ea typeface="Calibri" pitchFamily="34" charset="-122"/>
-                <a:cs typeface="Calibri" pitchFamily="34" charset="-120"/>
-              </a:rPr>
-              <a:t>Mensajes de delegados sin leer y notificaciones aparecen con badge naranja.</a:t>
-            </a:r>
-            <a:endParaRPr lang="en-US" sz="1100" dirty="0"/>
-          </a:p>
-        </p:txBody>
-      </p:sp>
-      <p:sp>
-        <p:nvSpPr>
-          <p:cNvPr id="8" name="Shape 5"/>
-          <p:cNvSpPr/>
-          <p:nvPr/>
-        </p:nvSpPr>
-        <p:spPr>
-          <a:xfrm>
-            <a:off x="0" y="6492240"/>
-            <a:ext cx="12188952" cy="27432"/>
+          <p:cNvPr id="4" name="Text 1"/>
+          <p:cNvSpPr/>
+          <p:nvPr/>
+        </p:nvSpPr>
+        <p:spPr>
+          <a:xfrm>
+            <a:off x="6217920" y="548640"/>
+            <a:ext cx="5669280" cy="320040"/>
+          </a:xfrm>
+          <a:prstGeom prst="rect">
+            <a:avLst/>
+          </a:prstGeom>
+          <a:noFill/>
+          <a:ln/>
+        </p:spPr>
+        <p:txBody>
+          <a:bodyPr wrap="square" rtlCol="0" anchor="ctr"/>
+          <a:lstStyle/>
+          <a:p>
+            <a:pPr indent="0" marL="0">
+              <a:buNone/>
+            </a:pPr>
+            <a:r>
+              <a:rPr lang="en-US" sz="1200" b="1" spc="300" kern="0" dirty="0">
+                <a:solidFill>
+                  <a:srgbClr val="7FCFE5"/>
+                </a:solidFill>
+                <a:latin typeface="Calibri" pitchFamily="34" charset="0"/>
+                <a:ea typeface="Calibri" pitchFamily="34" charset="-122"/>
+                <a:cs typeface="Calibri" pitchFamily="34" charset="-120"/>
+              </a:rPr>
+              <a:t>05 · EN VIVO · PANEL ADMIN</a:t>
+            </a:r>
+            <a:endParaRPr lang="en-US" sz="1200" dirty="0"/>
+          </a:p>
+        </p:txBody>
+      </p:sp>
+      <p:sp>
+        <p:nvSpPr>
+          <p:cNvPr id="5" name="Text 2"/>
+          <p:cNvSpPr/>
+          <p:nvPr/>
+        </p:nvSpPr>
+        <p:spPr>
+          <a:xfrm>
+            <a:off x="6217920" y="914400"/>
+            <a:ext cx="5669280" cy="1371600"/>
+          </a:xfrm>
+          <a:prstGeom prst="rect">
+            <a:avLst/>
+          </a:prstGeom>
+          <a:noFill/>
+          <a:ln/>
+        </p:spPr>
+        <p:txBody>
+          <a:bodyPr wrap="square" rtlCol="0" anchor="ctr"/>
+          <a:lstStyle/>
+          <a:p>
+            <a:pPr indent="0" marL="0">
+              <a:buNone/>
+            </a:pPr>
+            <a:r>
+              <a:rPr lang="en-US" sz="3200" b="1" dirty="0">
+                <a:solidFill>
+                  <a:srgbClr val="FFFFFF"/>
+                </a:solidFill>
+                <a:latin typeface="Calibri Light" pitchFamily="34" charset="0"/>
+                <a:ea typeface="Calibri Light" pitchFamily="34" charset="-122"/>
+                <a:cs typeface="Calibri Light" pitchFamily="34" charset="-120"/>
+              </a:rPr>
+              <a:t>Panel de la Comisión Directiva</a:t>
+            </a:r>
+            <a:endParaRPr lang="en-US" sz="3200" dirty="0"/>
+          </a:p>
+        </p:txBody>
+      </p:sp>
+      <p:sp>
+        <p:nvSpPr>
+          <p:cNvPr id="6" name="Shape 3"/>
+          <p:cNvSpPr/>
+          <p:nvPr/>
+        </p:nvSpPr>
+        <p:spPr>
+          <a:xfrm>
+            <a:off x="6217920" y="2331720"/>
+            <a:ext cx="731520" cy="45720"/>
           </a:xfrm>
           <a:prstGeom prst="rect">
             <a:avLst/>
@@ -5508,7 +5521,176 @@
       </p:sp>
       <p:sp>
         <p:nvSpPr>
+          <p:cNvPr id="7" name="Text 4"/>
+          <p:cNvSpPr/>
+          <p:nvPr/>
+        </p:nvSpPr>
+        <p:spPr>
+          <a:xfrm>
+            <a:off x="6217920" y="2514600"/>
+            <a:ext cx="5669280" cy="1097280"/>
+          </a:xfrm>
+          <a:prstGeom prst="rect">
+            <a:avLst/>
+          </a:prstGeom>
+          <a:noFill/>
+          <a:ln/>
+        </p:spPr>
+        <p:txBody>
+          <a:bodyPr wrap="square" rtlCol="0" anchor="ctr"/>
+          <a:lstStyle/>
+          <a:p>
+            <a:pPr indent="0" marL="0">
+              <a:spcAft>
+                <a:spcPts val="600"/>
+              </a:spcAft>
+              <a:buNone/>
+            </a:pPr>
+            <a:r>
+              <a:rPr lang="en-US" sz="1500" dirty="0">
+                <a:solidFill>
+                  <a:srgbClr val="CBD5E1"/>
+                </a:solidFill>
+                <a:latin typeface="Calibri" pitchFamily="34" charset="0"/>
+                <a:ea typeface="Calibri" pitchFamily="34" charset="-122"/>
+                <a:cs typeface="Calibri" pitchFamily="34" charset="-120"/>
+              </a:rPr>
+              <a:t>Atajos a todas las funciones administrativas con badges de pendientes.</a:t>
+            </a:r>
+            <a:endParaRPr lang="en-US" sz="1500" dirty="0"/>
+          </a:p>
+        </p:txBody>
+      </p:sp>
+      <p:sp>
+        <p:nvSpPr>
+          <p:cNvPr id="8" name="Shape 5"/>
+          <p:cNvSpPr/>
+          <p:nvPr/>
+        </p:nvSpPr>
+        <p:spPr>
+          <a:xfrm>
+            <a:off x="6217920" y="4023360"/>
+            <a:ext cx="5669280" cy="1463040"/>
+          </a:xfrm>
+          <a:prstGeom prst="roundRect">
+            <a:avLst>
+              <a:gd name="adj" fmla="val 7500"/>
+            </a:avLst>
+          </a:prstGeom>
+          <a:solidFill>
+            <a:srgbClr val="1F72B8">
+              <a:alpha val="20000"/>
+            </a:srgbClr>
+          </a:solidFill>
+          <a:ln w="12700">
+            <a:solidFill>
+              <a:srgbClr val="1F72B8"/>
+            </a:solidFill>
+            <a:prstDash val="solid"/>
+          </a:ln>
+        </p:spPr>
+      </p:sp>
+      <p:sp>
+        <p:nvSpPr>
           <p:cNvPr id="9" name="Text 6"/>
+          <p:cNvSpPr/>
+          <p:nvPr/>
+        </p:nvSpPr>
+        <p:spPr>
+          <a:xfrm>
+            <a:off x="6446520" y="4160520"/>
+            <a:ext cx="5212080" cy="274320"/>
+          </a:xfrm>
+          <a:prstGeom prst="rect">
+            <a:avLst/>
+          </a:prstGeom>
+          <a:noFill/>
+          <a:ln/>
+        </p:spPr>
+        <p:txBody>
+          <a:bodyPr wrap="square" rtlCol="0" anchor="ctr"/>
+          <a:lstStyle/>
+          <a:p>
+            <a:pPr indent="0" marL="0">
+              <a:buNone/>
+            </a:pPr>
+            <a:r>
+              <a:rPr lang="en-US" sz="1000" b="1" spc="300" kern="0" dirty="0">
+                <a:solidFill>
+                  <a:srgbClr val="7FCFE5"/>
+                </a:solidFill>
+                <a:latin typeface="Calibri" pitchFamily="34" charset="0"/>
+                <a:ea typeface="Calibri" pitchFamily="34" charset="-122"/>
+                <a:cs typeface="Calibri" pitchFamily="34" charset="-120"/>
+              </a:rPr>
+              <a:t>💡 DATO DESTACADO</a:t>
+            </a:r>
+            <a:endParaRPr lang="en-US" sz="1000" dirty="0"/>
+          </a:p>
+        </p:txBody>
+      </p:sp>
+      <p:sp>
+        <p:nvSpPr>
+          <p:cNvPr id="10" name="Text 7"/>
+          <p:cNvSpPr/>
+          <p:nvPr/>
+        </p:nvSpPr>
+        <p:spPr>
+          <a:xfrm>
+            <a:off x="6446520" y="4434840"/>
+            <a:ext cx="5212080" cy="960120"/>
+          </a:xfrm>
+          <a:prstGeom prst="rect">
+            <a:avLst/>
+          </a:prstGeom>
+          <a:noFill/>
+          <a:ln/>
+        </p:spPr>
+        <p:txBody>
+          <a:bodyPr wrap="square" rtlCol="0" anchor="ctr"/>
+          <a:lstStyle/>
+          <a:p>
+            <a:pPr indent="0" marL="0">
+              <a:buNone/>
+            </a:pPr>
+            <a:r>
+              <a:rPr lang="en-US" sz="1300" dirty="0">
+                <a:solidFill>
+                  <a:srgbClr val="FFFFFF"/>
+                </a:solidFill>
+                <a:latin typeface="Calibri" pitchFamily="34" charset="0"/>
+                <a:ea typeface="Calibri" pitchFamily="34" charset="-122"/>
+                <a:cs typeface="Calibri" pitchFamily="34" charset="-120"/>
+              </a:rPr>
+              <a:t>Mensajes de delegados sin leer y notificaciones aparecen con badge naranja.</a:t>
+            </a:r>
+            <a:endParaRPr lang="en-US" sz="1300" dirty="0"/>
+          </a:p>
+        </p:txBody>
+      </p:sp>
+      <p:sp>
+        <p:nvSpPr>
+          <p:cNvPr id="11" name="Shape 8"/>
+          <p:cNvSpPr/>
+          <p:nvPr/>
+        </p:nvSpPr>
+        <p:spPr>
+          <a:xfrm>
+            <a:off x="0" y="6492240"/>
+            <a:ext cx="12188952" cy="27432"/>
+          </a:xfrm>
+          <a:prstGeom prst="rect">
+            <a:avLst/>
+          </a:prstGeom>
+          <a:solidFill>
+            <a:srgbClr val="1F72B8"/>
+          </a:solidFill>
+          <a:ln/>
+        </p:spPr>
+      </p:sp>
+      <p:sp>
+        <p:nvSpPr>
+          <p:cNvPr id="12" name="Text 9"/>
           <p:cNvSpPr/>
           <p:nvPr/>
         </p:nvSpPr>
@@ -5547,7 +5729,7 @@
       </p:sp>
       <p:sp>
         <p:nvSpPr>
-          <p:cNvPr id="10" name="Text 7"/>
+          <p:cNvPr id="13" name="Text 10"/>
           <p:cNvSpPr/>
           <p:nvPr/>
         </p:nvSpPr>
@@ -5618,140 +5800,23 @@
       </p:grpSpPr>
       <p:sp>
         <p:nvSpPr>
-          <p:cNvPr id="2" name="Text 0"/>
-          <p:cNvSpPr/>
-          <p:nvPr/>
-        </p:nvSpPr>
-        <p:spPr>
-          <a:xfrm>
-            <a:off x="457200" y="320040"/>
-            <a:ext cx="7315200" cy="274320"/>
-          </a:xfrm>
-          <a:prstGeom prst="rect">
-            <a:avLst/>
-          </a:prstGeom>
-          <a:noFill/>
-          <a:ln/>
-        </p:spPr>
-        <p:txBody>
-          <a:bodyPr wrap="square" rtlCol="0" anchor="ctr"/>
-          <a:lstStyle/>
-          <a:p>
-            <a:pPr indent="0" marL="0">
-              <a:buNone/>
-            </a:pPr>
-            <a:r>
-              <a:rPr lang="en-US" sz="1100" b="1" spc="200" kern="0" dirty="0">
-                <a:solidFill>
-                  <a:srgbClr val="1F72B8"/>
-                </a:solidFill>
-                <a:latin typeface="Calibri" pitchFamily="34" charset="0"/>
-                <a:ea typeface="Calibri" pitchFamily="34" charset="-122"/>
-                <a:cs typeface="Calibri" pitchFamily="34" charset="-120"/>
-              </a:rPr>
-              <a:t>05 · EN VIVO · DASHBOARD</a:t>
-            </a:r>
-            <a:endParaRPr lang="en-US" sz="1100" dirty="0"/>
-          </a:p>
-        </p:txBody>
-      </p:sp>
-      <p:sp>
-        <p:nvSpPr>
-          <p:cNvPr id="3" name="Text 1"/>
-          <p:cNvSpPr/>
-          <p:nvPr/>
-        </p:nvSpPr>
-        <p:spPr>
-          <a:xfrm>
-            <a:off x="457200" y="594360"/>
-            <a:ext cx="11247120" cy="502920"/>
-          </a:xfrm>
-          <a:prstGeom prst="rect">
-            <a:avLst/>
-          </a:prstGeom>
-          <a:noFill/>
-          <a:ln/>
-        </p:spPr>
-        <p:txBody>
-          <a:bodyPr wrap="square" rtlCol="0" anchor="ctr"/>
-          <a:lstStyle/>
-          <a:p>
-            <a:pPr indent="0" marL="0">
-              <a:buNone/>
-            </a:pPr>
-            <a:r>
-              <a:rPr lang="en-US" sz="2400" b="1" dirty="0">
-                <a:solidFill>
-                  <a:srgbClr val="FFFFFF"/>
-                </a:solidFill>
-                <a:latin typeface="Calibri Light" pitchFamily="34" charset="0"/>
-                <a:ea typeface="Calibri Light" pitchFamily="34" charset="-122"/>
-                <a:cs typeface="Calibri Light" pitchFamily="34" charset="-120"/>
-              </a:rPr>
-              <a:t>Dashboard CD — vista Resumen</a:t>
-            </a:r>
-            <a:endParaRPr lang="en-US" sz="2400" dirty="0"/>
-          </a:p>
-        </p:txBody>
-      </p:sp>
-      <p:sp>
-        <p:nvSpPr>
-          <p:cNvPr id="4" name="Text 2"/>
-          <p:cNvSpPr/>
-          <p:nvPr/>
-        </p:nvSpPr>
-        <p:spPr>
-          <a:xfrm>
-            <a:off x="457200" y="1097280"/>
-            <a:ext cx="11247120" cy="365760"/>
-          </a:xfrm>
-          <a:prstGeom prst="rect">
-            <a:avLst/>
-          </a:prstGeom>
-          <a:noFill/>
-          <a:ln/>
-        </p:spPr>
-        <p:txBody>
-          <a:bodyPr wrap="square" rtlCol="0" anchor="ctr"/>
-          <a:lstStyle/>
-          <a:p>
-            <a:pPr indent="0" marL="0">
-              <a:buNone/>
-            </a:pPr>
-            <a:r>
-              <a:rPr lang="en-US" sz="1300" dirty="0">
-                <a:solidFill>
-                  <a:srgbClr val="CBD5E1"/>
-                </a:solidFill>
-                <a:latin typeface="Calibri" pitchFamily="34" charset="0"/>
-                <a:ea typeface="Calibri" pitchFamily="34" charset="-122"/>
-                <a:cs typeface="Calibri" pitchFamily="34" charset="-120"/>
-              </a:rPr>
-              <a:t>4 KPI cards con delta vs mes anterior. Selector de período arriba.</a:t>
-            </a:r>
-            <a:endParaRPr lang="en-US" sz="1300" dirty="0"/>
-          </a:p>
-        </p:txBody>
-      </p:sp>
-      <p:sp>
-        <p:nvSpPr>
-          <p:cNvPr id="5" name="Shape 3"/>
-          <p:cNvSpPr/>
-          <p:nvPr/>
-        </p:nvSpPr>
-        <p:spPr>
-          <a:xfrm>
-            <a:off x="4406271" y="1737360"/>
-            <a:ext cx="3467850" cy="4572000"/>
+          <p:cNvPr id="2" name="Shape 0"/>
+          <p:cNvSpPr/>
+          <p:nvPr/>
+        </p:nvSpPr>
+        <p:spPr>
+          <a:xfrm>
+            <a:off x="909722" y="438912"/>
+            <a:ext cx="4508205" cy="5943600"/>
           </a:xfrm>
           <a:prstGeom prst="roundRect">
             <a:avLst>
-              <a:gd name="adj" fmla="val 2637"/>
+              <a:gd name="adj" fmla="val 2434"/>
             </a:avLst>
           </a:prstGeom>
           <a:solidFill>
             <a:srgbClr val="000000">
-              <a:alpha val="15000"/>
+              <a:alpha val="30000"/>
             </a:srgbClr>
           </a:solidFill>
           <a:ln/>
@@ -5759,7 +5824,7 @@
       </p:sp>
       <p:pic>
         <p:nvPicPr>
-          <p:cNvPr id="6" name="Image 0" descr="public/imagenes para software/dashboard-resumen.png">    </p:cNvPr>
+          <p:cNvPr id="3" name="Image 0" descr="public/imagenes para software/dashboard-resumen.png">    </p:cNvPr>
           <p:cNvPicPr>
             <a:picLocks noChangeAspect="1"/>
           </p:cNvPicPr>
@@ -5773,8 +5838,8 @@
         </p:blipFill>
         <p:spPr>
           <a:xfrm>
-            <a:off x="4360551" y="1691640"/>
-            <a:ext cx="3467850" cy="4572000"/>
+            <a:off x="854858" y="365760"/>
+            <a:ext cx="4508205" cy="5943600"/>
           </a:xfrm>
           <a:prstGeom prst="rect">
             <a:avLst/>
@@ -5783,53 +5848,92 @@
       </p:pic>
       <p:sp>
         <p:nvSpPr>
-          <p:cNvPr id="7" name="Text 4"/>
-          <p:cNvSpPr/>
-          <p:nvPr/>
-        </p:nvSpPr>
-        <p:spPr>
-          <a:xfrm>
-            <a:off x="914400" y="6355080"/>
-            <a:ext cx="10332720" cy="274320"/>
-          </a:xfrm>
-          <a:prstGeom prst="rect">
-            <a:avLst/>
-          </a:prstGeom>
-          <a:noFill/>
-          <a:ln/>
-        </p:spPr>
-        <p:txBody>
-          <a:bodyPr wrap="square" rtlCol="0" anchor="ctr"/>
-          <a:lstStyle/>
-          <a:p>
-            <a:pPr algn="ctr" indent="0" marL="0">
-              <a:buNone/>
-            </a:pPr>
-            <a:r>
-              <a:rPr lang="en-US" sz="1100" i="1" dirty="0">
-                <a:solidFill>
-                  <a:srgbClr val="CBD5E1"/>
-                </a:solidFill>
-                <a:latin typeface="Calibri" pitchFamily="34" charset="0"/>
-                <a:ea typeface="Calibri" pitchFamily="34" charset="-122"/>
-                <a:cs typeface="Calibri" pitchFamily="34" charset="-120"/>
-              </a:rPr>
-              <a:t>15.558 cotizantes · 4.631 APOPS · 529 delegados · % adopción vs objetivo 70%.</a:t>
-            </a:r>
-            <a:endParaRPr lang="en-US" sz="1100" dirty="0"/>
-          </a:p>
-        </p:txBody>
-      </p:sp>
-      <p:sp>
-        <p:nvSpPr>
-          <p:cNvPr id="8" name="Shape 5"/>
-          <p:cNvSpPr/>
-          <p:nvPr/>
-        </p:nvSpPr>
-        <p:spPr>
-          <a:xfrm>
-            <a:off x="0" y="6492240"/>
-            <a:ext cx="12188952" cy="27432"/>
+          <p:cNvPr id="4" name="Text 1"/>
+          <p:cNvSpPr/>
+          <p:nvPr/>
+        </p:nvSpPr>
+        <p:spPr>
+          <a:xfrm>
+            <a:off x="6217920" y="548640"/>
+            <a:ext cx="5669280" cy="320040"/>
+          </a:xfrm>
+          <a:prstGeom prst="rect">
+            <a:avLst/>
+          </a:prstGeom>
+          <a:noFill/>
+          <a:ln/>
+        </p:spPr>
+        <p:txBody>
+          <a:bodyPr wrap="square" rtlCol="0" anchor="ctr"/>
+          <a:lstStyle/>
+          <a:p>
+            <a:pPr indent="0" marL="0">
+              <a:buNone/>
+            </a:pPr>
+            <a:r>
+              <a:rPr lang="en-US" sz="1200" b="1" spc="300" kern="0" dirty="0">
+                <a:solidFill>
+                  <a:srgbClr val="7FCFE5"/>
+                </a:solidFill>
+                <a:latin typeface="Calibri" pitchFamily="34" charset="0"/>
+                <a:ea typeface="Calibri" pitchFamily="34" charset="-122"/>
+                <a:cs typeface="Calibri" pitchFamily="34" charset="-120"/>
+              </a:rPr>
+              <a:t>05 · EN VIVO · DASHBOARD</a:t>
+            </a:r>
+            <a:endParaRPr lang="en-US" sz="1200" dirty="0"/>
+          </a:p>
+        </p:txBody>
+      </p:sp>
+      <p:sp>
+        <p:nvSpPr>
+          <p:cNvPr id="5" name="Text 2"/>
+          <p:cNvSpPr/>
+          <p:nvPr/>
+        </p:nvSpPr>
+        <p:spPr>
+          <a:xfrm>
+            <a:off x="6217920" y="914400"/>
+            <a:ext cx="5669280" cy="1371600"/>
+          </a:xfrm>
+          <a:prstGeom prst="rect">
+            <a:avLst/>
+          </a:prstGeom>
+          <a:noFill/>
+          <a:ln/>
+        </p:spPr>
+        <p:txBody>
+          <a:bodyPr wrap="square" rtlCol="0" anchor="ctr"/>
+          <a:lstStyle/>
+          <a:p>
+            <a:pPr indent="0" marL="0">
+              <a:buNone/>
+            </a:pPr>
+            <a:r>
+              <a:rPr lang="en-US" sz="3200" b="1" dirty="0">
+                <a:solidFill>
+                  <a:srgbClr val="FFFFFF"/>
+                </a:solidFill>
+                <a:latin typeface="Calibri Light" pitchFamily="34" charset="0"/>
+                <a:ea typeface="Calibri Light" pitchFamily="34" charset="-122"/>
+                <a:cs typeface="Calibri Light" pitchFamily="34" charset="-120"/>
+              </a:rPr>
+              <a:t>Dashboard CD — vista Resumen</a:t>
+            </a:r>
+            <a:endParaRPr lang="en-US" sz="3200" dirty="0"/>
+          </a:p>
+        </p:txBody>
+      </p:sp>
+      <p:sp>
+        <p:nvSpPr>
+          <p:cNvPr id="6" name="Shape 3"/>
+          <p:cNvSpPr/>
+          <p:nvPr/>
+        </p:nvSpPr>
+        <p:spPr>
+          <a:xfrm>
+            <a:off x="6217920" y="2331720"/>
+            <a:ext cx="731520" cy="45720"/>
           </a:xfrm>
           <a:prstGeom prst="rect">
             <a:avLst/>
@@ -5842,7 +5946,176 @@
       </p:sp>
       <p:sp>
         <p:nvSpPr>
+          <p:cNvPr id="7" name="Text 4"/>
+          <p:cNvSpPr/>
+          <p:nvPr/>
+        </p:nvSpPr>
+        <p:spPr>
+          <a:xfrm>
+            <a:off x="6217920" y="2514600"/>
+            <a:ext cx="5669280" cy="1097280"/>
+          </a:xfrm>
+          <a:prstGeom prst="rect">
+            <a:avLst/>
+          </a:prstGeom>
+          <a:noFill/>
+          <a:ln/>
+        </p:spPr>
+        <p:txBody>
+          <a:bodyPr wrap="square" rtlCol="0" anchor="ctr"/>
+          <a:lstStyle/>
+          <a:p>
+            <a:pPr indent="0" marL="0">
+              <a:spcAft>
+                <a:spcPts val="600"/>
+              </a:spcAft>
+              <a:buNone/>
+            </a:pPr>
+            <a:r>
+              <a:rPr lang="en-US" sz="1500" dirty="0">
+                <a:solidFill>
+                  <a:srgbClr val="CBD5E1"/>
+                </a:solidFill>
+                <a:latin typeface="Calibri" pitchFamily="34" charset="0"/>
+                <a:ea typeface="Calibri" pitchFamily="34" charset="-122"/>
+                <a:cs typeface="Calibri" pitchFamily="34" charset="-120"/>
+              </a:rPr>
+              <a:t>4 KPI cards con delta vs mes anterior. Selector de período arriba.</a:t>
+            </a:r>
+            <a:endParaRPr lang="en-US" sz="1500" dirty="0"/>
+          </a:p>
+        </p:txBody>
+      </p:sp>
+      <p:sp>
+        <p:nvSpPr>
+          <p:cNvPr id="8" name="Shape 5"/>
+          <p:cNvSpPr/>
+          <p:nvPr/>
+        </p:nvSpPr>
+        <p:spPr>
+          <a:xfrm>
+            <a:off x="6217920" y="4023360"/>
+            <a:ext cx="5669280" cy="1463040"/>
+          </a:xfrm>
+          <a:prstGeom prst="roundRect">
+            <a:avLst>
+              <a:gd name="adj" fmla="val 7500"/>
+            </a:avLst>
+          </a:prstGeom>
+          <a:solidFill>
+            <a:srgbClr val="1F72B8">
+              <a:alpha val="20000"/>
+            </a:srgbClr>
+          </a:solidFill>
+          <a:ln w="12700">
+            <a:solidFill>
+              <a:srgbClr val="1F72B8"/>
+            </a:solidFill>
+            <a:prstDash val="solid"/>
+          </a:ln>
+        </p:spPr>
+      </p:sp>
+      <p:sp>
+        <p:nvSpPr>
           <p:cNvPr id="9" name="Text 6"/>
+          <p:cNvSpPr/>
+          <p:nvPr/>
+        </p:nvSpPr>
+        <p:spPr>
+          <a:xfrm>
+            <a:off x="6446520" y="4160520"/>
+            <a:ext cx="5212080" cy="274320"/>
+          </a:xfrm>
+          <a:prstGeom prst="rect">
+            <a:avLst/>
+          </a:prstGeom>
+          <a:noFill/>
+          <a:ln/>
+        </p:spPr>
+        <p:txBody>
+          <a:bodyPr wrap="square" rtlCol="0" anchor="ctr"/>
+          <a:lstStyle/>
+          <a:p>
+            <a:pPr indent="0" marL="0">
+              <a:buNone/>
+            </a:pPr>
+            <a:r>
+              <a:rPr lang="en-US" sz="1000" b="1" spc="300" kern="0" dirty="0">
+                <a:solidFill>
+                  <a:srgbClr val="7FCFE5"/>
+                </a:solidFill>
+                <a:latin typeface="Calibri" pitchFamily="34" charset="0"/>
+                <a:ea typeface="Calibri" pitchFamily="34" charset="-122"/>
+                <a:cs typeface="Calibri" pitchFamily="34" charset="-120"/>
+              </a:rPr>
+              <a:t>💡 DATO DESTACADO</a:t>
+            </a:r>
+            <a:endParaRPr lang="en-US" sz="1000" dirty="0"/>
+          </a:p>
+        </p:txBody>
+      </p:sp>
+      <p:sp>
+        <p:nvSpPr>
+          <p:cNvPr id="10" name="Text 7"/>
+          <p:cNvSpPr/>
+          <p:nvPr/>
+        </p:nvSpPr>
+        <p:spPr>
+          <a:xfrm>
+            <a:off x="6446520" y="4434840"/>
+            <a:ext cx="5212080" cy="960120"/>
+          </a:xfrm>
+          <a:prstGeom prst="rect">
+            <a:avLst/>
+          </a:prstGeom>
+          <a:noFill/>
+          <a:ln/>
+        </p:spPr>
+        <p:txBody>
+          <a:bodyPr wrap="square" rtlCol="0" anchor="ctr"/>
+          <a:lstStyle/>
+          <a:p>
+            <a:pPr indent="0" marL="0">
+              <a:buNone/>
+            </a:pPr>
+            <a:r>
+              <a:rPr lang="en-US" sz="1300" dirty="0">
+                <a:solidFill>
+                  <a:srgbClr val="FFFFFF"/>
+                </a:solidFill>
+                <a:latin typeface="Calibri" pitchFamily="34" charset="0"/>
+                <a:ea typeface="Calibri" pitchFamily="34" charset="-122"/>
+                <a:cs typeface="Calibri" pitchFamily="34" charset="-120"/>
+              </a:rPr>
+              <a:t>15.558 cotizantes · 4.631 APOPS · 529 delegados · % adopción vs objetivo 70%.</a:t>
+            </a:r>
+            <a:endParaRPr lang="en-US" sz="1300" dirty="0"/>
+          </a:p>
+        </p:txBody>
+      </p:sp>
+      <p:sp>
+        <p:nvSpPr>
+          <p:cNvPr id="11" name="Shape 8"/>
+          <p:cNvSpPr/>
+          <p:nvPr/>
+        </p:nvSpPr>
+        <p:spPr>
+          <a:xfrm>
+            <a:off x="0" y="6492240"/>
+            <a:ext cx="12188952" cy="27432"/>
+          </a:xfrm>
+          <a:prstGeom prst="rect">
+            <a:avLst/>
+          </a:prstGeom>
+          <a:solidFill>
+            <a:srgbClr val="1F72B8"/>
+          </a:solidFill>
+          <a:ln/>
+        </p:spPr>
+      </p:sp>
+      <p:sp>
+        <p:nvSpPr>
+          <p:cNvPr id="12" name="Text 9"/>
           <p:cNvSpPr/>
           <p:nvPr/>
         </p:nvSpPr>
@@ -5881,7 +6154,7 @@
       </p:sp>
       <p:sp>
         <p:nvSpPr>
-          <p:cNvPr id="10" name="Text 7"/>
+          <p:cNvPr id="13" name="Text 10"/>
           <p:cNvSpPr/>
           <p:nvPr/>
         </p:nvSpPr>
@@ -5952,140 +6225,23 @@
       </p:grpSpPr>
       <p:sp>
         <p:nvSpPr>
-          <p:cNvPr id="2" name="Text 0"/>
-          <p:cNvSpPr/>
-          <p:nvPr/>
-        </p:nvSpPr>
-        <p:spPr>
-          <a:xfrm>
-            <a:off x="457200" y="320040"/>
-            <a:ext cx="7315200" cy="274320"/>
-          </a:xfrm>
-          <a:prstGeom prst="rect">
-            <a:avLst/>
-          </a:prstGeom>
-          <a:noFill/>
-          <a:ln/>
-        </p:spPr>
-        <p:txBody>
-          <a:bodyPr wrap="square" rtlCol="0" anchor="ctr"/>
-          <a:lstStyle/>
-          <a:p>
-            <a:pPr indent="0" marL="0">
-              <a:buNone/>
-            </a:pPr>
-            <a:r>
-              <a:rPr lang="en-US" sz="1100" b="1" spc="200" kern="0" dirty="0">
-                <a:solidFill>
-                  <a:srgbClr val="1F72B8"/>
-                </a:solidFill>
-                <a:latin typeface="Calibri" pitchFamily="34" charset="0"/>
-                <a:ea typeface="Calibri" pitchFamily="34" charset="-122"/>
-                <a:cs typeface="Calibri" pitchFamily="34" charset="-120"/>
-              </a:rPr>
-              <a:t>05 · EN VIVO · PADRÓN</a:t>
-            </a:r>
-            <a:endParaRPr lang="en-US" sz="1100" dirty="0"/>
-          </a:p>
-        </p:txBody>
-      </p:sp>
-      <p:sp>
-        <p:nvSpPr>
-          <p:cNvPr id="3" name="Text 1"/>
-          <p:cNvSpPr/>
-          <p:nvPr/>
-        </p:nvSpPr>
-        <p:spPr>
-          <a:xfrm>
-            <a:off x="457200" y="594360"/>
-            <a:ext cx="11247120" cy="502920"/>
-          </a:xfrm>
-          <a:prstGeom prst="rect">
-            <a:avLst/>
-          </a:prstGeom>
-          <a:noFill/>
-          <a:ln/>
-        </p:spPr>
-        <p:txBody>
-          <a:bodyPr wrap="square" rtlCol="0" anchor="ctr"/>
-          <a:lstStyle/>
-          <a:p>
-            <a:pPr indent="0" marL="0">
-              <a:buNone/>
-            </a:pPr>
-            <a:r>
-              <a:rPr lang="en-US" sz="2400" b="1" dirty="0">
-                <a:solidFill>
-                  <a:srgbClr val="FFFFFF"/>
-                </a:solidFill>
-                <a:latin typeface="Calibri Light" pitchFamily="34" charset="0"/>
-                <a:ea typeface="Calibri Light" pitchFamily="34" charset="-122"/>
-                <a:cs typeface="Calibri Light" pitchFamily="34" charset="-120"/>
-              </a:rPr>
-              <a:t>Distribución geográfica</a:t>
-            </a:r>
-            <a:endParaRPr lang="en-US" sz="2400" dirty="0"/>
-          </a:p>
-        </p:txBody>
-      </p:sp>
-      <p:sp>
-        <p:nvSpPr>
-          <p:cNvPr id="4" name="Text 2"/>
-          <p:cNvSpPr/>
-          <p:nvPr/>
-        </p:nvSpPr>
-        <p:spPr>
-          <a:xfrm>
-            <a:off x="457200" y="1097280"/>
-            <a:ext cx="11247120" cy="365760"/>
-          </a:xfrm>
-          <a:prstGeom prst="rect">
-            <a:avLst/>
-          </a:prstGeom>
-          <a:noFill/>
-          <a:ln/>
-        </p:spPr>
-        <p:txBody>
-          <a:bodyPr wrap="square" rtlCol="0" anchor="ctr"/>
-          <a:lstStyle/>
-          <a:p>
-            <a:pPr indent="0" marL="0">
-              <a:buNone/>
-            </a:pPr>
-            <a:r>
-              <a:rPr lang="en-US" sz="1300" dirty="0">
-                <a:solidFill>
-                  <a:srgbClr val="CBD5E1"/>
-                </a:solidFill>
-                <a:latin typeface="Calibri" pitchFamily="34" charset="0"/>
-                <a:ea typeface="Calibri" pitchFamily="34" charset="-122"/>
-                <a:cs typeface="Calibri" pitchFamily="34" charset="-120"/>
-              </a:rPr>
-              <a:t>Mapa SVG de Argentina con choropleth + números por provincia + CABA destacada.</a:t>
-            </a:r>
-            <a:endParaRPr lang="en-US" sz="1300" dirty="0"/>
-          </a:p>
-        </p:txBody>
-      </p:sp>
-      <p:sp>
-        <p:nvSpPr>
-          <p:cNvPr id="5" name="Shape 3"/>
-          <p:cNvSpPr/>
-          <p:nvPr/>
-        </p:nvSpPr>
-        <p:spPr>
-          <a:xfrm>
-            <a:off x="2686438" y="1737360"/>
-            <a:ext cx="6907516" cy="4572000"/>
+          <p:cNvPr id="2" name="Shape 0"/>
+          <p:cNvSpPr/>
+          <p:nvPr/>
+        </p:nvSpPr>
+        <p:spPr>
+          <a:xfrm>
+            <a:off x="420624" y="1595022"/>
+            <a:ext cx="5486400" cy="3631381"/>
           </a:xfrm>
           <a:prstGeom prst="roundRect">
             <a:avLst>
-              <a:gd name="adj" fmla="val 2000"/>
+              <a:gd name="adj" fmla="val 3022"/>
             </a:avLst>
           </a:prstGeom>
           <a:solidFill>
             <a:srgbClr val="000000">
-              <a:alpha val="15000"/>
+              <a:alpha val="30000"/>
             </a:srgbClr>
           </a:solidFill>
           <a:ln/>
@@ -6093,7 +6249,7 @@
       </p:sp>
       <p:pic>
         <p:nvPicPr>
-          <p:cNvPr id="6" name="Image 0" descr="public/imagenes para software/dashboard-padron-mapa1.PNG">    </p:cNvPr>
+          <p:cNvPr id="3" name="Image 0" descr="public/imagenes para software/dashboard-padron-mapa1.PNG">    </p:cNvPr>
           <p:cNvPicPr>
             <a:picLocks noChangeAspect="1"/>
           </p:cNvPicPr>
@@ -6107,8 +6263,8 @@
         </p:blipFill>
         <p:spPr>
           <a:xfrm>
-            <a:off x="2640718" y="1691640"/>
-            <a:ext cx="6907516" cy="4572000"/>
+            <a:off x="365760" y="1521870"/>
+            <a:ext cx="5486400" cy="3631381"/>
           </a:xfrm>
           <a:prstGeom prst="rect">
             <a:avLst/>
@@ -6117,53 +6273,92 @@
       </p:pic>
       <p:sp>
         <p:nvSpPr>
-          <p:cNvPr id="7" name="Text 4"/>
-          <p:cNvSpPr/>
-          <p:nvPr/>
-        </p:nvSpPr>
-        <p:spPr>
-          <a:xfrm>
-            <a:off x="914400" y="6355080"/>
-            <a:ext cx="10332720" cy="274320"/>
-          </a:xfrm>
-          <a:prstGeom prst="rect">
-            <a:avLst/>
-          </a:prstGeom>
-          <a:noFill/>
-          <a:ln/>
-        </p:spPr>
-        <p:txBody>
-          <a:bodyPr wrap="square" rtlCol="0" anchor="ctr"/>
-          <a:lstStyle/>
-          <a:p>
-            <a:pPr algn="ctr" indent="0" marL="0">
-              <a:buNone/>
-            </a:pPr>
-            <a:r>
-              <a:rPr lang="en-US" sz="1100" i="1" dirty="0">
-                <a:solidFill>
-                  <a:srgbClr val="CBD5E1"/>
-                </a:solidFill>
-                <a:latin typeface="Calibri" pitchFamily="34" charset="0"/>
-                <a:ea typeface="Calibri" pitchFamily="34" charset="-122"/>
-                <a:cs typeface="Calibri" pitchFamily="34" charset="-120"/>
-              </a:rPr>
-              <a:t>CABA concentra 1.2k afiliados APOPS. Buenos Aires 524. Córdoba 301.</a:t>
-            </a:r>
-            <a:endParaRPr lang="en-US" sz="1100" dirty="0"/>
-          </a:p>
-        </p:txBody>
-      </p:sp>
-      <p:sp>
-        <p:nvSpPr>
-          <p:cNvPr id="8" name="Shape 5"/>
-          <p:cNvSpPr/>
-          <p:nvPr/>
-        </p:nvSpPr>
-        <p:spPr>
-          <a:xfrm>
-            <a:off x="0" y="6492240"/>
-            <a:ext cx="12188952" cy="27432"/>
+          <p:cNvPr id="4" name="Text 1"/>
+          <p:cNvSpPr/>
+          <p:nvPr/>
+        </p:nvSpPr>
+        <p:spPr>
+          <a:xfrm>
+            <a:off x="6217920" y="548640"/>
+            <a:ext cx="5669280" cy="320040"/>
+          </a:xfrm>
+          <a:prstGeom prst="rect">
+            <a:avLst/>
+          </a:prstGeom>
+          <a:noFill/>
+          <a:ln/>
+        </p:spPr>
+        <p:txBody>
+          <a:bodyPr wrap="square" rtlCol="0" anchor="ctr"/>
+          <a:lstStyle/>
+          <a:p>
+            <a:pPr indent="0" marL="0">
+              <a:buNone/>
+            </a:pPr>
+            <a:r>
+              <a:rPr lang="en-US" sz="1200" b="1" spc="300" kern="0" dirty="0">
+                <a:solidFill>
+                  <a:srgbClr val="7FCFE5"/>
+                </a:solidFill>
+                <a:latin typeface="Calibri" pitchFamily="34" charset="0"/>
+                <a:ea typeface="Calibri" pitchFamily="34" charset="-122"/>
+                <a:cs typeface="Calibri" pitchFamily="34" charset="-120"/>
+              </a:rPr>
+              <a:t>05 · EN VIVO · PADRÓN</a:t>
+            </a:r>
+            <a:endParaRPr lang="en-US" sz="1200" dirty="0"/>
+          </a:p>
+        </p:txBody>
+      </p:sp>
+      <p:sp>
+        <p:nvSpPr>
+          <p:cNvPr id="5" name="Text 2"/>
+          <p:cNvSpPr/>
+          <p:nvPr/>
+        </p:nvSpPr>
+        <p:spPr>
+          <a:xfrm>
+            <a:off x="6217920" y="914400"/>
+            <a:ext cx="5669280" cy="1371600"/>
+          </a:xfrm>
+          <a:prstGeom prst="rect">
+            <a:avLst/>
+          </a:prstGeom>
+          <a:noFill/>
+          <a:ln/>
+        </p:spPr>
+        <p:txBody>
+          <a:bodyPr wrap="square" rtlCol="0" anchor="ctr"/>
+          <a:lstStyle/>
+          <a:p>
+            <a:pPr indent="0" marL="0">
+              <a:buNone/>
+            </a:pPr>
+            <a:r>
+              <a:rPr lang="en-US" sz="3200" b="1" dirty="0">
+                <a:solidFill>
+                  <a:srgbClr val="FFFFFF"/>
+                </a:solidFill>
+                <a:latin typeface="Calibri Light" pitchFamily="34" charset="0"/>
+                <a:ea typeface="Calibri Light" pitchFamily="34" charset="-122"/>
+                <a:cs typeface="Calibri Light" pitchFamily="34" charset="-120"/>
+              </a:rPr>
+              <a:t>Distribución geográfica</a:t>
+            </a:r>
+            <a:endParaRPr lang="en-US" sz="3200" dirty="0"/>
+          </a:p>
+        </p:txBody>
+      </p:sp>
+      <p:sp>
+        <p:nvSpPr>
+          <p:cNvPr id="6" name="Shape 3"/>
+          <p:cNvSpPr/>
+          <p:nvPr/>
+        </p:nvSpPr>
+        <p:spPr>
+          <a:xfrm>
+            <a:off x="6217920" y="2331720"/>
+            <a:ext cx="731520" cy="45720"/>
           </a:xfrm>
           <a:prstGeom prst="rect">
             <a:avLst/>
@@ -6176,7 +6371,176 @@
       </p:sp>
       <p:sp>
         <p:nvSpPr>
+          <p:cNvPr id="7" name="Text 4"/>
+          <p:cNvSpPr/>
+          <p:nvPr/>
+        </p:nvSpPr>
+        <p:spPr>
+          <a:xfrm>
+            <a:off x="6217920" y="2514600"/>
+            <a:ext cx="5669280" cy="1097280"/>
+          </a:xfrm>
+          <a:prstGeom prst="rect">
+            <a:avLst/>
+          </a:prstGeom>
+          <a:noFill/>
+          <a:ln/>
+        </p:spPr>
+        <p:txBody>
+          <a:bodyPr wrap="square" rtlCol="0" anchor="ctr"/>
+          <a:lstStyle/>
+          <a:p>
+            <a:pPr indent="0" marL="0">
+              <a:spcAft>
+                <a:spcPts val="600"/>
+              </a:spcAft>
+              <a:buNone/>
+            </a:pPr>
+            <a:r>
+              <a:rPr lang="en-US" sz="1500" dirty="0">
+                <a:solidFill>
+                  <a:srgbClr val="CBD5E1"/>
+                </a:solidFill>
+                <a:latin typeface="Calibri" pitchFamily="34" charset="0"/>
+                <a:ea typeface="Calibri" pitchFamily="34" charset="-122"/>
+                <a:cs typeface="Calibri" pitchFamily="34" charset="-120"/>
+              </a:rPr>
+              <a:t>Mapa SVG de Argentina con choropleth + números por provincia + CABA destacada.</a:t>
+            </a:r>
+            <a:endParaRPr lang="en-US" sz="1500" dirty="0"/>
+          </a:p>
+        </p:txBody>
+      </p:sp>
+      <p:sp>
+        <p:nvSpPr>
+          <p:cNvPr id="8" name="Shape 5"/>
+          <p:cNvSpPr/>
+          <p:nvPr/>
+        </p:nvSpPr>
+        <p:spPr>
+          <a:xfrm>
+            <a:off x="6217920" y="4023360"/>
+            <a:ext cx="5669280" cy="1463040"/>
+          </a:xfrm>
+          <a:prstGeom prst="roundRect">
+            <a:avLst>
+              <a:gd name="adj" fmla="val 7500"/>
+            </a:avLst>
+          </a:prstGeom>
+          <a:solidFill>
+            <a:srgbClr val="1F72B8">
+              <a:alpha val="20000"/>
+            </a:srgbClr>
+          </a:solidFill>
+          <a:ln w="12700">
+            <a:solidFill>
+              <a:srgbClr val="1F72B8"/>
+            </a:solidFill>
+            <a:prstDash val="solid"/>
+          </a:ln>
+        </p:spPr>
+      </p:sp>
+      <p:sp>
+        <p:nvSpPr>
           <p:cNvPr id="9" name="Text 6"/>
+          <p:cNvSpPr/>
+          <p:nvPr/>
+        </p:nvSpPr>
+        <p:spPr>
+          <a:xfrm>
+            <a:off x="6446520" y="4160520"/>
+            <a:ext cx="5212080" cy="274320"/>
+          </a:xfrm>
+          <a:prstGeom prst="rect">
+            <a:avLst/>
+          </a:prstGeom>
+          <a:noFill/>
+          <a:ln/>
+        </p:spPr>
+        <p:txBody>
+          <a:bodyPr wrap="square" rtlCol="0" anchor="ctr"/>
+          <a:lstStyle/>
+          <a:p>
+            <a:pPr indent="0" marL="0">
+              <a:buNone/>
+            </a:pPr>
+            <a:r>
+              <a:rPr lang="en-US" sz="1000" b="1" spc="300" kern="0" dirty="0">
+                <a:solidFill>
+                  <a:srgbClr val="7FCFE5"/>
+                </a:solidFill>
+                <a:latin typeface="Calibri" pitchFamily="34" charset="0"/>
+                <a:ea typeface="Calibri" pitchFamily="34" charset="-122"/>
+                <a:cs typeface="Calibri" pitchFamily="34" charset="-120"/>
+              </a:rPr>
+              <a:t>💡 DATO DESTACADO</a:t>
+            </a:r>
+            <a:endParaRPr lang="en-US" sz="1000" dirty="0"/>
+          </a:p>
+        </p:txBody>
+      </p:sp>
+      <p:sp>
+        <p:nvSpPr>
+          <p:cNvPr id="10" name="Text 7"/>
+          <p:cNvSpPr/>
+          <p:nvPr/>
+        </p:nvSpPr>
+        <p:spPr>
+          <a:xfrm>
+            <a:off x="6446520" y="4434840"/>
+            <a:ext cx="5212080" cy="960120"/>
+          </a:xfrm>
+          <a:prstGeom prst="rect">
+            <a:avLst/>
+          </a:prstGeom>
+          <a:noFill/>
+          <a:ln/>
+        </p:spPr>
+        <p:txBody>
+          <a:bodyPr wrap="square" rtlCol="0" anchor="ctr"/>
+          <a:lstStyle/>
+          <a:p>
+            <a:pPr indent="0" marL="0">
+              <a:buNone/>
+            </a:pPr>
+            <a:r>
+              <a:rPr lang="en-US" sz="1300" dirty="0">
+                <a:solidFill>
+                  <a:srgbClr val="FFFFFF"/>
+                </a:solidFill>
+                <a:latin typeface="Calibri" pitchFamily="34" charset="0"/>
+                <a:ea typeface="Calibri" pitchFamily="34" charset="-122"/>
+                <a:cs typeface="Calibri" pitchFamily="34" charset="-120"/>
+              </a:rPr>
+              <a:t>CABA concentra 1.2k afiliados APOPS. Buenos Aires 524. Córdoba 301.</a:t>
+            </a:r>
+            <a:endParaRPr lang="en-US" sz="1300" dirty="0"/>
+          </a:p>
+        </p:txBody>
+      </p:sp>
+      <p:sp>
+        <p:nvSpPr>
+          <p:cNvPr id="11" name="Shape 8"/>
+          <p:cNvSpPr/>
+          <p:nvPr/>
+        </p:nvSpPr>
+        <p:spPr>
+          <a:xfrm>
+            <a:off x="0" y="6492240"/>
+            <a:ext cx="12188952" cy="27432"/>
+          </a:xfrm>
+          <a:prstGeom prst="rect">
+            <a:avLst/>
+          </a:prstGeom>
+          <a:solidFill>
+            <a:srgbClr val="1F72B8"/>
+          </a:solidFill>
+          <a:ln/>
+        </p:spPr>
+      </p:sp>
+      <p:sp>
+        <p:nvSpPr>
+          <p:cNvPr id="12" name="Text 9"/>
           <p:cNvSpPr/>
           <p:nvPr/>
         </p:nvSpPr>
@@ -6215,7 +6579,7 @@
       </p:sp>
       <p:sp>
         <p:nvSpPr>
-          <p:cNvPr id="10" name="Text 7"/>
+          <p:cNvPr id="13" name="Text 10"/>
           <p:cNvSpPr/>
           <p:nvPr/>
         </p:nvSpPr>
@@ -6286,140 +6650,23 @@
       </p:grpSpPr>
       <p:sp>
         <p:nvSpPr>
-          <p:cNvPr id="2" name="Text 0"/>
-          <p:cNvSpPr/>
-          <p:nvPr/>
-        </p:nvSpPr>
-        <p:spPr>
-          <a:xfrm>
-            <a:off x="457200" y="320040"/>
-            <a:ext cx="7315200" cy="274320"/>
-          </a:xfrm>
-          <a:prstGeom prst="rect">
-            <a:avLst/>
-          </a:prstGeom>
-          <a:noFill/>
-          <a:ln/>
-        </p:spPr>
-        <p:txBody>
-          <a:bodyPr wrap="square" rtlCol="0" anchor="ctr"/>
-          <a:lstStyle/>
-          <a:p>
-            <a:pPr indent="0" marL="0">
-              <a:buNone/>
-            </a:pPr>
-            <a:r>
-              <a:rPr lang="en-US" sz="1100" b="1" spc="200" kern="0" dirty="0">
-                <a:solidFill>
-                  <a:srgbClr val="1F72B8"/>
-                </a:solidFill>
-                <a:latin typeface="Calibri" pitchFamily="34" charset="0"/>
-                <a:ea typeface="Calibri" pitchFamily="34" charset="-122"/>
-                <a:cs typeface="Calibri" pitchFamily="34" charset="-120"/>
-              </a:rPr>
-              <a:t>05 · EN VIVO · DELEGADOS</a:t>
-            </a:r>
-            <a:endParaRPr lang="en-US" sz="1100" dirty="0"/>
-          </a:p>
-        </p:txBody>
-      </p:sp>
-      <p:sp>
-        <p:nvSpPr>
-          <p:cNvPr id="3" name="Text 1"/>
-          <p:cNvSpPr/>
-          <p:nvPr/>
-        </p:nvSpPr>
-        <p:spPr>
-          <a:xfrm>
-            <a:off x="457200" y="594360"/>
-            <a:ext cx="11247120" cy="502920"/>
-          </a:xfrm>
-          <a:prstGeom prst="rect">
-            <a:avLst/>
-          </a:prstGeom>
-          <a:noFill/>
-          <a:ln/>
-        </p:spPr>
-        <p:txBody>
-          <a:bodyPr wrap="square" rtlCol="0" anchor="ctr"/>
-          <a:lstStyle/>
-          <a:p>
-            <a:pPr indent="0" marL="0">
-              <a:buNone/>
-            </a:pPr>
-            <a:r>
-              <a:rPr lang="en-US" sz="2400" b="1" dirty="0">
-                <a:solidFill>
-                  <a:srgbClr val="FFFFFF"/>
-                </a:solidFill>
-                <a:latin typeface="Calibri Light" pitchFamily="34" charset="0"/>
-                <a:ea typeface="Calibri Light" pitchFamily="34" charset="-122"/>
-                <a:cs typeface="Calibri Light" pitchFamily="34" charset="-120"/>
-              </a:rPr>
-              <a:t>Comisión Directiva — Delegados</a:t>
-            </a:r>
-            <a:endParaRPr lang="en-US" sz="2400" dirty="0"/>
-          </a:p>
-        </p:txBody>
-      </p:sp>
-      <p:sp>
-        <p:nvSpPr>
-          <p:cNvPr id="4" name="Text 2"/>
-          <p:cNvSpPr/>
-          <p:nvPr/>
-        </p:nvSpPr>
-        <p:spPr>
-          <a:xfrm>
-            <a:off x="457200" y="1097280"/>
-            <a:ext cx="11247120" cy="365760"/>
-          </a:xfrm>
-          <a:prstGeom prst="rect">
-            <a:avLst/>
-          </a:prstGeom>
-          <a:noFill/>
-          <a:ln/>
-        </p:spPr>
-        <p:txBody>
-          <a:bodyPr wrap="square" rtlCol="0" anchor="ctr"/>
-          <a:lstStyle/>
-          <a:p>
-            <a:pPr indent="0" marL="0">
-              <a:buNone/>
-            </a:pPr>
-            <a:r>
-              <a:rPr lang="en-US" sz="1300" dirty="0">
-                <a:solidFill>
-                  <a:srgbClr val="CBD5E1"/>
-                </a:solidFill>
-                <a:latin typeface="Calibri" pitchFamily="34" charset="0"/>
-                <a:ea typeface="Calibri" pitchFamily="34" charset="-122"/>
-                <a:cs typeface="Calibri" pitchFamily="34" charset="-120"/>
-              </a:rPr>
-              <a:t>529 delegados activos. Mandatos que vencen en 30 días en alerta. Edificios sin delegado.</a:t>
-            </a:r>
-            <a:endParaRPr lang="en-US" sz="1300" dirty="0"/>
-          </a:p>
-        </p:txBody>
-      </p:sp>
-      <p:sp>
-        <p:nvSpPr>
-          <p:cNvPr id="5" name="Shape 3"/>
-          <p:cNvSpPr/>
-          <p:nvPr/>
-        </p:nvSpPr>
-        <p:spPr>
-          <a:xfrm>
-            <a:off x="5082921" y="1737360"/>
-            <a:ext cx="2114550" cy="4572000"/>
+          <p:cNvPr id="2" name="Shape 0"/>
+          <p:cNvSpPr/>
+          <p:nvPr/>
+        </p:nvSpPr>
+        <p:spPr>
+          <a:xfrm>
+            <a:off x="1789367" y="438912"/>
+            <a:ext cx="2748915" cy="5943600"/>
           </a:xfrm>
           <a:prstGeom prst="roundRect">
             <a:avLst>
-              <a:gd name="adj" fmla="val 4324"/>
+              <a:gd name="adj" fmla="val 3992"/>
             </a:avLst>
           </a:prstGeom>
           <a:solidFill>
             <a:srgbClr val="000000">
-              <a:alpha val="15000"/>
+              <a:alpha val="30000"/>
             </a:srgbClr>
           </a:solidFill>
           <a:ln/>
@@ -6427,7 +6674,7 @@
       </p:sp>
       <p:pic>
         <p:nvPicPr>
-          <p:cNvPr id="6" name="Image 0" descr="public/imagenes para software/dashboard-delegados.png">    </p:cNvPr>
+          <p:cNvPr id="3" name="Image 0" descr="public/imagenes para software/dashboard-delegados.png">    </p:cNvPr>
           <p:cNvPicPr>
             <a:picLocks noChangeAspect="1"/>
           </p:cNvPicPr>
@@ -6441,8 +6688,8 @@
         </p:blipFill>
         <p:spPr>
           <a:xfrm>
-            <a:off x="5037201" y="1691640"/>
-            <a:ext cx="2114550" cy="4572000"/>
+            <a:off x="1734503" y="365760"/>
+            <a:ext cx="2748915" cy="5943600"/>
           </a:xfrm>
           <a:prstGeom prst="rect">
             <a:avLst/>
@@ -6451,53 +6698,92 @@
       </p:pic>
       <p:sp>
         <p:nvSpPr>
-          <p:cNvPr id="7" name="Text 4"/>
-          <p:cNvSpPr/>
-          <p:nvPr/>
-        </p:nvSpPr>
-        <p:spPr>
-          <a:xfrm>
-            <a:off x="914400" y="6355080"/>
-            <a:ext cx="10332720" cy="274320"/>
-          </a:xfrm>
-          <a:prstGeom prst="rect">
-            <a:avLst/>
-          </a:prstGeom>
-          <a:noFill/>
-          <a:ln/>
-        </p:spPr>
-        <p:txBody>
-          <a:bodyPr wrap="square" rtlCol="0" anchor="ctr"/>
-          <a:lstStyle/>
-          <a:p>
-            <a:pPr algn="ctr" indent="0" marL="0">
-              <a:buNone/>
-            </a:pPr>
-            <a:r>
-              <a:rPr lang="en-US" sz="1100" i="1" dirty="0">
-                <a:solidFill>
-                  <a:srgbClr val="CBD5E1"/>
-                </a:solidFill>
-                <a:latin typeface="Calibri" pitchFamily="34" charset="0"/>
-                <a:ea typeface="Calibri" pitchFamily="34" charset="-122"/>
-                <a:cs typeface="Calibri" pitchFamily="34" charset="-120"/>
-              </a:rPr>
-              <a:t>6 mandatos por vencer este mes — listado accionable. 10 edificios APOPS sin delegado asignado.</a:t>
-            </a:r>
-            <a:endParaRPr lang="en-US" sz="1100" dirty="0"/>
-          </a:p>
-        </p:txBody>
-      </p:sp>
-      <p:sp>
-        <p:nvSpPr>
-          <p:cNvPr id="8" name="Shape 5"/>
-          <p:cNvSpPr/>
-          <p:nvPr/>
-        </p:nvSpPr>
-        <p:spPr>
-          <a:xfrm>
-            <a:off x="0" y="6492240"/>
-            <a:ext cx="12188952" cy="27432"/>
+          <p:cNvPr id="4" name="Text 1"/>
+          <p:cNvSpPr/>
+          <p:nvPr/>
+        </p:nvSpPr>
+        <p:spPr>
+          <a:xfrm>
+            <a:off x="6217920" y="548640"/>
+            <a:ext cx="5669280" cy="320040"/>
+          </a:xfrm>
+          <a:prstGeom prst="rect">
+            <a:avLst/>
+          </a:prstGeom>
+          <a:noFill/>
+          <a:ln/>
+        </p:spPr>
+        <p:txBody>
+          <a:bodyPr wrap="square" rtlCol="0" anchor="ctr"/>
+          <a:lstStyle/>
+          <a:p>
+            <a:pPr indent="0" marL="0">
+              <a:buNone/>
+            </a:pPr>
+            <a:r>
+              <a:rPr lang="en-US" sz="1200" b="1" spc="300" kern="0" dirty="0">
+                <a:solidFill>
+                  <a:srgbClr val="7FCFE5"/>
+                </a:solidFill>
+                <a:latin typeface="Calibri" pitchFamily="34" charset="0"/>
+                <a:ea typeface="Calibri" pitchFamily="34" charset="-122"/>
+                <a:cs typeface="Calibri" pitchFamily="34" charset="-120"/>
+              </a:rPr>
+              <a:t>05 · EN VIVO · DELEGADOS</a:t>
+            </a:r>
+            <a:endParaRPr lang="en-US" sz="1200" dirty="0"/>
+          </a:p>
+        </p:txBody>
+      </p:sp>
+      <p:sp>
+        <p:nvSpPr>
+          <p:cNvPr id="5" name="Text 2"/>
+          <p:cNvSpPr/>
+          <p:nvPr/>
+        </p:nvSpPr>
+        <p:spPr>
+          <a:xfrm>
+            <a:off x="6217920" y="914400"/>
+            <a:ext cx="5669280" cy="1371600"/>
+          </a:xfrm>
+          <a:prstGeom prst="rect">
+            <a:avLst/>
+          </a:prstGeom>
+          <a:noFill/>
+          <a:ln/>
+        </p:spPr>
+        <p:txBody>
+          <a:bodyPr wrap="square" rtlCol="0" anchor="ctr"/>
+          <a:lstStyle/>
+          <a:p>
+            <a:pPr indent="0" marL="0">
+              <a:buNone/>
+            </a:pPr>
+            <a:r>
+              <a:rPr lang="en-US" sz="3200" b="1" dirty="0">
+                <a:solidFill>
+                  <a:srgbClr val="FFFFFF"/>
+                </a:solidFill>
+                <a:latin typeface="Calibri Light" pitchFamily="34" charset="0"/>
+                <a:ea typeface="Calibri Light" pitchFamily="34" charset="-122"/>
+                <a:cs typeface="Calibri Light" pitchFamily="34" charset="-120"/>
+              </a:rPr>
+              <a:t>Comisión Directiva — Delegados</a:t>
+            </a:r>
+            <a:endParaRPr lang="en-US" sz="3200" dirty="0"/>
+          </a:p>
+        </p:txBody>
+      </p:sp>
+      <p:sp>
+        <p:nvSpPr>
+          <p:cNvPr id="6" name="Shape 3"/>
+          <p:cNvSpPr/>
+          <p:nvPr/>
+        </p:nvSpPr>
+        <p:spPr>
+          <a:xfrm>
+            <a:off x="6217920" y="2331720"/>
+            <a:ext cx="731520" cy="45720"/>
           </a:xfrm>
           <a:prstGeom prst="rect">
             <a:avLst/>
@@ -6510,7 +6796,176 @@
       </p:sp>
       <p:sp>
         <p:nvSpPr>
+          <p:cNvPr id="7" name="Text 4"/>
+          <p:cNvSpPr/>
+          <p:nvPr/>
+        </p:nvSpPr>
+        <p:spPr>
+          <a:xfrm>
+            <a:off x="6217920" y="2514600"/>
+            <a:ext cx="5669280" cy="1097280"/>
+          </a:xfrm>
+          <a:prstGeom prst="rect">
+            <a:avLst/>
+          </a:prstGeom>
+          <a:noFill/>
+          <a:ln/>
+        </p:spPr>
+        <p:txBody>
+          <a:bodyPr wrap="square" rtlCol="0" anchor="ctr"/>
+          <a:lstStyle/>
+          <a:p>
+            <a:pPr indent="0" marL="0">
+              <a:spcAft>
+                <a:spcPts val="600"/>
+              </a:spcAft>
+              <a:buNone/>
+            </a:pPr>
+            <a:r>
+              <a:rPr lang="en-US" sz="1500" dirty="0">
+                <a:solidFill>
+                  <a:srgbClr val="CBD5E1"/>
+                </a:solidFill>
+                <a:latin typeface="Calibri" pitchFamily="34" charset="0"/>
+                <a:ea typeface="Calibri" pitchFamily="34" charset="-122"/>
+                <a:cs typeface="Calibri" pitchFamily="34" charset="-120"/>
+              </a:rPr>
+              <a:t>529 delegados activos. Mandatos que vencen en 30 días en alerta. Edificios sin delegado.</a:t>
+            </a:r>
+            <a:endParaRPr lang="en-US" sz="1500" dirty="0"/>
+          </a:p>
+        </p:txBody>
+      </p:sp>
+      <p:sp>
+        <p:nvSpPr>
+          <p:cNvPr id="8" name="Shape 5"/>
+          <p:cNvSpPr/>
+          <p:nvPr/>
+        </p:nvSpPr>
+        <p:spPr>
+          <a:xfrm>
+            <a:off x="6217920" y="4023360"/>
+            <a:ext cx="5669280" cy="1463040"/>
+          </a:xfrm>
+          <a:prstGeom prst="roundRect">
+            <a:avLst>
+              <a:gd name="adj" fmla="val 7500"/>
+            </a:avLst>
+          </a:prstGeom>
+          <a:solidFill>
+            <a:srgbClr val="1F72B8">
+              <a:alpha val="20000"/>
+            </a:srgbClr>
+          </a:solidFill>
+          <a:ln w="12700">
+            <a:solidFill>
+              <a:srgbClr val="1F72B8"/>
+            </a:solidFill>
+            <a:prstDash val="solid"/>
+          </a:ln>
+        </p:spPr>
+      </p:sp>
+      <p:sp>
+        <p:nvSpPr>
           <p:cNvPr id="9" name="Text 6"/>
+          <p:cNvSpPr/>
+          <p:nvPr/>
+        </p:nvSpPr>
+        <p:spPr>
+          <a:xfrm>
+            <a:off x="6446520" y="4160520"/>
+            <a:ext cx="5212080" cy="274320"/>
+          </a:xfrm>
+          <a:prstGeom prst="rect">
+            <a:avLst/>
+          </a:prstGeom>
+          <a:noFill/>
+          <a:ln/>
+        </p:spPr>
+        <p:txBody>
+          <a:bodyPr wrap="square" rtlCol="0" anchor="ctr"/>
+          <a:lstStyle/>
+          <a:p>
+            <a:pPr indent="0" marL="0">
+              <a:buNone/>
+            </a:pPr>
+            <a:r>
+              <a:rPr lang="en-US" sz="1000" b="1" spc="300" kern="0" dirty="0">
+                <a:solidFill>
+                  <a:srgbClr val="7FCFE5"/>
+                </a:solidFill>
+                <a:latin typeface="Calibri" pitchFamily="34" charset="0"/>
+                <a:ea typeface="Calibri" pitchFamily="34" charset="-122"/>
+                <a:cs typeface="Calibri" pitchFamily="34" charset="-120"/>
+              </a:rPr>
+              <a:t>💡 DATO DESTACADO</a:t>
+            </a:r>
+            <a:endParaRPr lang="en-US" sz="1000" dirty="0"/>
+          </a:p>
+        </p:txBody>
+      </p:sp>
+      <p:sp>
+        <p:nvSpPr>
+          <p:cNvPr id="10" name="Text 7"/>
+          <p:cNvSpPr/>
+          <p:nvPr/>
+        </p:nvSpPr>
+        <p:spPr>
+          <a:xfrm>
+            <a:off x="6446520" y="4434840"/>
+            <a:ext cx="5212080" cy="960120"/>
+          </a:xfrm>
+          <a:prstGeom prst="rect">
+            <a:avLst/>
+          </a:prstGeom>
+          <a:noFill/>
+          <a:ln/>
+        </p:spPr>
+        <p:txBody>
+          <a:bodyPr wrap="square" rtlCol="0" anchor="ctr"/>
+          <a:lstStyle/>
+          <a:p>
+            <a:pPr indent="0" marL="0">
+              <a:buNone/>
+            </a:pPr>
+            <a:r>
+              <a:rPr lang="en-US" sz="1300" dirty="0">
+                <a:solidFill>
+                  <a:srgbClr val="FFFFFF"/>
+                </a:solidFill>
+                <a:latin typeface="Calibri" pitchFamily="34" charset="0"/>
+                <a:ea typeface="Calibri" pitchFamily="34" charset="-122"/>
+                <a:cs typeface="Calibri" pitchFamily="34" charset="-120"/>
+              </a:rPr>
+              <a:t>6 mandatos por vencer este mes — listado accionable. 10 edificios APOPS sin delegado asignado.</a:t>
+            </a:r>
+            <a:endParaRPr lang="en-US" sz="1300" dirty="0"/>
+          </a:p>
+        </p:txBody>
+      </p:sp>
+      <p:sp>
+        <p:nvSpPr>
+          <p:cNvPr id="11" name="Shape 8"/>
+          <p:cNvSpPr/>
+          <p:nvPr/>
+        </p:nvSpPr>
+        <p:spPr>
+          <a:xfrm>
+            <a:off x="0" y="6492240"/>
+            <a:ext cx="12188952" cy="27432"/>
+          </a:xfrm>
+          <a:prstGeom prst="rect">
+            <a:avLst/>
+          </a:prstGeom>
+          <a:solidFill>
+            <a:srgbClr val="1F72B8"/>
+          </a:solidFill>
+          <a:ln/>
+        </p:spPr>
+      </p:sp>
+      <p:sp>
+        <p:nvSpPr>
+          <p:cNvPr id="12" name="Text 9"/>
           <p:cNvSpPr/>
           <p:nvPr/>
         </p:nvSpPr>
@@ -6549,7 +7004,7 @@
       </p:sp>
       <p:sp>
         <p:nvSpPr>
-          <p:cNvPr id="10" name="Text 7"/>
+          <p:cNvPr id="13" name="Text 10"/>
           <p:cNvSpPr/>
           <p:nvPr/>
         </p:nvSpPr>
@@ -6620,140 +7075,23 @@
       </p:grpSpPr>
       <p:sp>
         <p:nvSpPr>
-          <p:cNvPr id="2" name="Text 0"/>
-          <p:cNvSpPr/>
-          <p:nvPr/>
-        </p:nvSpPr>
-        <p:spPr>
-          <a:xfrm>
-            <a:off x="457200" y="320040"/>
-            <a:ext cx="7315200" cy="274320"/>
-          </a:xfrm>
-          <a:prstGeom prst="rect">
-            <a:avLst/>
-          </a:prstGeom>
-          <a:noFill/>
-          <a:ln/>
-        </p:spPr>
-        <p:txBody>
-          <a:bodyPr wrap="square" rtlCol="0" anchor="ctr"/>
-          <a:lstStyle/>
-          <a:p>
-            <a:pPr indent="0" marL="0">
-              <a:buNone/>
-            </a:pPr>
-            <a:r>
-              <a:rPr lang="en-US" sz="1100" b="1" spc="200" kern="0" dirty="0">
-                <a:solidFill>
-                  <a:srgbClr val="1F72B8"/>
-                </a:solidFill>
-                <a:latin typeface="Calibri" pitchFamily="34" charset="0"/>
-                <a:ea typeface="Calibri" pitchFamily="34" charset="-122"/>
-                <a:cs typeface="Calibri" pitchFamily="34" charset="-120"/>
-              </a:rPr>
-              <a:t>05 · EN VIVO · DELEGADO</a:t>
-            </a:r>
-            <a:endParaRPr lang="en-US" sz="1100" dirty="0"/>
-          </a:p>
-        </p:txBody>
-      </p:sp>
-      <p:sp>
-        <p:nvSpPr>
-          <p:cNvPr id="3" name="Text 1"/>
-          <p:cNvSpPr/>
-          <p:nvPr/>
-        </p:nvSpPr>
-        <p:spPr>
-          <a:xfrm>
-            <a:off x="457200" y="594360"/>
-            <a:ext cx="11247120" cy="502920"/>
-          </a:xfrm>
-          <a:prstGeom prst="rect">
-            <a:avLst/>
-          </a:prstGeom>
-          <a:noFill/>
-          <a:ln/>
-        </p:spPr>
-        <p:txBody>
-          <a:bodyPr wrap="square" rtlCol="0" anchor="ctr"/>
-          <a:lstStyle/>
-          <a:p>
-            <a:pPr indent="0" marL="0">
-              <a:buNone/>
-            </a:pPr>
-            <a:r>
-              <a:rPr lang="en-US" sz="2400" b="1" dirty="0">
-                <a:solidFill>
-                  <a:srgbClr val="FFFFFF"/>
-                </a:solidFill>
-                <a:latin typeface="Calibri Light" pitchFamily="34" charset="0"/>
-                <a:ea typeface="Calibri Light" pitchFamily="34" charset="-122"/>
-                <a:cs typeface="Calibri Light" pitchFamily="34" charset="-120"/>
-              </a:rPr>
-              <a:t>El delegado ve su edificio</a:t>
-            </a:r>
-            <a:endParaRPr lang="en-US" sz="2400" dirty="0"/>
-          </a:p>
-        </p:txBody>
-      </p:sp>
-      <p:sp>
-        <p:nvSpPr>
-          <p:cNvPr id="4" name="Text 2"/>
-          <p:cNvSpPr/>
-          <p:nvPr/>
-        </p:nvSpPr>
-        <p:spPr>
-          <a:xfrm>
-            <a:off x="457200" y="1097280"/>
-            <a:ext cx="11247120" cy="365760"/>
-          </a:xfrm>
-          <a:prstGeom prst="rect">
-            <a:avLst/>
-          </a:prstGeom>
-          <a:noFill/>
-          <a:ln/>
-        </p:spPr>
-        <p:txBody>
-          <a:bodyPr wrap="square" rtlCol="0" anchor="ctr"/>
-          <a:lstStyle/>
-          <a:p>
-            <a:pPr indent="0" marL="0">
-              <a:buNone/>
-            </a:pPr>
-            <a:r>
-              <a:rPr lang="en-US" sz="1300" dirty="0">
-                <a:solidFill>
-                  <a:srgbClr val="CBD5E1"/>
-                </a:solidFill>
-                <a:latin typeface="Calibri" pitchFamily="34" charset="0"/>
-                <a:ea typeface="Calibri" pitchFamily="34" charset="-122"/>
-                <a:cs typeface="Calibri" pitchFamily="34" charset="-120"/>
-              </a:rPr>
-              <a:t>Alertas automáticas de altas y bajas. Comunicación directa con la CD.</a:t>
-            </a:r>
-            <a:endParaRPr lang="en-US" sz="1300" dirty="0"/>
-          </a:p>
-        </p:txBody>
-      </p:sp>
-      <p:sp>
-        <p:nvSpPr>
-          <p:cNvPr id="5" name="Shape 3"/>
-          <p:cNvSpPr/>
-          <p:nvPr/>
-        </p:nvSpPr>
-        <p:spPr>
-          <a:xfrm>
-            <a:off x="5082921" y="1737360"/>
-            <a:ext cx="2114550" cy="4572000"/>
+          <p:cNvPr id="2" name="Shape 0"/>
+          <p:cNvSpPr/>
+          <p:nvPr/>
+        </p:nvSpPr>
+        <p:spPr>
+          <a:xfrm>
+            <a:off x="1789367" y="438912"/>
+            <a:ext cx="2748915" cy="5943600"/>
           </a:xfrm>
           <a:prstGeom prst="roundRect">
             <a:avLst>
-              <a:gd name="adj" fmla="val 4324"/>
+              <a:gd name="adj" fmla="val 3992"/>
             </a:avLst>
           </a:prstGeom>
           <a:solidFill>
             <a:srgbClr val="000000">
-              <a:alpha val="15000"/>
+              <a:alpha val="30000"/>
             </a:srgbClr>
           </a:solidFill>
           <a:ln/>
@@ -6761,7 +7099,7 @@
       </p:sp>
       <p:pic>
         <p:nvPicPr>
-          <p:cNvPr id="6" name="Image 0" descr="public/imagenes para software/DashboardalertasDelegado.jpeg">    </p:cNvPr>
+          <p:cNvPr id="3" name="Image 0" descr="public/imagenes para software/DashboardalertasDelegado.jpeg">    </p:cNvPr>
           <p:cNvPicPr>
             <a:picLocks noChangeAspect="1"/>
           </p:cNvPicPr>
@@ -6775,8 +7113,8 @@
         </p:blipFill>
         <p:spPr>
           <a:xfrm>
-            <a:off x="5037201" y="1691640"/>
-            <a:ext cx="2114550" cy="4572000"/>
+            <a:off x="1734503" y="365760"/>
+            <a:ext cx="2748915" cy="5943600"/>
           </a:xfrm>
           <a:prstGeom prst="rect">
             <a:avLst/>
@@ -6785,53 +7123,92 @@
       </p:pic>
       <p:sp>
         <p:nvSpPr>
-          <p:cNvPr id="7" name="Text 4"/>
-          <p:cNvSpPr/>
-          <p:nvPr/>
-        </p:nvSpPr>
-        <p:spPr>
-          <a:xfrm>
-            <a:off x="914400" y="6355080"/>
-            <a:ext cx="10332720" cy="274320"/>
-          </a:xfrm>
-          <a:prstGeom prst="rect">
-            <a:avLst/>
-          </a:prstGeom>
-          <a:noFill/>
-          <a:ln/>
-        </p:spPr>
-        <p:txBody>
-          <a:bodyPr wrap="square" rtlCol="0" anchor="ctr"/>
-          <a:lstStyle/>
-          <a:p>
-            <a:pPr algn="ctr" indent="0" marL="0">
-              <a:buNone/>
-            </a:pPr>
-            <a:r>
-              <a:rPr lang="en-US" sz="1100" i="1" dirty="0">
-                <a:solidFill>
-                  <a:srgbClr val="CBD5E1"/>
-                </a:solidFill>
-                <a:latin typeface="Calibri" pitchFamily="34" charset="0"/>
-                <a:ea typeface="Calibri" pitchFamily="34" charset="-122"/>
-                <a:cs typeface="Calibri" pitchFamily="34" charset="-120"/>
-              </a:rPr>
-              <a:t>Cada delegado recibe notificación cuando hay movimientos en su edificio o consultas.</a:t>
-            </a:r>
-            <a:endParaRPr lang="en-US" sz="1100" dirty="0"/>
-          </a:p>
-        </p:txBody>
-      </p:sp>
-      <p:sp>
-        <p:nvSpPr>
-          <p:cNvPr id="8" name="Shape 5"/>
-          <p:cNvSpPr/>
-          <p:nvPr/>
-        </p:nvSpPr>
-        <p:spPr>
-          <a:xfrm>
-            <a:off x="0" y="6492240"/>
-            <a:ext cx="12188952" cy="27432"/>
+          <p:cNvPr id="4" name="Text 1"/>
+          <p:cNvSpPr/>
+          <p:nvPr/>
+        </p:nvSpPr>
+        <p:spPr>
+          <a:xfrm>
+            <a:off x="6217920" y="548640"/>
+            <a:ext cx="5669280" cy="320040"/>
+          </a:xfrm>
+          <a:prstGeom prst="rect">
+            <a:avLst/>
+          </a:prstGeom>
+          <a:noFill/>
+          <a:ln/>
+        </p:spPr>
+        <p:txBody>
+          <a:bodyPr wrap="square" rtlCol="0" anchor="ctr"/>
+          <a:lstStyle/>
+          <a:p>
+            <a:pPr indent="0" marL="0">
+              <a:buNone/>
+            </a:pPr>
+            <a:r>
+              <a:rPr lang="en-US" sz="1200" b="1" spc="300" kern="0" dirty="0">
+                <a:solidFill>
+                  <a:srgbClr val="7FCFE5"/>
+                </a:solidFill>
+                <a:latin typeface="Calibri" pitchFamily="34" charset="0"/>
+                <a:ea typeface="Calibri" pitchFamily="34" charset="-122"/>
+                <a:cs typeface="Calibri" pitchFamily="34" charset="-120"/>
+              </a:rPr>
+              <a:t>05 · EN VIVO · DELEGADO</a:t>
+            </a:r>
+            <a:endParaRPr lang="en-US" sz="1200" dirty="0"/>
+          </a:p>
+        </p:txBody>
+      </p:sp>
+      <p:sp>
+        <p:nvSpPr>
+          <p:cNvPr id="5" name="Text 2"/>
+          <p:cNvSpPr/>
+          <p:nvPr/>
+        </p:nvSpPr>
+        <p:spPr>
+          <a:xfrm>
+            <a:off x="6217920" y="914400"/>
+            <a:ext cx="5669280" cy="1371600"/>
+          </a:xfrm>
+          <a:prstGeom prst="rect">
+            <a:avLst/>
+          </a:prstGeom>
+          <a:noFill/>
+          <a:ln/>
+        </p:spPr>
+        <p:txBody>
+          <a:bodyPr wrap="square" rtlCol="0" anchor="ctr"/>
+          <a:lstStyle/>
+          <a:p>
+            <a:pPr indent="0" marL="0">
+              <a:buNone/>
+            </a:pPr>
+            <a:r>
+              <a:rPr lang="en-US" sz="3200" b="1" dirty="0">
+                <a:solidFill>
+                  <a:srgbClr val="FFFFFF"/>
+                </a:solidFill>
+                <a:latin typeface="Calibri Light" pitchFamily="34" charset="0"/>
+                <a:ea typeface="Calibri Light" pitchFamily="34" charset="-122"/>
+                <a:cs typeface="Calibri Light" pitchFamily="34" charset="-120"/>
+              </a:rPr>
+              <a:t>El delegado ve su edificio</a:t>
+            </a:r>
+            <a:endParaRPr lang="en-US" sz="3200" dirty="0"/>
+          </a:p>
+        </p:txBody>
+      </p:sp>
+      <p:sp>
+        <p:nvSpPr>
+          <p:cNvPr id="6" name="Shape 3"/>
+          <p:cNvSpPr/>
+          <p:nvPr/>
+        </p:nvSpPr>
+        <p:spPr>
+          <a:xfrm>
+            <a:off x="6217920" y="2331720"/>
+            <a:ext cx="731520" cy="45720"/>
           </a:xfrm>
           <a:prstGeom prst="rect">
             <a:avLst/>
@@ -6844,7 +7221,176 @@
       </p:sp>
       <p:sp>
         <p:nvSpPr>
+          <p:cNvPr id="7" name="Text 4"/>
+          <p:cNvSpPr/>
+          <p:nvPr/>
+        </p:nvSpPr>
+        <p:spPr>
+          <a:xfrm>
+            <a:off x="6217920" y="2514600"/>
+            <a:ext cx="5669280" cy="1097280"/>
+          </a:xfrm>
+          <a:prstGeom prst="rect">
+            <a:avLst/>
+          </a:prstGeom>
+          <a:noFill/>
+          <a:ln/>
+        </p:spPr>
+        <p:txBody>
+          <a:bodyPr wrap="square" rtlCol="0" anchor="ctr"/>
+          <a:lstStyle/>
+          <a:p>
+            <a:pPr indent="0" marL="0">
+              <a:spcAft>
+                <a:spcPts val="600"/>
+              </a:spcAft>
+              <a:buNone/>
+            </a:pPr>
+            <a:r>
+              <a:rPr lang="en-US" sz="1500" dirty="0">
+                <a:solidFill>
+                  <a:srgbClr val="CBD5E1"/>
+                </a:solidFill>
+                <a:latin typeface="Calibri" pitchFamily="34" charset="0"/>
+                <a:ea typeface="Calibri" pitchFamily="34" charset="-122"/>
+                <a:cs typeface="Calibri" pitchFamily="34" charset="-120"/>
+              </a:rPr>
+              <a:t>Alertas automáticas de altas y bajas. Comunicación directa con la CD.</a:t>
+            </a:r>
+            <a:endParaRPr lang="en-US" sz="1500" dirty="0"/>
+          </a:p>
+        </p:txBody>
+      </p:sp>
+      <p:sp>
+        <p:nvSpPr>
+          <p:cNvPr id="8" name="Shape 5"/>
+          <p:cNvSpPr/>
+          <p:nvPr/>
+        </p:nvSpPr>
+        <p:spPr>
+          <a:xfrm>
+            <a:off x="6217920" y="4023360"/>
+            <a:ext cx="5669280" cy="1463040"/>
+          </a:xfrm>
+          <a:prstGeom prst="roundRect">
+            <a:avLst>
+              <a:gd name="adj" fmla="val 7500"/>
+            </a:avLst>
+          </a:prstGeom>
+          <a:solidFill>
+            <a:srgbClr val="1F72B8">
+              <a:alpha val="20000"/>
+            </a:srgbClr>
+          </a:solidFill>
+          <a:ln w="12700">
+            <a:solidFill>
+              <a:srgbClr val="1F72B8"/>
+            </a:solidFill>
+            <a:prstDash val="solid"/>
+          </a:ln>
+        </p:spPr>
+      </p:sp>
+      <p:sp>
+        <p:nvSpPr>
           <p:cNvPr id="9" name="Text 6"/>
+          <p:cNvSpPr/>
+          <p:nvPr/>
+        </p:nvSpPr>
+        <p:spPr>
+          <a:xfrm>
+            <a:off x="6446520" y="4160520"/>
+            <a:ext cx="5212080" cy="274320"/>
+          </a:xfrm>
+          <a:prstGeom prst="rect">
+            <a:avLst/>
+          </a:prstGeom>
+          <a:noFill/>
+          <a:ln/>
+        </p:spPr>
+        <p:txBody>
+          <a:bodyPr wrap="square" rtlCol="0" anchor="ctr"/>
+          <a:lstStyle/>
+          <a:p>
+            <a:pPr indent="0" marL="0">
+              <a:buNone/>
+            </a:pPr>
+            <a:r>
+              <a:rPr lang="en-US" sz="1000" b="1" spc="300" kern="0" dirty="0">
+                <a:solidFill>
+                  <a:srgbClr val="7FCFE5"/>
+                </a:solidFill>
+                <a:latin typeface="Calibri" pitchFamily="34" charset="0"/>
+                <a:ea typeface="Calibri" pitchFamily="34" charset="-122"/>
+                <a:cs typeface="Calibri" pitchFamily="34" charset="-120"/>
+              </a:rPr>
+              <a:t>💡 DATO DESTACADO</a:t>
+            </a:r>
+            <a:endParaRPr lang="en-US" sz="1000" dirty="0"/>
+          </a:p>
+        </p:txBody>
+      </p:sp>
+      <p:sp>
+        <p:nvSpPr>
+          <p:cNvPr id="10" name="Text 7"/>
+          <p:cNvSpPr/>
+          <p:nvPr/>
+        </p:nvSpPr>
+        <p:spPr>
+          <a:xfrm>
+            <a:off x="6446520" y="4434840"/>
+            <a:ext cx="5212080" cy="960120"/>
+          </a:xfrm>
+          <a:prstGeom prst="rect">
+            <a:avLst/>
+          </a:prstGeom>
+          <a:noFill/>
+          <a:ln/>
+        </p:spPr>
+        <p:txBody>
+          <a:bodyPr wrap="square" rtlCol="0" anchor="ctr"/>
+          <a:lstStyle/>
+          <a:p>
+            <a:pPr indent="0" marL="0">
+              <a:buNone/>
+            </a:pPr>
+            <a:r>
+              <a:rPr lang="en-US" sz="1300" dirty="0">
+                <a:solidFill>
+                  <a:srgbClr val="FFFFFF"/>
+                </a:solidFill>
+                <a:latin typeface="Calibri" pitchFamily="34" charset="0"/>
+                <a:ea typeface="Calibri" pitchFamily="34" charset="-122"/>
+                <a:cs typeface="Calibri" pitchFamily="34" charset="-120"/>
+              </a:rPr>
+              <a:t>Cada delegado recibe notificación cuando hay movimientos en su edificio o consultas.</a:t>
+            </a:r>
+            <a:endParaRPr lang="en-US" sz="1300" dirty="0"/>
+          </a:p>
+        </p:txBody>
+      </p:sp>
+      <p:sp>
+        <p:nvSpPr>
+          <p:cNvPr id="11" name="Shape 8"/>
+          <p:cNvSpPr/>
+          <p:nvPr/>
+        </p:nvSpPr>
+        <p:spPr>
+          <a:xfrm>
+            <a:off x="0" y="6492240"/>
+            <a:ext cx="12188952" cy="27432"/>
+          </a:xfrm>
+          <a:prstGeom prst="rect">
+            <a:avLst/>
+          </a:prstGeom>
+          <a:solidFill>
+            <a:srgbClr val="1F72B8"/>
+          </a:solidFill>
+          <a:ln/>
+        </p:spPr>
+      </p:sp>
+      <p:sp>
+        <p:nvSpPr>
+          <p:cNvPr id="12" name="Text 9"/>
           <p:cNvSpPr/>
           <p:nvPr/>
         </p:nvSpPr>
@@ -6883,7 +7429,7 @@
       </p:sp>
       <p:sp>
         <p:nvSpPr>
-          <p:cNvPr id="10" name="Text 7"/>
+          <p:cNvPr id="13" name="Text 10"/>
           <p:cNvSpPr/>
           <p:nvPr/>
         </p:nvSpPr>
@@ -6954,140 +7500,23 @@
       </p:grpSpPr>
       <p:sp>
         <p:nvSpPr>
-          <p:cNvPr id="2" name="Text 0"/>
-          <p:cNvSpPr/>
-          <p:nvPr/>
-        </p:nvSpPr>
-        <p:spPr>
-          <a:xfrm>
-            <a:off x="457200" y="320040"/>
-            <a:ext cx="7315200" cy="274320"/>
-          </a:xfrm>
-          <a:prstGeom prst="rect">
-            <a:avLst/>
-          </a:prstGeom>
-          <a:noFill/>
-          <a:ln/>
-        </p:spPr>
-        <p:txBody>
-          <a:bodyPr wrap="square" rtlCol="0" anchor="ctr"/>
-          <a:lstStyle/>
-          <a:p>
-            <a:pPr indent="0" marL="0">
-              <a:buNone/>
-            </a:pPr>
-            <a:r>
-              <a:rPr lang="en-US" sz="1100" b="1" spc="200" kern="0" dirty="0">
-                <a:solidFill>
-                  <a:srgbClr val="1F72B8"/>
-                </a:solidFill>
-                <a:latin typeface="Calibri" pitchFamily="34" charset="0"/>
-                <a:ea typeface="Calibri" pitchFamily="34" charset="-122"/>
-                <a:cs typeface="Calibri" pitchFamily="34" charset="-120"/>
-              </a:rPr>
-              <a:t>05 · EN VIVO · OPERACIÓN</a:t>
-            </a:r>
-            <a:endParaRPr lang="en-US" sz="1100" dirty="0"/>
-          </a:p>
-        </p:txBody>
-      </p:sp>
-      <p:sp>
-        <p:nvSpPr>
-          <p:cNvPr id="3" name="Text 1"/>
-          <p:cNvSpPr/>
-          <p:nvPr/>
-        </p:nvSpPr>
-        <p:spPr>
-          <a:xfrm>
-            <a:off x="457200" y="594360"/>
-            <a:ext cx="11247120" cy="502920"/>
-          </a:xfrm>
-          <a:prstGeom prst="rect">
-            <a:avLst/>
-          </a:prstGeom>
-          <a:noFill/>
-          <a:ln/>
-        </p:spPr>
-        <p:txBody>
-          <a:bodyPr wrap="square" rtlCol="0" anchor="ctr"/>
-          <a:lstStyle/>
-          <a:p>
-            <a:pPr indent="0" marL="0">
-              <a:buNone/>
-            </a:pPr>
-            <a:r>
-              <a:rPr lang="en-US" sz="2400" b="1" dirty="0">
-                <a:solidFill>
-                  <a:srgbClr val="FFFFFF"/>
-                </a:solidFill>
-                <a:latin typeface="Calibri Light" pitchFamily="34" charset="0"/>
-                <a:ea typeface="Calibri Light" pitchFamily="34" charset="-122"/>
-                <a:cs typeface="Calibri Light" pitchFamily="34" charset="-120"/>
-              </a:rPr>
-              <a:t>Altas y bajas accionables</a:t>
-            </a:r>
-            <a:endParaRPr lang="en-US" sz="2400" dirty="0"/>
-          </a:p>
-        </p:txBody>
-      </p:sp>
-      <p:sp>
-        <p:nvSpPr>
-          <p:cNvPr id="4" name="Text 2"/>
-          <p:cNvSpPr/>
-          <p:nvPr/>
-        </p:nvSpPr>
-        <p:spPr>
-          <a:xfrm>
-            <a:off x="457200" y="1097280"/>
-            <a:ext cx="11247120" cy="365760"/>
-          </a:xfrm>
-          <a:prstGeom prst="rect">
-            <a:avLst/>
-          </a:prstGeom>
-          <a:noFill/>
-          <a:ln/>
-        </p:spPr>
-        <p:txBody>
-          <a:bodyPr wrap="square" rtlCol="0" anchor="ctr"/>
-          <a:lstStyle/>
-          <a:p>
-            <a:pPr indent="0" marL="0">
-              <a:buNone/>
-            </a:pPr>
-            <a:r>
-              <a:rPr lang="en-US" sz="1300" dirty="0">
-                <a:solidFill>
-                  <a:srgbClr val="CBD5E1"/>
-                </a:solidFill>
-                <a:latin typeface="Calibri" pitchFamily="34" charset="0"/>
-                <a:ea typeface="Calibri" pitchFamily="34" charset="-122"/>
-                <a:cs typeface="Calibri" pitchFamily="34" charset="-120"/>
-              </a:rPr>
-              <a:t>Listado de movimientos con plantillas WhatsApp pre-cargadas para saludar / despedir.</a:t>
-            </a:r>
-            <a:endParaRPr lang="en-US" sz="1300" dirty="0"/>
-          </a:p>
-        </p:txBody>
-      </p:sp>
-      <p:sp>
-        <p:nvSpPr>
-          <p:cNvPr id="5" name="Shape 3"/>
-          <p:cNvSpPr/>
-          <p:nvPr/>
-        </p:nvSpPr>
-        <p:spPr>
-          <a:xfrm>
-            <a:off x="2883583" y="1737360"/>
-            <a:ext cx="6513226" cy="4572000"/>
+          <p:cNvPr id="2" name="Shape 0"/>
+          <p:cNvSpPr/>
+          <p:nvPr/>
+        </p:nvSpPr>
+        <p:spPr>
+          <a:xfrm>
+            <a:off x="420624" y="1485106"/>
+            <a:ext cx="5486400" cy="3851213"/>
           </a:xfrm>
           <a:prstGeom prst="roundRect">
             <a:avLst>
-              <a:gd name="adj" fmla="val 2000"/>
+              <a:gd name="adj" fmla="val 2849"/>
             </a:avLst>
           </a:prstGeom>
           <a:solidFill>
             <a:srgbClr val="000000">
-              <a:alpha val="15000"/>
+              <a:alpha val="30000"/>
             </a:srgbClr>
           </a:solidFill>
           <a:ln/>
@@ -7095,7 +7524,7 @@
       </p:sp>
       <p:pic>
         <p:nvPicPr>
-          <p:cNvPr id="6" name="Image 0" descr="public/imagenes para software/dashboardAltaBajas.PNG">    </p:cNvPr>
+          <p:cNvPr id="3" name="Image 0" descr="public/imagenes para software/dashboardAltaBajas.PNG">    </p:cNvPr>
           <p:cNvPicPr>
             <a:picLocks noChangeAspect="1"/>
           </p:cNvPicPr>
@@ -7109,8 +7538,8 @@
         </p:blipFill>
         <p:spPr>
           <a:xfrm>
-            <a:off x="2837863" y="1691640"/>
-            <a:ext cx="6513226" cy="4572000"/>
+            <a:off x="365760" y="1411954"/>
+            <a:ext cx="5486400" cy="3851213"/>
           </a:xfrm>
           <a:prstGeom prst="rect">
             <a:avLst/>
@@ -7119,53 +7548,92 @@
       </p:pic>
       <p:sp>
         <p:nvSpPr>
-          <p:cNvPr id="7" name="Text 4"/>
-          <p:cNvSpPr/>
-          <p:nvPr/>
-        </p:nvSpPr>
-        <p:spPr>
-          <a:xfrm>
-            <a:off x="914400" y="6355080"/>
-            <a:ext cx="10332720" cy="274320"/>
-          </a:xfrm>
-          <a:prstGeom prst="rect">
-            <a:avLst/>
-          </a:prstGeom>
-          <a:noFill/>
-          <a:ln/>
-        </p:spPr>
-        <p:txBody>
-          <a:bodyPr wrap="square" rtlCol="0" anchor="ctr"/>
-          <a:lstStyle/>
-          <a:p>
-            <a:pPr algn="ctr" indent="0" marL="0">
-              <a:buNone/>
-            </a:pPr>
-            <a:r>
-              <a:rPr lang="en-US" sz="1100" i="1" dirty="0">
-                <a:solidFill>
-                  <a:srgbClr val="CBD5E1"/>
-                </a:solidFill>
-                <a:latin typeface="Calibri" pitchFamily="34" charset="0"/>
-                <a:ea typeface="Calibri" pitchFamily="34" charset="-122"/>
-                <a:cs typeface="Calibri" pitchFamily="34" charset="-120"/>
-              </a:rPr>
-              <a:t>Botón "Mensaje bienvenida" aparece solo si la persona es APOPS — para no-APOPS es invitación.</a:t>
-            </a:r>
-            <a:endParaRPr lang="en-US" sz="1100" dirty="0"/>
-          </a:p>
-        </p:txBody>
-      </p:sp>
-      <p:sp>
-        <p:nvSpPr>
-          <p:cNvPr id="8" name="Shape 5"/>
-          <p:cNvSpPr/>
-          <p:nvPr/>
-        </p:nvSpPr>
-        <p:spPr>
-          <a:xfrm>
-            <a:off x="0" y="6492240"/>
-            <a:ext cx="12188952" cy="27432"/>
+          <p:cNvPr id="4" name="Text 1"/>
+          <p:cNvSpPr/>
+          <p:nvPr/>
+        </p:nvSpPr>
+        <p:spPr>
+          <a:xfrm>
+            <a:off x="6217920" y="548640"/>
+            <a:ext cx="5669280" cy="320040"/>
+          </a:xfrm>
+          <a:prstGeom prst="rect">
+            <a:avLst/>
+          </a:prstGeom>
+          <a:noFill/>
+          <a:ln/>
+        </p:spPr>
+        <p:txBody>
+          <a:bodyPr wrap="square" rtlCol="0" anchor="ctr"/>
+          <a:lstStyle/>
+          <a:p>
+            <a:pPr indent="0" marL="0">
+              <a:buNone/>
+            </a:pPr>
+            <a:r>
+              <a:rPr lang="en-US" sz="1200" b="1" spc="300" kern="0" dirty="0">
+                <a:solidFill>
+                  <a:srgbClr val="7FCFE5"/>
+                </a:solidFill>
+                <a:latin typeface="Calibri" pitchFamily="34" charset="0"/>
+                <a:ea typeface="Calibri" pitchFamily="34" charset="-122"/>
+                <a:cs typeface="Calibri" pitchFamily="34" charset="-120"/>
+              </a:rPr>
+              <a:t>05 · EN VIVO · OPERACIÓN</a:t>
+            </a:r>
+            <a:endParaRPr lang="en-US" sz="1200" dirty="0"/>
+          </a:p>
+        </p:txBody>
+      </p:sp>
+      <p:sp>
+        <p:nvSpPr>
+          <p:cNvPr id="5" name="Text 2"/>
+          <p:cNvSpPr/>
+          <p:nvPr/>
+        </p:nvSpPr>
+        <p:spPr>
+          <a:xfrm>
+            <a:off x="6217920" y="914400"/>
+            <a:ext cx="5669280" cy="1371600"/>
+          </a:xfrm>
+          <a:prstGeom prst="rect">
+            <a:avLst/>
+          </a:prstGeom>
+          <a:noFill/>
+          <a:ln/>
+        </p:spPr>
+        <p:txBody>
+          <a:bodyPr wrap="square" rtlCol="0" anchor="ctr"/>
+          <a:lstStyle/>
+          <a:p>
+            <a:pPr indent="0" marL="0">
+              <a:buNone/>
+            </a:pPr>
+            <a:r>
+              <a:rPr lang="en-US" sz="3200" b="1" dirty="0">
+                <a:solidFill>
+                  <a:srgbClr val="FFFFFF"/>
+                </a:solidFill>
+                <a:latin typeface="Calibri Light" pitchFamily="34" charset="0"/>
+                <a:ea typeface="Calibri Light" pitchFamily="34" charset="-122"/>
+                <a:cs typeface="Calibri Light" pitchFamily="34" charset="-120"/>
+              </a:rPr>
+              <a:t>Altas y bajas accionables</a:t>
+            </a:r>
+            <a:endParaRPr lang="en-US" sz="3200" dirty="0"/>
+          </a:p>
+        </p:txBody>
+      </p:sp>
+      <p:sp>
+        <p:nvSpPr>
+          <p:cNvPr id="6" name="Shape 3"/>
+          <p:cNvSpPr/>
+          <p:nvPr/>
+        </p:nvSpPr>
+        <p:spPr>
+          <a:xfrm>
+            <a:off x="6217920" y="2331720"/>
+            <a:ext cx="731520" cy="45720"/>
           </a:xfrm>
           <a:prstGeom prst="rect">
             <a:avLst/>
@@ -7178,7 +7646,176 @@
       </p:sp>
       <p:sp>
         <p:nvSpPr>
+          <p:cNvPr id="7" name="Text 4"/>
+          <p:cNvSpPr/>
+          <p:nvPr/>
+        </p:nvSpPr>
+        <p:spPr>
+          <a:xfrm>
+            <a:off x="6217920" y="2514600"/>
+            <a:ext cx="5669280" cy="1097280"/>
+          </a:xfrm>
+          <a:prstGeom prst="rect">
+            <a:avLst/>
+          </a:prstGeom>
+          <a:noFill/>
+          <a:ln/>
+        </p:spPr>
+        <p:txBody>
+          <a:bodyPr wrap="square" rtlCol="0" anchor="ctr"/>
+          <a:lstStyle/>
+          <a:p>
+            <a:pPr indent="0" marL="0">
+              <a:spcAft>
+                <a:spcPts val="600"/>
+              </a:spcAft>
+              <a:buNone/>
+            </a:pPr>
+            <a:r>
+              <a:rPr lang="en-US" sz="1500" dirty="0">
+                <a:solidFill>
+                  <a:srgbClr val="CBD5E1"/>
+                </a:solidFill>
+                <a:latin typeface="Calibri" pitchFamily="34" charset="0"/>
+                <a:ea typeface="Calibri" pitchFamily="34" charset="-122"/>
+                <a:cs typeface="Calibri" pitchFamily="34" charset="-120"/>
+              </a:rPr>
+              <a:t>Listado de movimientos con plantillas WhatsApp pre-cargadas para saludar / despedir.</a:t>
+            </a:r>
+            <a:endParaRPr lang="en-US" sz="1500" dirty="0"/>
+          </a:p>
+        </p:txBody>
+      </p:sp>
+      <p:sp>
+        <p:nvSpPr>
+          <p:cNvPr id="8" name="Shape 5"/>
+          <p:cNvSpPr/>
+          <p:nvPr/>
+        </p:nvSpPr>
+        <p:spPr>
+          <a:xfrm>
+            <a:off x="6217920" y="4023360"/>
+            <a:ext cx="5669280" cy="1463040"/>
+          </a:xfrm>
+          <a:prstGeom prst="roundRect">
+            <a:avLst>
+              <a:gd name="adj" fmla="val 7500"/>
+            </a:avLst>
+          </a:prstGeom>
+          <a:solidFill>
+            <a:srgbClr val="1F72B8">
+              <a:alpha val="20000"/>
+            </a:srgbClr>
+          </a:solidFill>
+          <a:ln w="12700">
+            <a:solidFill>
+              <a:srgbClr val="1F72B8"/>
+            </a:solidFill>
+            <a:prstDash val="solid"/>
+          </a:ln>
+        </p:spPr>
+      </p:sp>
+      <p:sp>
+        <p:nvSpPr>
           <p:cNvPr id="9" name="Text 6"/>
+          <p:cNvSpPr/>
+          <p:nvPr/>
+        </p:nvSpPr>
+        <p:spPr>
+          <a:xfrm>
+            <a:off x="6446520" y="4160520"/>
+            <a:ext cx="5212080" cy="274320"/>
+          </a:xfrm>
+          <a:prstGeom prst="rect">
+            <a:avLst/>
+          </a:prstGeom>
+          <a:noFill/>
+          <a:ln/>
+        </p:spPr>
+        <p:txBody>
+          <a:bodyPr wrap="square" rtlCol="0" anchor="ctr"/>
+          <a:lstStyle/>
+          <a:p>
+            <a:pPr indent="0" marL="0">
+              <a:buNone/>
+            </a:pPr>
+            <a:r>
+              <a:rPr lang="en-US" sz="1000" b="1" spc="300" kern="0" dirty="0">
+                <a:solidFill>
+                  <a:srgbClr val="7FCFE5"/>
+                </a:solidFill>
+                <a:latin typeface="Calibri" pitchFamily="34" charset="0"/>
+                <a:ea typeface="Calibri" pitchFamily="34" charset="-122"/>
+                <a:cs typeface="Calibri" pitchFamily="34" charset="-120"/>
+              </a:rPr>
+              <a:t>💡 DATO DESTACADO</a:t>
+            </a:r>
+            <a:endParaRPr lang="en-US" sz="1000" dirty="0"/>
+          </a:p>
+        </p:txBody>
+      </p:sp>
+      <p:sp>
+        <p:nvSpPr>
+          <p:cNvPr id="10" name="Text 7"/>
+          <p:cNvSpPr/>
+          <p:nvPr/>
+        </p:nvSpPr>
+        <p:spPr>
+          <a:xfrm>
+            <a:off x="6446520" y="4434840"/>
+            <a:ext cx="5212080" cy="960120"/>
+          </a:xfrm>
+          <a:prstGeom prst="rect">
+            <a:avLst/>
+          </a:prstGeom>
+          <a:noFill/>
+          <a:ln/>
+        </p:spPr>
+        <p:txBody>
+          <a:bodyPr wrap="square" rtlCol="0" anchor="ctr"/>
+          <a:lstStyle/>
+          <a:p>
+            <a:pPr indent="0" marL="0">
+              <a:buNone/>
+            </a:pPr>
+            <a:r>
+              <a:rPr lang="en-US" sz="1300" dirty="0">
+                <a:solidFill>
+                  <a:srgbClr val="FFFFFF"/>
+                </a:solidFill>
+                <a:latin typeface="Calibri" pitchFamily="34" charset="0"/>
+                <a:ea typeface="Calibri" pitchFamily="34" charset="-122"/>
+                <a:cs typeface="Calibri" pitchFamily="34" charset="-120"/>
+              </a:rPr>
+              <a:t>Botón "Mensaje bienvenida" aparece solo si la persona es APOPS — para no-APOPS es invitación.</a:t>
+            </a:r>
+            <a:endParaRPr lang="en-US" sz="1300" dirty="0"/>
+          </a:p>
+        </p:txBody>
+      </p:sp>
+      <p:sp>
+        <p:nvSpPr>
+          <p:cNvPr id="11" name="Shape 8"/>
+          <p:cNvSpPr/>
+          <p:nvPr/>
+        </p:nvSpPr>
+        <p:spPr>
+          <a:xfrm>
+            <a:off x="0" y="6492240"/>
+            <a:ext cx="12188952" cy="27432"/>
+          </a:xfrm>
+          <a:prstGeom prst="rect">
+            <a:avLst/>
+          </a:prstGeom>
+          <a:solidFill>
+            <a:srgbClr val="1F72B8"/>
+          </a:solidFill>
+          <a:ln/>
+        </p:spPr>
+      </p:sp>
+      <p:sp>
+        <p:nvSpPr>
+          <p:cNvPr id="12" name="Text 9"/>
           <p:cNvSpPr/>
           <p:nvPr/>
         </p:nvSpPr>
@@ -7217,7 +7854,7 @@
       </p:sp>
       <p:sp>
         <p:nvSpPr>
-          <p:cNvPr id="10" name="Text 7"/>
+          <p:cNvPr id="13" name="Text 10"/>
           <p:cNvSpPr/>
           <p:nvPr/>
         </p:nvSpPr>

--- a/Presentacion-APOPS-Siempre.pptx
+++ b/Presentacion-APOPS-Siempre.pptx
@@ -4956,12 +4956,12 @@
         </p:nvSpPr>
         <p:spPr>
           <a:xfrm>
-            <a:off x="420624" y="487550"/>
-            <a:ext cx="5486400" cy="5846323"/>
+            <a:off x="420624" y="438912"/>
+            <a:ext cx="5943600" cy="6333517"/>
           </a:xfrm>
           <a:prstGeom prst="roundRect">
             <a:avLst>
-              <a:gd name="adj" fmla="val 2000"/>
+              <a:gd name="adj" fmla="val 1846"/>
             </a:avLst>
           </a:prstGeom>
           <a:solidFill>
@@ -4988,8 +4988,8 @@
         </p:blipFill>
         <p:spPr>
           <a:xfrm>
-            <a:off x="365760" y="414398"/>
-            <a:ext cx="5486400" cy="5846323"/>
+            <a:off x="365760" y="365760"/>
+            <a:ext cx="5943600" cy="6333517"/>
           </a:xfrm>
           <a:prstGeom prst="rect">
             <a:avLst/>
@@ -5381,12 +5381,12 @@
         </p:nvSpPr>
         <p:spPr>
           <a:xfrm>
-            <a:off x="1789367" y="438912"/>
-            <a:ext cx="2748915" cy="5943600"/>
+            <a:off x="1912239" y="438912"/>
+            <a:ext cx="2960370" cy="6400800"/>
           </a:xfrm>
           <a:prstGeom prst="roundRect">
             <a:avLst>
-              <a:gd name="adj" fmla="val 3992"/>
+              <a:gd name="adj" fmla="val 3707"/>
             </a:avLst>
           </a:prstGeom>
           <a:solidFill>
@@ -5413,8 +5413,8 @@
         </p:blipFill>
         <p:spPr>
           <a:xfrm>
-            <a:off x="1734503" y="365760"/>
-            <a:ext cx="2748915" cy="5943600"/>
+            <a:off x="1857375" y="365760"/>
+            <a:ext cx="2960370" cy="6400800"/>
           </a:xfrm>
           <a:prstGeom prst="rect">
             <a:avLst/>
@@ -5806,12 +5806,12 @@
         </p:nvSpPr>
         <p:spPr>
           <a:xfrm>
-            <a:off x="909722" y="438912"/>
-            <a:ext cx="4508205" cy="5943600"/>
+            <a:off x="964929" y="438912"/>
+            <a:ext cx="4854990" cy="6400800"/>
           </a:xfrm>
           <a:prstGeom prst="roundRect">
             <a:avLst>
-              <a:gd name="adj" fmla="val 2434"/>
+              <a:gd name="adj" fmla="val 2260"/>
             </a:avLst>
           </a:prstGeom>
           <a:solidFill>
@@ -5838,8 +5838,8 @@
         </p:blipFill>
         <p:spPr>
           <a:xfrm>
-            <a:off x="854858" y="365760"/>
-            <a:ext cx="4508205" cy="5943600"/>
+            <a:off x="910065" y="365760"/>
+            <a:ext cx="4854990" cy="6400800"/>
           </a:xfrm>
           <a:prstGeom prst="rect">
             <a:avLst/>
@@ -6231,12 +6231,12 @@
         </p:nvSpPr>
         <p:spPr>
           <a:xfrm>
-            <a:off x="420624" y="1595022"/>
-            <a:ext cx="5486400" cy="3631381"/>
+            <a:off x="420624" y="438912"/>
+            <a:ext cx="5943600" cy="3933996"/>
           </a:xfrm>
           <a:prstGeom prst="roundRect">
             <a:avLst>
-              <a:gd name="adj" fmla="val 3022"/>
+              <a:gd name="adj" fmla="val 2789"/>
             </a:avLst>
           </a:prstGeom>
           <a:solidFill>
@@ -6263,8 +6263,8 @@
         </p:blipFill>
         <p:spPr>
           <a:xfrm>
-            <a:off x="365760" y="1521870"/>
-            <a:ext cx="5486400" cy="3631381"/>
+            <a:off x="365760" y="365760"/>
+            <a:ext cx="5943600" cy="3933996"/>
           </a:xfrm>
           <a:prstGeom prst="rect">
             <a:avLst/>
@@ -6656,12 +6656,12 @@
         </p:nvSpPr>
         <p:spPr>
           <a:xfrm>
-            <a:off x="1789367" y="438912"/>
-            <a:ext cx="2748915" cy="5943600"/>
+            <a:off x="1912239" y="438912"/>
+            <a:ext cx="2960370" cy="6400800"/>
           </a:xfrm>
           <a:prstGeom prst="roundRect">
             <a:avLst>
-              <a:gd name="adj" fmla="val 3992"/>
+              <a:gd name="adj" fmla="val 3707"/>
             </a:avLst>
           </a:prstGeom>
           <a:solidFill>
@@ -6688,8 +6688,8 @@
         </p:blipFill>
         <p:spPr>
           <a:xfrm>
-            <a:off x="1734503" y="365760"/>
-            <a:ext cx="2748915" cy="5943600"/>
+            <a:off x="1857375" y="365760"/>
+            <a:ext cx="2960370" cy="6400800"/>
           </a:xfrm>
           <a:prstGeom prst="rect">
             <a:avLst/>
@@ -7081,12 +7081,12 @@
         </p:nvSpPr>
         <p:spPr>
           <a:xfrm>
-            <a:off x="1789367" y="438912"/>
-            <a:ext cx="2748915" cy="5943600"/>
+            <a:off x="1912239" y="438912"/>
+            <a:ext cx="2960370" cy="6400800"/>
           </a:xfrm>
           <a:prstGeom prst="roundRect">
             <a:avLst>
-              <a:gd name="adj" fmla="val 3992"/>
+              <a:gd name="adj" fmla="val 3707"/>
             </a:avLst>
           </a:prstGeom>
           <a:solidFill>
@@ -7113,8 +7113,8 @@
         </p:blipFill>
         <p:spPr>
           <a:xfrm>
-            <a:off x="1734503" y="365760"/>
-            <a:ext cx="2748915" cy="5943600"/>
+            <a:off x="1857375" y="365760"/>
+            <a:ext cx="2960370" cy="6400800"/>
           </a:xfrm>
           <a:prstGeom prst="rect">
             <a:avLst/>
@@ -7506,12 +7506,12 @@
         </p:nvSpPr>
         <p:spPr>
           <a:xfrm>
-            <a:off x="420624" y="1485106"/>
-            <a:ext cx="5486400" cy="3851213"/>
+            <a:off x="420624" y="438912"/>
+            <a:ext cx="5943600" cy="4172147"/>
           </a:xfrm>
           <a:prstGeom prst="roundRect">
             <a:avLst>
-              <a:gd name="adj" fmla="val 2849"/>
+              <a:gd name="adj" fmla="val 2630"/>
             </a:avLst>
           </a:prstGeom>
           <a:solidFill>
@@ -7538,8 +7538,8 @@
         </p:blipFill>
         <p:spPr>
           <a:xfrm>
-            <a:off x="365760" y="1411954"/>
-            <a:ext cx="5486400" cy="3851213"/>
+            <a:off x="365760" y="365760"/>
+            <a:ext cx="5943600" cy="4172147"/>
           </a:xfrm>
           <a:prstGeom prst="rect">
             <a:avLst/>

--- a/Presentacion-APOPS-Siempre.pptx
+++ b/Presentacion-APOPS-Siempre.pptx
@@ -4956,12 +4956,12 @@
         </p:nvSpPr>
         <p:spPr>
           <a:xfrm>
-            <a:off x="420624" y="438912"/>
-            <a:ext cx="5943600" cy="6333517"/>
+            <a:off x="589507" y="576072"/>
+            <a:ext cx="5148635" cy="5486400"/>
           </a:xfrm>
           <a:prstGeom prst="roundRect">
             <a:avLst>
-              <a:gd name="adj" fmla="val 1846"/>
+              <a:gd name="adj" fmla="val 2131"/>
             </a:avLst>
           </a:prstGeom>
           <a:solidFill>
@@ -4988,8 +4988,8 @@
         </p:blipFill>
         <p:spPr>
           <a:xfrm>
-            <a:off x="365760" y="365760"/>
-            <a:ext cx="5943600" cy="6333517"/>
+            <a:off x="534643" y="502920"/>
+            <a:ext cx="5148635" cy="5486400"/>
           </a:xfrm>
           <a:prstGeom prst="rect">
             <a:avLst/>
@@ -5381,12 +5381,12 @@
         </p:nvSpPr>
         <p:spPr>
           <a:xfrm>
-            <a:off x="1912239" y="438912"/>
-            <a:ext cx="2960370" cy="6400800"/>
+            <a:off x="1895094" y="576072"/>
+            <a:ext cx="2537460" cy="5486400"/>
           </a:xfrm>
           <a:prstGeom prst="roundRect">
             <a:avLst>
-              <a:gd name="adj" fmla="val 3707"/>
+              <a:gd name="adj" fmla="val 4324"/>
             </a:avLst>
           </a:prstGeom>
           <a:solidFill>
@@ -5413,8 +5413,8 @@
         </p:blipFill>
         <p:spPr>
           <a:xfrm>
-            <a:off x="1857375" y="365760"/>
-            <a:ext cx="2960370" cy="6400800"/>
+            <a:off x="1840230" y="502920"/>
+            <a:ext cx="2537460" cy="5486400"/>
           </a:xfrm>
           <a:prstGeom prst="rect">
             <a:avLst/>
@@ -5806,12 +5806,12 @@
         </p:nvSpPr>
         <p:spPr>
           <a:xfrm>
-            <a:off x="964929" y="438912"/>
-            <a:ext cx="4854990" cy="6400800"/>
+            <a:off x="1083114" y="576072"/>
+            <a:ext cx="4161420" cy="5486400"/>
           </a:xfrm>
           <a:prstGeom prst="roundRect">
             <a:avLst>
-              <a:gd name="adj" fmla="val 2260"/>
+              <a:gd name="adj" fmla="val 2637"/>
             </a:avLst>
           </a:prstGeom>
           <a:solidFill>
@@ -5838,8 +5838,8 @@
         </p:blipFill>
         <p:spPr>
           <a:xfrm>
-            <a:off x="910065" y="365760"/>
-            <a:ext cx="4854990" cy="6400800"/>
+            <a:off x="1028250" y="502920"/>
+            <a:ext cx="4161420" cy="5486400"/>
           </a:xfrm>
           <a:prstGeom prst="rect">
             <a:avLst/>
@@ -6231,12 +6231,12 @@
         </p:nvSpPr>
         <p:spPr>
           <a:xfrm>
-            <a:off x="420624" y="438912"/>
-            <a:ext cx="5943600" cy="3933996"/>
+            <a:off x="512064" y="576072"/>
+            <a:ext cx="5303520" cy="3510335"/>
           </a:xfrm>
           <a:prstGeom prst="roundRect">
             <a:avLst>
-              <a:gd name="adj" fmla="val 2789"/>
+              <a:gd name="adj" fmla="val 3126"/>
             </a:avLst>
           </a:prstGeom>
           <a:solidFill>
@@ -6263,8 +6263,8 @@
         </p:blipFill>
         <p:spPr>
           <a:xfrm>
-            <a:off x="365760" y="365760"/>
-            <a:ext cx="5943600" cy="3933996"/>
+            <a:off x="457200" y="502920"/>
+            <a:ext cx="5303520" cy="3510335"/>
           </a:xfrm>
           <a:prstGeom prst="rect">
             <a:avLst/>
@@ -6656,12 +6656,12 @@
         </p:nvSpPr>
         <p:spPr>
           <a:xfrm>
-            <a:off x="1912239" y="438912"/>
-            <a:ext cx="2960370" cy="6400800"/>
+            <a:off x="1895094" y="576072"/>
+            <a:ext cx="2537460" cy="5486400"/>
           </a:xfrm>
           <a:prstGeom prst="roundRect">
             <a:avLst>
-              <a:gd name="adj" fmla="val 3707"/>
+              <a:gd name="adj" fmla="val 4324"/>
             </a:avLst>
           </a:prstGeom>
           <a:solidFill>
@@ -6688,8 +6688,8 @@
         </p:blipFill>
         <p:spPr>
           <a:xfrm>
-            <a:off x="1857375" y="365760"/>
-            <a:ext cx="2960370" cy="6400800"/>
+            <a:off x="1840230" y="502920"/>
+            <a:ext cx="2537460" cy="5486400"/>
           </a:xfrm>
           <a:prstGeom prst="rect">
             <a:avLst/>
@@ -7081,12 +7081,12 @@
         </p:nvSpPr>
         <p:spPr>
           <a:xfrm>
-            <a:off x="1912239" y="438912"/>
-            <a:ext cx="2960370" cy="6400800"/>
+            <a:off x="1895094" y="576072"/>
+            <a:ext cx="2537460" cy="5486400"/>
           </a:xfrm>
           <a:prstGeom prst="roundRect">
             <a:avLst>
-              <a:gd name="adj" fmla="val 3707"/>
+              <a:gd name="adj" fmla="val 4324"/>
             </a:avLst>
           </a:prstGeom>
           <a:solidFill>
@@ -7113,8 +7113,8 @@
         </p:blipFill>
         <p:spPr>
           <a:xfrm>
-            <a:off x="1857375" y="365760"/>
-            <a:ext cx="2960370" cy="6400800"/>
+            <a:off x="1840230" y="502920"/>
+            <a:ext cx="2537460" cy="5486400"/>
           </a:xfrm>
           <a:prstGeom prst="rect">
             <a:avLst/>
@@ -7506,12 +7506,12 @@
         </p:nvSpPr>
         <p:spPr>
           <a:xfrm>
-            <a:off x="420624" y="438912"/>
-            <a:ext cx="5943600" cy="4172147"/>
+            <a:off x="512064" y="576072"/>
+            <a:ext cx="5303520" cy="3722839"/>
           </a:xfrm>
           <a:prstGeom prst="roundRect">
             <a:avLst>
-              <a:gd name="adj" fmla="val 2630"/>
+              <a:gd name="adj" fmla="val 2947"/>
             </a:avLst>
           </a:prstGeom>
           <a:solidFill>
@@ -7538,8 +7538,8 @@
         </p:blipFill>
         <p:spPr>
           <a:xfrm>
-            <a:off x="365760" y="365760"/>
-            <a:ext cx="5943600" cy="4172147"/>
+            <a:off x="457200" y="502920"/>
+            <a:ext cx="5303520" cy="3722839"/>
           </a:xfrm>
           <a:prstGeom prst="rect">
             <a:avLst/>

--- a/Presentacion-APOPS-Siempre.pptx
+++ b/Presentacion-APOPS-Siempre.pptx
@@ -8109,32 +8109,59 @@
       </p:sp>
       <p:sp>
         <p:nvSpPr>
-          <p:cNvPr id="8" name="Text 6"/>
+          <p:cNvPr id="8" name="Shape 6"/>
           <p:cNvSpPr/>
           <p:nvPr/>
         </p:nvSpPr>
         <p:spPr>
           <a:xfrm>
             <a:off x="822960" y="2926080"/>
-            <a:ext cx="914400" cy="731520"/>
-          </a:xfrm>
-          <a:prstGeom prst="rect">
-            <a:avLst/>
-          </a:prstGeom>
-          <a:noFill/>
-          <a:ln/>
-        </p:spPr>
-        <p:txBody>
-          <a:bodyPr wrap="square" rtlCol="0" anchor="ctr"/>
-          <a:lstStyle/>
-          <a:p>
-            <a:pPr indent="0" marL="0">
-              <a:buNone/>
-            </a:pPr>
-            <a:r>
-              <a:rPr lang="en-US" sz="4000" dirty="0">
-                <a:solidFill>
-                  <a:srgbClr val="000000"/>
+            <a:ext cx="822960" cy="822960"/>
+          </a:xfrm>
+          <a:prstGeom prst="ellipse">
+            <a:avLst/>
+          </a:prstGeom>
+          <a:solidFill>
+            <a:srgbClr val="7FCFE5">
+              <a:alpha val="40000"/>
+            </a:srgbClr>
+          </a:solidFill>
+          <a:ln w="19050">
+            <a:solidFill>
+              <a:srgbClr val="7FCFE5"/>
+            </a:solidFill>
+            <a:prstDash val="solid"/>
+          </a:ln>
+        </p:spPr>
+      </p:sp>
+      <p:sp>
+        <p:nvSpPr>
+          <p:cNvPr id="9" name="Text 7"/>
+          <p:cNvSpPr/>
+          <p:nvPr/>
+        </p:nvSpPr>
+        <p:spPr>
+          <a:xfrm>
+            <a:off x="822960" y="2926080"/>
+            <a:ext cx="822960" cy="822960"/>
+          </a:xfrm>
+          <a:prstGeom prst="rect">
+            <a:avLst/>
+          </a:prstGeom>
+          <a:noFill/>
+          <a:ln/>
+        </p:spPr>
+        <p:txBody>
+          <a:bodyPr wrap="square" rtlCol="0" anchor="ctr"/>
+          <a:lstStyle/>
+          <a:p>
+            <a:pPr algn="ctr" indent="0" marL="0">
+              <a:buNone/>
+            </a:pPr>
+            <a:r>
+              <a:rPr lang="en-US" sz="3420" dirty="0">
+                <a:solidFill>
+                  <a:srgbClr val="FFFFFF"/>
                 </a:solidFill>
                 <a:latin typeface="Calibri" pitchFamily="34" charset="0"/>
                 <a:ea typeface="Calibri" pitchFamily="34" charset="-122"/>
@@ -8142,13 +8169,13 @@
               </a:rPr>
               <a:t>🌐</a:t>
             </a:r>
-            <a:endParaRPr lang="en-US" sz="4000" dirty="0"/>
-          </a:p>
-        </p:txBody>
-      </p:sp>
-      <p:sp>
-        <p:nvSpPr>
-          <p:cNvPr id="9" name="Text 7"/>
+            <a:endParaRPr lang="en-US" sz="3420" dirty="0"/>
+          </a:p>
+        </p:txBody>
+      </p:sp>
+      <p:sp>
+        <p:nvSpPr>
+          <p:cNvPr id="10" name="Text 8"/>
           <p:cNvSpPr/>
           <p:nvPr/>
         </p:nvSpPr>
@@ -8187,7 +8214,7 @@
       </p:sp>
       <p:sp>
         <p:nvSpPr>
-          <p:cNvPr id="10" name="Text 8"/>
+          <p:cNvPr id="11" name="Text 9"/>
           <p:cNvSpPr/>
           <p:nvPr/>
         </p:nvSpPr>
@@ -8226,7 +8253,7 @@
       </p:sp>
       <p:sp>
         <p:nvSpPr>
-          <p:cNvPr id="11" name="Text 9"/>
+          <p:cNvPr id="12" name="Text 10"/>
           <p:cNvSpPr/>
           <p:nvPr/>
         </p:nvSpPr>
@@ -8265,7 +8292,7 @@
       </p:sp>
       <p:sp>
         <p:nvSpPr>
-          <p:cNvPr id="12" name="Shape 10"/>
+          <p:cNvPr id="13" name="Shape 11"/>
           <p:cNvSpPr/>
           <p:nvPr/>
         </p:nvSpPr>
@@ -8292,7 +8319,7 @@
       </p:sp>
       <p:sp>
         <p:nvSpPr>
-          <p:cNvPr id="13" name="Shape 11"/>
+          <p:cNvPr id="14" name="Shape 12"/>
           <p:cNvSpPr/>
           <p:nvPr/>
         </p:nvSpPr>
@@ -8312,32 +8339,59 @@
       </p:sp>
       <p:sp>
         <p:nvSpPr>
-          <p:cNvPr id="14" name="Text 12"/>
+          <p:cNvPr id="15" name="Shape 13"/>
           <p:cNvSpPr/>
           <p:nvPr/>
         </p:nvSpPr>
         <p:spPr>
           <a:xfrm>
             <a:off x="4617720" y="2926080"/>
-            <a:ext cx="914400" cy="731520"/>
-          </a:xfrm>
-          <a:prstGeom prst="rect">
-            <a:avLst/>
-          </a:prstGeom>
-          <a:noFill/>
-          <a:ln/>
-        </p:spPr>
-        <p:txBody>
-          <a:bodyPr wrap="square" rtlCol="0" anchor="ctr"/>
-          <a:lstStyle/>
-          <a:p>
-            <a:pPr indent="0" marL="0">
-              <a:buNone/>
-            </a:pPr>
-            <a:r>
-              <a:rPr lang="en-US" sz="4000" dirty="0">
-                <a:solidFill>
-                  <a:srgbClr val="000000"/>
+            <a:ext cx="822960" cy="822960"/>
+          </a:xfrm>
+          <a:prstGeom prst="ellipse">
+            <a:avLst/>
+          </a:prstGeom>
+          <a:solidFill>
+            <a:srgbClr val="7FCFE5">
+              <a:alpha val="40000"/>
+            </a:srgbClr>
+          </a:solidFill>
+          <a:ln w="19050">
+            <a:solidFill>
+              <a:srgbClr val="7FCFE5"/>
+            </a:solidFill>
+            <a:prstDash val="solid"/>
+          </a:ln>
+        </p:spPr>
+      </p:sp>
+      <p:sp>
+        <p:nvSpPr>
+          <p:cNvPr id="16" name="Text 14"/>
+          <p:cNvSpPr/>
+          <p:nvPr/>
+        </p:nvSpPr>
+        <p:spPr>
+          <a:xfrm>
+            <a:off x="4617720" y="2926080"/>
+            <a:ext cx="822960" cy="822960"/>
+          </a:xfrm>
+          <a:prstGeom prst="rect">
+            <a:avLst/>
+          </a:prstGeom>
+          <a:noFill/>
+          <a:ln/>
+        </p:spPr>
+        <p:txBody>
+          <a:bodyPr wrap="square" rtlCol="0" anchor="ctr"/>
+          <a:lstStyle/>
+          <a:p>
+            <a:pPr algn="ctr" indent="0" marL="0">
+              <a:buNone/>
+            </a:pPr>
+            <a:r>
+              <a:rPr lang="en-US" sz="3420" dirty="0">
+                <a:solidFill>
+                  <a:srgbClr val="FFFFFF"/>
                 </a:solidFill>
                 <a:latin typeface="Calibri" pitchFamily="34" charset="0"/>
                 <a:ea typeface="Calibri" pitchFamily="34" charset="-122"/>
@@ -8345,13 +8399,13 @@
               </a:rPr>
               <a:t>📰</a:t>
             </a:r>
-            <a:endParaRPr lang="en-US" sz="4000" dirty="0"/>
-          </a:p>
-        </p:txBody>
-      </p:sp>
-      <p:sp>
-        <p:nvSpPr>
-          <p:cNvPr id="15" name="Text 13"/>
+            <a:endParaRPr lang="en-US" sz="3420" dirty="0"/>
+          </a:p>
+        </p:txBody>
+      </p:sp>
+      <p:sp>
+        <p:nvSpPr>
+          <p:cNvPr id="17" name="Text 15"/>
           <p:cNvSpPr/>
           <p:nvPr/>
         </p:nvSpPr>
@@ -8390,7 +8444,7 @@
       </p:sp>
       <p:sp>
         <p:nvSpPr>
-          <p:cNvPr id="16" name="Text 14"/>
+          <p:cNvPr id="18" name="Text 16"/>
           <p:cNvSpPr/>
           <p:nvPr/>
         </p:nvSpPr>
@@ -8429,7 +8483,7 @@
       </p:sp>
       <p:sp>
         <p:nvSpPr>
-          <p:cNvPr id="17" name="Text 15"/>
+          <p:cNvPr id="19" name="Text 17"/>
           <p:cNvSpPr/>
           <p:nvPr/>
         </p:nvSpPr>
@@ -8468,7 +8522,7 @@
       </p:sp>
       <p:sp>
         <p:nvSpPr>
-          <p:cNvPr id="18" name="Shape 16"/>
+          <p:cNvPr id="20" name="Shape 18"/>
           <p:cNvSpPr/>
           <p:nvPr/>
         </p:nvSpPr>
@@ -8495,7 +8549,7 @@
       </p:sp>
       <p:sp>
         <p:nvSpPr>
-          <p:cNvPr id="19" name="Shape 17"/>
+          <p:cNvPr id="21" name="Shape 19"/>
           <p:cNvSpPr/>
           <p:nvPr/>
         </p:nvSpPr>
@@ -8515,32 +8569,59 @@
       </p:sp>
       <p:sp>
         <p:nvSpPr>
-          <p:cNvPr id="20" name="Text 18"/>
+          <p:cNvPr id="22" name="Shape 20"/>
           <p:cNvSpPr/>
           <p:nvPr/>
         </p:nvSpPr>
         <p:spPr>
           <a:xfrm>
             <a:off x="8412480" y="2926080"/>
-            <a:ext cx="914400" cy="731520"/>
-          </a:xfrm>
-          <a:prstGeom prst="rect">
-            <a:avLst/>
-          </a:prstGeom>
-          <a:noFill/>
-          <a:ln/>
-        </p:spPr>
-        <p:txBody>
-          <a:bodyPr wrap="square" rtlCol="0" anchor="ctr"/>
-          <a:lstStyle/>
-          <a:p>
-            <a:pPr indent="0" marL="0">
-              <a:buNone/>
-            </a:pPr>
-            <a:r>
-              <a:rPr lang="en-US" sz="4000" dirty="0">
-                <a:solidFill>
-                  <a:srgbClr val="000000"/>
+            <a:ext cx="822960" cy="822960"/>
+          </a:xfrm>
+          <a:prstGeom prst="ellipse">
+            <a:avLst/>
+          </a:prstGeom>
+          <a:solidFill>
+            <a:srgbClr val="7FCFE5">
+              <a:alpha val="40000"/>
+            </a:srgbClr>
+          </a:solidFill>
+          <a:ln w="19050">
+            <a:solidFill>
+              <a:srgbClr val="7FCFE5"/>
+            </a:solidFill>
+            <a:prstDash val="solid"/>
+          </a:ln>
+        </p:spPr>
+      </p:sp>
+      <p:sp>
+        <p:nvSpPr>
+          <p:cNvPr id="23" name="Text 21"/>
+          <p:cNvSpPr/>
+          <p:nvPr/>
+        </p:nvSpPr>
+        <p:spPr>
+          <a:xfrm>
+            <a:off x="8412480" y="2926080"/>
+            <a:ext cx="822960" cy="822960"/>
+          </a:xfrm>
+          <a:prstGeom prst="rect">
+            <a:avLst/>
+          </a:prstGeom>
+          <a:noFill/>
+          <a:ln/>
+        </p:spPr>
+        <p:txBody>
+          <a:bodyPr wrap="square" rtlCol="0" anchor="ctr"/>
+          <a:lstStyle/>
+          <a:p>
+            <a:pPr algn="ctr" indent="0" marL="0">
+              <a:buNone/>
+            </a:pPr>
+            <a:r>
+              <a:rPr lang="en-US" sz="3420" dirty="0">
+                <a:solidFill>
+                  <a:srgbClr val="FFFFFF"/>
                 </a:solidFill>
                 <a:latin typeface="Calibri" pitchFamily="34" charset="0"/>
                 <a:ea typeface="Calibri" pitchFamily="34" charset="-122"/>
@@ -8548,13 +8629,13 @@
               </a:rPr>
               <a:t>🔗</a:t>
             </a:r>
-            <a:endParaRPr lang="en-US" sz="4000" dirty="0"/>
-          </a:p>
-        </p:txBody>
-      </p:sp>
-      <p:sp>
-        <p:nvSpPr>
-          <p:cNvPr id="21" name="Text 19"/>
+            <a:endParaRPr lang="en-US" sz="3420" dirty="0"/>
+          </a:p>
+        </p:txBody>
+      </p:sp>
+      <p:sp>
+        <p:nvSpPr>
+          <p:cNvPr id="24" name="Text 22"/>
           <p:cNvSpPr/>
           <p:nvPr/>
         </p:nvSpPr>
@@ -8593,7 +8674,7 @@
       </p:sp>
       <p:sp>
         <p:nvSpPr>
-          <p:cNvPr id="22" name="Text 20"/>
+          <p:cNvPr id="25" name="Text 23"/>
           <p:cNvSpPr/>
           <p:nvPr/>
         </p:nvSpPr>
@@ -8632,7 +8713,7 @@
       </p:sp>
       <p:sp>
         <p:nvSpPr>
-          <p:cNvPr id="23" name="Text 21"/>
+          <p:cNvPr id="26" name="Text 24"/>
           <p:cNvSpPr/>
           <p:nvPr/>
         </p:nvSpPr>
@@ -8671,7 +8752,7 @@
       </p:sp>
       <p:sp>
         <p:nvSpPr>
-          <p:cNvPr id="24" name="Text 22"/>
+          <p:cNvPr id="27" name="Text 25"/>
           <p:cNvSpPr/>
           <p:nvPr/>
         </p:nvSpPr>
@@ -8710,7 +8791,7 @@
       </p:sp>
       <p:sp>
         <p:nvSpPr>
-          <p:cNvPr id="25" name="Shape 23"/>
+          <p:cNvPr id="28" name="Shape 26"/>
           <p:cNvSpPr/>
           <p:nvPr/>
         </p:nvSpPr>
@@ -8730,7 +8811,7 @@
       </p:sp>
       <p:sp>
         <p:nvSpPr>
-          <p:cNvPr id="26" name="Text 24"/>
+          <p:cNvPr id="29" name="Text 27"/>
           <p:cNvSpPr/>
           <p:nvPr/>
         </p:nvSpPr>
@@ -8769,7 +8850,7 @@
       </p:sp>
       <p:sp>
         <p:nvSpPr>
-          <p:cNvPr id="27" name="Text 25"/>
+          <p:cNvPr id="30" name="Text 28"/>
           <p:cNvSpPr/>
           <p:nvPr/>
         </p:nvSpPr>
@@ -11002,32 +11083,59 @@
       </p:sp>
       <p:sp>
         <p:nvSpPr>
-          <p:cNvPr id="7" name="Text 5"/>
-          <p:cNvSpPr/>
-          <p:nvPr/>
-        </p:nvSpPr>
-        <p:spPr>
-          <a:xfrm>
-            <a:off x="731520" y="2880360"/>
-            <a:ext cx="640080" cy="640080"/>
-          </a:xfrm>
-          <a:prstGeom prst="rect">
-            <a:avLst/>
-          </a:prstGeom>
-          <a:noFill/>
-          <a:ln/>
-        </p:spPr>
-        <p:txBody>
-          <a:bodyPr wrap="square" rtlCol="0" anchor="ctr"/>
-          <a:lstStyle/>
-          <a:p>
-            <a:pPr indent="0" marL="0">
-              <a:buNone/>
-            </a:pPr>
-            <a:r>
-              <a:rPr lang="en-US" sz="2800" dirty="0">
-                <a:solidFill>
-                  <a:srgbClr val="000000"/>
+          <p:cNvPr id="7" name="Shape 5"/>
+          <p:cNvSpPr/>
+          <p:nvPr/>
+        </p:nvSpPr>
+        <p:spPr>
+          <a:xfrm>
+            <a:off x="731520" y="2926080"/>
+            <a:ext cx="548640" cy="548640"/>
+          </a:xfrm>
+          <a:prstGeom prst="ellipse">
+            <a:avLst/>
+          </a:prstGeom>
+          <a:solidFill>
+            <a:srgbClr val="1F72B8">
+              <a:alpha val="40000"/>
+            </a:srgbClr>
+          </a:solidFill>
+          <a:ln w="19050">
+            <a:solidFill>
+              <a:srgbClr val="1F72B8"/>
+            </a:solidFill>
+            <a:prstDash val="solid"/>
+          </a:ln>
+        </p:spPr>
+      </p:sp>
+      <p:sp>
+        <p:nvSpPr>
+          <p:cNvPr id="8" name="Text 6"/>
+          <p:cNvSpPr/>
+          <p:nvPr/>
+        </p:nvSpPr>
+        <p:spPr>
+          <a:xfrm>
+            <a:off x="731520" y="2926080"/>
+            <a:ext cx="548640" cy="548640"/>
+          </a:xfrm>
+          <a:prstGeom prst="rect">
+            <a:avLst/>
+          </a:prstGeom>
+          <a:noFill/>
+          <a:ln/>
+        </p:spPr>
+        <p:txBody>
+          <a:bodyPr wrap="square" rtlCol="0" anchor="ctr"/>
+          <a:lstStyle/>
+          <a:p>
+            <a:pPr algn="ctr" indent="0" marL="0">
+              <a:buNone/>
+            </a:pPr>
+            <a:r>
+              <a:rPr lang="en-US" sz="2280" dirty="0">
+                <a:solidFill>
+                  <a:srgbClr val="FFFFFF"/>
                 </a:solidFill>
                 <a:latin typeface="Calibri" pitchFamily="34" charset="0"/>
                 <a:ea typeface="Calibri" pitchFamily="34" charset="-122"/>
@@ -11035,13 +11143,13 @@
               </a:rPr>
               <a:t>📞</a:t>
             </a:r>
-            <a:endParaRPr lang="en-US" sz="2800" dirty="0"/>
-          </a:p>
-        </p:txBody>
-      </p:sp>
-      <p:sp>
-        <p:nvSpPr>
-          <p:cNvPr id="8" name="Text 6"/>
+            <a:endParaRPr lang="en-US" sz="2280" dirty="0"/>
+          </a:p>
+        </p:txBody>
+      </p:sp>
+      <p:sp>
+        <p:nvSpPr>
+          <p:cNvPr id="9" name="Text 7"/>
           <p:cNvSpPr/>
           <p:nvPr/>
         </p:nvSpPr>
@@ -11080,7 +11188,7 @@
       </p:sp>
       <p:sp>
         <p:nvSpPr>
-          <p:cNvPr id="9" name="Shape 7"/>
+          <p:cNvPr id="10" name="Shape 8"/>
           <p:cNvSpPr/>
           <p:nvPr/>
         </p:nvSpPr>
@@ -11107,32 +11215,59 @@
       </p:sp>
       <p:sp>
         <p:nvSpPr>
-          <p:cNvPr id="10" name="Text 8"/>
-          <p:cNvSpPr/>
-          <p:nvPr/>
-        </p:nvSpPr>
-        <p:spPr>
-          <a:xfrm>
-            <a:off x="3593592" y="2880360"/>
-            <a:ext cx="640080" cy="640080"/>
-          </a:xfrm>
-          <a:prstGeom prst="rect">
-            <a:avLst/>
-          </a:prstGeom>
-          <a:noFill/>
-          <a:ln/>
-        </p:spPr>
-        <p:txBody>
-          <a:bodyPr wrap="square" rtlCol="0" anchor="ctr"/>
-          <a:lstStyle/>
-          <a:p>
-            <a:pPr indent="0" marL="0">
-              <a:buNone/>
-            </a:pPr>
-            <a:r>
-              <a:rPr lang="en-US" sz="2800" dirty="0">
-                <a:solidFill>
-                  <a:srgbClr val="000000"/>
+          <p:cNvPr id="11" name="Shape 9"/>
+          <p:cNvSpPr/>
+          <p:nvPr/>
+        </p:nvSpPr>
+        <p:spPr>
+          <a:xfrm>
+            <a:off x="3593592" y="2926080"/>
+            <a:ext cx="548640" cy="548640"/>
+          </a:xfrm>
+          <a:prstGeom prst="ellipse">
+            <a:avLst/>
+          </a:prstGeom>
+          <a:solidFill>
+            <a:srgbClr val="1F72B8">
+              <a:alpha val="40000"/>
+            </a:srgbClr>
+          </a:solidFill>
+          <a:ln w="19050">
+            <a:solidFill>
+              <a:srgbClr val="1F72B8"/>
+            </a:solidFill>
+            <a:prstDash val="solid"/>
+          </a:ln>
+        </p:spPr>
+      </p:sp>
+      <p:sp>
+        <p:nvSpPr>
+          <p:cNvPr id="12" name="Text 10"/>
+          <p:cNvSpPr/>
+          <p:nvPr/>
+        </p:nvSpPr>
+        <p:spPr>
+          <a:xfrm>
+            <a:off x="3593592" y="2926080"/>
+            <a:ext cx="548640" cy="548640"/>
+          </a:xfrm>
+          <a:prstGeom prst="rect">
+            <a:avLst/>
+          </a:prstGeom>
+          <a:noFill/>
+          <a:ln/>
+        </p:spPr>
+        <p:txBody>
+          <a:bodyPr wrap="square" rtlCol="0" anchor="ctr"/>
+          <a:lstStyle/>
+          <a:p>
+            <a:pPr algn="ctr" indent="0" marL="0">
+              <a:buNone/>
+            </a:pPr>
+            <a:r>
+              <a:rPr lang="en-US" sz="2280" dirty="0">
+                <a:solidFill>
+                  <a:srgbClr val="FFFFFF"/>
                 </a:solidFill>
                 <a:latin typeface="Calibri" pitchFamily="34" charset="0"/>
                 <a:ea typeface="Calibri" pitchFamily="34" charset="-122"/>
@@ -11140,13 +11275,13 @@
               </a:rPr>
               <a:t>📊</a:t>
             </a:r>
-            <a:endParaRPr lang="en-US" sz="2800" dirty="0"/>
-          </a:p>
-        </p:txBody>
-      </p:sp>
-      <p:sp>
-        <p:nvSpPr>
-          <p:cNvPr id="11" name="Text 9"/>
+            <a:endParaRPr lang="en-US" sz="2280" dirty="0"/>
+          </a:p>
+        </p:txBody>
+      </p:sp>
+      <p:sp>
+        <p:nvSpPr>
+          <p:cNvPr id="13" name="Text 11"/>
           <p:cNvSpPr/>
           <p:nvPr/>
         </p:nvSpPr>
@@ -11185,7 +11320,7 @@
       </p:sp>
       <p:sp>
         <p:nvSpPr>
-          <p:cNvPr id="12" name="Shape 10"/>
+          <p:cNvPr id="14" name="Shape 12"/>
           <p:cNvSpPr/>
           <p:nvPr/>
         </p:nvSpPr>
@@ -11212,32 +11347,59 @@
       </p:sp>
       <p:sp>
         <p:nvSpPr>
-          <p:cNvPr id="13" name="Text 11"/>
-          <p:cNvSpPr/>
-          <p:nvPr/>
-        </p:nvSpPr>
-        <p:spPr>
-          <a:xfrm>
-            <a:off x="6455664" y="2880360"/>
-            <a:ext cx="640080" cy="640080"/>
-          </a:xfrm>
-          <a:prstGeom prst="rect">
-            <a:avLst/>
-          </a:prstGeom>
-          <a:noFill/>
-          <a:ln/>
-        </p:spPr>
-        <p:txBody>
-          <a:bodyPr wrap="square" rtlCol="0" anchor="ctr"/>
-          <a:lstStyle/>
-          <a:p>
-            <a:pPr indent="0" marL="0">
-              <a:buNone/>
-            </a:pPr>
-            <a:r>
-              <a:rPr lang="en-US" sz="2800" dirty="0">
-                <a:solidFill>
-                  <a:srgbClr val="000000"/>
+          <p:cNvPr id="15" name="Shape 13"/>
+          <p:cNvSpPr/>
+          <p:nvPr/>
+        </p:nvSpPr>
+        <p:spPr>
+          <a:xfrm>
+            <a:off x="6455664" y="2926080"/>
+            <a:ext cx="548640" cy="548640"/>
+          </a:xfrm>
+          <a:prstGeom prst="ellipse">
+            <a:avLst/>
+          </a:prstGeom>
+          <a:solidFill>
+            <a:srgbClr val="1F72B8">
+              <a:alpha val="40000"/>
+            </a:srgbClr>
+          </a:solidFill>
+          <a:ln w="19050">
+            <a:solidFill>
+              <a:srgbClr val="1F72B8"/>
+            </a:solidFill>
+            <a:prstDash val="solid"/>
+          </a:ln>
+        </p:spPr>
+      </p:sp>
+      <p:sp>
+        <p:nvSpPr>
+          <p:cNvPr id="16" name="Text 14"/>
+          <p:cNvSpPr/>
+          <p:nvPr/>
+        </p:nvSpPr>
+        <p:spPr>
+          <a:xfrm>
+            <a:off x="6455664" y="2926080"/>
+            <a:ext cx="548640" cy="548640"/>
+          </a:xfrm>
+          <a:prstGeom prst="rect">
+            <a:avLst/>
+          </a:prstGeom>
+          <a:noFill/>
+          <a:ln/>
+        </p:spPr>
+        <p:txBody>
+          <a:bodyPr wrap="square" rtlCol="0" anchor="ctr"/>
+          <a:lstStyle/>
+          <a:p>
+            <a:pPr algn="ctr" indent="0" marL="0">
+              <a:buNone/>
+            </a:pPr>
+            <a:r>
+              <a:rPr lang="en-US" sz="2280" dirty="0">
+                <a:solidFill>
+                  <a:srgbClr val="FFFFFF"/>
                 </a:solidFill>
                 <a:latin typeface="Calibri" pitchFamily="34" charset="0"/>
                 <a:ea typeface="Calibri" pitchFamily="34" charset="-122"/>
@@ -11245,13 +11407,13 @@
               </a:rPr>
               <a:t>📈</a:t>
             </a:r>
-            <a:endParaRPr lang="en-US" sz="2800" dirty="0"/>
-          </a:p>
-        </p:txBody>
-      </p:sp>
-      <p:sp>
-        <p:nvSpPr>
-          <p:cNvPr id="14" name="Text 12"/>
+            <a:endParaRPr lang="en-US" sz="2280" dirty="0"/>
+          </a:p>
+        </p:txBody>
+      </p:sp>
+      <p:sp>
+        <p:nvSpPr>
+          <p:cNvPr id="17" name="Text 15"/>
           <p:cNvSpPr/>
           <p:nvPr/>
         </p:nvSpPr>
@@ -11290,7 +11452,7 @@
       </p:sp>
       <p:sp>
         <p:nvSpPr>
-          <p:cNvPr id="15" name="Shape 13"/>
+          <p:cNvPr id="18" name="Shape 16"/>
           <p:cNvSpPr/>
           <p:nvPr/>
         </p:nvSpPr>
@@ -11317,32 +11479,59 @@
       </p:sp>
       <p:sp>
         <p:nvSpPr>
-          <p:cNvPr id="16" name="Text 14"/>
-          <p:cNvSpPr/>
-          <p:nvPr/>
-        </p:nvSpPr>
-        <p:spPr>
-          <a:xfrm>
-            <a:off x="9317736" y="2880360"/>
-            <a:ext cx="640080" cy="640080"/>
-          </a:xfrm>
-          <a:prstGeom prst="rect">
-            <a:avLst/>
-          </a:prstGeom>
-          <a:noFill/>
-          <a:ln/>
-        </p:spPr>
-        <p:txBody>
-          <a:bodyPr wrap="square" rtlCol="0" anchor="ctr"/>
-          <a:lstStyle/>
-          <a:p>
-            <a:pPr indent="0" marL="0">
-              <a:buNone/>
-            </a:pPr>
-            <a:r>
-              <a:rPr lang="en-US" sz="2800" dirty="0">
-                <a:solidFill>
-                  <a:srgbClr val="000000"/>
+          <p:cNvPr id="19" name="Shape 17"/>
+          <p:cNvSpPr/>
+          <p:nvPr/>
+        </p:nvSpPr>
+        <p:spPr>
+          <a:xfrm>
+            <a:off x="9317736" y="2926080"/>
+            <a:ext cx="548640" cy="548640"/>
+          </a:xfrm>
+          <a:prstGeom prst="ellipse">
+            <a:avLst/>
+          </a:prstGeom>
+          <a:solidFill>
+            <a:srgbClr val="1F72B8">
+              <a:alpha val="40000"/>
+            </a:srgbClr>
+          </a:solidFill>
+          <a:ln w="19050">
+            <a:solidFill>
+              <a:srgbClr val="1F72B8"/>
+            </a:solidFill>
+            <a:prstDash val="solid"/>
+          </a:ln>
+        </p:spPr>
+      </p:sp>
+      <p:sp>
+        <p:nvSpPr>
+          <p:cNvPr id="20" name="Text 18"/>
+          <p:cNvSpPr/>
+          <p:nvPr/>
+        </p:nvSpPr>
+        <p:spPr>
+          <a:xfrm>
+            <a:off x="9317736" y="2926080"/>
+            <a:ext cx="548640" cy="548640"/>
+          </a:xfrm>
+          <a:prstGeom prst="rect">
+            <a:avLst/>
+          </a:prstGeom>
+          <a:noFill/>
+          <a:ln/>
+        </p:spPr>
+        <p:txBody>
+          <a:bodyPr wrap="square" rtlCol="0" anchor="ctr"/>
+          <a:lstStyle/>
+          <a:p>
+            <a:pPr algn="ctr" indent="0" marL="0">
+              <a:buNone/>
+            </a:pPr>
+            <a:r>
+              <a:rPr lang="en-US" sz="2280" dirty="0">
+                <a:solidFill>
+                  <a:srgbClr val="FFFFFF"/>
                 </a:solidFill>
                 <a:latin typeface="Calibri" pitchFamily="34" charset="0"/>
                 <a:ea typeface="Calibri" pitchFamily="34" charset="-122"/>
@@ -11350,13 +11539,13 @@
               </a:rPr>
               <a:t>✨</a:t>
             </a:r>
-            <a:endParaRPr lang="en-US" sz="2800" dirty="0"/>
-          </a:p>
-        </p:txBody>
-      </p:sp>
-      <p:sp>
-        <p:nvSpPr>
-          <p:cNvPr id="17" name="Text 15"/>
+            <a:endParaRPr lang="en-US" sz="2280" dirty="0"/>
+          </a:p>
+        </p:txBody>
+      </p:sp>
+      <p:sp>
+        <p:nvSpPr>
+          <p:cNvPr id="21" name="Text 19"/>
           <p:cNvSpPr/>
           <p:nvPr/>
         </p:nvSpPr>
@@ -11395,7 +11584,7 @@
       </p:sp>
       <p:sp>
         <p:nvSpPr>
-          <p:cNvPr id="18" name="Shape 16"/>
+          <p:cNvPr id="22" name="Shape 20"/>
           <p:cNvSpPr/>
           <p:nvPr/>
         </p:nvSpPr>
@@ -11422,32 +11611,59 @@
       </p:sp>
       <p:sp>
         <p:nvSpPr>
-          <p:cNvPr id="19" name="Text 17"/>
-          <p:cNvSpPr/>
-          <p:nvPr/>
-        </p:nvSpPr>
-        <p:spPr>
-          <a:xfrm>
-            <a:off x="731520" y="4617720"/>
-            <a:ext cx="640080" cy="640080"/>
-          </a:xfrm>
-          <a:prstGeom prst="rect">
-            <a:avLst/>
-          </a:prstGeom>
-          <a:noFill/>
-          <a:ln/>
-        </p:spPr>
-        <p:txBody>
-          <a:bodyPr wrap="square" rtlCol="0" anchor="ctr"/>
-          <a:lstStyle/>
-          <a:p>
-            <a:pPr indent="0" marL="0">
-              <a:buNone/>
-            </a:pPr>
-            <a:r>
-              <a:rPr lang="en-US" sz="2800" dirty="0">
-                <a:solidFill>
-                  <a:srgbClr val="000000"/>
+          <p:cNvPr id="23" name="Shape 21"/>
+          <p:cNvSpPr/>
+          <p:nvPr/>
+        </p:nvSpPr>
+        <p:spPr>
+          <a:xfrm>
+            <a:off x="731520" y="4663440"/>
+            <a:ext cx="548640" cy="548640"/>
+          </a:xfrm>
+          <a:prstGeom prst="ellipse">
+            <a:avLst/>
+          </a:prstGeom>
+          <a:solidFill>
+            <a:srgbClr val="1F72B8">
+              <a:alpha val="40000"/>
+            </a:srgbClr>
+          </a:solidFill>
+          <a:ln w="19050">
+            <a:solidFill>
+              <a:srgbClr val="1F72B8"/>
+            </a:solidFill>
+            <a:prstDash val="solid"/>
+          </a:ln>
+        </p:spPr>
+      </p:sp>
+      <p:sp>
+        <p:nvSpPr>
+          <p:cNvPr id="24" name="Text 22"/>
+          <p:cNvSpPr/>
+          <p:nvPr/>
+        </p:nvSpPr>
+        <p:spPr>
+          <a:xfrm>
+            <a:off x="731520" y="4663440"/>
+            <a:ext cx="548640" cy="548640"/>
+          </a:xfrm>
+          <a:prstGeom prst="rect">
+            <a:avLst/>
+          </a:prstGeom>
+          <a:noFill/>
+          <a:ln/>
+        </p:spPr>
+        <p:txBody>
+          <a:bodyPr wrap="square" rtlCol="0" anchor="ctr"/>
+          <a:lstStyle/>
+          <a:p>
+            <a:pPr algn="ctr" indent="0" marL="0">
+              <a:buNone/>
+            </a:pPr>
+            <a:r>
+              <a:rPr lang="en-US" sz="2280" dirty="0">
+                <a:solidFill>
+                  <a:srgbClr val="FFFFFF"/>
                 </a:solidFill>
                 <a:latin typeface="Calibri" pitchFamily="34" charset="0"/>
                 <a:ea typeface="Calibri" pitchFamily="34" charset="-122"/>
@@ -11455,13 +11671,13 @@
               </a:rPr>
               <a:t>⚙️</a:t>
             </a:r>
-            <a:endParaRPr lang="en-US" sz="2800" dirty="0"/>
-          </a:p>
-        </p:txBody>
-      </p:sp>
-      <p:sp>
-        <p:nvSpPr>
-          <p:cNvPr id="20" name="Text 18"/>
+            <a:endParaRPr lang="en-US" sz="2280" dirty="0"/>
+          </a:p>
+        </p:txBody>
+      </p:sp>
+      <p:sp>
+        <p:nvSpPr>
+          <p:cNvPr id="25" name="Text 23"/>
           <p:cNvSpPr/>
           <p:nvPr/>
         </p:nvSpPr>
@@ -11500,7 +11716,7 @@
       </p:sp>
       <p:sp>
         <p:nvSpPr>
-          <p:cNvPr id="21" name="Shape 19"/>
+          <p:cNvPr id="26" name="Shape 24"/>
           <p:cNvSpPr/>
           <p:nvPr/>
         </p:nvSpPr>
@@ -11527,32 +11743,59 @@
       </p:sp>
       <p:sp>
         <p:nvSpPr>
-          <p:cNvPr id="22" name="Text 20"/>
-          <p:cNvSpPr/>
-          <p:nvPr/>
-        </p:nvSpPr>
-        <p:spPr>
-          <a:xfrm>
-            <a:off x="3593592" y="4617720"/>
-            <a:ext cx="640080" cy="640080"/>
-          </a:xfrm>
-          <a:prstGeom prst="rect">
-            <a:avLst/>
-          </a:prstGeom>
-          <a:noFill/>
-          <a:ln/>
-        </p:spPr>
-        <p:txBody>
-          <a:bodyPr wrap="square" rtlCol="0" anchor="ctr"/>
-          <a:lstStyle/>
-          <a:p>
-            <a:pPr indent="0" marL="0">
-              <a:buNone/>
-            </a:pPr>
-            <a:r>
-              <a:rPr lang="en-US" sz="2800" dirty="0">
-                <a:solidFill>
-                  <a:srgbClr val="000000"/>
+          <p:cNvPr id="27" name="Shape 25"/>
+          <p:cNvSpPr/>
+          <p:nvPr/>
+        </p:nvSpPr>
+        <p:spPr>
+          <a:xfrm>
+            <a:off x="3593592" y="4663440"/>
+            <a:ext cx="548640" cy="548640"/>
+          </a:xfrm>
+          <a:prstGeom prst="ellipse">
+            <a:avLst/>
+          </a:prstGeom>
+          <a:solidFill>
+            <a:srgbClr val="1F72B8">
+              <a:alpha val="40000"/>
+            </a:srgbClr>
+          </a:solidFill>
+          <a:ln w="19050">
+            <a:solidFill>
+              <a:srgbClr val="1F72B8"/>
+            </a:solidFill>
+            <a:prstDash val="solid"/>
+          </a:ln>
+        </p:spPr>
+      </p:sp>
+      <p:sp>
+        <p:nvSpPr>
+          <p:cNvPr id="28" name="Text 26"/>
+          <p:cNvSpPr/>
+          <p:nvPr/>
+        </p:nvSpPr>
+        <p:spPr>
+          <a:xfrm>
+            <a:off x="3593592" y="4663440"/>
+            <a:ext cx="548640" cy="548640"/>
+          </a:xfrm>
+          <a:prstGeom prst="rect">
+            <a:avLst/>
+          </a:prstGeom>
+          <a:noFill/>
+          <a:ln/>
+        </p:spPr>
+        <p:txBody>
+          <a:bodyPr wrap="square" rtlCol="0" anchor="ctr"/>
+          <a:lstStyle/>
+          <a:p>
+            <a:pPr algn="ctr" indent="0" marL="0">
+              <a:buNone/>
+            </a:pPr>
+            <a:r>
+              <a:rPr lang="en-US" sz="2280" dirty="0">
+                <a:solidFill>
+                  <a:srgbClr val="FFFFFF"/>
                 </a:solidFill>
                 <a:latin typeface="Calibri" pitchFamily="34" charset="0"/>
                 <a:ea typeface="Calibri" pitchFamily="34" charset="-122"/>
@@ -11560,13 +11803,13 @@
               </a:rPr>
               <a:t>🧭</a:t>
             </a:r>
-            <a:endParaRPr lang="en-US" sz="2800" dirty="0"/>
-          </a:p>
-        </p:txBody>
-      </p:sp>
-      <p:sp>
-        <p:nvSpPr>
-          <p:cNvPr id="23" name="Text 21"/>
+            <a:endParaRPr lang="en-US" sz="2280" dirty="0"/>
+          </a:p>
+        </p:txBody>
+      </p:sp>
+      <p:sp>
+        <p:nvSpPr>
+          <p:cNvPr id="29" name="Text 27"/>
           <p:cNvSpPr/>
           <p:nvPr/>
         </p:nvSpPr>
@@ -11605,7 +11848,7 @@
       </p:sp>
       <p:sp>
         <p:nvSpPr>
-          <p:cNvPr id="24" name="Shape 22"/>
+          <p:cNvPr id="30" name="Shape 28"/>
           <p:cNvSpPr/>
           <p:nvPr/>
         </p:nvSpPr>
@@ -11632,32 +11875,59 @@
       </p:sp>
       <p:sp>
         <p:nvSpPr>
-          <p:cNvPr id="25" name="Text 23"/>
-          <p:cNvSpPr/>
-          <p:nvPr/>
-        </p:nvSpPr>
-        <p:spPr>
-          <a:xfrm>
-            <a:off x="6455664" y="4617720"/>
-            <a:ext cx="640080" cy="640080"/>
-          </a:xfrm>
-          <a:prstGeom prst="rect">
-            <a:avLst/>
-          </a:prstGeom>
-          <a:noFill/>
-          <a:ln/>
-        </p:spPr>
-        <p:txBody>
-          <a:bodyPr wrap="square" rtlCol="0" anchor="ctr"/>
-          <a:lstStyle/>
-          <a:p>
-            <a:pPr indent="0" marL="0">
-              <a:buNone/>
-            </a:pPr>
-            <a:r>
-              <a:rPr lang="en-US" sz="2800" dirty="0">
-                <a:solidFill>
-                  <a:srgbClr val="000000"/>
+          <p:cNvPr id="31" name="Shape 29"/>
+          <p:cNvSpPr/>
+          <p:nvPr/>
+        </p:nvSpPr>
+        <p:spPr>
+          <a:xfrm>
+            <a:off x="6455664" y="4663440"/>
+            <a:ext cx="548640" cy="548640"/>
+          </a:xfrm>
+          <a:prstGeom prst="ellipse">
+            <a:avLst/>
+          </a:prstGeom>
+          <a:solidFill>
+            <a:srgbClr val="1F72B8">
+              <a:alpha val="40000"/>
+            </a:srgbClr>
+          </a:solidFill>
+          <a:ln w="19050">
+            <a:solidFill>
+              <a:srgbClr val="1F72B8"/>
+            </a:solidFill>
+            <a:prstDash val="solid"/>
+          </a:ln>
+        </p:spPr>
+      </p:sp>
+      <p:sp>
+        <p:nvSpPr>
+          <p:cNvPr id="32" name="Text 30"/>
+          <p:cNvSpPr/>
+          <p:nvPr/>
+        </p:nvSpPr>
+        <p:spPr>
+          <a:xfrm>
+            <a:off x="6455664" y="4663440"/>
+            <a:ext cx="548640" cy="548640"/>
+          </a:xfrm>
+          <a:prstGeom prst="rect">
+            <a:avLst/>
+          </a:prstGeom>
+          <a:noFill/>
+          <a:ln/>
+        </p:spPr>
+        <p:txBody>
+          <a:bodyPr wrap="square" rtlCol="0" anchor="ctr"/>
+          <a:lstStyle/>
+          <a:p>
+            <a:pPr algn="ctr" indent="0" marL="0">
+              <a:buNone/>
+            </a:pPr>
+            <a:r>
+              <a:rPr lang="en-US" sz="2280" dirty="0">
+                <a:solidFill>
+                  <a:srgbClr val="FFFFFF"/>
                 </a:solidFill>
                 <a:latin typeface="Calibri" pitchFamily="34" charset="0"/>
                 <a:ea typeface="Calibri" pitchFamily="34" charset="-122"/>
@@ -11665,13 +11935,13 @@
               </a:rPr>
               <a:t>💸</a:t>
             </a:r>
-            <a:endParaRPr lang="en-US" sz="2800" dirty="0"/>
-          </a:p>
-        </p:txBody>
-      </p:sp>
-      <p:sp>
-        <p:nvSpPr>
-          <p:cNvPr id="26" name="Text 24"/>
+            <a:endParaRPr lang="en-US" sz="2280" dirty="0"/>
+          </a:p>
+        </p:txBody>
+      </p:sp>
+      <p:sp>
+        <p:nvSpPr>
+          <p:cNvPr id="33" name="Text 31"/>
           <p:cNvSpPr/>
           <p:nvPr/>
         </p:nvSpPr>
@@ -11710,7 +11980,7 @@
       </p:sp>
       <p:sp>
         <p:nvSpPr>
-          <p:cNvPr id="27" name="Shape 25"/>
+          <p:cNvPr id="34" name="Shape 32"/>
           <p:cNvSpPr/>
           <p:nvPr/>
         </p:nvSpPr>
@@ -11737,32 +12007,59 @@
       </p:sp>
       <p:sp>
         <p:nvSpPr>
-          <p:cNvPr id="28" name="Text 26"/>
-          <p:cNvSpPr/>
-          <p:nvPr/>
-        </p:nvSpPr>
-        <p:spPr>
-          <a:xfrm>
-            <a:off x="9317736" y="4617720"/>
-            <a:ext cx="640080" cy="640080"/>
-          </a:xfrm>
-          <a:prstGeom prst="rect">
-            <a:avLst/>
-          </a:prstGeom>
-          <a:noFill/>
-          <a:ln/>
-        </p:spPr>
-        <p:txBody>
-          <a:bodyPr wrap="square" rtlCol="0" anchor="ctr"/>
-          <a:lstStyle/>
-          <a:p>
-            <a:pPr indent="0" marL="0">
-              <a:buNone/>
-            </a:pPr>
-            <a:r>
-              <a:rPr lang="en-US" sz="2800" dirty="0">
-                <a:solidFill>
-                  <a:srgbClr val="000000"/>
+          <p:cNvPr id="35" name="Shape 33"/>
+          <p:cNvSpPr/>
+          <p:nvPr/>
+        </p:nvSpPr>
+        <p:spPr>
+          <a:xfrm>
+            <a:off x="9317736" y="4663440"/>
+            <a:ext cx="548640" cy="548640"/>
+          </a:xfrm>
+          <a:prstGeom prst="ellipse">
+            <a:avLst/>
+          </a:prstGeom>
+          <a:solidFill>
+            <a:srgbClr val="1F72B8">
+              <a:alpha val="40000"/>
+            </a:srgbClr>
+          </a:solidFill>
+          <a:ln w="19050">
+            <a:solidFill>
+              <a:srgbClr val="1F72B8"/>
+            </a:solidFill>
+            <a:prstDash val="solid"/>
+          </a:ln>
+        </p:spPr>
+      </p:sp>
+      <p:sp>
+        <p:nvSpPr>
+          <p:cNvPr id="36" name="Text 34"/>
+          <p:cNvSpPr/>
+          <p:nvPr/>
+        </p:nvSpPr>
+        <p:spPr>
+          <a:xfrm>
+            <a:off x="9317736" y="4663440"/>
+            <a:ext cx="548640" cy="548640"/>
+          </a:xfrm>
+          <a:prstGeom prst="rect">
+            <a:avLst/>
+          </a:prstGeom>
+          <a:noFill/>
+          <a:ln/>
+        </p:spPr>
+        <p:txBody>
+          <a:bodyPr wrap="square" rtlCol="0" anchor="ctr"/>
+          <a:lstStyle/>
+          <a:p>
+            <a:pPr algn="ctr" indent="0" marL="0">
+              <a:buNone/>
+            </a:pPr>
+            <a:r>
+              <a:rPr lang="en-US" sz="2280" dirty="0">
+                <a:solidFill>
+                  <a:srgbClr val="FFFFFF"/>
                 </a:solidFill>
                 <a:latin typeface="Calibri" pitchFamily="34" charset="0"/>
                 <a:ea typeface="Calibri" pitchFamily="34" charset="-122"/>
@@ -11770,13 +12067,13 @@
               </a:rPr>
               <a:t>🔄</a:t>
             </a:r>
-            <a:endParaRPr lang="en-US" sz="2800" dirty="0"/>
-          </a:p>
-        </p:txBody>
-      </p:sp>
-      <p:sp>
-        <p:nvSpPr>
-          <p:cNvPr id="29" name="Text 27"/>
+            <a:endParaRPr lang="en-US" sz="2280" dirty="0"/>
+          </a:p>
+        </p:txBody>
+      </p:sp>
+      <p:sp>
+        <p:nvSpPr>
+          <p:cNvPr id="37" name="Text 35"/>
           <p:cNvSpPr/>
           <p:nvPr/>
         </p:nvSpPr>
@@ -11815,7 +12112,7 @@
       </p:sp>
       <p:sp>
         <p:nvSpPr>
-          <p:cNvPr id="30" name="Shape 28"/>
+          <p:cNvPr id="38" name="Shape 36"/>
           <p:cNvSpPr/>
           <p:nvPr/>
         </p:nvSpPr>
@@ -11835,7 +12132,7 @@
       </p:sp>
       <p:sp>
         <p:nvSpPr>
-          <p:cNvPr id="31" name="Text 29"/>
+          <p:cNvPr id="39" name="Text 37"/>
           <p:cNvSpPr/>
           <p:nvPr/>
         </p:nvSpPr>
@@ -11874,7 +12171,7 @@
       </p:sp>
       <p:sp>
         <p:nvSpPr>
-          <p:cNvPr id="32" name="Text 30"/>
+          <p:cNvPr id="40" name="Text 38"/>
           <p:cNvSpPr/>
           <p:nvPr/>
         </p:nvSpPr>
@@ -12844,32 +13141,59 @@
       </p:sp>
       <p:sp>
         <p:nvSpPr>
-          <p:cNvPr id="7" name="Text 5"/>
+          <p:cNvPr id="7" name="Shape 5"/>
           <p:cNvSpPr/>
           <p:nvPr/>
         </p:nvSpPr>
         <p:spPr>
           <a:xfrm>
             <a:off x="822960" y="2743200"/>
-            <a:ext cx="914400" cy="731520"/>
-          </a:xfrm>
-          <a:prstGeom prst="rect">
-            <a:avLst/>
-          </a:prstGeom>
-          <a:noFill/>
-          <a:ln/>
-        </p:spPr>
-        <p:txBody>
-          <a:bodyPr wrap="square" rtlCol="0" anchor="ctr"/>
-          <a:lstStyle/>
-          <a:p>
-            <a:pPr indent="0" marL="0">
-              <a:buNone/>
-            </a:pPr>
-            <a:r>
-              <a:rPr lang="en-US" sz="3600" dirty="0">
-                <a:solidFill>
-                  <a:srgbClr val="000000"/>
+            <a:ext cx="777240" cy="777240"/>
+          </a:xfrm>
+          <a:prstGeom prst="ellipse">
+            <a:avLst/>
+          </a:prstGeom>
+          <a:solidFill>
+            <a:srgbClr val="7FCFE5">
+              <a:alpha val="40000"/>
+            </a:srgbClr>
+          </a:solidFill>
+          <a:ln w="19050">
+            <a:solidFill>
+              <a:srgbClr val="7FCFE5"/>
+            </a:solidFill>
+            <a:prstDash val="solid"/>
+          </a:ln>
+        </p:spPr>
+      </p:sp>
+      <p:sp>
+        <p:nvSpPr>
+          <p:cNvPr id="8" name="Text 6"/>
+          <p:cNvSpPr/>
+          <p:nvPr/>
+        </p:nvSpPr>
+        <p:spPr>
+          <a:xfrm>
+            <a:off x="822960" y="2743200"/>
+            <a:ext cx="777240" cy="777240"/>
+          </a:xfrm>
+          <a:prstGeom prst="rect">
+            <a:avLst/>
+          </a:prstGeom>
+          <a:noFill/>
+          <a:ln/>
+        </p:spPr>
+        <p:txBody>
+          <a:bodyPr wrap="square" rtlCol="0" anchor="ctr"/>
+          <a:lstStyle/>
+          <a:p>
+            <a:pPr algn="ctr" indent="0" marL="0">
+              <a:buNone/>
+            </a:pPr>
+            <a:r>
+              <a:rPr lang="en-US" sz="3230" dirty="0">
+                <a:solidFill>
+                  <a:srgbClr val="FFFFFF"/>
                 </a:solidFill>
                 <a:latin typeface="Calibri" pitchFamily="34" charset="0"/>
                 <a:ea typeface="Calibri" pitchFamily="34" charset="-122"/>
@@ -12877,13 +13201,13 @@
               </a:rPr>
               <a:t>🤖</a:t>
             </a:r>
-            <a:endParaRPr lang="en-US" sz="3600" dirty="0"/>
-          </a:p>
-        </p:txBody>
-      </p:sp>
-      <p:sp>
-        <p:nvSpPr>
-          <p:cNvPr id="8" name="Text 6"/>
+            <a:endParaRPr lang="en-US" sz="3230" dirty="0"/>
+          </a:p>
+        </p:txBody>
+      </p:sp>
+      <p:sp>
+        <p:nvSpPr>
+          <p:cNvPr id="9" name="Text 7"/>
           <p:cNvSpPr/>
           <p:nvPr/>
         </p:nvSpPr>
@@ -12922,7 +13246,7 @@
       </p:sp>
       <p:sp>
         <p:nvSpPr>
-          <p:cNvPr id="9" name="Text 7"/>
+          <p:cNvPr id="10" name="Text 8"/>
           <p:cNvSpPr/>
           <p:nvPr/>
         </p:nvSpPr>
@@ -12961,7 +13285,7 @@
       </p:sp>
       <p:sp>
         <p:nvSpPr>
-          <p:cNvPr id="10" name="Text 8"/>
+          <p:cNvPr id="11" name="Text 9"/>
           <p:cNvSpPr/>
           <p:nvPr/>
         </p:nvSpPr>
@@ -13066,7 +13390,7 @@
       </p:sp>
       <p:sp>
         <p:nvSpPr>
-          <p:cNvPr id="11" name="Shape 9"/>
+          <p:cNvPr id="12" name="Shape 10"/>
           <p:cNvSpPr/>
           <p:nvPr/>
         </p:nvSpPr>
@@ -13093,32 +13417,59 @@
       </p:sp>
       <p:sp>
         <p:nvSpPr>
-          <p:cNvPr id="12" name="Text 10"/>
+          <p:cNvPr id="13" name="Shape 11"/>
           <p:cNvSpPr/>
           <p:nvPr/>
         </p:nvSpPr>
         <p:spPr>
           <a:xfrm>
             <a:off x="4617720" y="2743200"/>
-            <a:ext cx="914400" cy="731520"/>
-          </a:xfrm>
-          <a:prstGeom prst="rect">
-            <a:avLst/>
-          </a:prstGeom>
-          <a:noFill/>
-          <a:ln/>
-        </p:spPr>
-        <p:txBody>
-          <a:bodyPr wrap="square" rtlCol="0" anchor="ctr"/>
-          <a:lstStyle/>
-          <a:p>
-            <a:pPr indent="0" marL="0">
-              <a:buNone/>
-            </a:pPr>
-            <a:r>
-              <a:rPr lang="en-US" sz="3600" dirty="0">
-                <a:solidFill>
-                  <a:srgbClr val="000000"/>
+            <a:ext cx="777240" cy="777240"/>
+          </a:xfrm>
+          <a:prstGeom prst="ellipse">
+            <a:avLst/>
+          </a:prstGeom>
+          <a:solidFill>
+            <a:srgbClr val="7FCFE5">
+              <a:alpha val="40000"/>
+            </a:srgbClr>
+          </a:solidFill>
+          <a:ln w="19050">
+            <a:solidFill>
+              <a:srgbClr val="7FCFE5"/>
+            </a:solidFill>
+            <a:prstDash val="solid"/>
+          </a:ln>
+        </p:spPr>
+      </p:sp>
+      <p:sp>
+        <p:nvSpPr>
+          <p:cNvPr id="14" name="Text 12"/>
+          <p:cNvSpPr/>
+          <p:nvPr/>
+        </p:nvSpPr>
+        <p:spPr>
+          <a:xfrm>
+            <a:off x="4617720" y="2743200"/>
+            <a:ext cx="777240" cy="777240"/>
+          </a:xfrm>
+          <a:prstGeom prst="rect">
+            <a:avLst/>
+          </a:prstGeom>
+          <a:noFill/>
+          <a:ln/>
+        </p:spPr>
+        <p:txBody>
+          <a:bodyPr wrap="square" rtlCol="0" anchor="ctr"/>
+          <a:lstStyle/>
+          <a:p>
+            <a:pPr algn="ctr" indent="0" marL="0">
+              <a:buNone/>
+            </a:pPr>
+            <a:r>
+              <a:rPr lang="en-US" sz="3230" dirty="0">
+                <a:solidFill>
+                  <a:srgbClr val="FFFFFF"/>
                 </a:solidFill>
                 <a:latin typeface="Calibri" pitchFamily="34" charset="0"/>
                 <a:ea typeface="Calibri" pitchFamily="34" charset="-122"/>
@@ -13126,13 +13477,13 @@
               </a:rPr>
               <a:t>🍎</a:t>
             </a:r>
-            <a:endParaRPr lang="en-US" sz="3600" dirty="0"/>
-          </a:p>
-        </p:txBody>
-      </p:sp>
-      <p:sp>
-        <p:nvSpPr>
-          <p:cNvPr id="13" name="Text 11"/>
+            <a:endParaRPr lang="en-US" sz="3230" dirty="0"/>
+          </a:p>
+        </p:txBody>
+      </p:sp>
+      <p:sp>
+        <p:nvSpPr>
+          <p:cNvPr id="15" name="Text 13"/>
           <p:cNvSpPr/>
           <p:nvPr/>
         </p:nvSpPr>
@@ -13171,7 +13522,7 @@
       </p:sp>
       <p:sp>
         <p:nvSpPr>
-          <p:cNvPr id="14" name="Text 12"/>
+          <p:cNvPr id="16" name="Text 14"/>
           <p:cNvSpPr/>
           <p:nvPr/>
         </p:nvSpPr>
@@ -13210,7 +13561,7 @@
       </p:sp>
       <p:sp>
         <p:nvSpPr>
-          <p:cNvPr id="15" name="Text 13"/>
+          <p:cNvPr id="17" name="Text 15"/>
           <p:cNvSpPr/>
           <p:nvPr/>
         </p:nvSpPr>
@@ -13315,7 +13666,7 @@
       </p:sp>
       <p:sp>
         <p:nvSpPr>
-          <p:cNvPr id="16" name="Shape 14"/>
+          <p:cNvPr id="18" name="Shape 16"/>
           <p:cNvSpPr/>
           <p:nvPr/>
         </p:nvSpPr>
@@ -13342,32 +13693,59 @@
       </p:sp>
       <p:sp>
         <p:nvSpPr>
-          <p:cNvPr id="17" name="Text 15"/>
+          <p:cNvPr id="19" name="Shape 17"/>
           <p:cNvSpPr/>
           <p:nvPr/>
         </p:nvSpPr>
         <p:spPr>
           <a:xfrm>
             <a:off x="8412480" y="2743200"/>
-            <a:ext cx="914400" cy="731520"/>
-          </a:xfrm>
-          <a:prstGeom prst="rect">
-            <a:avLst/>
-          </a:prstGeom>
-          <a:noFill/>
-          <a:ln/>
-        </p:spPr>
-        <p:txBody>
-          <a:bodyPr wrap="square" rtlCol="0" anchor="ctr"/>
-          <a:lstStyle/>
-          <a:p>
-            <a:pPr indent="0" marL="0">
-              <a:buNone/>
-            </a:pPr>
-            <a:r>
-              <a:rPr lang="en-US" sz="3600" dirty="0">
-                <a:solidFill>
-                  <a:srgbClr val="000000"/>
+            <a:ext cx="777240" cy="777240"/>
+          </a:xfrm>
+          <a:prstGeom prst="ellipse">
+            <a:avLst/>
+          </a:prstGeom>
+          <a:solidFill>
+            <a:srgbClr val="7FCFE5">
+              <a:alpha val="40000"/>
+            </a:srgbClr>
+          </a:solidFill>
+          <a:ln w="19050">
+            <a:solidFill>
+              <a:srgbClr val="7FCFE5"/>
+            </a:solidFill>
+            <a:prstDash val="solid"/>
+          </a:ln>
+        </p:spPr>
+      </p:sp>
+      <p:sp>
+        <p:nvSpPr>
+          <p:cNvPr id="20" name="Text 18"/>
+          <p:cNvSpPr/>
+          <p:nvPr/>
+        </p:nvSpPr>
+        <p:spPr>
+          <a:xfrm>
+            <a:off x="8412480" y="2743200"/>
+            <a:ext cx="777240" cy="777240"/>
+          </a:xfrm>
+          <a:prstGeom prst="rect">
+            <a:avLst/>
+          </a:prstGeom>
+          <a:noFill/>
+          <a:ln/>
+        </p:spPr>
+        <p:txBody>
+          <a:bodyPr wrap="square" rtlCol="0" anchor="ctr"/>
+          <a:lstStyle/>
+          <a:p>
+            <a:pPr algn="ctr" indent="0" marL="0">
+              <a:buNone/>
+            </a:pPr>
+            <a:r>
+              <a:rPr lang="en-US" sz="3230" dirty="0">
+                <a:solidFill>
+                  <a:srgbClr val="FFFFFF"/>
                 </a:solidFill>
                 <a:latin typeface="Calibri" pitchFamily="34" charset="0"/>
                 <a:ea typeface="Calibri" pitchFamily="34" charset="-122"/>
@@ -13375,13 +13753,13 @@
               </a:rPr>
               <a:t>💻</a:t>
             </a:r>
-            <a:endParaRPr lang="en-US" sz="3600" dirty="0"/>
-          </a:p>
-        </p:txBody>
-      </p:sp>
-      <p:sp>
-        <p:nvSpPr>
-          <p:cNvPr id="18" name="Text 16"/>
+            <a:endParaRPr lang="en-US" sz="3230" dirty="0"/>
+          </a:p>
+        </p:txBody>
+      </p:sp>
+      <p:sp>
+        <p:nvSpPr>
+          <p:cNvPr id="21" name="Text 19"/>
           <p:cNvSpPr/>
           <p:nvPr/>
         </p:nvSpPr>
@@ -13420,7 +13798,7 @@
       </p:sp>
       <p:sp>
         <p:nvSpPr>
-          <p:cNvPr id="19" name="Text 17"/>
+          <p:cNvPr id="22" name="Text 20"/>
           <p:cNvSpPr/>
           <p:nvPr/>
         </p:nvSpPr>
@@ -13459,7 +13837,7 @@
       </p:sp>
       <p:sp>
         <p:nvSpPr>
-          <p:cNvPr id="20" name="Text 18"/>
+          <p:cNvPr id="23" name="Text 21"/>
           <p:cNvSpPr/>
           <p:nvPr/>
         </p:nvSpPr>
@@ -13564,7 +13942,7 @@
       </p:sp>
       <p:sp>
         <p:nvSpPr>
-          <p:cNvPr id="21" name="Shape 19"/>
+          <p:cNvPr id="24" name="Shape 22"/>
           <p:cNvSpPr/>
           <p:nvPr/>
         </p:nvSpPr>
@@ -13588,7 +13966,7 @@
       </p:sp>
       <p:sp>
         <p:nvSpPr>
-          <p:cNvPr id="22" name="Text 20"/>
+          <p:cNvPr id="25" name="Text 23"/>
           <p:cNvSpPr/>
           <p:nvPr/>
         </p:nvSpPr>
@@ -13627,7 +14005,7 @@
       </p:sp>
       <p:sp>
         <p:nvSpPr>
-          <p:cNvPr id="23" name="Shape 21"/>
+          <p:cNvPr id="26" name="Shape 24"/>
           <p:cNvSpPr/>
           <p:nvPr/>
         </p:nvSpPr>
@@ -13647,7 +14025,7 @@
       </p:sp>
       <p:sp>
         <p:nvSpPr>
-          <p:cNvPr id="24" name="Text 22"/>
+          <p:cNvPr id="27" name="Text 25"/>
           <p:cNvSpPr/>
           <p:nvPr/>
         </p:nvSpPr>
@@ -13686,7 +14064,7 @@
       </p:sp>
       <p:sp>
         <p:nvSpPr>
-          <p:cNvPr id="25" name="Text 23"/>
+          <p:cNvPr id="28" name="Text 26"/>
           <p:cNvSpPr/>
           <p:nvPr/>
         </p:nvSpPr>
@@ -17187,32 +17565,59 @@
       </p:sp>
       <p:sp>
         <p:nvSpPr>
-          <p:cNvPr id="7" name="Text 5"/>
-          <p:cNvSpPr/>
-          <p:nvPr/>
-        </p:nvSpPr>
-        <p:spPr>
-          <a:xfrm>
-            <a:off x="731520" y="2651760"/>
+          <p:cNvPr id="7" name="Shape 5"/>
+          <p:cNvSpPr/>
+          <p:nvPr/>
+        </p:nvSpPr>
+        <p:spPr>
+          <a:xfrm>
+            <a:off x="731520" y="2697480"/>
             <a:ext cx="640080" cy="640080"/>
           </a:xfrm>
-          <a:prstGeom prst="rect">
-            <a:avLst/>
-          </a:prstGeom>
-          <a:noFill/>
-          <a:ln/>
-        </p:spPr>
-        <p:txBody>
-          <a:bodyPr wrap="square" rtlCol="0" anchor="ctr"/>
-          <a:lstStyle/>
-          <a:p>
-            <a:pPr indent="0" marL="0">
-              <a:buNone/>
-            </a:pPr>
-            <a:r>
-              <a:rPr lang="en-US" sz="3200" dirty="0">
-                <a:solidFill>
-                  <a:srgbClr val="000000"/>
+          <a:prstGeom prst="ellipse">
+            <a:avLst/>
+          </a:prstGeom>
+          <a:solidFill>
+            <a:srgbClr val="1F72B8">
+              <a:alpha val="40000"/>
+            </a:srgbClr>
+          </a:solidFill>
+          <a:ln w="19050">
+            <a:solidFill>
+              <a:srgbClr val="1F72B8"/>
+            </a:solidFill>
+            <a:prstDash val="solid"/>
+          </a:ln>
+        </p:spPr>
+      </p:sp>
+      <p:sp>
+        <p:nvSpPr>
+          <p:cNvPr id="8" name="Text 6"/>
+          <p:cNvSpPr/>
+          <p:nvPr/>
+        </p:nvSpPr>
+        <p:spPr>
+          <a:xfrm>
+            <a:off x="731520" y="2697480"/>
+            <a:ext cx="640080" cy="640080"/>
+          </a:xfrm>
+          <a:prstGeom prst="rect">
+            <a:avLst/>
+          </a:prstGeom>
+          <a:noFill/>
+          <a:ln/>
+        </p:spPr>
+        <p:txBody>
+          <a:bodyPr wrap="square" rtlCol="0" anchor="ctr"/>
+          <a:lstStyle/>
+          <a:p>
+            <a:pPr algn="ctr" indent="0" marL="0">
+              <a:buNone/>
+            </a:pPr>
+            <a:r>
+              <a:rPr lang="en-US" sz="2660" dirty="0">
+                <a:solidFill>
+                  <a:srgbClr val="FFFFFF"/>
                 </a:solidFill>
                 <a:latin typeface="Calibri" pitchFamily="34" charset="0"/>
                 <a:ea typeface="Calibri" pitchFamily="34" charset="-122"/>
@@ -17220,20 +17625,20 @@
               </a:rPr>
               <a:t>✉️</a:t>
             </a:r>
-            <a:endParaRPr lang="en-US" sz="3200" dirty="0"/>
-          </a:p>
-        </p:txBody>
-      </p:sp>
-      <p:sp>
-        <p:nvSpPr>
-          <p:cNvPr id="8" name="Text 6"/>
-          <p:cNvSpPr/>
-          <p:nvPr/>
-        </p:nvSpPr>
-        <p:spPr>
-          <a:xfrm>
-            <a:off x="1463040" y="2697480"/>
-            <a:ext cx="2606040" cy="457200"/>
+            <a:endParaRPr lang="en-US" sz="2660" dirty="0"/>
+          </a:p>
+        </p:txBody>
+      </p:sp>
+      <p:sp>
+        <p:nvSpPr>
+          <p:cNvPr id="9" name="Text 7"/>
+          <p:cNvSpPr/>
+          <p:nvPr/>
+        </p:nvSpPr>
+        <p:spPr>
+          <a:xfrm>
+            <a:off x="1508760" y="2697480"/>
+            <a:ext cx="2560320" cy="457200"/>
           </a:xfrm>
           <a:prstGeom prst="rect">
             <a:avLst/>
@@ -17265,14 +17670,14 @@
       </p:sp>
       <p:sp>
         <p:nvSpPr>
-          <p:cNvPr id="9" name="Text 7"/>
-          <p:cNvSpPr/>
-          <p:nvPr/>
-        </p:nvSpPr>
-        <p:spPr>
-          <a:xfrm>
-            <a:off x="1463040" y="3154680"/>
-            <a:ext cx="2606040" cy="914400"/>
+          <p:cNvPr id="10" name="Text 8"/>
+          <p:cNvSpPr/>
+          <p:nvPr/>
+        </p:nvSpPr>
+        <p:spPr>
+          <a:xfrm>
+            <a:off x="1508760" y="3154680"/>
+            <a:ext cx="2560320" cy="914400"/>
           </a:xfrm>
           <a:prstGeom prst="rect">
             <a:avLst/>
@@ -17304,7 +17709,7 @@
       </p:sp>
       <p:sp>
         <p:nvSpPr>
-          <p:cNvPr id="10" name="Shape 8"/>
+          <p:cNvPr id="11" name="Shape 9"/>
           <p:cNvSpPr/>
           <p:nvPr/>
         </p:nvSpPr>
@@ -17331,32 +17736,59 @@
       </p:sp>
       <p:sp>
         <p:nvSpPr>
-          <p:cNvPr id="11" name="Text 9"/>
-          <p:cNvSpPr/>
-          <p:nvPr/>
-        </p:nvSpPr>
-        <p:spPr>
-          <a:xfrm>
-            <a:off x="4526280" y="2651760"/>
+          <p:cNvPr id="12" name="Shape 10"/>
+          <p:cNvSpPr/>
+          <p:nvPr/>
+        </p:nvSpPr>
+        <p:spPr>
+          <a:xfrm>
+            <a:off x="4526280" y="2697480"/>
             <a:ext cx="640080" cy="640080"/>
           </a:xfrm>
-          <a:prstGeom prst="rect">
-            <a:avLst/>
-          </a:prstGeom>
-          <a:noFill/>
-          <a:ln/>
-        </p:spPr>
-        <p:txBody>
-          <a:bodyPr wrap="square" rtlCol="0" anchor="ctr"/>
-          <a:lstStyle/>
-          <a:p>
-            <a:pPr indent="0" marL="0">
-              <a:buNone/>
-            </a:pPr>
-            <a:r>
-              <a:rPr lang="en-US" sz="3200" dirty="0">
-                <a:solidFill>
-                  <a:srgbClr val="000000"/>
+          <a:prstGeom prst="ellipse">
+            <a:avLst/>
+          </a:prstGeom>
+          <a:solidFill>
+            <a:srgbClr val="1F72B8">
+              <a:alpha val="40000"/>
+            </a:srgbClr>
+          </a:solidFill>
+          <a:ln w="19050">
+            <a:solidFill>
+              <a:srgbClr val="1F72B8"/>
+            </a:solidFill>
+            <a:prstDash val="solid"/>
+          </a:ln>
+        </p:spPr>
+      </p:sp>
+      <p:sp>
+        <p:nvSpPr>
+          <p:cNvPr id="13" name="Text 11"/>
+          <p:cNvSpPr/>
+          <p:nvPr/>
+        </p:nvSpPr>
+        <p:spPr>
+          <a:xfrm>
+            <a:off x="4526280" y="2697480"/>
+            <a:ext cx="640080" cy="640080"/>
+          </a:xfrm>
+          <a:prstGeom prst="rect">
+            <a:avLst/>
+          </a:prstGeom>
+          <a:noFill/>
+          <a:ln/>
+        </p:spPr>
+        <p:txBody>
+          <a:bodyPr wrap="square" rtlCol="0" anchor="ctr"/>
+          <a:lstStyle/>
+          <a:p>
+            <a:pPr algn="ctr" indent="0" marL="0">
+              <a:buNone/>
+            </a:pPr>
+            <a:r>
+              <a:rPr lang="en-US" sz="2660" dirty="0">
+                <a:solidFill>
+                  <a:srgbClr val="FFFFFF"/>
                 </a:solidFill>
                 <a:latin typeface="Calibri" pitchFamily="34" charset="0"/>
                 <a:ea typeface="Calibri" pitchFamily="34" charset="-122"/>
@@ -17364,20 +17796,20 @@
               </a:rPr>
               <a:t>📊</a:t>
             </a:r>
-            <a:endParaRPr lang="en-US" sz="3200" dirty="0"/>
-          </a:p>
-        </p:txBody>
-      </p:sp>
-      <p:sp>
-        <p:nvSpPr>
-          <p:cNvPr id="12" name="Text 10"/>
-          <p:cNvSpPr/>
-          <p:nvPr/>
-        </p:nvSpPr>
-        <p:spPr>
-          <a:xfrm>
-            <a:off x="5257800" y="2697480"/>
-            <a:ext cx="2606040" cy="457200"/>
+            <a:endParaRPr lang="en-US" sz="2660" dirty="0"/>
+          </a:p>
+        </p:txBody>
+      </p:sp>
+      <p:sp>
+        <p:nvSpPr>
+          <p:cNvPr id="14" name="Text 12"/>
+          <p:cNvSpPr/>
+          <p:nvPr/>
+        </p:nvSpPr>
+        <p:spPr>
+          <a:xfrm>
+            <a:off x="5303520" y="2697480"/>
+            <a:ext cx="2560320" cy="457200"/>
           </a:xfrm>
           <a:prstGeom prst="rect">
             <a:avLst/>
@@ -17409,14 +17841,14 @@
       </p:sp>
       <p:sp>
         <p:nvSpPr>
-          <p:cNvPr id="13" name="Text 11"/>
-          <p:cNvSpPr/>
-          <p:nvPr/>
-        </p:nvSpPr>
-        <p:spPr>
-          <a:xfrm>
-            <a:off x="5257800" y="3154680"/>
-            <a:ext cx="2606040" cy="914400"/>
+          <p:cNvPr id="15" name="Text 13"/>
+          <p:cNvSpPr/>
+          <p:nvPr/>
+        </p:nvSpPr>
+        <p:spPr>
+          <a:xfrm>
+            <a:off x="5303520" y="3154680"/>
+            <a:ext cx="2560320" cy="914400"/>
           </a:xfrm>
           <a:prstGeom prst="rect">
             <a:avLst/>
@@ -17448,7 +17880,7 @@
       </p:sp>
       <p:sp>
         <p:nvSpPr>
-          <p:cNvPr id="14" name="Shape 12"/>
+          <p:cNvPr id="16" name="Shape 14"/>
           <p:cNvSpPr/>
           <p:nvPr/>
         </p:nvSpPr>
@@ -17475,32 +17907,59 @@
       </p:sp>
       <p:sp>
         <p:nvSpPr>
-          <p:cNvPr id="15" name="Text 13"/>
-          <p:cNvSpPr/>
-          <p:nvPr/>
-        </p:nvSpPr>
-        <p:spPr>
-          <a:xfrm>
-            <a:off x="8321040" y="2651760"/>
+          <p:cNvPr id="17" name="Shape 15"/>
+          <p:cNvSpPr/>
+          <p:nvPr/>
+        </p:nvSpPr>
+        <p:spPr>
+          <a:xfrm>
+            <a:off x="8321040" y="2697480"/>
             <a:ext cx="640080" cy="640080"/>
           </a:xfrm>
-          <a:prstGeom prst="rect">
-            <a:avLst/>
-          </a:prstGeom>
-          <a:noFill/>
-          <a:ln/>
-        </p:spPr>
-        <p:txBody>
-          <a:bodyPr wrap="square" rtlCol="0" anchor="ctr"/>
-          <a:lstStyle/>
-          <a:p>
-            <a:pPr indent="0" marL="0">
-              <a:buNone/>
-            </a:pPr>
-            <a:r>
-              <a:rPr lang="en-US" sz="3200" dirty="0">
-                <a:solidFill>
-                  <a:srgbClr val="000000"/>
+          <a:prstGeom prst="ellipse">
+            <a:avLst/>
+          </a:prstGeom>
+          <a:solidFill>
+            <a:srgbClr val="1F72B8">
+              <a:alpha val="40000"/>
+            </a:srgbClr>
+          </a:solidFill>
+          <a:ln w="19050">
+            <a:solidFill>
+              <a:srgbClr val="1F72B8"/>
+            </a:solidFill>
+            <a:prstDash val="solid"/>
+          </a:ln>
+        </p:spPr>
+      </p:sp>
+      <p:sp>
+        <p:nvSpPr>
+          <p:cNvPr id="18" name="Text 16"/>
+          <p:cNvSpPr/>
+          <p:nvPr/>
+        </p:nvSpPr>
+        <p:spPr>
+          <a:xfrm>
+            <a:off x="8321040" y="2697480"/>
+            <a:ext cx="640080" cy="640080"/>
+          </a:xfrm>
+          <a:prstGeom prst="rect">
+            <a:avLst/>
+          </a:prstGeom>
+          <a:noFill/>
+          <a:ln/>
+        </p:spPr>
+        <p:txBody>
+          <a:bodyPr wrap="square" rtlCol="0" anchor="ctr"/>
+          <a:lstStyle/>
+          <a:p>
+            <a:pPr algn="ctr" indent="0" marL="0">
+              <a:buNone/>
+            </a:pPr>
+            <a:r>
+              <a:rPr lang="en-US" sz="2660" dirty="0">
+                <a:solidFill>
+                  <a:srgbClr val="FFFFFF"/>
                 </a:solidFill>
                 <a:latin typeface="Calibri" pitchFamily="34" charset="0"/>
                 <a:ea typeface="Calibri" pitchFamily="34" charset="-122"/>
@@ -17508,20 +17967,20 @@
               </a:rPr>
               <a:t>📋</a:t>
             </a:r>
-            <a:endParaRPr lang="en-US" sz="3200" dirty="0"/>
-          </a:p>
-        </p:txBody>
-      </p:sp>
-      <p:sp>
-        <p:nvSpPr>
-          <p:cNvPr id="16" name="Text 14"/>
-          <p:cNvSpPr/>
-          <p:nvPr/>
-        </p:nvSpPr>
-        <p:spPr>
-          <a:xfrm>
-            <a:off x="9052560" y="2697480"/>
-            <a:ext cx="2606040" cy="457200"/>
+            <a:endParaRPr lang="en-US" sz="2660" dirty="0"/>
+          </a:p>
+        </p:txBody>
+      </p:sp>
+      <p:sp>
+        <p:nvSpPr>
+          <p:cNvPr id="19" name="Text 17"/>
+          <p:cNvSpPr/>
+          <p:nvPr/>
+        </p:nvSpPr>
+        <p:spPr>
+          <a:xfrm>
+            <a:off x="9098280" y="2697480"/>
+            <a:ext cx="2560320" cy="457200"/>
           </a:xfrm>
           <a:prstGeom prst="rect">
             <a:avLst/>
@@ -17553,14 +18012,14 @@
       </p:sp>
       <p:sp>
         <p:nvSpPr>
-          <p:cNvPr id="17" name="Text 15"/>
-          <p:cNvSpPr/>
-          <p:nvPr/>
-        </p:nvSpPr>
-        <p:spPr>
-          <a:xfrm>
-            <a:off x="9052560" y="3154680"/>
-            <a:ext cx="2606040" cy="914400"/>
+          <p:cNvPr id="20" name="Text 18"/>
+          <p:cNvSpPr/>
+          <p:nvPr/>
+        </p:nvSpPr>
+        <p:spPr>
+          <a:xfrm>
+            <a:off x="9098280" y="3154680"/>
+            <a:ext cx="2560320" cy="914400"/>
           </a:xfrm>
           <a:prstGeom prst="rect">
             <a:avLst/>
@@ -17592,7 +18051,7 @@
       </p:sp>
       <p:sp>
         <p:nvSpPr>
-          <p:cNvPr id="18" name="Shape 16"/>
+          <p:cNvPr id="21" name="Shape 19"/>
           <p:cNvSpPr/>
           <p:nvPr/>
         </p:nvSpPr>
@@ -17619,32 +18078,59 @@
       </p:sp>
       <p:sp>
         <p:nvSpPr>
-          <p:cNvPr id="19" name="Text 17"/>
-          <p:cNvSpPr/>
-          <p:nvPr/>
-        </p:nvSpPr>
-        <p:spPr>
-          <a:xfrm>
-            <a:off x="731520" y="4526280"/>
+          <p:cNvPr id="22" name="Shape 20"/>
+          <p:cNvSpPr/>
+          <p:nvPr/>
+        </p:nvSpPr>
+        <p:spPr>
+          <a:xfrm>
+            <a:off x="731520" y="4572000"/>
             <a:ext cx="640080" cy="640080"/>
           </a:xfrm>
-          <a:prstGeom prst="rect">
-            <a:avLst/>
-          </a:prstGeom>
-          <a:noFill/>
-          <a:ln/>
-        </p:spPr>
-        <p:txBody>
-          <a:bodyPr wrap="square" rtlCol="0" anchor="ctr"/>
-          <a:lstStyle/>
-          <a:p>
-            <a:pPr indent="0" marL="0">
-              <a:buNone/>
-            </a:pPr>
-            <a:r>
-              <a:rPr lang="en-US" sz="3200" dirty="0">
-                <a:solidFill>
-                  <a:srgbClr val="000000"/>
+          <a:prstGeom prst="ellipse">
+            <a:avLst/>
+          </a:prstGeom>
+          <a:solidFill>
+            <a:srgbClr val="1F72B8">
+              <a:alpha val="40000"/>
+            </a:srgbClr>
+          </a:solidFill>
+          <a:ln w="19050">
+            <a:solidFill>
+              <a:srgbClr val="1F72B8"/>
+            </a:solidFill>
+            <a:prstDash val="solid"/>
+          </a:ln>
+        </p:spPr>
+      </p:sp>
+      <p:sp>
+        <p:nvSpPr>
+          <p:cNvPr id="23" name="Text 21"/>
+          <p:cNvSpPr/>
+          <p:nvPr/>
+        </p:nvSpPr>
+        <p:spPr>
+          <a:xfrm>
+            <a:off x="731520" y="4572000"/>
+            <a:ext cx="640080" cy="640080"/>
+          </a:xfrm>
+          <a:prstGeom prst="rect">
+            <a:avLst/>
+          </a:prstGeom>
+          <a:noFill/>
+          <a:ln/>
+        </p:spPr>
+        <p:txBody>
+          <a:bodyPr wrap="square" rtlCol="0" anchor="ctr"/>
+          <a:lstStyle/>
+          <a:p>
+            <a:pPr algn="ctr" indent="0" marL="0">
+              <a:buNone/>
+            </a:pPr>
+            <a:r>
+              <a:rPr lang="en-US" sz="2660" dirty="0">
+                <a:solidFill>
+                  <a:srgbClr val="FFFFFF"/>
                 </a:solidFill>
                 <a:latin typeface="Calibri" pitchFamily="34" charset="0"/>
                 <a:ea typeface="Calibri" pitchFamily="34" charset="-122"/>
@@ -17652,20 +18138,20 @@
               </a:rPr>
               <a:t>👁️</a:t>
             </a:r>
-            <a:endParaRPr lang="en-US" sz="3200" dirty="0"/>
-          </a:p>
-        </p:txBody>
-      </p:sp>
-      <p:sp>
-        <p:nvSpPr>
-          <p:cNvPr id="20" name="Text 18"/>
-          <p:cNvSpPr/>
-          <p:nvPr/>
-        </p:nvSpPr>
-        <p:spPr>
-          <a:xfrm>
-            <a:off x="1463040" y="4572000"/>
-            <a:ext cx="2606040" cy="457200"/>
+            <a:endParaRPr lang="en-US" sz="2660" dirty="0"/>
+          </a:p>
+        </p:txBody>
+      </p:sp>
+      <p:sp>
+        <p:nvSpPr>
+          <p:cNvPr id="24" name="Text 22"/>
+          <p:cNvSpPr/>
+          <p:nvPr/>
+        </p:nvSpPr>
+        <p:spPr>
+          <a:xfrm>
+            <a:off x="1508760" y="4572000"/>
+            <a:ext cx="2560320" cy="457200"/>
           </a:xfrm>
           <a:prstGeom prst="rect">
             <a:avLst/>
@@ -17697,14 +18183,14 @@
       </p:sp>
       <p:sp>
         <p:nvSpPr>
-          <p:cNvPr id="21" name="Text 19"/>
-          <p:cNvSpPr/>
-          <p:nvPr/>
-        </p:nvSpPr>
-        <p:spPr>
-          <a:xfrm>
-            <a:off x="1463040" y="5029200"/>
-            <a:ext cx="2606040" cy="914400"/>
+          <p:cNvPr id="25" name="Text 23"/>
+          <p:cNvSpPr/>
+          <p:nvPr/>
+        </p:nvSpPr>
+        <p:spPr>
+          <a:xfrm>
+            <a:off x="1508760" y="5029200"/>
+            <a:ext cx="2560320" cy="914400"/>
           </a:xfrm>
           <a:prstGeom prst="rect">
             <a:avLst/>
@@ -17736,7 +18222,7 @@
       </p:sp>
       <p:sp>
         <p:nvSpPr>
-          <p:cNvPr id="22" name="Shape 20"/>
+          <p:cNvPr id="26" name="Shape 24"/>
           <p:cNvSpPr/>
           <p:nvPr/>
         </p:nvSpPr>
@@ -17763,32 +18249,59 @@
       </p:sp>
       <p:sp>
         <p:nvSpPr>
-          <p:cNvPr id="23" name="Text 21"/>
-          <p:cNvSpPr/>
-          <p:nvPr/>
-        </p:nvSpPr>
-        <p:spPr>
-          <a:xfrm>
-            <a:off x="4526280" y="4526280"/>
+          <p:cNvPr id="27" name="Shape 25"/>
+          <p:cNvSpPr/>
+          <p:nvPr/>
+        </p:nvSpPr>
+        <p:spPr>
+          <a:xfrm>
+            <a:off x="4526280" y="4572000"/>
             <a:ext cx="640080" cy="640080"/>
           </a:xfrm>
-          <a:prstGeom prst="rect">
-            <a:avLst/>
-          </a:prstGeom>
-          <a:noFill/>
-          <a:ln/>
-        </p:spPr>
-        <p:txBody>
-          <a:bodyPr wrap="square" rtlCol="0" anchor="ctr"/>
-          <a:lstStyle/>
-          <a:p>
-            <a:pPr indent="0" marL="0">
-              <a:buNone/>
-            </a:pPr>
-            <a:r>
-              <a:rPr lang="en-US" sz="3200" dirty="0">
-                <a:solidFill>
-                  <a:srgbClr val="000000"/>
+          <a:prstGeom prst="ellipse">
+            <a:avLst/>
+          </a:prstGeom>
+          <a:solidFill>
+            <a:srgbClr val="1F72B8">
+              <a:alpha val="40000"/>
+            </a:srgbClr>
+          </a:solidFill>
+          <a:ln w="19050">
+            <a:solidFill>
+              <a:srgbClr val="1F72B8"/>
+            </a:solidFill>
+            <a:prstDash val="solid"/>
+          </a:ln>
+        </p:spPr>
+      </p:sp>
+      <p:sp>
+        <p:nvSpPr>
+          <p:cNvPr id="28" name="Text 26"/>
+          <p:cNvSpPr/>
+          <p:nvPr/>
+        </p:nvSpPr>
+        <p:spPr>
+          <a:xfrm>
+            <a:off x="4526280" y="4572000"/>
+            <a:ext cx="640080" cy="640080"/>
+          </a:xfrm>
+          <a:prstGeom prst="rect">
+            <a:avLst/>
+          </a:prstGeom>
+          <a:noFill/>
+          <a:ln/>
+        </p:spPr>
+        <p:txBody>
+          <a:bodyPr wrap="square" rtlCol="0" anchor="ctr"/>
+          <a:lstStyle/>
+          <a:p>
+            <a:pPr algn="ctr" indent="0" marL="0">
+              <a:buNone/>
+            </a:pPr>
+            <a:r>
+              <a:rPr lang="en-US" sz="2660" dirty="0">
+                <a:solidFill>
+                  <a:srgbClr val="FFFFFF"/>
                 </a:solidFill>
                 <a:latin typeface="Calibri" pitchFamily="34" charset="0"/>
                 <a:ea typeface="Calibri" pitchFamily="34" charset="-122"/>
@@ -17796,20 +18309,20 @@
               </a:rPr>
               <a:t>🗺️</a:t>
             </a:r>
-            <a:endParaRPr lang="en-US" sz="3200" dirty="0"/>
-          </a:p>
-        </p:txBody>
-      </p:sp>
-      <p:sp>
-        <p:nvSpPr>
-          <p:cNvPr id="24" name="Text 22"/>
-          <p:cNvSpPr/>
-          <p:nvPr/>
-        </p:nvSpPr>
-        <p:spPr>
-          <a:xfrm>
-            <a:off x="5257800" y="4572000"/>
-            <a:ext cx="2606040" cy="457200"/>
+            <a:endParaRPr lang="en-US" sz="2660" dirty="0"/>
+          </a:p>
+        </p:txBody>
+      </p:sp>
+      <p:sp>
+        <p:nvSpPr>
+          <p:cNvPr id="29" name="Text 27"/>
+          <p:cNvSpPr/>
+          <p:nvPr/>
+        </p:nvSpPr>
+        <p:spPr>
+          <a:xfrm>
+            <a:off x="5303520" y="4572000"/>
+            <a:ext cx="2560320" cy="457200"/>
           </a:xfrm>
           <a:prstGeom prst="rect">
             <a:avLst/>
@@ -17841,14 +18354,14 @@
       </p:sp>
       <p:sp>
         <p:nvSpPr>
-          <p:cNvPr id="25" name="Text 23"/>
-          <p:cNvSpPr/>
-          <p:nvPr/>
-        </p:nvSpPr>
-        <p:spPr>
-          <a:xfrm>
-            <a:off x="5257800" y="5029200"/>
-            <a:ext cx="2606040" cy="914400"/>
+          <p:cNvPr id="30" name="Text 28"/>
+          <p:cNvSpPr/>
+          <p:nvPr/>
+        </p:nvSpPr>
+        <p:spPr>
+          <a:xfrm>
+            <a:off x="5303520" y="5029200"/>
+            <a:ext cx="2560320" cy="914400"/>
           </a:xfrm>
           <a:prstGeom prst="rect">
             <a:avLst/>
@@ -17880,7 +18393,7 @@
       </p:sp>
       <p:sp>
         <p:nvSpPr>
-          <p:cNvPr id="26" name="Shape 24"/>
+          <p:cNvPr id="31" name="Shape 29"/>
           <p:cNvSpPr/>
           <p:nvPr/>
         </p:nvSpPr>
@@ -17900,7 +18413,7 @@
       </p:sp>
       <p:sp>
         <p:nvSpPr>
-          <p:cNvPr id="27" name="Text 25"/>
+          <p:cNvPr id="32" name="Text 30"/>
           <p:cNvSpPr/>
           <p:nvPr/>
         </p:nvSpPr>
@@ -17939,7 +18452,7 @@
       </p:sp>
       <p:sp>
         <p:nvSpPr>
-          <p:cNvPr id="28" name="Text 26"/>
+          <p:cNvPr id="33" name="Text 31"/>
           <p:cNvSpPr/>
           <p:nvPr/>
         </p:nvSpPr>
@@ -18147,34 +18660,1576 @@
       </p:sp>
       <p:sp>
         <p:nvSpPr>
-          <p:cNvPr id="6" name="Shape 4"/>
-          <p:cNvSpPr/>
-          <p:nvPr/>
-        </p:nvSpPr>
-        <p:spPr>
-          <a:xfrm>
-            <a:off x="548640" y="2514600"/>
-            <a:ext cx="5486400" cy="457200"/>
-          </a:xfrm>
-          <a:prstGeom prst="rect">
-            <a:avLst/>
+          <p:cNvPr id="6" name="Text 4"/>
+          <p:cNvSpPr/>
+          <p:nvPr/>
+        </p:nvSpPr>
+        <p:spPr>
+          <a:xfrm>
+            <a:off x="1188720" y="2331720"/>
+            <a:ext cx="4114800" cy="274320"/>
+          </a:xfrm>
+          <a:prstGeom prst="rect">
+            <a:avLst/>
+          </a:prstGeom>
+          <a:noFill/>
+          <a:ln/>
+        </p:spPr>
+        <p:txBody>
+          <a:bodyPr wrap="square" rtlCol="0" anchor="ctr"/>
+          <a:lstStyle/>
+          <a:p>
+            <a:pPr indent="0" marL="0">
+              <a:buNone/>
+            </a:pPr>
+            <a:r>
+              <a:rPr lang="en-US" sz="1100" b="1" spc="300" kern="0" dirty="0">
+                <a:solidFill>
+                  <a:srgbClr val="CBD5E1"/>
+                </a:solidFill>
+                <a:latin typeface="Calibri" pitchFamily="34" charset="0"/>
+                <a:ea typeface="Calibri" pitchFamily="34" charset="-122"/>
+                <a:cs typeface="Calibri" pitchFamily="34" charset="-120"/>
+              </a:rPr>
+              <a:t>HOY · SIN APP</a:t>
+            </a:r>
+            <a:endParaRPr lang="en-US" sz="1100" dirty="0"/>
+          </a:p>
+        </p:txBody>
+      </p:sp>
+      <p:sp>
+        <p:nvSpPr>
+          <p:cNvPr id="7" name="Text 5"/>
+          <p:cNvSpPr/>
+          <p:nvPr/>
+        </p:nvSpPr>
+        <p:spPr>
+          <a:xfrm>
+            <a:off x="6949440" y="2331720"/>
+            <a:ext cx="4572000" cy="274320"/>
+          </a:xfrm>
+          <a:prstGeom prst="rect">
+            <a:avLst/>
+          </a:prstGeom>
+          <a:noFill/>
+          <a:ln/>
+        </p:spPr>
+        <p:txBody>
+          <a:bodyPr wrap="square" rtlCol="0" anchor="ctr"/>
+          <a:lstStyle/>
+          <a:p>
+            <a:pPr indent="0" marL="0">
+              <a:buNone/>
+            </a:pPr>
+            <a:r>
+              <a:rPr lang="en-US" sz="1100" b="1" spc="300" kern="0" dirty="0">
+                <a:solidFill>
+                  <a:srgbClr val="7FCFE5"/>
+                </a:solidFill>
+                <a:latin typeface="Calibri" pitchFamily="34" charset="0"/>
+                <a:ea typeface="Calibri" pitchFamily="34" charset="-122"/>
+                <a:cs typeface="Calibri" pitchFamily="34" charset="-120"/>
+              </a:rPr>
+              <a:t>CON APOPS SIEMPRE</a:t>
+            </a:r>
+            <a:endParaRPr lang="en-US" sz="1100" dirty="0"/>
+          </a:p>
+        </p:txBody>
+      </p:sp>
+      <p:sp>
+        <p:nvSpPr>
+          <p:cNvPr id="8" name="Shape 6"/>
+          <p:cNvSpPr/>
+          <p:nvPr/>
+        </p:nvSpPr>
+        <p:spPr>
+          <a:xfrm>
+            <a:off x="457200" y="2697480"/>
+            <a:ext cx="11247120" cy="475488"/>
+          </a:xfrm>
+          <a:prstGeom prst="roundRect">
+            <a:avLst>
+              <a:gd name="adj" fmla="val 15385"/>
+            </a:avLst>
           </a:prstGeom>
           <a:solidFill>
-            <a:srgbClr val="94A3B8"/>
+            <a:srgbClr val="1A325C">
+              <a:alpha val="70000"/>
+            </a:srgbClr>
           </a:solidFill>
-          <a:ln/>
-        </p:spPr>
-      </p:sp>
-      <p:sp>
-        <p:nvSpPr>
-          <p:cNvPr id="7" name="Shape 5"/>
-          <p:cNvSpPr/>
-          <p:nvPr/>
-        </p:nvSpPr>
-        <p:spPr>
-          <a:xfrm>
-            <a:off x="6126480" y="2514600"/>
-            <a:ext cx="5486400" cy="457200"/>
+          <a:ln w="6350">
+            <a:solidFill>
+              <a:srgbClr val="334155"/>
+            </a:solidFill>
+            <a:prstDash val="solid"/>
+          </a:ln>
+        </p:spPr>
+      </p:sp>
+      <p:sp>
+        <p:nvSpPr>
+          <p:cNvPr id="9" name="Shape 7"/>
+          <p:cNvSpPr/>
+          <p:nvPr/>
+        </p:nvSpPr>
+        <p:spPr>
+          <a:xfrm>
+            <a:off x="594360" y="2752344"/>
+            <a:ext cx="365760" cy="365760"/>
+          </a:xfrm>
+          <a:prstGeom prst="ellipse">
+            <a:avLst/>
+          </a:prstGeom>
+          <a:solidFill>
+            <a:srgbClr val="1F72B8">
+              <a:alpha val="40000"/>
+            </a:srgbClr>
+          </a:solidFill>
+          <a:ln w="19050">
+            <a:solidFill>
+              <a:srgbClr val="1F72B8"/>
+            </a:solidFill>
+            <a:prstDash val="solid"/>
+          </a:ln>
+        </p:spPr>
+      </p:sp>
+      <p:sp>
+        <p:nvSpPr>
+          <p:cNvPr id="10" name="Text 8"/>
+          <p:cNvSpPr/>
+          <p:nvPr/>
+        </p:nvSpPr>
+        <p:spPr>
+          <a:xfrm>
+            <a:off x="594360" y="2752344"/>
+            <a:ext cx="365760" cy="365760"/>
+          </a:xfrm>
+          <a:prstGeom prst="rect">
+            <a:avLst/>
+          </a:prstGeom>
+          <a:noFill/>
+          <a:ln/>
+        </p:spPr>
+        <p:txBody>
+          <a:bodyPr wrap="square" rtlCol="0" anchor="ctr"/>
+          <a:lstStyle/>
+          <a:p>
+            <a:pPr algn="ctr" indent="0" marL="0">
+              <a:buNone/>
+            </a:pPr>
+            <a:r>
+              <a:rPr lang="en-US" sz="1520" dirty="0">
+                <a:solidFill>
+                  <a:srgbClr val="FFFFFF"/>
+                </a:solidFill>
+                <a:latin typeface="Calibri" pitchFamily="34" charset="0"/>
+                <a:ea typeface="Calibri" pitchFamily="34" charset="-122"/>
+                <a:cs typeface="Calibri" pitchFamily="34" charset="-120"/>
+              </a:rPr>
+              <a:t>📧</a:t>
+            </a:r>
+            <a:endParaRPr lang="en-US" sz="1520" dirty="0"/>
+          </a:p>
+        </p:txBody>
+      </p:sp>
+      <p:sp>
+        <p:nvSpPr>
+          <p:cNvPr id="11" name="Text 9"/>
+          <p:cNvSpPr/>
+          <p:nvPr/>
+        </p:nvSpPr>
+        <p:spPr>
+          <a:xfrm>
+            <a:off x="1097280" y="2743200"/>
+            <a:ext cx="4846320" cy="384048"/>
+          </a:xfrm>
+          <a:prstGeom prst="rect">
+            <a:avLst/>
+          </a:prstGeom>
+          <a:noFill/>
+          <a:ln/>
+        </p:spPr>
+        <p:txBody>
+          <a:bodyPr wrap="square" rtlCol="0" anchor="ctr"/>
+          <a:lstStyle/>
+          <a:p>
+            <a:pPr indent="0" marL="0">
+              <a:buNone/>
+            </a:pPr>
+            <a:r>
+              <a:rPr lang="en-US" sz="1200" dirty="0">
+                <a:solidFill>
+                  <a:srgbClr val="CBD5E1"/>
+                </a:solidFill>
+                <a:latin typeface="Calibri" pitchFamily="34" charset="0"/>
+                <a:ea typeface="Calibri" pitchFamily="34" charset="-122"/>
+                <a:cs typeface="Calibri" pitchFamily="34" charset="-120"/>
+              </a:rPr>
+              <a:t>Mail o WhatsApp que se pierde</a:t>
+            </a:r>
+            <a:endParaRPr lang="en-US" sz="1200" dirty="0"/>
+          </a:p>
+        </p:txBody>
+      </p:sp>
+      <p:sp>
+        <p:nvSpPr>
+          <p:cNvPr id="12" name="Text 10"/>
+          <p:cNvSpPr/>
+          <p:nvPr/>
+        </p:nvSpPr>
+        <p:spPr>
+          <a:xfrm>
+            <a:off x="6035040" y="2743200"/>
+            <a:ext cx="548640" cy="384048"/>
+          </a:xfrm>
+          <a:prstGeom prst="rect">
+            <a:avLst/>
+          </a:prstGeom>
+          <a:noFill/>
+          <a:ln/>
+        </p:spPr>
+        <p:txBody>
+          <a:bodyPr wrap="square" rtlCol="0" anchor="ctr"/>
+          <a:lstStyle/>
+          <a:p>
+            <a:pPr algn="ctr" indent="0" marL="0">
+              <a:buNone/>
+            </a:pPr>
+            <a:r>
+              <a:rPr lang="en-US" sz="2200" b="1" dirty="0">
+                <a:solidFill>
+                  <a:srgbClr val="7FCFE5"/>
+                </a:solidFill>
+                <a:latin typeface="Calibri" pitchFamily="34" charset="0"/>
+                <a:ea typeface="Calibri" pitchFamily="34" charset="-122"/>
+                <a:cs typeface="Calibri" pitchFamily="34" charset="-120"/>
+              </a:rPr>
+              <a:t>→</a:t>
+            </a:r>
+            <a:endParaRPr lang="en-US" sz="2200" dirty="0"/>
+          </a:p>
+        </p:txBody>
+      </p:sp>
+      <p:sp>
+        <p:nvSpPr>
+          <p:cNvPr id="13" name="Text 11"/>
+          <p:cNvSpPr/>
+          <p:nvPr/>
+        </p:nvSpPr>
+        <p:spPr>
+          <a:xfrm>
+            <a:off x="6675120" y="2743200"/>
+            <a:ext cx="4846320" cy="384048"/>
+          </a:xfrm>
+          <a:prstGeom prst="rect">
+            <a:avLst/>
+          </a:prstGeom>
+          <a:noFill/>
+          <a:ln/>
+        </p:spPr>
+        <p:txBody>
+          <a:bodyPr wrap="square" rtlCol="0" anchor="ctr"/>
+          <a:lstStyle/>
+          <a:p>
+            <a:pPr indent="0" marL="0">
+              <a:buNone/>
+            </a:pPr>
+            <a:r>
+              <a:rPr lang="en-US" sz="1200" b="1" dirty="0">
+                <a:solidFill>
+                  <a:srgbClr val="FFFFFF"/>
+                </a:solidFill>
+                <a:latin typeface="Calibri" pitchFamily="34" charset="0"/>
+                <a:ea typeface="Calibri" pitchFamily="34" charset="-122"/>
+                <a:cs typeface="Calibri" pitchFamily="34" charset="-120"/>
+              </a:rPr>
+              <a:t>Notificación al celular con tasa de lectura medida</a:t>
+            </a:r>
+            <a:endParaRPr lang="en-US" sz="1200" dirty="0"/>
+          </a:p>
+        </p:txBody>
+      </p:sp>
+      <p:sp>
+        <p:nvSpPr>
+          <p:cNvPr id="14" name="Shape 12"/>
+          <p:cNvSpPr/>
+          <p:nvPr/>
+        </p:nvSpPr>
+        <p:spPr>
+          <a:xfrm>
+            <a:off x="457200" y="3246120"/>
+            <a:ext cx="11247120" cy="475488"/>
+          </a:xfrm>
+          <a:prstGeom prst="roundRect">
+            <a:avLst>
+              <a:gd name="adj" fmla="val 15385"/>
+            </a:avLst>
+          </a:prstGeom>
+          <a:solidFill>
+            <a:srgbClr val="1A325C">
+              <a:alpha val="70000"/>
+            </a:srgbClr>
+          </a:solidFill>
+          <a:ln w="6350">
+            <a:solidFill>
+              <a:srgbClr val="334155"/>
+            </a:solidFill>
+            <a:prstDash val="solid"/>
+          </a:ln>
+        </p:spPr>
+      </p:sp>
+      <p:sp>
+        <p:nvSpPr>
+          <p:cNvPr id="15" name="Shape 13"/>
+          <p:cNvSpPr/>
+          <p:nvPr/>
+        </p:nvSpPr>
+        <p:spPr>
+          <a:xfrm>
+            <a:off x="594360" y="3300984"/>
+            <a:ext cx="365760" cy="365760"/>
+          </a:xfrm>
+          <a:prstGeom prst="ellipse">
+            <a:avLst/>
+          </a:prstGeom>
+          <a:solidFill>
+            <a:srgbClr val="1F72B8">
+              <a:alpha val="40000"/>
+            </a:srgbClr>
+          </a:solidFill>
+          <a:ln w="19050">
+            <a:solidFill>
+              <a:srgbClr val="1F72B8"/>
+            </a:solidFill>
+            <a:prstDash val="solid"/>
+          </a:ln>
+        </p:spPr>
+      </p:sp>
+      <p:sp>
+        <p:nvSpPr>
+          <p:cNvPr id="16" name="Text 14"/>
+          <p:cNvSpPr/>
+          <p:nvPr/>
+        </p:nvSpPr>
+        <p:spPr>
+          <a:xfrm>
+            <a:off x="594360" y="3300984"/>
+            <a:ext cx="365760" cy="365760"/>
+          </a:xfrm>
+          <a:prstGeom prst="rect">
+            <a:avLst/>
+          </a:prstGeom>
+          <a:noFill/>
+          <a:ln/>
+        </p:spPr>
+        <p:txBody>
+          <a:bodyPr wrap="square" rtlCol="0" anchor="ctr"/>
+          <a:lstStyle/>
+          <a:p>
+            <a:pPr algn="ctr" indent="0" marL="0">
+              <a:buNone/>
+            </a:pPr>
+            <a:r>
+              <a:rPr lang="en-US" sz="1520" dirty="0">
+                <a:solidFill>
+                  <a:srgbClr val="FFFFFF"/>
+                </a:solidFill>
+                <a:latin typeface="Calibri" pitchFamily="34" charset="0"/>
+                <a:ea typeface="Calibri" pitchFamily="34" charset="-122"/>
+                <a:cs typeface="Calibri" pitchFamily="34" charset="-120"/>
+              </a:rPr>
+              <a:t>📰</a:t>
+            </a:r>
+            <a:endParaRPr lang="en-US" sz="1520" dirty="0"/>
+          </a:p>
+        </p:txBody>
+      </p:sp>
+      <p:sp>
+        <p:nvSpPr>
+          <p:cNvPr id="17" name="Text 15"/>
+          <p:cNvSpPr/>
+          <p:nvPr/>
+        </p:nvSpPr>
+        <p:spPr>
+          <a:xfrm>
+            <a:off x="1097280" y="3291840"/>
+            <a:ext cx="4846320" cy="384048"/>
+          </a:xfrm>
+          <a:prstGeom prst="rect">
+            <a:avLst/>
+          </a:prstGeom>
+          <a:noFill/>
+          <a:ln/>
+        </p:spPr>
+        <p:txBody>
+          <a:bodyPr wrap="square" rtlCol="0" anchor="ctr"/>
+          <a:lstStyle/>
+          <a:p>
+            <a:pPr indent="0" marL="0">
+              <a:buNone/>
+            </a:pPr>
+            <a:r>
+              <a:rPr lang="en-US" sz="1200" dirty="0">
+                <a:solidFill>
+                  <a:srgbClr val="CBD5E1"/>
+                </a:solidFill>
+                <a:latin typeface="Calibri" pitchFamily="34" charset="0"/>
+                <a:ea typeface="Calibri" pitchFamily="34" charset="-122"/>
+                <a:cs typeface="Calibri" pitchFamily="34" charset="-120"/>
+              </a:rPr>
+              <a:t>Comunicados que no se leen</a:t>
+            </a:r>
+            <a:endParaRPr lang="en-US" sz="1200" dirty="0"/>
+          </a:p>
+        </p:txBody>
+      </p:sp>
+      <p:sp>
+        <p:nvSpPr>
+          <p:cNvPr id="18" name="Text 16"/>
+          <p:cNvSpPr/>
+          <p:nvPr/>
+        </p:nvSpPr>
+        <p:spPr>
+          <a:xfrm>
+            <a:off x="6035040" y="3291840"/>
+            <a:ext cx="548640" cy="384048"/>
+          </a:xfrm>
+          <a:prstGeom prst="rect">
+            <a:avLst/>
+          </a:prstGeom>
+          <a:noFill/>
+          <a:ln/>
+        </p:spPr>
+        <p:txBody>
+          <a:bodyPr wrap="square" rtlCol="0" anchor="ctr"/>
+          <a:lstStyle/>
+          <a:p>
+            <a:pPr algn="ctr" indent="0" marL="0">
+              <a:buNone/>
+            </a:pPr>
+            <a:r>
+              <a:rPr lang="en-US" sz="2200" b="1" dirty="0">
+                <a:solidFill>
+                  <a:srgbClr val="7FCFE5"/>
+                </a:solidFill>
+                <a:latin typeface="Calibri" pitchFamily="34" charset="0"/>
+                <a:ea typeface="Calibri" pitchFamily="34" charset="-122"/>
+                <a:cs typeface="Calibri" pitchFamily="34" charset="-120"/>
+              </a:rPr>
+              <a:t>→</a:t>
+            </a:r>
+            <a:endParaRPr lang="en-US" sz="2200" dirty="0"/>
+          </a:p>
+        </p:txBody>
+      </p:sp>
+      <p:sp>
+        <p:nvSpPr>
+          <p:cNvPr id="19" name="Text 17"/>
+          <p:cNvSpPr/>
+          <p:nvPr/>
+        </p:nvSpPr>
+        <p:spPr>
+          <a:xfrm>
+            <a:off x="6675120" y="3291840"/>
+            <a:ext cx="4846320" cy="384048"/>
+          </a:xfrm>
+          <a:prstGeom prst="rect">
+            <a:avLst/>
+          </a:prstGeom>
+          <a:noFill/>
+          <a:ln/>
+        </p:spPr>
+        <p:txBody>
+          <a:bodyPr wrap="square" rtlCol="0" anchor="ctr"/>
+          <a:lstStyle/>
+          <a:p>
+            <a:pPr indent="0" marL="0">
+              <a:buNone/>
+            </a:pPr>
+            <a:r>
+              <a:rPr lang="en-US" sz="1200" b="1" dirty="0">
+                <a:solidFill>
+                  <a:srgbClr val="FFFFFF"/>
+                </a:solidFill>
+                <a:latin typeface="Calibri" pitchFamily="34" charset="0"/>
+                <a:ea typeface="Calibri" pitchFamily="34" charset="-122"/>
+                <a:cs typeface="Calibri" pitchFamily="34" charset="-120"/>
+              </a:rPr>
+              <a:t>Novedades en feed + página pública compartible</a:t>
+            </a:r>
+            <a:endParaRPr lang="en-US" sz="1200" dirty="0"/>
+          </a:p>
+        </p:txBody>
+      </p:sp>
+      <p:sp>
+        <p:nvSpPr>
+          <p:cNvPr id="20" name="Shape 18"/>
+          <p:cNvSpPr/>
+          <p:nvPr/>
+        </p:nvSpPr>
+        <p:spPr>
+          <a:xfrm>
+            <a:off x="457200" y="3794760"/>
+            <a:ext cx="11247120" cy="475488"/>
+          </a:xfrm>
+          <a:prstGeom prst="roundRect">
+            <a:avLst>
+              <a:gd name="adj" fmla="val 15385"/>
+            </a:avLst>
+          </a:prstGeom>
+          <a:solidFill>
+            <a:srgbClr val="1A325C">
+              <a:alpha val="70000"/>
+            </a:srgbClr>
+          </a:solidFill>
+          <a:ln w="6350">
+            <a:solidFill>
+              <a:srgbClr val="334155"/>
+            </a:solidFill>
+            <a:prstDash val="solid"/>
+          </a:ln>
+        </p:spPr>
+      </p:sp>
+      <p:sp>
+        <p:nvSpPr>
+          <p:cNvPr id="21" name="Shape 19"/>
+          <p:cNvSpPr/>
+          <p:nvPr/>
+        </p:nvSpPr>
+        <p:spPr>
+          <a:xfrm>
+            <a:off x="594360" y="3849624"/>
+            <a:ext cx="365760" cy="365760"/>
+          </a:xfrm>
+          <a:prstGeom prst="ellipse">
+            <a:avLst/>
+          </a:prstGeom>
+          <a:solidFill>
+            <a:srgbClr val="1F72B8">
+              <a:alpha val="40000"/>
+            </a:srgbClr>
+          </a:solidFill>
+          <a:ln w="19050">
+            <a:solidFill>
+              <a:srgbClr val="1F72B8"/>
+            </a:solidFill>
+            <a:prstDash val="solid"/>
+          </a:ln>
+        </p:spPr>
+      </p:sp>
+      <p:sp>
+        <p:nvSpPr>
+          <p:cNvPr id="22" name="Text 20"/>
+          <p:cNvSpPr/>
+          <p:nvPr/>
+        </p:nvSpPr>
+        <p:spPr>
+          <a:xfrm>
+            <a:off x="594360" y="3849624"/>
+            <a:ext cx="365760" cy="365760"/>
+          </a:xfrm>
+          <a:prstGeom prst="rect">
+            <a:avLst/>
+          </a:prstGeom>
+          <a:noFill/>
+          <a:ln/>
+        </p:spPr>
+        <p:txBody>
+          <a:bodyPr wrap="square" rtlCol="0" anchor="ctr"/>
+          <a:lstStyle/>
+          <a:p>
+            <a:pPr algn="ctr" indent="0" marL="0">
+              <a:buNone/>
+            </a:pPr>
+            <a:r>
+              <a:rPr lang="en-US" sz="1520" dirty="0">
+                <a:solidFill>
+                  <a:srgbClr val="FFFFFF"/>
+                </a:solidFill>
+                <a:latin typeface="Calibri" pitchFamily="34" charset="0"/>
+                <a:ea typeface="Calibri" pitchFamily="34" charset="-122"/>
+                <a:cs typeface="Calibri" pitchFamily="34" charset="-120"/>
+              </a:rPr>
+              <a:t>💬</a:t>
+            </a:r>
+            <a:endParaRPr lang="en-US" sz="1520" dirty="0"/>
+          </a:p>
+        </p:txBody>
+      </p:sp>
+      <p:sp>
+        <p:nvSpPr>
+          <p:cNvPr id="23" name="Text 21"/>
+          <p:cNvSpPr/>
+          <p:nvPr/>
+        </p:nvSpPr>
+        <p:spPr>
+          <a:xfrm>
+            <a:off x="1097280" y="3840480"/>
+            <a:ext cx="4846320" cy="384048"/>
+          </a:xfrm>
+          <a:prstGeom prst="rect">
+            <a:avLst/>
+          </a:prstGeom>
+          <a:noFill/>
+          <a:ln/>
+        </p:spPr>
+        <p:txBody>
+          <a:bodyPr wrap="square" rtlCol="0" anchor="ctr"/>
+          <a:lstStyle/>
+          <a:p>
+            <a:pPr indent="0" marL="0">
+              <a:buNone/>
+            </a:pPr>
+            <a:r>
+              <a:rPr lang="en-US" sz="1200" dirty="0">
+                <a:solidFill>
+                  <a:srgbClr val="CBD5E1"/>
+                </a:solidFill>
+                <a:latin typeface="Calibri" pitchFamily="34" charset="0"/>
+                <a:ea typeface="Calibri" pitchFamily="34" charset="-122"/>
+                <a:cs typeface="Calibri" pitchFamily="34" charset="-120"/>
+              </a:rPr>
+              <a:t>WhatsApp del delegado se inunda</a:t>
+            </a:r>
+            <a:endParaRPr lang="en-US" sz="1200" dirty="0"/>
+          </a:p>
+        </p:txBody>
+      </p:sp>
+      <p:sp>
+        <p:nvSpPr>
+          <p:cNvPr id="24" name="Text 22"/>
+          <p:cNvSpPr/>
+          <p:nvPr/>
+        </p:nvSpPr>
+        <p:spPr>
+          <a:xfrm>
+            <a:off x="6035040" y="3840480"/>
+            <a:ext cx="548640" cy="384048"/>
+          </a:xfrm>
+          <a:prstGeom prst="rect">
+            <a:avLst/>
+          </a:prstGeom>
+          <a:noFill/>
+          <a:ln/>
+        </p:spPr>
+        <p:txBody>
+          <a:bodyPr wrap="square" rtlCol="0" anchor="ctr"/>
+          <a:lstStyle/>
+          <a:p>
+            <a:pPr algn="ctr" indent="0" marL="0">
+              <a:buNone/>
+            </a:pPr>
+            <a:r>
+              <a:rPr lang="en-US" sz="2200" b="1" dirty="0">
+                <a:solidFill>
+                  <a:srgbClr val="7FCFE5"/>
+                </a:solidFill>
+                <a:latin typeface="Calibri" pitchFamily="34" charset="0"/>
+                <a:ea typeface="Calibri" pitchFamily="34" charset="-122"/>
+                <a:cs typeface="Calibri" pitchFamily="34" charset="-120"/>
+              </a:rPr>
+              <a:t>→</a:t>
+            </a:r>
+            <a:endParaRPr lang="en-US" sz="2200" dirty="0"/>
+          </a:p>
+        </p:txBody>
+      </p:sp>
+      <p:sp>
+        <p:nvSpPr>
+          <p:cNvPr id="25" name="Text 23"/>
+          <p:cNvSpPr/>
+          <p:nvPr/>
+        </p:nvSpPr>
+        <p:spPr>
+          <a:xfrm>
+            <a:off x="6675120" y="3840480"/>
+            <a:ext cx="4846320" cy="384048"/>
+          </a:xfrm>
+          <a:prstGeom prst="rect">
+            <a:avLst/>
+          </a:prstGeom>
+          <a:noFill/>
+          <a:ln/>
+        </p:spPr>
+        <p:txBody>
+          <a:bodyPr wrap="square" rtlCol="0" anchor="ctr"/>
+          <a:lstStyle/>
+          <a:p>
+            <a:pPr indent="0" marL="0">
+              <a:buNone/>
+            </a:pPr>
+            <a:r>
+              <a:rPr lang="en-US" sz="1200" b="1" dirty="0">
+                <a:solidFill>
+                  <a:srgbClr val="FFFFFF"/>
+                </a:solidFill>
+                <a:latin typeface="Calibri" pitchFamily="34" charset="0"/>
+                <a:ea typeface="Calibri" pitchFamily="34" charset="-122"/>
+                <a:cs typeface="Calibri" pitchFamily="34" charset="-120"/>
+              </a:rPr>
+              <a:t>Hilos 1-a-1 ordenados con historial</a:t>
+            </a:r>
+            <a:endParaRPr lang="en-US" sz="1200" dirty="0"/>
+          </a:p>
+        </p:txBody>
+      </p:sp>
+      <p:sp>
+        <p:nvSpPr>
+          <p:cNvPr id="26" name="Shape 24"/>
+          <p:cNvSpPr/>
+          <p:nvPr/>
+        </p:nvSpPr>
+        <p:spPr>
+          <a:xfrm>
+            <a:off x="457200" y="4343400"/>
+            <a:ext cx="11247120" cy="475488"/>
+          </a:xfrm>
+          <a:prstGeom prst="roundRect">
+            <a:avLst>
+              <a:gd name="adj" fmla="val 15385"/>
+            </a:avLst>
+          </a:prstGeom>
+          <a:solidFill>
+            <a:srgbClr val="1A325C">
+              <a:alpha val="70000"/>
+            </a:srgbClr>
+          </a:solidFill>
+          <a:ln w="6350">
+            <a:solidFill>
+              <a:srgbClr val="334155"/>
+            </a:solidFill>
+            <a:prstDash val="solid"/>
+          </a:ln>
+        </p:spPr>
+      </p:sp>
+      <p:sp>
+        <p:nvSpPr>
+          <p:cNvPr id="27" name="Shape 25"/>
+          <p:cNvSpPr/>
+          <p:nvPr/>
+        </p:nvSpPr>
+        <p:spPr>
+          <a:xfrm>
+            <a:off x="594360" y="4398264"/>
+            <a:ext cx="365760" cy="365760"/>
+          </a:xfrm>
+          <a:prstGeom prst="ellipse">
+            <a:avLst/>
+          </a:prstGeom>
+          <a:solidFill>
+            <a:srgbClr val="1F72B8">
+              <a:alpha val="40000"/>
+            </a:srgbClr>
+          </a:solidFill>
+          <a:ln w="19050">
+            <a:solidFill>
+              <a:srgbClr val="1F72B8"/>
+            </a:solidFill>
+            <a:prstDash val="solid"/>
+          </a:ln>
+        </p:spPr>
+      </p:sp>
+      <p:sp>
+        <p:nvSpPr>
+          <p:cNvPr id="28" name="Text 26"/>
+          <p:cNvSpPr/>
+          <p:nvPr/>
+        </p:nvSpPr>
+        <p:spPr>
+          <a:xfrm>
+            <a:off x="594360" y="4398264"/>
+            <a:ext cx="365760" cy="365760"/>
+          </a:xfrm>
+          <a:prstGeom prst="rect">
+            <a:avLst/>
+          </a:prstGeom>
+          <a:noFill/>
+          <a:ln/>
+        </p:spPr>
+        <p:txBody>
+          <a:bodyPr wrap="square" rtlCol="0" anchor="ctr"/>
+          <a:lstStyle/>
+          <a:p>
+            <a:pPr algn="ctr" indent="0" marL="0">
+              <a:buNone/>
+            </a:pPr>
+            <a:r>
+              <a:rPr lang="en-US" sz="1520" dirty="0">
+                <a:solidFill>
+                  <a:srgbClr val="FFFFFF"/>
+                </a:solidFill>
+                <a:latin typeface="Calibri" pitchFamily="34" charset="0"/>
+                <a:ea typeface="Calibri" pitchFamily="34" charset="-122"/>
+                <a:cs typeface="Calibri" pitchFamily="34" charset="-120"/>
+              </a:rPr>
+              <a:t>📊</a:t>
+            </a:r>
+            <a:endParaRPr lang="en-US" sz="1520" dirty="0"/>
+          </a:p>
+        </p:txBody>
+      </p:sp>
+      <p:sp>
+        <p:nvSpPr>
+          <p:cNvPr id="29" name="Text 27"/>
+          <p:cNvSpPr/>
+          <p:nvPr/>
+        </p:nvSpPr>
+        <p:spPr>
+          <a:xfrm>
+            <a:off x="1097280" y="4389120"/>
+            <a:ext cx="4846320" cy="384048"/>
+          </a:xfrm>
+          <a:prstGeom prst="rect">
+            <a:avLst/>
+          </a:prstGeom>
+          <a:noFill/>
+          <a:ln/>
+        </p:spPr>
+        <p:txBody>
+          <a:bodyPr wrap="square" rtlCol="0" anchor="ctr"/>
+          <a:lstStyle/>
+          <a:p>
+            <a:pPr indent="0" marL="0">
+              <a:buNone/>
+            </a:pPr>
+            <a:r>
+              <a:rPr lang="en-US" sz="1200" dirty="0">
+                <a:solidFill>
+                  <a:srgbClr val="CBD5E1"/>
+                </a:solidFill>
+                <a:latin typeface="Calibri" pitchFamily="34" charset="0"/>
+                <a:ea typeface="Calibri" pitchFamily="34" charset="-122"/>
+                <a:cs typeface="Calibri" pitchFamily="34" charset="-120"/>
+              </a:rPr>
+              <a:t>CD sin saber cuántos leyeron</a:t>
+            </a:r>
+            <a:endParaRPr lang="en-US" sz="1200" dirty="0"/>
+          </a:p>
+        </p:txBody>
+      </p:sp>
+      <p:sp>
+        <p:nvSpPr>
+          <p:cNvPr id="30" name="Text 28"/>
+          <p:cNvSpPr/>
+          <p:nvPr/>
+        </p:nvSpPr>
+        <p:spPr>
+          <a:xfrm>
+            <a:off x="6035040" y="4389120"/>
+            <a:ext cx="548640" cy="384048"/>
+          </a:xfrm>
+          <a:prstGeom prst="rect">
+            <a:avLst/>
+          </a:prstGeom>
+          <a:noFill/>
+          <a:ln/>
+        </p:spPr>
+        <p:txBody>
+          <a:bodyPr wrap="square" rtlCol="0" anchor="ctr"/>
+          <a:lstStyle/>
+          <a:p>
+            <a:pPr algn="ctr" indent="0" marL="0">
+              <a:buNone/>
+            </a:pPr>
+            <a:r>
+              <a:rPr lang="en-US" sz="2200" b="1" dirty="0">
+                <a:solidFill>
+                  <a:srgbClr val="7FCFE5"/>
+                </a:solidFill>
+                <a:latin typeface="Calibri" pitchFamily="34" charset="0"/>
+                <a:ea typeface="Calibri" pitchFamily="34" charset="-122"/>
+                <a:cs typeface="Calibri" pitchFamily="34" charset="-120"/>
+              </a:rPr>
+              <a:t>→</a:t>
+            </a:r>
+            <a:endParaRPr lang="en-US" sz="2200" dirty="0"/>
+          </a:p>
+        </p:txBody>
+      </p:sp>
+      <p:sp>
+        <p:nvSpPr>
+          <p:cNvPr id="31" name="Text 29"/>
+          <p:cNvSpPr/>
+          <p:nvPr/>
+        </p:nvSpPr>
+        <p:spPr>
+          <a:xfrm>
+            <a:off x="6675120" y="4389120"/>
+            <a:ext cx="4846320" cy="384048"/>
+          </a:xfrm>
+          <a:prstGeom prst="rect">
+            <a:avLst/>
+          </a:prstGeom>
+          <a:noFill/>
+          <a:ln/>
+        </p:spPr>
+        <p:txBody>
+          <a:bodyPr wrap="square" rtlCol="0" anchor="ctr"/>
+          <a:lstStyle/>
+          <a:p>
+            <a:pPr indent="0" marL="0">
+              <a:buNone/>
+            </a:pPr>
+            <a:r>
+              <a:rPr lang="en-US" sz="1200" b="1" dirty="0">
+                <a:solidFill>
+                  <a:srgbClr val="FFFFFF"/>
+                </a:solidFill>
+                <a:latin typeface="Calibri" pitchFamily="34" charset="0"/>
+                <a:ea typeface="Calibri" pitchFamily="34" charset="-122"/>
+                <a:cs typeface="Calibri" pitchFamily="34" charset="-120"/>
+              </a:rPr>
+              <a:t>Tasa de lectura en vivo (60-80%)</a:t>
+            </a:r>
+            <a:endParaRPr lang="en-US" sz="1200" dirty="0"/>
+          </a:p>
+        </p:txBody>
+      </p:sp>
+      <p:sp>
+        <p:nvSpPr>
+          <p:cNvPr id="32" name="Shape 30"/>
+          <p:cNvSpPr/>
+          <p:nvPr/>
+        </p:nvSpPr>
+        <p:spPr>
+          <a:xfrm>
+            <a:off x="457200" y="4892040"/>
+            <a:ext cx="11247120" cy="475488"/>
+          </a:xfrm>
+          <a:prstGeom prst="roundRect">
+            <a:avLst>
+              <a:gd name="adj" fmla="val 15385"/>
+            </a:avLst>
+          </a:prstGeom>
+          <a:solidFill>
+            <a:srgbClr val="1A325C">
+              <a:alpha val="70000"/>
+            </a:srgbClr>
+          </a:solidFill>
+          <a:ln w="6350">
+            <a:solidFill>
+              <a:srgbClr val="334155"/>
+            </a:solidFill>
+            <a:prstDash val="solid"/>
+          </a:ln>
+        </p:spPr>
+      </p:sp>
+      <p:sp>
+        <p:nvSpPr>
+          <p:cNvPr id="33" name="Shape 31"/>
+          <p:cNvSpPr/>
+          <p:nvPr/>
+        </p:nvSpPr>
+        <p:spPr>
+          <a:xfrm>
+            <a:off x="594360" y="4946904"/>
+            <a:ext cx="365760" cy="365760"/>
+          </a:xfrm>
+          <a:prstGeom prst="ellipse">
+            <a:avLst/>
+          </a:prstGeom>
+          <a:solidFill>
+            <a:srgbClr val="1F72B8">
+              <a:alpha val="40000"/>
+            </a:srgbClr>
+          </a:solidFill>
+          <a:ln w="19050">
+            <a:solidFill>
+              <a:srgbClr val="1F72B8"/>
+            </a:solidFill>
+            <a:prstDash val="solid"/>
+          </a:ln>
+        </p:spPr>
+      </p:sp>
+      <p:sp>
+        <p:nvSpPr>
+          <p:cNvPr id="34" name="Text 32"/>
+          <p:cNvSpPr/>
+          <p:nvPr/>
+        </p:nvSpPr>
+        <p:spPr>
+          <a:xfrm>
+            <a:off x="594360" y="4946904"/>
+            <a:ext cx="365760" cy="365760"/>
+          </a:xfrm>
+          <a:prstGeom prst="rect">
+            <a:avLst/>
+          </a:prstGeom>
+          <a:noFill/>
+          <a:ln/>
+        </p:spPr>
+        <p:txBody>
+          <a:bodyPr wrap="square" rtlCol="0" anchor="ctr"/>
+          <a:lstStyle/>
+          <a:p>
+            <a:pPr algn="ctr" indent="0" marL="0">
+              <a:buNone/>
+            </a:pPr>
+            <a:r>
+              <a:rPr lang="en-US" sz="1520" dirty="0">
+                <a:solidFill>
+                  <a:srgbClr val="FFFFFF"/>
+                </a:solidFill>
+                <a:latin typeface="Calibri" pitchFamily="34" charset="0"/>
+                <a:ea typeface="Calibri" pitchFamily="34" charset="-122"/>
+                <a:cs typeface="Calibri" pitchFamily="34" charset="-120"/>
+              </a:rPr>
+              <a:t>👥</a:t>
+            </a:r>
+            <a:endParaRPr lang="en-US" sz="1520" dirty="0"/>
+          </a:p>
+        </p:txBody>
+      </p:sp>
+      <p:sp>
+        <p:nvSpPr>
+          <p:cNvPr id="35" name="Text 33"/>
+          <p:cNvSpPr/>
+          <p:nvPr/>
+        </p:nvSpPr>
+        <p:spPr>
+          <a:xfrm>
+            <a:off x="1097280" y="4937760"/>
+            <a:ext cx="4846320" cy="384048"/>
+          </a:xfrm>
+          <a:prstGeom prst="rect">
+            <a:avLst/>
+          </a:prstGeom>
+          <a:noFill/>
+          <a:ln/>
+        </p:spPr>
+        <p:txBody>
+          <a:bodyPr wrap="square" rtlCol="0" anchor="ctr"/>
+          <a:lstStyle/>
+          <a:p>
+            <a:pPr indent="0" marL="0">
+              <a:buNone/>
+            </a:pPr>
+            <a:r>
+              <a:rPr lang="en-US" sz="1200" dirty="0">
+                <a:solidFill>
+                  <a:srgbClr val="CBD5E1"/>
+                </a:solidFill>
+                <a:latin typeface="Calibri" pitchFamily="34" charset="0"/>
+                <a:ea typeface="Calibri" pitchFamily="34" charset="-122"/>
+                <a:cs typeface="Calibri" pitchFamily="34" charset="-120"/>
+              </a:rPr>
+              <a:t>Delegado no ve a no-APOPS</a:t>
+            </a:r>
+            <a:endParaRPr lang="en-US" sz="1200" dirty="0"/>
+          </a:p>
+        </p:txBody>
+      </p:sp>
+      <p:sp>
+        <p:nvSpPr>
+          <p:cNvPr id="36" name="Text 34"/>
+          <p:cNvSpPr/>
+          <p:nvPr/>
+        </p:nvSpPr>
+        <p:spPr>
+          <a:xfrm>
+            <a:off x="6035040" y="4937760"/>
+            <a:ext cx="548640" cy="384048"/>
+          </a:xfrm>
+          <a:prstGeom prst="rect">
+            <a:avLst/>
+          </a:prstGeom>
+          <a:noFill/>
+          <a:ln/>
+        </p:spPr>
+        <p:txBody>
+          <a:bodyPr wrap="square" rtlCol="0" anchor="ctr"/>
+          <a:lstStyle/>
+          <a:p>
+            <a:pPr algn="ctr" indent="0" marL="0">
+              <a:buNone/>
+            </a:pPr>
+            <a:r>
+              <a:rPr lang="en-US" sz="2200" b="1" dirty="0">
+                <a:solidFill>
+                  <a:srgbClr val="7FCFE5"/>
+                </a:solidFill>
+                <a:latin typeface="Calibri" pitchFamily="34" charset="0"/>
+                <a:ea typeface="Calibri" pitchFamily="34" charset="-122"/>
+                <a:cs typeface="Calibri" pitchFamily="34" charset="-120"/>
+              </a:rPr>
+              <a:t>→</a:t>
+            </a:r>
+            <a:endParaRPr lang="en-US" sz="2200" dirty="0"/>
+          </a:p>
+        </p:txBody>
+      </p:sp>
+      <p:sp>
+        <p:nvSpPr>
+          <p:cNvPr id="37" name="Text 35"/>
+          <p:cNvSpPr/>
+          <p:nvPr/>
+        </p:nvSpPr>
+        <p:spPr>
+          <a:xfrm>
+            <a:off x="6675120" y="4937760"/>
+            <a:ext cx="4846320" cy="384048"/>
+          </a:xfrm>
+          <a:prstGeom prst="rect">
+            <a:avLst/>
+          </a:prstGeom>
+          <a:noFill/>
+          <a:ln/>
+        </p:spPr>
+        <p:txBody>
+          <a:bodyPr wrap="square" rtlCol="0" anchor="ctr"/>
+          <a:lstStyle/>
+          <a:p>
+            <a:pPr indent="0" marL="0">
+              <a:buNone/>
+            </a:pPr>
+            <a:r>
+              <a:rPr lang="en-US" sz="1200" b="1" dirty="0">
+                <a:solidFill>
+                  <a:srgbClr val="FFFFFF"/>
+                </a:solidFill>
+                <a:latin typeface="Calibri" pitchFamily="34" charset="0"/>
+                <a:ea typeface="Calibri" pitchFamily="34" charset="-122"/>
+                <a:cs typeface="Calibri" pitchFamily="34" charset="-120"/>
+              </a:rPr>
+              <a:t>Vista completa del edificio con filtros</a:t>
+            </a:r>
+            <a:endParaRPr lang="en-US" sz="1200" dirty="0"/>
+          </a:p>
+        </p:txBody>
+      </p:sp>
+      <p:sp>
+        <p:nvSpPr>
+          <p:cNvPr id="38" name="Shape 36"/>
+          <p:cNvSpPr/>
+          <p:nvPr/>
+        </p:nvSpPr>
+        <p:spPr>
+          <a:xfrm>
+            <a:off x="457200" y="5440680"/>
+            <a:ext cx="11247120" cy="475488"/>
+          </a:xfrm>
+          <a:prstGeom prst="roundRect">
+            <a:avLst>
+              <a:gd name="adj" fmla="val 15385"/>
+            </a:avLst>
+          </a:prstGeom>
+          <a:solidFill>
+            <a:srgbClr val="1A325C">
+              <a:alpha val="70000"/>
+            </a:srgbClr>
+          </a:solidFill>
+          <a:ln w="6350">
+            <a:solidFill>
+              <a:srgbClr val="334155"/>
+            </a:solidFill>
+            <a:prstDash val="solid"/>
+          </a:ln>
+        </p:spPr>
+      </p:sp>
+      <p:sp>
+        <p:nvSpPr>
+          <p:cNvPr id="39" name="Shape 37"/>
+          <p:cNvSpPr/>
+          <p:nvPr/>
+        </p:nvSpPr>
+        <p:spPr>
+          <a:xfrm>
+            <a:off x="594360" y="5495544"/>
+            <a:ext cx="365760" cy="365760"/>
+          </a:xfrm>
+          <a:prstGeom prst="ellipse">
+            <a:avLst/>
+          </a:prstGeom>
+          <a:solidFill>
+            <a:srgbClr val="1F72B8">
+              <a:alpha val="40000"/>
+            </a:srgbClr>
+          </a:solidFill>
+          <a:ln w="19050">
+            <a:solidFill>
+              <a:srgbClr val="1F72B8"/>
+            </a:solidFill>
+            <a:prstDash val="solid"/>
+          </a:ln>
+        </p:spPr>
+      </p:sp>
+      <p:sp>
+        <p:nvSpPr>
+          <p:cNvPr id="40" name="Text 38"/>
+          <p:cNvSpPr/>
+          <p:nvPr/>
+        </p:nvSpPr>
+        <p:spPr>
+          <a:xfrm>
+            <a:off x="594360" y="5495544"/>
+            <a:ext cx="365760" cy="365760"/>
+          </a:xfrm>
+          <a:prstGeom prst="rect">
+            <a:avLst/>
+          </a:prstGeom>
+          <a:noFill/>
+          <a:ln/>
+        </p:spPr>
+        <p:txBody>
+          <a:bodyPr wrap="square" rtlCol="0" anchor="ctr"/>
+          <a:lstStyle/>
+          <a:p>
+            <a:pPr algn="ctr" indent="0" marL="0">
+              <a:buNone/>
+            </a:pPr>
+            <a:r>
+              <a:rPr lang="en-US" sz="1520" dirty="0">
+                <a:solidFill>
+                  <a:srgbClr val="FFFFFF"/>
+                </a:solidFill>
+                <a:latin typeface="Calibri" pitchFamily="34" charset="0"/>
+                <a:ea typeface="Calibri" pitchFamily="34" charset="-122"/>
+                <a:cs typeface="Calibri" pitchFamily="34" charset="-120"/>
+              </a:rPr>
+              <a:t>✍️</a:t>
+            </a:r>
+            <a:endParaRPr lang="en-US" sz="1520" dirty="0"/>
+          </a:p>
+        </p:txBody>
+      </p:sp>
+      <p:sp>
+        <p:nvSpPr>
+          <p:cNvPr id="41" name="Text 39"/>
+          <p:cNvSpPr/>
+          <p:nvPr/>
+        </p:nvSpPr>
+        <p:spPr>
+          <a:xfrm>
+            <a:off x="1097280" y="5486400"/>
+            <a:ext cx="4846320" cy="384048"/>
+          </a:xfrm>
+          <a:prstGeom prst="rect">
+            <a:avLst/>
+          </a:prstGeom>
+          <a:noFill/>
+          <a:ln/>
+        </p:spPr>
+        <p:txBody>
+          <a:bodyPr wrap="square" rtlCol="0" anchor="ctr"/>
+          <a:lstStyle/>
+          <a:p>
+            <a:pPr indent="0" marL="0">
+              <a:buNone/>
+            </a:pPr>
+            <a:r>
+              <a:rPr lang="en-US" sz="1200" dirty="0">
+                <a:solidFill>
+                  <a:srgbClr val="CBD5E1"/>
+                </a:solidFill>
+                <a:latin typeface="Calibri" pitchFamily="34" charset="0"/>
+                <a:ea typeface="Calibri" pitchFamily="34" charset="-122"/>
+                <a:cs typeface="Calibri" pitchFamily="34" charset="-120"/>
+              </a:rPr>
+              <a:t>Afiliación presencial con papeles</a:t>
+            </a:r>
+            <a:endParaRPr lang="en-US" sz="1200" dirty="0"/>
+          </a:p>
+        </p:txBody>
+      </p:sp>
+      <p:sp>
+        <p:nvSpPr>
+          <p:cNvPr id="42" name="Text 40"/>
+          <p:cNvSpPr/>
+          <p:nvPr/>
+        </p:nvSpPr>
+        <p:spPr>
+          <a:xfrm>
+            <a:off x="6035040" y="5486400"/>
+            <a:ext cx="548640" cy="384048"/>
+          </a:xfrm>
+          <a:prstGeom prst="rect">
+            <a:avLst/>
+          </a:prstGeom>
+          <a:noFill/>
+          <a:ln/>
+        </p:spPr>
+        <p:txBody>
+          <a:bodyPr wrap="square" rtlCol="0" anchor="ctr"/>
+          <a:lstStyle/>
+          <a:p>
+            <a:pPr algn="ctr" indent="0" marL="0">
+              <a:buNone/>
+            </a:pPr>
+            <a:r>
+              <a:rPr lang="en-US" sz="2200" b="1" dirty="0">
+                <a:solidFill>
+                  <a:srgbClr val="7FCFE5"/>
+                </a:solidFill>
+                <a:latin typeface="Calibri" pitchFamily="34" charset="0"/>
+                <a:ea typeface="Calibri" pitchFamily="34" charset="-122"/>
+                <a:cs typeface="Calibri" pitchFamily="34" charset="-120"/>
+              </a:rPr>
+              <a:t>→</a:t>
+            </a:r>
+            <a:endParaRPr lang="en-US" sz="2200" dirty="0"/>
+          </a:p>
+        </p:txBody>
+      </p:sp>
+      <p:sp>
+        <p:nvSpPr>
+          <p:cNvPr id="43" name="Text 41"/>
+          <p:cNvSpPr/>
+          <p:nvPr/>
+        </p:nvSpPr>
+        <p:spPr>
+          <a:xfrm>
+            <a:off x="6675120" y="5486400"/>
+            <a:ext cx="4846320" cy="384048"/>
+          </a:xfrm>
+          <a:prstGeom prst="rect">
+            <a:avLst/>
+          </a:prstGeom>
+          <a:noFill/>
+          <a:ln/>
+        </p:spPr>
+        <p:txBody>
+          <a:bodyPr wrap="square" rtlCol="0" anchor="ctr"/>
+          <a:lstStyle/>
+          <a:p>
+            <a:pPr indent="0" marL="0">
+              <a:buNone/>
+            </a:pPr>
+            <a:r>
+              <a:rPr lang="en-US" sz="1200" b="1" dirty="0">
+                <a:solidFill>
+                  <a:srgbClr val="FFFFFF"/>
+                </a:solidFill>
+                <a:latin typeface="Calibri" pitchFamily="34" charset="0"/>
+                <a:ea typeface="Calibri" pitchFamily="34" charset="-122"/>
+                <a:cs typeface="Calibri" pitchFamily="34" charset="-120"/>
+              </a:rPr>
+              <a:t>Wizard online + firma digital + PDF por mail</a:t>
+            </a:r>
+            <a:endParaRPr lang="en-US" sz="1200" dirty="0"/>
+          </a:p>
+        </p:txBody>
+      </p:sp>
+      <p:sp>
+        <p:nvSpPr>
+          <p:cNvPr id="44" name="Shape 42"/>
+          <p:cNvSpPr/>
+          <p:nvPr/>
+        </p:nvSpPr>
+        <p:spPr>
+          <a:xfrm>
+            <a:off x="457200" y="5989320"/>
+            <a:ext cx="11247120" cy="475488"/>
+          </a:xfrm>
+          <a:prstGeom prst="roundRect">
+            <a:avLst>
+              <a:gd name="adj" fmla="val 15385"/>
+            </a:avLst>
+          </a:prstGeom>
+          <a:solidFill>
+            <a:srgbClr val="1A325C">
+              <a:alpha val="70000"/>
+            </a:srgbClr>
+          </a:solidFill>
+          <a:ln w="6350">
+            <a:solidFill>
+              <a:srgbClr val="334155"/>
+            </a:solidFill>
+            <a:prstDash val="solid"/>
+          </a:ln>
+        </p:spPr>
+      </p:sp>
+      <p:sp>
+        <p:nvSpPr>
+          <p:cNvPr id="45" name="Shape 43"/>
+          <p:cNvSpPr/>
+          <p:nvPr/>
+        </p:nvSpPr>
+        <p:spPr>
+          <a:xfrm>
+            <a:off x="594360" y="6044184"/>
+            <a:ext cx="365760" cy="365760"/>
+          </a:xfrm>
+          <a:prstGeom prst="ellipse">
+            <a:avLst/>
+          </a:prstGeom>
+          <a:solidFill>
+            <a:srgbClr val="1F72B8">
+              <a:alpha val="40000"/>
+            </a:srgbClr>
+          </a:solidFill>
+          <a:ln w="19050">
+            <a:solidFill>
+              <a:srgbClr val="1F72B8"/>
+            </a:solidFill>
+            <a:prstDash val="solid"/>
+          </a:ln>
+        </p:spPr>
+      </p:sp>
+      <p:sp>
+        <p:nvSpPr>
+          <p:cNvPr id="46" name="Text 44"/>
+          <p:cNvSpPr/>
+          <p:nvPr/>
+        </p:nvSpPr>
+        <p:spPr>
+          <a:xfrm>
+            <a:off x="594360" y="6044184"/>
+            <a:ext cx="365760" cy="365760"/>
+          </a:xfrm>
+          <a:prstGeom prst="rect">
+            <a:avLst/>
+          </a:prstGeom>
+          <a:noFill/>
+          <a:ln/>
+        </p:spPr>
+        <p:txBody>
+          <a:bodyPr wrap="square" rtlCol="0" anchor="ctr"/>
+          <a:lstStyle/>
+          <a:p>
+            <a:pPr algn="ctr" indent="0" marL="0">
+              <a:buNone/>
+            </a:pPr>
+            <a:r>
+              <a:rPr lang="en-US" sz="1520" dirty="0">
+                <a:solidFill>
+                  <a:srgbClr val="FFFFFF"/>
+                </a:solidFill>
+                <a:latin typeface="Calibri" pitchFamily="34" charset="0"/>
+                <a:ea typeface="Calibri" pitchFamily="34" charset="-122"/>
+                <a:cs typeface="Calibri" pitchFamily="34" charset="-120"/>
+              </a:rPr>
+              <a:t>👁️</a:t>
+            </a:r>
+            <a:endParaRPr lang="en-US" sz="1520" dirty="0"/>
+          </a:p>
+        </p:txBody>
+      </p:sp>
+      <p:sp>
+        <p:nvSpPr>
+          <p:cNvPr id="47" name="Text 45"/>
+          <p:cNvSpPr/>
+          <p:nvPr/>
+        </p:nvSpPr>
+        <p:spPr>
+          <a:xfrm>
+            <a:off x="1097280" y="6035040"/>
+            <a:ext cx="4846320" cy="384048"/>
+          </a:xfrm>
+          <a:prstGeom prst="rect">
+            <a:avLst/>
+          </a:prstGeom>
+          <a:noFill/>
+          <a:ln/>
+        </p:spPr>
+        <p:txBody>
+          <a:bodyPr wrap="square" rtlCol="0" anchor="ctr"/>
+          <a:lstStyle/>
+          <a:p>
+            <a:pPr indent="0" marL="0">
+              <a:buNone/>
+            </a:pPr>
+            <a:r>
+              <a:rPr lang="en-US" sz="1200" dirty="0">
+                <a:solidFill>
+                  <a:srgbClr val="CBD5E1"/>
+                </a:solidFill>
+                <a:latin typeface="Calibri" pitchFamily="34" charset="0"/>
+                <a:ea typeface="Calibri" pitchFamily="34" charset="-122"/>
+                <a:cs typeface="Calibri" pitchFamily="34" charset="-120"/>
+              </a:rPr>
+              <a:t>Compañeros invisibles</a:t>
+            </a:r>
+            <a:endParaRPr lang="en-US" sz="1200" dirty="0"/>
+          </a:p>
+        </p:txBody>
+      </p:sp>
+      <p:sp>
+        <p:nvSpPr>
+          <p:cNvPr id="48" name="Text 46"/>
+          <p:cNvSpPr/>
+          <p:nvPr/>
+        </p:nvSpPr>
+        <p:spPr>
+          <a:xfrm>
+            <a:off x="6035040" y="6035040"/>
+            <a:ext cx="548640" cy="384048"/>
+          </a:xfrm>
+          <a:prstGeom prst="rect">
+            <a:avLst/>
+          </a:prstGeom>
+          <a:noFill/>
+          <a:ln/>
+        </p:spPr>
+        <p:txBody>
+          <a:bodyPr wrap="square" rtlCol="0" anchor="ctr"/>
+          <a:lstStyle/>
+          <a:p>
+            <a:pPr algn="ctr" indent="0" marL="0">
+              <a:buNone/>
+            </a:pPr>
+            <a:r>
+              <a:rPr lang="en-US" sz="2200" b="1" dirty="0">
+                <a:solidFill>
+                  <a:srgbClr val="7FCFE5"/>
+                </a:solidFill>
+                <a:latin typeface="Calibri" pitchFamily="34" charset="0"/>
+                <a:ea typeface="Calibri" pitchFamily="34" charset="-122"/>
+                <a:cs typeface="Calibri" pitchFamily="34" charset="-120"/>
+              </a:rPr>
+              <a:t>→</a:t>
+            </a:r>
+            <a:endParaRPr lang="en-US" sz="2200" dirty="0"/>
+          </a:p>
+        </p:txBody>
+      </p:sp>
+      <p:sp>
+        <p:nvSpPr>
+          <p:cNvPr id="49" name="Text 47"/>
+          <p:cNvSpPr/>
+          <p:nvPr/>
+        </p:nvSpPr>
+        <p:spPr>
+          <a:xfrm>
+            <a:off x="6675120" y="6035040"/>
+            <a:ext cx="4846320" cy="384048"/>
+          </a:xfrm>
+          <a:prstGeom prst="rect">
+            <a:avLst/>
+          </a:prstGeom>
+          <a:noFill/>
+          <a:ln/>
+        </p:spPr>
+        <p:txBody>
+          <a:bodyPr wrap="square" rtlCol="0" anchor="ctr"/>
+          <a:lstStyle/>
+          <a:p>
+            <a:pPr indent="0" marL="0">
+              <a:buNone/>
+            </a:pPr>
+            <a:r>
+              <a:rPr lang="en-US" sz="1200" b="1" dirty="0">
+                <a:solidFill>
+                  <a:srgbClr val="FFFFFF"/>
+                </a:solidFill>
+                <a:latin typeface="Calibri" pitchFamily="34" charset="0"/>
+                <a:ea typeface="Calibri" pitchFamily="34" charset="-122"/>
+                <a:cs typeface="Calibri" pitchFamily="34" charset="-120"/>
+              </a:rPr>
+              <a:t>Página pública con noticias y formulario de afiliación</a:t>
+            </a:r>
+            <a:endParaRPr lang="en-US" sz="1200" dirty="0"/>
+          </a:p>
+        </p:txBody>
+      </p:sp>
+      <p:sp>
+        <p:nvSpPr>
+          <p:cNvPr id="50" name="Shape 48"/>
+          <p:cNvSpPr/>
+          <p:nvPr/>
+        </p:nvSpPr>
+        <p:spPr>
+          <a:xfrm>
+            <a:off x="0" y="6492240"/>
+            <a:ext cx="12188952" cy="27432"/>
           </a:xfrm>
           <a:prstGeom prst="rect">
             <a:avLst/>
@@ -18187,651 +20242,7 @@
       </p:sp>
       <p:sp>
         <p:nvSpPr>
-          <p:cNvPr id="8" name="Text 6"/>
-          <p:cNvSpPr/>
-          <p:nvPr/>
-        </p:nvSpPr>
-        <p:spPr>
-          <a:xfrm>
-            <a:off x="731520" y="2587752"/>
-            <a:ext cx="5303520" cy="365760"/>
-          </a:xfrm>
-          <a:prstGeom prst="rect">
-            <a:avLst/>
-          </a:prstGeom>
-          <a:noFill/>
-          <a:ln/>
-        </p:spPr>
-        <p:txBody>
-          <a:bodyPr wrap="square" rtlCol="0" anchor="ctr"/>
-          <a:lstStyle/>
-          <a:p>
-            <a:pPr indent="0" marL="0">
-              <a:buNone/>
-            </a:pPr>
-            <a:r>
-              <a:rPr lang="en-US" sz="1300" b="1" dirty="0">
-                <a:solidFill>
-                  <a:srgbClr val="FFFFFF"/>
-                </a:solidFill>
-                <a:latin typeface="Calibri" pitchFamily="34" charset="0"/>
-                <a:ea typeface="Calibri" pitchFamily="34" charset="-122"/>
-                <a:cs typeface="Calibri" pitchFamily="34" charset="-120"/>
-              </a:rPr>
-              <a:t>Hoy (sin app)</a:t>
-            </a:r>
-            <a:endParaRPr lang="en-US" sz="1300" dirty="0"/>
-          </a:p>
-        </p:txBody>
-      </p:sp>
-      <p:sp>
-        <p:nvSpPr>
-          <p:cNvPr id="9" name="Text 7"/>
-          <p:cNvSpPr/>
-          <p:nvPr/>
-        </p:nvSpPr>
-        <p:spPr>
-          <a:xfrm>
-            <a:off x="6309360" y="2587752"/>
-            <a:ext cx="5303520" cy="365760"/>
-          </a:xfrm>
-          <a:prstGeom prst="rect">
-            <a:avLst/>
-          </a:prstGeom>
-          <a:noFill/>
-          <a:ln/>
-        </p:spPr>
-        <p:txBody>
-          <a:bodyPr wrap="square" rtlCol="0" anchor="ctr"/>
-          <a:lstStyle/>
-          <a:p>
-            <a:pPr indent="0" marL="0">
-              <a:buNone/>
-            </a:pPr>
-            <a:r>
-              <a:rPr lang="en-US" sz="1300" b="1" dirty="0">
-                <a:solidFill>
-                  <a:srgbClr val="FFFFFF"/>
-                </a:solidFill>
-                <a:latin typeface="Calibri" pitchFamily="34" charset="0"/>
-                <a:ea typeface="Calibri" pitchFamily="34" charset="-122"/>
-                <a:cs typeface="Calibri" pitchFamily="34" charset="-120"/>
-              </a:rPr>
-              <a:t>Con APOPS Siempre</a:t>
-            </a:r>
-            <a:endParaRPr lang="en-US" sz="1300" dirty="0"/>
-          </a:p>
-        </p:txBody>
-      </p:sp>
-      <p:sp>
-        <p:nvSpPr>
-          <p:cNvPr id="10" name="Text 8"/>
-          <p:cNvSpPr/>
-          <p:nvPr/>
-        </p:nvSpPr>
-        <p:spPr>
-          <a:xfrm>
-            <a:off x="731520" y="3017520"/>
-            <a:ext cx="5212080" cy="457200"/>
-          </a:xfrm>
-          <a:prstGeom prst="rect">
-            <a:avLst/>
-          </a:prstGeom>
-          <a:noFill/>
-          <a:ln/>
-        </p:spPr>
-        <p:txBody>
-          <a:bodyPr wrap="square" rtlCol="0" anchor="ctr"/>
-          <a:lstStyle/>
-          <a:p>
-            <a:pPr indent="0" marL="0">
-              <a:buNone/>
-            </a:pPr>
-            <a:r>
-              <a:rPr lang="en-US" sz="1200" dirty="0">
-                <a:solidFill>
-                  <a:srgbClr val="CBD5E1"/>
-                </a:solidFill>
-                <a:latin typeface="Calibri" pitchFamily="34" charset="0"/>
-                <a:ea typeface="Calibri" pitchFamily="34" charset="-122"/>
-                <a:cs typeface="Calibri" pitchFamily="34" charset="-120"/>
-              </a:rPr>
-              <a:t>Mail o WhatsApp que se pierde</a:t>
-            </a:r>
-            <a:endParaRPr lang="en-US" sz="1200" dirty="0"/>
-          </a:p>
-        </p:txBody>
-      </p:sp>
-      <p:sp>
-        <p:nvSpPr>
-          <p:cNvPr id="11" name="Text 9"/>
-          <p:cNvSpPr/>
-          <p:nvPr/>
-        </p:nvSpPr>
-        <p:spPr>
-          <a:xfrm>
-            <a:off x="6309360" y="3017520"/>
-            <a:ext cx="5212080" cy="457200"/>
-          </a:xfrm>
-          <a:prstGeom prst="rect">
-            <a:avLst/>
-          </a:prstGeom>
-          <a:noFill/>
-          <a:ln/>
-        </p:spPr>
-        <p:txBody>
-          <a:bodyPr wrap="square" rtlCol="0" anchor="ctr"/>
-          <a:lstStyle/>
-          <a:p>
-            <a:pPr indent="0" marL="0">
-              <a:buNone/>
-            </a:pPr>
-            <a:r>
-              <a:rPr lang="en-US" sz="1200" b="1" dirty="0">
-                <a:solidFill>
-                  <a:srgbClr val="FFFFFF"/>
-                </a:solidFill>
-                <a:latin typeface="Calibri" pitchFamily="34" charset="0"/>
-                <a:ea typeface="Calibri" pitchFamily="34" charset="-122"/>
-                <a:cs typeface="Calibri" pitchFamily="34" charset="-120"/>
-              </a:rPr>
-              <a:t>Notificación al celular con tasa de lectura medida</a:t>
-            </a:r>
-            <a:endParaRPr lang="en-US" sz="1200" dirty="0"/>
-          </a:p>
-        </p:txBody>
-      </p:sp>
-      <p:sp>
-        <p:nvSpPr>
-          <p:cNvPr id="12" name="Text 10"/>
-          <p:cNvSpPr/>
-          <p:nvPr/>
-        </p:nvSpPr>
-        <p:spPr>
-          <a:xfrm>
-            <a:off x="731520" y="3520440"/>
-            <a:ext cx="5212080" cy="457200"/>
-          </a:xfrm>
-          <a:prstGeom prst="rect">
-            <a:avLst/>
-          </a:prstGeom>
-          <a:noFill/>
-          <a:ln/>
-        </p:spPr>
-        <p:txBody>
-          <a:bodyPr wrap="square" rtlCol="0" anchor="ctr"/>
-          <a:lstStyle/>
-          <a:p>
-            <a:pPr indent="0" marL="0">
-              <a:buNone/>
-            </a:pPr>
-            <a:r>
-              <a:rPr lang="en-US" sz="1200" dirty="0">
-                <a:solidFill>
-                  <a:srgbClr val="CBD5E1"/>
-                </a:solidFill>
-                <a:latin typeface="Calibri" pitchFamily="34" charset="0"/>
-                <a:ea typeface="Calibri" pitchFamily="34" charset="-122"/>
-                <a:cs typeface="Calibri" pitchFamily="34" charset="-120"/>
-              </a:rPr>
-              <a:t>Comunicados que no se leen</a:t>
-            </a:r>
-            <a:endParaRPr lang="en-US" sz="1200" dirty="0"/>
-          </a:p>
-        </p:txBody>
-      </p:sp>
-      <p:sp>
-        <p:nvSpPr>
-          <p:cNvPr id="13" name="Text 11"/>
-          <p:cNvSpPr/>
-          <p:nvPr/>
-        </p:nvSpPr>
-        <p:spPr>
-          <a:xfrm>
-            <a:off x="6309360" y="3520440"/>
-            <a:ext cx="5212080" cy="457200"/>
-          </a:xfrm>
-          <a:prstGeom prst="rect">
-            <a:avLst/>
-          </a:prstGeom>
-          <a:noFill/>
-          <a:ln/>
-        </p:spPr>
-        <p:txBody>
-          <a:bodyPr wrap="square" rtlCol="0" anchor="ctr"/>
-          <a:lstStyle/>
-          <a:p>
-            <a:pPr indent="0" marL="0">
-              <a:buNone/>
-            </a:pPr>
-            <a:r>
-              <a:rPr lang="en-US" sz="1200" b="1" dirty="0">
-                <a:solidFill>
-                  <a:srgbClr val="FFFFFF"/>
-                </a:solidFill>
-                <a:latin typeface="Calibri" pitchFamily="34" charset="0"/>
-                <a:ea typeface="Calibri" pitchFamily="34" charset="-122"/>
-                <a:cs typeface="Calibri" pitchFamily="34" charset="-120"/>
-              </a:rPr>
-              <a:t>Novedades en feed + página pública compartible</a:t>
-            </a:r>
-            <a:endParaRPr lang="en-US" sz="1200" dirty="0"/>
-          </a:p>
-        </p:txBody>
-      </p:sp>
-      <p:sp>
-        <p:nvSpPr>
-          <p:cNvPr id="14" name="Text 12"/>
-          <p:cNvSpPr/>
-          <p:nvPr/>
-        </p:nvSpPr>
-        <p:spPr>
-          <a:xfrm>
-            <a:off x="731520" y="4023360"/>
-            <a:ext cx="5212080" cy="457200"/>
-          </a:xfrm>
-          <a:prstGeom prst="rect">
-            <a:avLst/>
-          </a:prstGeom>
-          <a:noFill/>
-          <a:ln/>
-        </p:spPr>
-        <p:txBody>
-          <a:bodyPr wrap="square" rtlCol="0" anchor="ctr"/>
-          <a:lstStyle/>
-          <a:p>
-            <a:pPr indent="0" marL="0">
-              <a:buNone/>
-            </a:pPr>
-            <a:r>
-              <a:rPr lang="en-US" sz="1200" dirty="0">
-                <a:solidFill>
-                  <a:srgbClr val="CBD5E1"/>
-                </a:solidFill>
-                <a:latin typeface="Calibri" pitchFamily="34" charset="0"/>
-                <a:ea typeface="Calibri" pitchFamily="34" charset="-122"/>
-                <a:cs typeface="Calibri" pitchFamily="34" charset="-120"/>
-              </a:rPr>
-              <a:t>WhatsApp del delegado se inunda</a:t>
-            </a:r>
-            <a:endParaRPr lang="en-US" sz="1200" dirty="0"/>
-          </a:p>
-        </p:txBody>
-      </p:sp>
-      <p:sp>
-        <p:nvSpPr>
-          <p:cNvPr id="15" name="Text 13"/>
-          <p:cNvSpPr/>
-          <p:nvPr/>
-        </p:nvSpPr>
-        <p:spPr>
-          <a:xfrm>
-            <a:off x="6309360" y="4023360"/>
-            <a:ext cx="5212080" cy="457200"/>
-          </a:xfrm>
-          <a:prstGeom prst="rect">
-            <a:avLst/>
-          </a:prstGeom>
-          <a:noFill/>
-          <a:ln/>
-        </p:spPr>
-        <p:txBody>
-          <a:bodyPr wrap="square" rtlCol="0" anchor="ctr"/>
-          <a:lstStyle/>
-          <a:p>
-            <a:pPr indent="0" marL="0">
-              <a:buNone/>
-            </a:pPr>
-            <a:r>
-              <a:rPr lang="en-US" sz="1200" b="1" dirty="0">
-                <a:solidFill>
-                  <a:srgbClr val="FFFFFF"/>
-                </a:solidFill>
-                <a:latin typeface="Calibri" pitchFamily="34" charset="0"/>
-                <a:ea typeface="Calibri" pitchFamily="34" charset="-122"/>
-                <a:cs typeface="Calibri" pitchFamily="34" charset="-120"/>
-              </a:rPr>
-              <a:t>Hilos 1-a-1 ordenados con historial</a:t>
-            </a:r>
-            <a:endParaRPr lang="en-US" sz="1200" dirty="0"/>
-          </a:p>
-        </p:txBody>
-      </p:sp>
-      <p:sp>
-        <p:nvSpPr>
-          <p:cNvPr id="16" name="Text 14"/>
-          <p:cNvSpPr/>
-          <p:nvPr/>
-        </p:nvSpPr>
-        <p:spPr>
-          <a:xfrm>
-            <a:off x="731520" y="4526280"/>
-            <a:ext cx="5212080" cy="457200"/>
-          </a:xfrm>
-          <a:prstGeom prst="rect">
-            <a:avLst/>
-          </a:prstGeom>
-          <a:noFill/>
-          <a:ln/>
-        </p:spPr>
-        <p:txBody>
-          <a:bodyPr wrap="square" rtlCol="0" anchor="ctr"/>
-          <a:lstStyle/>
-          <a:p>
-            <a:pPr indent="0" marL="0">
-              <a:buNone/>
-            </a:pPr>
-            <a:r>
-              <a:rPr lang="en-US" sz="1200" dirty="0">
-                <a:solidFill>
-                  <a:srgbClr val="CBD5E1"/>
-                </a:solidFill>
-                <a:latin typeface="Calibri" pitchFamily="34" charset="0"/>
-                <a:ea typeface="Calibri" pitchFamily="34" charset="-122"/>
-                <a:cs typeface="Calibri" pitchFamily="34" charset="-120"/>
-              </a:rPr>
-              <a:t>CD sin saber cuántos leyeron</a:t>
-            </a:r>
-            <a:endParaRPr lang="en-US" sz="1200" dirty="0"/>
-          </a:p>
-        </p:txBody>
-      </p:sp>
-      <p:sp>
-        <p:nvSpPr>
-          <p:cNvPr id="17" name="Text 15"/>
-          <p:cNvSpPr/>
-          <p:nvPr/>
-        </p:nvSpPr>
-        <p:spPr>
-          <a:xfrm>
-            <a:off x="6309360" y="4526280"/>
-            <a:ext cx="5212080" cy="457200"/>
-          </a:xfrm>
-          <a:prstGeom prst="rect">
-            <a:avLst/>
-          </a:prstGeom>
-          <a:noFill/>
-          <a:ln/>
-        </p:spPr>
-        <p:txBody>
-          <a:bodyPr wrap="square" rtlCol="0" anchor="ctr"/>
-          <a:lstStyle/>
-          <a:p>
-            <a:pPr indent="0" marL="0">
-              <a:buNone/>
-            </a:pPr>
-            <a:r>
-              <a:rPr lang="en-US" sz="1200" b="1" dirty="0">
-                <a:solidFill>
-                  <a:srgbClr val="FFFFFF"/>
-                </a:solidFill>
-                <a:latin typeface="Calibri" pitchFamily="34" charset="0"/>
-                <a:ea typeface="Calibri" pitchFamily="34" charset="-122"/>
-                <a:cs typeface="Calibri" pitchFamily="34" charset="-120"/>
-              </a:rPr>
-              <a:t>Tasa de lectura en vivo (60-80%)</a:t>
-            </a:r>
-            <a:endParaRPr lang="en-US" sz="1200" dirty="0"/>
-          </a:p>
-        </p:txBody>
-      </p:sp>
-      <p:sp>
-        <p:nvSpPr>
-          <p:cNvPr id="18" name="Text 16"/>
-          <p:cNvSpPr/>
-          <p:nvPr/>
-        </p:nvSpPr>
-        <p:spPr>
-          <a:xfrm>
-            <a:off x="731520" y="5029200"/>
-            <a:ext cx="5212080" cy="457200"/>
-          </a:xfrm>
-          <a:prstGeom prst="rect">
-            <a:avLst/>
-          </a:prstGeom>
-          <a:noFill/>
-          <a:ln/>
-        </p:spPr>
-        <p:txBody>
-          <a:bodyPr wrap="square" rtlCol="0" anchor="ctr"/>
-          <a:lstStyle/>
-          <a:p>
-            <a:pPr indent="0" marL="0">
-              <a:buNone/>
-            </a:pPr>
-            <a:r>
-              <a:rPr lang="en-US" sz="1200" dirty="0">
-                <a:solidFill>
-                  <a:srgbClr val="CBD5E1"/>
-                </a:solidFill>
-                <a:latin typeface="Calibri" pitchFamily="34" charset="0"/>
-                <a:ea typeface="Calibri" pitchFamily="34" charset="-122"/>
-                <a:cs typeface="Calibri" pitchFamily="34" charset="-120"/>
-              </a:rPr>
-              <a:t>Delegado no ve a no-APOPS</a:t>
-            </a:r>
-            <a:endParaRPr lang="en-US" sz="1200" dirty="0"/>
-          </a:p>
-        </p:txBody>
-      </p:sp>
-      <p:sp>
-        <p:nvSpPr>
-          <p:cNvPr id="19" name="Text 17"/>
-          <p:cNvSpPr/>
-          <p:nvPr/>
-        </p:nvSpPr>
-        <p:spPr>
-          <a:xfrm>
-            <a:off x="6309360" y="5029200"/>
-            <a:ext cx="5212080" cy="457200"/>
-          </a:xfrm>
-          <a:prstGeom prst="rect">
-            <a:avLst/>
-          </a:prstGeom>
-          <a:noFill/>
-          <a:ln/>
-        </p:spPr>
-        <p:txBody>
-          <a:bodyPr wrap="square" rtlCol="0" anchor="ctr"/>
-          <a:lstStyle/>
-          <a:p>
-            <a:pPr indent="0" marL="0">
-              <a:buNone/>
-            </a:pPr>
-            <a:r>
-              <a:rPr lang="en-US" sz="1200" b="1" dirty="0">
-                <a:solidFill>
-                  <a:srgbClr val="FFFFFF"/>
-                </a:solidFill>
-                <a:latin typeface="Calibri" pitchFamily="34" charset="0"/>
-                <a:ea typeface="Calibri" pitchFamily="34" charset="-122"/>
-                <a:cs typeface="Calibri" pitchFamily="34" charset="-120"/>
-              </a:rPr>
-              <a:t>Vista completa del edificio con filtros</a:t>
-            </a:r>
-            <a:endParaRPr lang="en-US" sz="1200" dirty="0"/>
-          </a:p>
-        </p:txBody>
-      </p:sp>
-      <p:sp>
-        <p:nvSpPr>
-          <p:cNvPr id="20" name="Text 18"/>
-          <p:cNvSpPr/>
-          <p:nvPr/>
-        </p:nvSpPr>
-        <p:spPr>
-          <a:xfrm>
-            <a:off x="731520" y="5532120"/>
-            <a:ext cx="5212080" cy="457200"/>
-          </a:xfrm>
-          <a:prstGeom prst="rect">
-            <a:avLst/>
-          </a:prstGeom>
-          <a:noFill/>
-          <a:ln/>
-        </p:spPr>
-        <p:txBody>
-          <a:bodyPr wrap="square" rtlCol="0" anchor="ctr"/>
-          <a:lstStyle/>
-          <a:p>
-            <a:pPr indent="0" marL="0">
-              <a:buNone/>
-            </a:pPr>
-            <a:r>
-              <a:rPr lang="en-US" sz="1200" dirty="0">
-                <a:solidFill>
-                  <a:srgbClr val="CBD5E1"/>
-                </a:solidFill>
-                <a:latin typeface="Calibri" pitchFamily="34" charset="0"/>
-                <a:ea typeface="Calibri" pitchFamily="34" charset="-122"/>
-                <a:cs typeface="Calibri" pitchFamily="34" charset="-120"/>
-              </a:rPr>
-              <a:t>Afiliación presencial con papeles</a:t>
-            </a:r>
-            <a:endParaRPr lang="en-US" sz="1200" dirty="0"/>
-          </a:p>
-        </p:txBody>
-      </p:sp>
-      <p:sp>
-        <p:nvSpPr>
-          <p:cNvPr id="21" name="Text 19"/>
-          <p:cNvSpPr/>
-          <p:nvPr/>
-        </p:nvSpPr>
-        <p:spPr>
-          <a:xfrm>
-            <a:off x="6309360" y="5532120"/>
-            <a:ext cx="5212080" cy="457200"/>
-          </a:xfrm>
-          <a:prstGeom prst="rect">
-            <a:avLst/>
-          </a:prstGeom>
-          <a:noFill/>
-          <a:ln/>
-        </p:spPr>
-        <p:txBody>
-          <a:bodyPr wrap="square" rtlCol="0" anchor="ctr"/>
-          <a:lstStyle/>
-          <a:p>
-            <a:pPr indent="0" marL="0">
-              <a:buNone/>
-            </a:pPr>
-            <a:r>
-              <a:rPr lang="en-US" sz="1200" b="1" dirty="0">
-                <a:solidFill>
-                  <a:srgbClr val="FFFFFF"/>
-                </a:solidFill>
-                <a:latin typeface="Calibri" pitchFamily="34" charset="0"/>
-                <a:ea typeface="Calibri" pitchFamily="34" charset="-122"/>
-                <a:cs typeface="Calibri" pitchFamily="34" charset="-120"/>
-              </a:rPr>
-              <a:t>Wizard online + firma digital + PDF por mail</a:t>
-            </a:r>
-            <a:endParaRPr lang="en-US" sz="1200" dirty="0"/>
-          </a:p>
-        </p:txBody>
-      </p:sp>
-      <p:sp>
-        <p:nvSpPr>
-          <p:cNvPr id="22" name="Text 20"/>
-          <p:cNvSpPr/>
-          <p:nvPr/>
-        </p:nvSpPr>
-        <p:spPr>
-          <a:xfrm>
-            <a:off x="731520" y="6035040"/>
-            <a:ext cx="5212080" cy="457200"/>
-          </a:xfrm>
-          <a:prstGeom prst="rect">
-            <a:avLst/>
-          </a:prstGeom>
-          <a:noFill/>
-          <a:ln/>
-        </p:spPr>
-        <p:txBody>
-          <a:bodyPr wrap="square" rtlCol="0" anchor="ctr"/>
-          <a:lstStyle/>
-          <a:p>
-            <a:pPr indent="0" marL="0">
-              <a:buNone/>
-            </a:pPr>
-            <a:r>
-              <a:rPr lang="en-US" sz="1200" dirty="0">
-                <a:solidFill>
-                  <a:srgbClr val="CBD5E1"/>
-                </a:solidFill>
-                <a:latin typeface="Calibri" pitchFamily="34" charset="0"/>
-                <a:ea typeface="Calibri" pitchFamily="34" charset="-122"/>
-                <a:cs typeface="Calibri" pitchFamily="34" charset="-120"/>
-              </a:rPr>
-              <a:t>Compañeros invisibles</a:t>
-            </a:r>
-            <a:endParaRPr lang="en-US" sz="1200" dirty="0"/>
-          </a:p>
-        </p:txBody>
-      </p:sp>
-      <p:sp>
-        <p:nvSpPr>
-          <p:cNvPr id="23" name="Text 21"/>
-          <p:cNvSpPr/>
-          <p:nvPr/>
-        </p:nvSpPr>
-        <p:spPr>
-          <a:xfrm>
-            <a:off x="6309360" y="6035040"/>
-            <a:ext cx="5212080" cy="457200"/>
-          </a:xfrm>
-          <a:prstGeom prst="rect">
-            <a:avLst/>
-          </a:prstGeom>
-          <a:noFill/>
-          <a:ln/>
-        </p:spPr>
-        <p:txBody>
-          <a:bodyPr wrap="square" rtlCol="0" anchor="ctr"/>
-          <a:lstStyle/>
-          <a:p>
-            <a:pPr indent="0" marL="0">
-              <a:buNone/>
-            </a:pPr>
-            <a:r>
-              <a:rPr lang="en-US" sz="1200" b="1" dirty="0">
-                <a:solidFill>
-                  <a:srgbClr val="FFFFFF"/>
-                </a:solidFill>
-                <a:latin typeface="Calibri" pitchFamily="34" charset="0"/>
-                <a:ea typeface="Calibri" pitchFamily="34" charset="-122"/>
-                <a:cs typeface="Calibri" pitchFamily="34" charset="-120"/>
-              </a:rPr>
-              <a:t>Página pública con noticias y formulario de afiliación</a:t>
-            </a:r>
-            <a:endParaRPr lang="en-US" sz="1200" dirty="0"/>
-          </a:p>
-        </p:txBody>
-      </p:sp>
-      <p:sp>
-        <p:nvSpPr>
-          <p:cNvPr id="24" name="Shape 22"/>
-          <p:cNvSpPr/>
-          <p:nvPr/>
-        </p:nvSpPr>
-        <p:spPr>
-          <a:xfrm>
-            <a:off x="0" y="6492240"/>
-            <a:ext cx="12188952" cy="27432"/>
-          </a:xfrm>
-          <a:prstGeom prst="rect">
-            <a:avLst/>
-          </a:prstGeom>
-          <a:solidFill>
-            <a:srgbClr val="1F72B8"/>
-          </a:solidFill>
-          <a:ln/>
-        </p:spPr>
-      </p:sp>
-      <p:sp>
-        <p:nvSpPr>
-          <p:cNvPr id="25" name="Text 23"/>
+          <p:cNvPr id="51" name="Text 49"/>
           <p:cNvSpPr/>
           <p:nvPr/>
         </p:nvSpPr>
@@ -18870,7 +20281,7 @@
       </p:sp>
       <p:sp>
         <p:nvSpPr>
-          <p:cNvPr id="26" name="Text 24"/>
+          <p:cNvPr id="52" name="Text 50"/>
           <p:cNvSpPr/>
           <p:nvPr/>
         </p:nvSpPr>
